--- a/GitHub_collaboration.pptx
+++ b/GitHub_collaboration.pptx
@@ -1,11 +1,11 @@
 
 <file path=ppt/presentation.xml><?xml version="1.0" encoding="utf-8"?>
-<p:presentation xmlns:a="http://schemas.openxmlformats.org/drawingml/2006/main" xmlns:r="http://schemas.openxmlformats.org/officeDocument/2006/relationships" xmlns:p="http://schemas.openxmlformats.org/presentationml/2006/main" strictFirstAndLastChars="0" embedTrueTypeFonts="1" saveSubsetFonts="1" autoCompressPictures="0">
+<p:presentation xmlns:a="http://schemas.openxmlformats.org/drawingml/2006/main" xmlns:r="http://schemas.openxmlformats.org/officeDocument/2006/relationships" xmlns:p="http://schemas.openxmlformats.org/presentationml/2006/main" strictFirstAndLastChars="0" saveSubsetFonts="1" autoCompressPictures="0">
   <p:sldMasterIdLst>
     <p:sldMasterId id="2147483659" r:id="rId1"/>
   </p:sldMasterIdLst>
   <p:notesMasterIdLst>
-    <p:notesMasterId r:id="rId15"/>
+    <p:notesMasterId r:id="rId17"/>
   </p:notesMasterIdLst>
   <p:sldIdLst>
     <p:sldId id="256" r:id="rId2"/>
@@ -21,25 +21,11 @@
     <p:sldId id="269" r:id="rId12"/>
     <p:sldId id="270" r:id="rId13"/>
     <p:sldId id="271" r:id="rId14"/>
+    <p:sldId id="272" r:id="rId15"/>
+    <p:sldId id="274" r:id="rId16"/>
   </p:sldIdLst>
   <p:sldSz cx="12192000" cy="6858000"/>
   <p:notesSz cx="6858000" cy="9144000"/>
-  <p:embeddedFontLst>
-    <p:embeddedFont>
-      <p:font typeface="JetBrains Mono" panose="020B0604020202020204" charset="0"/>
-      <p:regular r:id="rId16"/>
-      <p:bold r:id="rId17"/>
-      <p:italic r:id="rId18"/>
-      <p:boldItalic r:id="rId19"/>
-    </p:embeddedFont>
-    <p:embeddedFont>
-      <p:font typeface="Urbanist" panose="020B0604020202020204" charset="0"/>
-      <p:regular r:id="rId20"/>
-      <p:bold r:id="rId21"/>
-      <p:italic r:id="rId22"/>
-      <p:boldItalic r:id="rId23"/>
-    </p:embeddedFont>
-  </p:embeddedFontLst>
   <p:defaultTextStyle>
     <a:defPPr marR="0" lvl="0" algn="l" rtl="0">
       <a:lnSpc>
@@ -1194,9 +1180,9 @@
               <a:solidFill>
                 <a:schemeClr val="tx1"/>
               </a:solidFill>
-              <a:latin typeface="Urbanist" panose="020B0604020202020204" charset="0"/>
+              <a:latin typeface="IDLC" pitchFamily="2" charset="0"/>
               <a:ea typeface="Urbanist" panose="020B0604020202020204" charset="0"/>
-              <a:cs typeface="Urbanist" panose="020B0604020202020204" charset="0"/>
+              <a:cs typeface="IDLC" pitchFamily="2" charset="0"/>
             </a:rPr>
             <a:t>Usethis</a:t>
           </a:r>
@@ -1205,9 +1191,9 @@
               <a:solidFill>
                 <a:schemeClr val="tx1"/>
               </a:solidFill>
-              <a:latin typeface="Urbanist" panose="020B0604020202020204" charset="0"/>
+              <a:latin typeface="IDLC" pitchFamily="2" charset="0"/>
               <a:ea typeface="Urbanist" panose="020B0604020202020204" charset="0"/>
-              <a:cs typeface="Urbanist" panose="020B0604020202020204" charset="0"/>
+              <a:cs typeface="IDLC" pitchFamily="2" charset="0"/>
             </a:rPr>
             <a:t>::</a:t>
           </a:r>
@@ -1216,9 +1202,9 @@
               <a:solidFill>
                 <a:schemeClr val="tx1"/>
               </a:solidFill>
-              <a:latin typeface="Urbanist" panose="020B0604020202020204" charset="0"/>
+              <a:latin typeface="IDLC" pitchFamily="2" charset="0"/>
               <a:ea typeface="Urbanist" panose="020B0604020202020204" charset="0"/>
-              <a:cs typeface="Urbanist" panose="020B0604020202020204" charset="0"/>
+              <a:cs typeface="IDLC" pitchFamily="2" charset="0"/>
             </a:rPr>
             <a:t>create_github_token</a:t>
           </a:r>
@@ -1227,9 +1213,9 @@
               <a:solidFill>
                 <a:schemeClr val="tx1"/>
               </a:solidFill>
-              <a:latin typeface="Urbanist" panose="020B0604020202020204" charset="0"/>
+              <a:latin typeface="IDLC" pitchFamily="2" charset="0"/>
               <a:ea typeface="Urbanist" panose="020B0604020202020204" charset="0"/>
-              <a:cs typeface="Urbanist" panose="020B0604020202020204" charset="0"/>
+              <a:cs typeface="IDLC" pitchFamily="2" charset="0"/>
             </a:rPr>
             <a:t>()</a:t>
           </a:r>
@@ -1278,6 +1264,8 @@
               <a:solidFill>
                 <a:schemeClr val="tx1"/>
               </a:solidFill>
+              <a:latin typeface="IDLC" pitchFamily="2" charset="0"/>
+              <a:cs typeface="IDLC" pitchFamily="2" charset="0"/>
             </a:rPr>
             <a:t>Launches GitHub authentication Configuration</a:t>
           </a:r>
@@ -1326,9 +1314,9 @@
               <a:solidFill>
                 <a:schemeClr val="tx1"/>
               </a:solidFill>
-              <a:latin typeface="Urbanist" panose="020B0604020202020204" charset="0"/>
+              <a:latin typeface="IDLC" pitchFamily="2" charset="0"/>
               <a:ea typeface="Urbanist" panose="020B0604020202020204" charset="0"/>
-              <a:cs typeface="Urbanist" panose="020B0604020202020204" charset="0"/>
+              <a:cs typeface="IDLC" pitchFamily="2" charset="0"/>
             </a:rPr>
             <a:t>Generate Token</a:t>
           </a:r>
@@ -1377,6 +1365,8 @@
               <a:solidFill>
                 <a:schemeClr val="tx1"/>
               </a:solidFill>
+              <a:latin typeface="IDLC" pitchFamily="2" charset="0"/>
+              <a:cs typeface="IDLC" pitchFamily="2" charset="0"/>
             </a:rPr>
             <a:t>Generates a token. Copy this</a:t>
           </a:r>
@@ -1425,9 +1415,9 @@
               <a:solidFill>
                 <a:schemeClr val="tx1"/>
               </a:solidFill>
-              <a:latin typeface="Urbanist" panose="020B0604020202020204" charset="0"/>
+              <a:latin typeface="IDLC" pitchFamily="2" charset="0"/>
               <a:ea typeface="Urbanist" panose="020B0604020202020204" charset="0"/>
-              <a:cs typeface="Urbanist" panose="020B0604020202020204" charset="0"/>
+              <a:cs typeface="IDLC" pitchFamily="2" charset="0"/>
             </a:rPr>
             <a:t>gitcreds</a:t>
           </a:r>
@@ -1436,9 +1426,9 @@
               <a:solidFill>
                 <a:schemeClr val="tx1"/>
               </a:solidFill>
-              <a:latin typeface="Urbanist" panose="020B0604020202020204" charset="0"/>
+              <a:latin typeface="IDLC" pitchFamily="2" charset="0"/>
               <a:ea typeface="Urbanist" panose="020B0604020202020204" charset="0"/>
-              <a:cs typeface="Urbanist" panose="020B0604020202020204" charset="0"/>
+              <a:cs typeface="IDLC" pitchFamily="2" charset="0"/>
             </a:rPr>
             <a:t>::</a:t>
           </a:r>
@@ -1447,9 +1437,9 @@
               <a:solidFill>
                 <a:schemeClr val="tx1"/>
               </a:solidFill>
-              <a:latin typeface="Urbanist" panose="020B0604020202020204" charset="0"/>
+              <a:latin typeface="IDLC" pitchFamily="2" charset="0"/>
               <a:ea typeface="Urbanist" panose="020B0604020202020204" charset="0"/>
-              <a:cs typeface="Urbanist" panose="020B0604020202020204" charset="0"/>
+              <a:cs typeface="IDLC" pitchFamily="2" charset="0"/>
             </a:rPr>
             <a:t>gitcreds_set</a:t>
           </a:r>
@@ -1458,9 +1448,9 @@
               <a:solidFill>
                 <a:schemeClr val="tx1"/>
               </a:solidFill>
-              <a:latin typeface="Urbanist" panose="020B0604020202020204" charset="0"/>
+              <a:latin typeface="IDLC" pitchFamily="2" charset="0"/>
               <a:ea typeface="Urbanist" panose="020B0604020202020204" charset="0"/>
-              <a:cs typeface="Urbanist" panose="020B0604020202020204" charset="0"/>
+              <a:cs typeface="IDLC" pitchFamily="2" charset="0"/>
             </a:rPr>
             <a:t>()</a:t>
           </a:r>
@@ -1509,6 +1499,8 @@
               <a:solidFill>
                 <a:schemeClr val="tx1"/>
               </a:solidFill>
+              <a:latin typeface="IDLC" pitchFamily="2" charset="0"/>
+              <a:cs typeface="IDLC" pitchFamily="2" charset="0"/>
             </a:rPr>
             <a:t>Paste the token here</a:t>
           </a:r>
@@ -1554,6 +1546,13 @@
         </dgm:presLayoutVars>
       </dgm:prSet>
       <dgm:spPr/>
+      <dgm:t>
+        <a:bodyPr/>
+        <a:lstStyle/>
+        <a:p>
+          <a:endParaRPr lang="en-US"/>
+        </a:p>
+      </dgm:t>
     </dgm:pt>
     <dgm:pt modelId="{721861BE-0A6E-4F7D-AA99-D9788900AD4C}" type="pres">
       <dgm:prSet presAssocID="{DA5DC895-BB0C-40F8-B471-AC47FF787DD5}" presName="boxAndChildren" presStyleCnt="0"/>
@@ -1562,10 +1561,24 @@
     <dgm:pt modelId="{2E2CE860-9741-4824-A512-E59CE11345D0}" type="pres">
       <dgm:prSet presAssocID="{DA5DC895-BB0C-40F8-B471-AC47FF787DD5}" presName="parentTextBox" presStyleLbl="node1" presStyleIdx="0" presStyleCnt="3"/>
       <dgm:spPr/>
+      <dgm:t>
+        <a:bodyPr/>
+        <a:lstStyle/>
+        <a:p>
+          <a:endParaRPr lang="en-US"/>
+        </a:p>
+      </dgm:t>
     </dgm:pt>
     <dgm:pt modelId="{28CF1DAA-44AC-4D8D-84EF-1340A6B8DF3E}" type="pres">
       <dgm:prSet presAssocID="{DA5DC895-BB0C-40F8-B471-AC47FF787DD5}" presName="entireBox" presStyleLbl="node1" presStyleIdx="0" presStyleCnt="3"/>
       <dgm:spPr/>
+      <dgm:t>
+        <a:bodyPr/>
+        <a:lstStyle/>
+        <a:p>
+          <a:endParaRPr lang="en-US"/>
+        </a:p>
+      </dgm:t>
     </dgm:pt>
     <dgm:pt modelId="{D9743783-E986-4807-9A52-327A05CF1276}" type="pres">
       <dgm:prSet presAssocID="{DA5DC895-BB0C-40F8-B471-AC47FF787DD5}" presName="descendantBox" presStyleCnt="0"/>
@@ -1578,6 +1591,13 @@
         </dgm:presLayoutVars>
       </dgm:prSet>
       <dgm:spPr/>
+      <dgm:t>
+        <a:bodyPr/>
+        <a:lstStyle/>
+        <a:p>
+          <a:endParaRPr lang="en-US"/>
+        </a:p>
+      </dgm:t>
     </dgm:pt>
     <dgm:pt modelId="{9A20B6E3-4304-4E27-9219-125F5F7561CF}" type="pres">
       <dgm:prSet presAssocID="{55B5D042-7401-403E-81C0-E2E99083D13F}" presName="sp" presStyleCnt="0"/>
@@ -1590,10 +1610,24 @@
     <dgm:pt modelId="{A7B497D3-8456-4DAE-8D2D-32262AE4E45E}" type="pres">
       <dgm:prSet presAssocID="{8A53FA2D-5476-44F4-8858-EA2D7C9188CC}" presName="parentTextArrow" presStyleLbl="node1" presStyleIdx="0" presStyleCnt="3"/>
       <dgm:spPr/>
+      <dgm:t>
+        <a:bodyPr/>
+        <a:lstStyle/>
+        <a:p>
+          <a:endParaRPr lang="en-US"/>
+        </a:p>
+      </dgm:t>
     </dgm:pt>
     <dgm:pt modelId="{F8EB6A61-DC24-4717-94AC-74EF8D491873}" type="pres">
-      <dgm:prSet presAssocID="{8A53FA2D-5476-44F4-8858-EA2D7C9188CC}" presName="arrow" presStyleLbl="node1" presStyleIdx="1" presStyleCnt="3"/>
+      <dgm:prSet presAssocID="{8A53FA2D-5476-44F4-8858-EA2D7C9188CC}" presName="arrow" presStyleLbl="node1" presStyleIdx="1" presStyleCnt="3" custLinFactNeighborX="-30696" custLinFactNeighborY="-302"/>
       <dgm:spPr/>
+      <dgm:t>
+        <a:bodyPr/>
+        <a:lstStyle/>
+        <a:p>
+          <a:endParaRPr lang="en-US"/>
+        </a:p>
+      </dgm:t>
     </dgm:pt>
     <dgm:pt modelId="{5512F83E-97C3-4760-8075-F0466174D8C5}" type="pres">
       <dgm:prSet presAssocID="{8A53FA2D-5476-44F4-8858-EA2D7C9188CC}" presName="descendantArrow" presStyleCnt="0"/>
@@ -1606,6 +1640,13 @@
         </dgm:presLayoutVars>
       </dgm:prSet>
       <dgm:spPr/>
+      <dgm:t>
+        <a:bodyPr/>
+        <a:lstStyle/>
+        <a:p>
+          <a:endParaRPr lang="en-US"/>
+        </a:p>
+      </dgm:t>
     </dgm:pt>
     <dgm:pt modelId="{215399F9-3445-48E3-9596-1006FE6AC478}" type="pres">
       <dgm:prSet presAssocID="{8F01E5DD-B15F-48C6-ABCF-C05DF5ADBE31}" presName="sp" presStyleCnt="0"/>
@@ -1618,10 +1659,24 @@
     <dgm:pt modelId="{D36A9558-9300-4802-852B-CD33D4F18457}" type="pres">
       <dgm:prSet presAssocID="{9FF4DE82-4AE3-4A93-A3A8-D1EC91938A0C}" presName="parentTextArrow" presStyleLbl="node1" presStyleIdx="1" presStyleCnt="3"/>
       <dgm:spPr/>
+      <dgm:t>
+        <a:bodyPr/>
+        <a:lstStyle/>
+        <a:p>
+          <a:endParaRPr lang="en-US"/>
+        </a:p>
+      </dgm:t>
     </dgm:pt>
     <dgm:pt modelId="{BFFEBD7C-987E-440B-8E76-ADB9F767FCB7}" type="pres">
       <dgm:prSet presAssocID="{9FF4DE82-4AE3-4A93-A3A8-D1EC91938A0C}" presName="arrow" presStyleLbl="node1" presStyleIdx="2" presStyleCnt="3"/>
       <dgm:spPr/>
+      <dgm:t>
+        <a:bodyPr/>
+        <a:lstStyle/>
+        <a:p>
+          <a:endParaRPr lang="en-US"/>
+        </a:p>
+      </dgm:t>
     </dgm:pt>
     <dgm:pt modelId="{5B9C669B-249C-4E7A-B682-C0CCC51CC789}" type="pres">
       <dgm:prSet presAssocID="{9FF4DE82-4AE3-4A93-A3A8-D1EC91938A0C}" presName="descendantArrow" presStyleCnt="0"/>
@@ -1634,25 +1689,32 @@
         </dgm:presLayoutVars>
       </dgm:prSet>
       <dgm:spPr/>
+      <dgm:t>
+        <a:bodyPr/>
+        <a:lstStyle/>
+        <a:p>
+          <a:endParaRPr lang="en-US"/>
+        </a:p>
+      </dgm:t>
     </dgm:pt>
   </dgm:ptLst>
   <dgm:cxnLst>
+    <dgm:cxn modelId="{298A9750-C39C-44BD-8427-E77850B04646}" type="presOf" srcId="{8A53FA2D-5476-44F4-8858-EA2D7C9188CC}" destId="{A7B497D3-8456-4DAE-8D2D-32262AE4E45E}" srcOrd="0" destOrd="0" presId="urn:microsoft.com/office/officeart/2005/8/layout/process4"/>
+    <dgm:cxn modelId="{099C1B70-F0EB-47E9-A27C-A05A802C6ECB}" srcId="{846A122F-E103-4B44-9298-634E56F24B97}" destId="{9FF4DE82-4AE3-4A93-A3A8-D1EC91938A0C}" srcOrd="0" destOrd="0" parTransId="{A12F850C-E39D-4B3D-8833-CB74C12FED4F}" sibTransId="{8F01E5DD-B15F-48C6-ABCF-C05DF5ADBE31}"/>
+    <dgm:cxn modelId="{223FCD36-6340-4774-8F8D-18C474EB3273}" type="presOf" srcId="{9FF4DE82-4AE3-4A93-A3A8-D1EC91938A0C}" destId="{D36A9558-9300-4802-852B-CD33D4F18457}" srcOrd="0" destOrd="0" presId="urn:microsoft.com/office/officeart/2005/8/layout/process4"/>
+    <dgm:cxn modelId="{B6E3E77B-69A4-4B97-A5EF-5030AF5796CA}" srcId="{846A122F-E103-4B44-9298-634E56F24B97}" destId="{DA5DC895-BB0C-40F8-B471-AC47FF787DD5}" srcOrd="2" destOrd="0" parTransId="{6F63D350-D599-46F1-8AC7-01E5C536B5F9}" sibTransId="{FAAFCF2D-2A93-492E-BA09-8A8C9F64FFD0}"/>
+    <dgm:cxn modelId="{D56A978C-5244-4994-8434-566CCCF5D2B7}" type="presOf" srcId="{01BB52A4-F47B-4701-8DC2-C2D362D11BEA}" destId="{BF4277A5-6432-4F95-AD65-54BA2960A7A4}" srcOrd="0" destOrd="0" presId="urn:microsoft.com/office/officeart/2005/8/layout/process4"/>
+    <dgm:cxn modelId="{005E8DE4-0905-41B4-9591-BFE14BF95CE9}" type="presOf" srcId="{846A122F-E103-4B44-9298-634E56F24B97}" destId="{639088EA-86CA-4D5F-81E0-F504D4FB20CC}" srcOrd="0" destOrd="0" presId="urn:microsoft.com/office/officeart/2005/8/layout/process4"/>
+    <dgm:cxn modelId="{8E569D34-E009-4298-824E-F1C5739C1E81}" srcId="{846A122F-E103-4B44-9298-634E56F24B97}" destId="{8A53FA2D-5476-44F4-8858-EA2D7C9188CC}" srcOrd="1" destOrd="0" parTransId="{C3C7A970-61A1-47DD-8BC7-0C2372FB453D}" sibTransId="{55B5D042-7401-403E-81C0-E2E99083D13F}"/>
+    <dgm:cxn modelId="{62BFE877-C7B6-4E68-8E45-AEB924394F29}" type="presOf" srcId="{CF2489DE-5313-4438-8A51-A1003EE78C7C}" destId="{BCDC24D4-542C-412C-A82E-328C46DA3225}" srcOrd="0" destOrd="0" presId="urn:microsoft.com/office/officeart/2005/8/layout/process4"/>
+    <dgm:cxn modelId="{837F5253-3BA7-453D-A7C2-64CB234999BD}" srcId="{9FF4DE82-4AE3-4A93-A3A8-D1EC91938A0C}" destId="{EB7FEFAC-4022-46A2-96DA-21E3FD50D563}" srcOrd="0" destOrd="0" parTransId="{086C0901-5C0B-406F-BD30-E9447317B264}" sibTransId="{8B4723BA-7EFB-42C5-8020-DD5A882F7C6F}"/>
+    <dgm:cxn modelId="{1384CA8B-7492-4F83-88CE-8E01E390200E}" type="presOf" srcId="{EB7FEFAC-4022-46A2-96DA-21E3FD50D563}" destId="{0BE0B7A8-6E6D-43C3-8BC7-05C625583171}" srcOrd="0" destOrd="0" presId="urn:microsoft.com/office/officeart/2005/8/layout/process4"/>
+    <dgm:cxn modelId="{E06A85F6-9853-45E8-8EE1-82EDCDAB610A}" srcId="{DA5DC895-BB0C-40F8-B471-AC47FF787DD5}" destId="{01BB52A4-F47B-4701-8DC2-C2D362D11BEA}" srcOrd="0" destOrd="0" parTransId="{4B84767E-BAAF-4AA4-A449-7F6B7F2DAA30}" sibTransId="{FC5811AD-BB09-4139-8EB4-C276B87A3603}"/>
+    <dgm:cxn modelId="{AD3B3629-7D31-4E10-958F-28AEB67F5EB3}" type="presOf" srcId="{8A53FA2D-5476-44F4-8858-EA2D7C9188CC}" destId="{F8EB6A61-DC24-4717-94AC-74EF8D491873}" srcOrd="1" destOrd="0" presId="urn:microsoft.com/office/officeart/2005/8/layout/process4"/>
+    <dgm:cxn modelId="{D395E099-AC7F-4105-8868-00E9C4A5682C}" type="presOf" srcId="{DA5DC895-BB0C-40F8-B471-AC47FF787DD5}" destId="{2E2CE860-9741-4824-A512-E59CE11345D0}" srcOrd="0" destOrd="0" presId="urn:microsoft.com/office/officeart/2005/8/layout/process4"/>
     <dgm:cxn modelId="{24AF1029-53B1-40B3-AA8D-CB261F6D93B3}" type="presOf" srcId="{DA5DC895-BB0C-40F8-B471-AC47FF787DD5}" destId="{28CF1DAA-44AC-4D8D-84EF-1340A6B8DF3E}" srcOrd="1" destOrd="0" presId="urn:microsoft.com/office/officeart/2005/8/layout/process4"/>
-    <dgm:cxn modelId="{AD3B3629-7D31-4E10-958F-28AEB67F5EB3}" type="presOf" srcId="{8A53FA2D-5476-44F4-8858-EA2D7C9188CC}" destId="{F8EB6A61-DC24-4717-94AC-74EF8D491873}" srcOrd="1" destOrd="0" presId="urn:microsoft.com/office/officeart/2005/8/layout/process4"/>
-    <dgm:cxn modelId="{8E569D34-E009-4298-824E-F1C5739C1E81}" srcId="{846A122F-E103-4B44-9298-634E56F24B97}" destId="{8A53FA2D-5476-44F4-8858-EA2D7C9188CC}" srcOrd="1" destOrd="0" parTransId="{C3C7A970-61A1-47DD-8BC7-0C2372FB453D}" sibTransId="{55B5D042-7401-403E-81C0-E2E99083D13F}"/>
-    <dgm:cxn modelId="{223FCD36-6340-4774-8F8D-18C474EB3273}" type="presOf" srcId="{9FF4DE82-4AE3-4A93-A3A8-D1EC91938A0C}" destId="{D36A9558-9300-4802-852B-CD33D4F18457}" srcOrd="0" destOrd="0" presId="urn:microsoft.com/office/officeart/2005/8/layout/process4"/>
+    <dgm:cxn modelId="{E59EBD97-8689-4B3C-86A7-A03EDA49C368}" type="presOf" srcId="{9FF4DE82-4AE3-4A93-A3A8-D1EC91938A0C}" destId="{BFFEBD7C-987E-440B-8E76-ADB9F767FCB7}" srcOrd="1" destOrd="0" presId="urn:microsoft.com/office/officeart/2005/8/layout/process4"/>
     <dgm:cxn modelId="{9983405D-FC2E-415D-8EF1-D65EC34E0627}" srcId="{8A53FA2D-5476-44F4-8858-EA2D7C9188CC}" destId="{CF2489DE-5313-4438-8A51-A1003EE78C7C}" srcOrd="0" destOrd="0" parTransId="{0E8F5CF4-731C-42C3-A4E3-D60E343963D4}" sibTransId="{77E2FB05-F9AF-44EC-96A0-10DA9138F830}"/>
-    <dgm:cxn modelId="{099C1B70-F0EB-47E9-A27C-A05A802C6ECB}" srcId="{846A122F-E103-4B44-9298-634E56F24B97}" destId="{9FF4DE82-4AE3-4A93-A3A8-D1EC91938A0C}" srcOrd="0" destOrd="0" parTransId="{A12F850C-E39D-4B3D-8833-CB74C12FED4F}" sibTransId="{8F01E5DD-B15F-48C6-ABCF-C05DF5ADBE31}"/>
-    <dgm:cxn modelId="{298A9750-C39C-44BD-8427-E77850B04646}" type="presOf" srcId="{8A53FA2D-5476-44F4-8858-EA2D7C9188CC}" destId="{A7B497D3-8456-4DAE-8D2D-32262AE4E45E}" srcOrd="0" destOrd="0" presId="urn:microsoft.com/office/officeart/2005/8/layout/process4"/>
-    <dgm:cxn modelId="{837F5253-3BA7-453D-A7C2-64CB234999BD}" srcId="{9FF4DE82-4AE3-4A93-A3A8-D1EC91938A0C}" destId="{EB7FEFAC-4022-46A2-96DA-21E3FD50D563}" srcOrd="0" destOrd="0" parTransId="{086C0901-5C0B-406F-BD30-E9447317B264}" sibTransId="{8B4723BA-7EFB-42C5-8020-DD5A882F7C6F}"/>
-    <dgm:cxn modelId="{62BFE877-C7B6-4E68-8E45-AEB924394F29}" type="presOf" srcId="{CF2489DE-5313-4438-8A51-A1003EE78C7C}" destId="{BCDC24D4-542C-412C-A82E-328C46DA3225}" srcOrd="0" destOrd="0" presId="urn:microsoft.com/office/officeart/2005/8/layout/process4"/>
-    <dgm:cxn modelId="{B6E3E77B-69A4-4B97-A5EF-5030AF5796CA}" srcId="{846A122F-E103-4B44-9298-634E56F24B97}" destId="{DA5DC895-BB0C-40F8-B471-AC47FF787DD5}" srcOrd="2" destOrd="0" parTransId="{6F63D350-D599-46F1-8AC7-01E5C536B5F9}" sibTransId="{FAAFCF2D-2A93-492E-BA09-8A8C9F64FFD0}"/>
-    <dgm:cxn modelId="{1384CA8B-7492-4F83-88CE-8E01E390200E}" type="presOf" srcId="{EB7FEFAC-4022-46A2-96DA-21E3FD50D563}" destId="{0BE0B7A8-6E6D-43C3-8BC7-05C625583171}" srcOrd="0" destOrd="0" presId="urn:microsoft.com/office/officeart/2005/8/layout/process4"/>
-    <dgm:cxn modelId="{D56A978C-5244-4994-8434-566CCCF5D2B7}" type="presOf" srcId="{01BB52A4-F47B-4701-8DC2-C2D362D11BEA}" destId="{BF4277A5-6432-4F95-AD65-54BA2960A7A4}" srcOrd="0" destOrd="0" presId="urn:microsoft.com/office/officeart/2005/8/layout/process4"/>
-    <dgm:cxn modelId="{E59EBD97-8689-4B3C-86A7-A03EDA49C368}" type="presOf" srcId="{9FF4DE82-4AE3-4A93-A3A8-D1EC91938A0C}" destId="{BFFEBD7C-987E-440B-8E76-ADB9F767FCB7}" srcOrd="1" destOrd="0" presId="urn:microsoft.com/office/officeart/2005/8/layout/process4"/>
-    <dgm:cxn modelId="{D395E099-AC7F-4105-8868-00E9C4A5682C}" type="presOf" srcId="{DA5DC895-BB0C-40F8-B471-AC47FF787DD5}" destId="{2E2CE860-9741-4824-A512-E59CE11345D0}" srcOrd="0" destOrd="0" presId="urn:microsoft.com/office/officeart/2005/8/layout/process4"/>
-    <dgm:cxn modelId="{005E8DE4-0905-41B4-9591-BFE14BF95CE9}" type="presOf" srcId="{846A122F-E103-4B44-9298-634E56F24B97}" destId="{639088EA-86CA-4D5F-81E0-F504D4FB20CC}" srcOrd="0" destOrd="0" presId="urn:microsoft.com/office/officeart/2005/8/layout/process4"/>
-    <dgm:cxn modelId="{E06A85F6-9853-45E8-8EE1-82EDCDAB610A}" srcId="{DA5DC895-BB0C-40F8-B471-AC47FF787DD5}" destId="{01BB52A4-F47B-4701-8DC2-C2D362D11BEA}" srcOrd="0" destOrd="0" parTransId="{4B84767E-BAAF-4AA4-A449-7F6B7F2DAA30}" sibTransId="{FC5811AD-BB09-4139-8EB4-C276B87A3603}"/>
     <dgm:cxn modelId="{E24EE398-16AF-4842-9D7F-BFAFAD5DFF6C}" type="presParOf" srcId="{639088EA-86CA-4D5F-81E0-F504D4FB20CC}" destId="{721861BE-0A6E-4F7D-AA99-D9788900AD4C}" srcOrd="0" destOrd="0" presId="urn:microsoft.com/office/officeart/2005/8/layout/process4"/>
     <dgm:cxn modelId="{68C17845-5983-4749-9CD0-CCB35B47EF11}" type="presParOf" srcId="{721861BE-0A6E-4F7D-AA99-D9788900AD4C}" destId="{2E2CE860-9741-4824-A512-E59CE11345D0}" srcOrd="0" destOrd="0" presId="urn:microsoft.com/office/officeart/2005/8/layout/process4"/>
     <dgm:cxn modelId="{8280EFAA-1DD5-40CC-BE8E-0C2B55AB2911}" type="presParOf" srcId="{721861BE-0A6E-4F7D-AA99-D9788900AD4C}" destId="{28CF1DAA-44AC-4D8D-84EF-1340A6B8DF3E}" srcOrd="1" destOrd="0" presId="urn:microsoft.com/office/officeart/2005/8/layout/process4"/>
@@ -1760,12 +1822,12 @@
         </a:fontRef>
       </dsp:style>
       <dsp:txBody>
-        <a:bodyPr spcFirstLastPara="0" vert="horz" wrap="square" lIns="106680" tIns="106680" rIns="106680" bIns="106680" numCol="1" spcCol="1270" anchor="ctr" anchorCtr="0">
+        <a:bodyPr spcFirstLastPara="0" vert="horz" wrap="square" lIns="99568" tIns="99568" rIns="99568" bIns="99568" numCol="1" spcCol="1270" anchor="ctr" anchorCtr="0">
           <a:noAutofit/>
         </a:bodyPr>
         <a:lstStyle/>
         <a:p>
-          <a:pPr marL="0" lvl="0" indent="0" algn="ctr" defTabSz="666750">
+          <a:pPr lvl="0" algn="ctr" defTabSz="622300">
             <a:lnSpc>
               <a:spcPct val="90000"/>
             </a:lnSpc>
@@ -1775,49 +1837,48 @@
             <a:spcAft>
               <a:spcPct val="35000"/>
             </a:spcAft>
-            <a:buNone/>
           </a:pPr>
           <a:r>
-            <a:rPr lang="en-US" sz="1500" b="1" kern="1200" dirty="0" err="1">
+            <a:rPr lang="en-US" sz="1400" b="1" kern="1200" dirty="0" err="1">
               <a:solidFill>
                 <a:schemeClr val="tx1"/>
               </a:solidFill>
-              <a:latin typeface="Urbanist" panose="020B0604020202020204" charset="0"/>
+              <a:latin typeface="IDLC" pitchFamily="2" charset="0"/>
               <a:ea typeface="Urbanist" panose="020B0604020202020204" charset="0"/>
-              <a:cs typeface="Urbanist" panose="020B0604020202020204" charset="0"/>
+              <a:cs typeface="IDLC" pitchFamily="2" charset="0"/>
             </a:rPr>
             <a:t>gitcreds</a:t>
           </a:r>
           <a:r>
-            <a:rPr lang="en-US" sz="1500" b="1" kern="1200" dirty="0">
+            <a:rPr lang="en-US" sz="1400" b="1" kern="1200" dirty="0">
               <a:solidFill>
                 <a:schemeClr val="tx1"/>
               </a:solidFill>
-              <a:latin typeface="Urbanist" panose="020B0604020202020204" charset="0"/>
+              <a:latin typeface="IDLC" pitchFamily="2" charset="0"/>
               <a:ea typeface="Urbanist" panose="020B0604020202020204" charset="0"/>
-              <a:cs typeface="Urbanist" panose="020B0604020202020204" charset="0"/>
+              <a:cs typeface="IDLC" pitchFamily="2" charset="0"/>
             </a:rPr>
             <a:t>::</a:t>
           </a:r>
           <a:r>
-            <a:rPr lang="en-US" sz="1500" b="1" kern="1200" dirty="0" err="1">
+            <a:rPr lang="en-US" sz="1400" b="1" kern="1200" dirty="0" err="1">
               <a:solidFill>
                 <a:schemeClr val="tx1"/>
               </a:solidFill>
-              <a:latin typeface="Urbanist" panose="020B0604020202020204" charset="0"/>
+              <a:latin typeface="IDLC" pitchFamily="2" charset="0"/>
               <a:ea typeface="Urbanist" panose="020B0604020202020204" charset="0"/>
-              <a:cs typeface="Urbanist" panose="020B0604020202020204" charset="0"/>
+              <a:cs typeface="IDLC" pitchFamily="2" charset="0"/>
             </a:rPr>
             <a:t>gitcreds_set</a:t>
           </a:r>
           <a:r>
-            <a:rPr lang="en-US" sz="1500" b="1" kern="1200" dirty="0">
+            <a:rPr lang="en-US" sz="1400" b="1" kern="1200" dirty="0">
               <a:solidFill>
                 <a:schemeClr val="tx1"/>
               </a:solidFill>
-              <a:latin typeface="Urbanist" panose="020B0604020202020204" charset="0"/>
+              <a:latin typeface="IDLC" pitchFamily="2" charset="0"/>
               <a:ea typeface="Urbanist" panose="020B0604020202020204" charset="0"/>
-              <a:cs typeface="Urbanist" panose="020B0604020202020204" charset="0"/>
+              <a:cs typeface="IDLC" pitchFamily="2" charset="0"/>
             </a:rPr>
             <a:t>()</a:t>
           </a:r>
@@ -1884,7 +1945,7 @@
         </a:bodyPr>
         <a:lstStyle/>
         <a:p>
-          <a:pPr marL="0" lvl="0" indent="0" algn="ctr" defTabSz="577850">
+          <a:pPr lvl="0" algn="ctr" defTabSz="577850">
             <a:lnSpc>
               <a:spcPct val="90000"/>
             </a:lnSpc>
@@ -1894,13 +1955,14 @@
             <a:spcAft>
               <a:spcPct val="35000"/>
             </a:spcAft>
-            <a:buNone/>
           </a:pPr>
           <a:r>
             <a:rPr lang="en-US" sz="1300" i="1" kern="1200" dirty="0">
               <a:solidFill>
                 <a:schemeClr val="tx1"/>
               </a:solidFill>
+              <a:latin typeface="IDLC" pitchFamily="2" charset="0"/>
+              <a:cs typeface="IDLC" pitchFamily="2" charset="0"/>
             </a:rPr>
             <a:t>Paste the token here</a:t>
           </a:r>
@@ -1918,7 +1980,7 @@
       </dsp:nvSpPr>
       <dsp:spPr>
         <a:xfrm rot="10800000">
-          <a:off x="0" y="1186605"/>
+          <a:off x="0" y="1182988"/>
           <a:ext cx="3794985" cy="1197730"/>
         </a:xfrm>
         <a:prstGeom prst="upArrowCallout">
@@ -1979,12 +2041,12 @@
         </a:fontRef>
       </dsp:style>
       <dsp:txBody>
-        <a:bodyPr spcFirstLastPara="0" vert="horz" wrap="square" lIns="106680" tIns="106680" rIns="106680" bIns="106680" numCol="1" spcCol="1270" anchor="ctr" anchorCtr="0">
+        <a:bodyPr spcFirstLastPara="0" vert="horz" wrap="square" lIns="99568" tIns="99568" rIns="99568" bIns="99568" numCol="1" spcCol="1270" anchor="ctr" anchorCtr="0">
           <a:noAutofit/>
         </a:bodyPr>
         <a:lstStyle/>
         <a:p>
-          <a:pPr marL="0" lvl="0" indent="0" algn="ctr" defTabSz="666750">
+          <a:pPr lvl="0" algn="ctr" defTabSz="622300">
             <a:lnSpc>
               <a:spcPct val="90000"/>
             </a:lnSpc>
@@ -1994,23 +2056,22 @@
             <a:spcAft>
               <a:spcPct val="35000"/>
             </a:spcAft>
-            <a:buNone/>
           </a:pPr>
           <a:r>
-            <a:rPr lang="en-US" sz="1500" b="1" kern="1200" dirty="0">
+            <a:rPr lang="en-US" sz="1400" b="1" kern="1200" dirty="0">
               <a:solidFill>
                 <a:schemeClr val="tx1"/>
               </a:solidFill>
-              <a:latin typeface="Urbanist" panose="020B0604020202020204" charset="0"/>
+              <a:latin typeface="IDLC" pitchFamily="2" charset="0"/>
               <a:ea typeface="Urbanist" panose="020B0604020202020204" charset="0"/>
-              <a:cs typeface="Urbanist" panose="020B0604020202020204" charset="0"/>
+              <a:cs typeface="IDLC" pitchFamily="2" charset="0"/>
             </a:rPr>
             <a:t>Generate Token</a:t>
           </a:r>
         </a:p>
       </dsp:txBody>
       <dsp:txXfrm rot="-10800000">
-        <a:off x="0" y="1186605"/>
+        <a:off x="0" y="1182988"/>
         <a:ext cx="3794985" cy="420403"/>
       </dsp:txXfrm>
     </dsp:sp>
@@ -2070,7 +2131,7 @@
         </a:bodyPr>
         <a:lstStyle/>
         <a:p>
-          <a:pPr marL="0" lvl="0" indent="0" algn="ctr" defTabSz="577850">
+          <a:pPr lvl="0" algn="ctr" defTabSz="577850">
             <a:lnSpc>
               <a:spcPct val="90000"/>
             </a:lnSpc>
@@ -2080,13 +2141,14 @@
             <a:spcAft>
               <a:spcPct val="35000"/>
             </a:spcAft>
-            <a:buNone/>
           </a:pPr>
           <a:r>
             <a:rPr lang="en-US" sz="1300" i="1" kern="1200" dirty="0">
               <a:solidFill>
                 <a:schemeClr val="tx1"/>
               </a:solidFill>
+              <a:latin typeface="IDLC" pitchFamily="2" charset="0"/>
+              <a:cs typeface="IDLC" pitchFamily="2" charset="0"/>
             </a:rPr>
             <a:t>Generates a token. Copy this</a:t>
           </a:r>
@@ -2165,12 +2227,12 @@
         </a:fontRef>
       </dsp:style>
       <dsp:txBody>
-        <a:bodyPr spcFirstLastPara="0" vert="horz" wrap="square" lIns="106680" tIns="106680" rIns="106680" bIns="106680" numCol="1" spcCol="1270" anchor="ctr" anchorCtr="0">
+        <a:bodyPr spcFirstLastPara="0" vert="horz" wrap="square" lIns="99568" tIns="99568" rIns="99568" bIns="99568" numCol="1" spcCol="1270" anchor="ctr" anchorCtr="0">
           <a:noAutofit/>
         </a:bodyPr>
         <a:lstStyle/>
         <a:p>
-          <a:pPr marL="0" lvl="0" indent="0" algn="ctr" defTabSz="666750">
+          <a:pPr lvl="0" algn="ctr" defTabSz="622300">
             <a:lnSpc>
               <a:spcPct val="90000"/>
             </a:lnSpc>
@@ -2180,49 +2242,48 @@
             <a:spcAft>
               <a:spcPct val="35000"/>
             </a:spcAft>
-            <a:buNone/>
           </a:pPr>
           <a:r>
-            <a:rPr lang="en-US" sz="1500" b="1" kern="1200" dirty="0" err="1">
+            <a:rPr lang="en-US" sz="1400" b="1" kern="1200" dirty="0" err="1">
               <a:solidFill>
                 <a:schemeClr val="tx1"/>
               </a:solidFill>
-              <a:latin typeface="Urbanist" panose="020B0604020202020204" charset="0"/>
+              <a:latin typeface="IDLC" pitchFamily="2" charset="0"/>
               <a:ea typeface="Urbanist" panose="020B0604020202020204" charset="0"/>
-              <a:cs typeface="Urbanist" panose="020B0604020202020204" charset="0"/>
+              <a:cs typeface="IDLC" pitchFamily="2" charset="0"/>
             </a:rPr>
             <a:t>Usethis</a:t>
           </a:r>
           <a:r>
-            <a:rPr lang="en-US" sz="1500" b="1" kern="1200" dirty="0">
+            <a:rPr lang="en-US" sz="1400" b="1" kern="1200" dirty="0">
               <a:solidFill>
                 <a:schemeClr val="tx1"/>
               </a:solidFill>
-              <a:latin typeface="Urbanist" panose="020B0604020202020204" charset="0"/>
+              <a:latin typeface="IDLC" pitchFamily="2" charset="0"/>
               <a:ea typeface="Urbanist" panose="020B0604020202020204" charset="0"/>
-              <a:cs typeface="Urbanist" panose="020B0604020202020204" charset="0"/>
+              <a:cs typeface="IDLC" pitchFamily="2" charset="0"/>
             </a:rPr>
             <a:t>::</a:t>
           </a:r>
           <a:r>
-            <a:rPr lang="en-US" sz="1500" b="1" kern="1200" dirty="0" err="1">
+            <a:rPr lang="en-US" sz="1400" b="1" kern="1200" dirty="0" err="1">
               <a:solidFill>
                 <a:schemeClr val="tx1"/>
               </a:solidFill>
-              <a:latin typeface="Urbanist" panose="020B0604020202020204" charset="0"/>
+              <a:latin typeface="IDLC" pitchFamily="2" charset="0"/>
               <a:ea typeface="Urbanist" panose="020B0604020202020204" charset="0"/>
-              <a:cs typeface="Urbanist" panose="020B0604020202020204" charset="0"/>
+              <a:cs typeface="IDLC" pitchFamily="2" charset="0"/>
             </a:rPr>
             <a:t>create_github_token</a:t>
           </a:r>
           <a:r>
-            <a:rPr lang="en-US" sz="1500" b="1" kern="1200" dirty="0">
+            <a:rPr lang="en-US" sz="1400" b="1" kern="1200" dirty="0">
               <a:solidFill>
                 <a:schemeClr val="tx1"/>
               </a:solidFill>
-              <a:latin typeface="Urbanist" panose="020B0604020202020204" charset="0"/>
+              <a:latin typeface="IDLC" pitchFamily="2" charset="0"/>
               <a:ea typeface="Urbanist" panose="020B0604020202020204" charset="0"/>
-              <a:cs typeface="Urbanist" panose="020B0604020202020204" charset="0"/>
+              <a:cs typeface="IDLC" pitchFamily="2" charset="0"/>
             </a:rPr>
             <a:t>()</a:t>
           </a:r>
@@ -2289,7 +2350,7 @@
         </a:bodyPr>
         <a:lstStyle/>
         <a:p>
-          <a:pPr marL="0" lvl="0" indent="0" algn="ctr" defTabSz="577850">
+          <a:pPr lvl="0" algn="ctr" defTabSz="577850">
             <a:lnSpc>
               <a:spcPct val="90000"/>
             </a:lnSpc>
@@ -2299,13 +2360,14 @@
             <a:spcAft>
               <a:spcPct val="35000"/>
             </a:spcAft>
-            <a:buNone/>
           </a:pPr>
           <a:r>
             <a:rPr lang="en-US" sz="1300" i="1" kern="1200" dirty="0">
               <a:solidFill>
                 <a:schemeClr val="tx1"/>
               </a:solidFill>
+              <a:latin typeface="IDLC" pitchFamily="2" charset="0"/>
+              <a:cs typeface="IDLC" pitchFamily="2" charset="0"/>
             </a:rPr>
             <a:t>Launches GitHub authentication Configuration</a:t>
           </a:r>
@@ -4564,6 +4626,115 @@
 </p:notes>
 </file>
 
+<file path=ppt/notesSlides/notesSlide13.xml><?xml version="1.0" encoding="utf-8"?>
+<p:notes xmlns:a="http://schemas.openxmlformats.org/drawingml/2006/main" xmlns:r="http://schemas.openxmlformats.org/officeDocument/2006/relationships" xmlns:p="http://schemas.openxmlformats.org/presentationml/2006/main" showMasterSp="0" showMasterPhAnim="0">
+  <p:cSld>
+    <p:spTree>
+      <p:nvGrpSpPr>
+        <p:cNvPr id="1" name="Shape 80"/>
+        <p:cNvGrpSpPr/>
+        <p:nvPr/>
+      </p:nvGrpSpPr>
+      <p:grpSpPr>
+        <a:xfrm>
+          <a:off x="0" y="0"/>
+          <a:ext cx="0" cy="0"/>
+          <a:chOff x="0" y="0"/>
+          <a:chExt cx="0" cy="0"/>
+        </a:xfrm>
+      </p:grpSpPr>
+      <p:sp>
+        <p:nvSpPr>
+          <p:cNvPr id="81" name="Google Shape;81;p1:notes"/>
+          <p:cNvSpPr txBox="1">
+            <a:spLocks noGrp="1"/>
+          </p:cNvSpPr>
+          <p:nvPr>
+            <p:ph type="body" idx="1"/>
+          </p:nvPr>
+        </p:nvSpPr>
+        <p:spPr>
+          <a:xfrm>
+            <a:off x="685800" y="4343400"/>
+            <a:ext cx="5486400" cy="4114800"/>
+          </a:xfrm>
+          <a:prstGeom prst="rect">
+            <a:avLst/>
+          </a:prstGeom>
+        </p:spPr>
+        <p:txBody>
+          <a:bodyPr spcFirstLastPara="1" wrap="square" lIns="91425" tIns="91425" rIns="91425" bIns="91425" anchor="t" anchorCtr="0">
+            <a:noAutofit/>
+          </a:bodyPr>
+          <a:lstStyle/>
+          <a:p>
+            <a:pPr marL="0" lvl="0" indent="0" algn="l" rtl="0">
+              <a:spcBef>
+                <a:spcPts val="0"/>
+              </a:spcBef>
+              <a:spcAft>
+                <a:spcPts val="0"/>
+              </a:spcAft>
+              <a:buNone/>
+            </a:pPr>
+            <a:endParaRPr/>
+          </a:p>
+        </p:txBody>
+      </p:sp>
+      <p:sp>
+        <p:nvSpPr>
+          <p:cNvPr id="82" name="Google Shape;82;p1:notes"/>
+          <p:cNvSpPr>
+            <a:spLocks noGrp="1" noRot="1" noChangeAspect="1"/>
+          </p:cNvSpPr>
+          <p:nvPr>
+            <p:ph type="sldImg" idx="2"/>
+          </p:nvPr>
+        </p:nvSpPr>
+        <p:spPr>
+          <a:xfrm>
+            <a:off x="381000" y="685800"/>
+            <a:ext cx="6096000" cy="3429000"/>
+          </a:xfrm>
+          <a:custGeom>
+            <a:avLst/>
+            <a:gdLst/>
+            <a:ahLst/>
+            <a:cxnLst/>
+            <a:rect l="l" t="t" r="r" b="b"/>
+            <a:pathLst>
+              <a:path w="120000" h="120000" extrusionOk="0">
+                <a:moveTo>
+                  <a:pt x="0" y="0"/>
+                </a:moveTo>
+                <a:lnTo>
+                  <a:pt x="120000" y="0"/>
+                </a:lnTo>
+                <a:lnTo>
+                  <a:pt x="120000" y="120000"/>
+                </a:lnTo>
+                <a:lnTo>
+                  <a:pt x="0" y="120000"/>
+                </a:lnTo>
+                <a:close/>
+              </a:path>
+            </a:pathLst>
+          </a:custGeom>
+        </p:spPr>
+      </p:sp>
+    </p:spTree>
+    <p:extLst>
+      <p:ext uri="{BB962C8B-B14F-4D97-AF65-F5344CB8AC3E}">
+        <p14:creationId xmlns:p14="http://schemas.microsoft.com/office/powerpoint/2010/main" val="1959080865"/>
+      </p:ext>
+    </p:extLst>
+  </p:cSld>
+  <p:clrMapOvr>
+    <a:masterClrMapping/>
+  </p:clrMapOvr>
+</p:notes>
+</file>
+
 <file path=ppt/notesSlides/notesSlide2.xml><?xml version="1.0" encoding="utf-8"?>
 <p:notes xmlns:a="http://schemas.openxmlformats.org/drawingml/2006/main" xmlns:r="http://schemas.openxmlformats.org/officeDocument/2006/relationships" xmlns:p="http://schemas.openxmlformats.org/presentationml/2006/main" showMasterSp="0" showMasterPhAnim="0">
   <p:cSld>
@@ -4615,7 +4786,7 @@
               </a:spcAft>
               <a:buNone/>
             </a:pPr>
-            <a:endParaRPr/>
+            <a:endParaRPr dirty="0"/>
           </a:p>
         </p:txBody>
       </p:sp>
@@ -4719,7 +4890,7 @@
               </a:spcAft>
               <a:buNone/>
             </a:pPr>
-            <a:endParaRPr/>
+            <a:endParaRPr dirty="0"/>
           </a:p>
         </p:txBody>
       </p:sp>
@@ -15246,7 +15417,7 @@
       </p:grpSpPr>
       <p:pic>
         <p:nvPicPr>
-          <p:cNvPr id="84" name="Google Shape;84;p13" descr="image.png"/>
+          <p:cNvPr id="85" name="Google Shape;85;p13" descr="image.png"/>
           <p:cNvPicPr preferRelativeResize="0"/>
           <p:nvPr/>
         </p:nvPicPr>
@@ -15259,8 +15430,8 @@
         </p:blipFill>
         <p:spPr>
           <a:xfrm>
-            <a:off x="0" y="0"/>
-            <a:ext cx="2729662" cy="3210165"/>
+            <a:off x="1679045" y="1447065"/>
+            <a:ext cx="1714500" cy="1714500"/>
           </a:xfrm>
           <a:prstGeom prst="rect">
             <a:avLst/>
@@ -15273,7 +15444,7 @@
       </p:pic>
       <p:pic>
         <p:nvPicPr>
-          <p:cNvPr id="85" name="Google Shape;85;p13" descr="image.png"/>
+          <p:cNvPr id="86" name="Google Shape;86;p13" descr="image.png"/>
           <p:cNvPicPr preferRelativeResize="0"/>
           <p:nvPr/>
         </p:nvPicPr>
@@ -15286,7 +15457,7 @@
         </p:blipFill>
         <p:spPr>
           <a:xfrm>
-            <a:off x="1679045" y="1447065"/>
+            <a:off x="3788568" y="3191243"/>
             <a:ext cx="1714500" cy="1714500"/>
           </a:xfrm>
           <a:prstGeom prst="rect">
@@ -15300,7 +15471,7 @@
       </p:pic>
       <p:pic>
         <p:nvPicPr>
-          <p:cNvPr id="86" name="Google Shape;86;p13" descr="image.png"/>
+          <p:cNvPr id="87" name="Google Shape;87;p13" descr="image.png"/>
           <p:cNvPicPr preferRelativeResize="0"/>
           <p:nvPr/>
         </p:nvPicPr>
@@ -15313,8 +15484,8 @@
         </p:blipFill>
         <p:spPr>
           <a:xfrm>
-            <a:off x="3788568" y="3191243"/>
-            <a:ext cx="1714500" cy="1714500"/>
+            <a:off x="973460" y="3696435"/>
+            <a:ext cx="1905000" cy="1905000"/>
           </a:xfrm>
           <a:prstGeom prst="rect">
             <a:avLst/>
@@ -15327,20 +15498,27 @@
       </p:pic>
       <p:pic>
         <p:nvPicPr>
-          <p:cNvPr id="87" name="Google Shape;87;p13" descr="image.png"/>
+          <p:cNvPr id="88" name="Google Shape;88;p13" descr="image.png"/>
           <p:cNvPicPr preferRelativeResize="0"/>
           <p:nvPr/>
         </p:nvPicPr>
         <p:blipFill rotWithShape="1">
           <a:blip r:embed="rId6">
             <a:alphaModFix/>
+            <a:duotone>
+              <a:prstClr val="black"/>
+              <a:srgbClr val="FFC000">
+                <a:tint val="45000"/>
+                <a:satMod val="400000"/>
+              </a:srgbClr>
+            </a:duotone>
           </a:blip>
           <a:srcRect/>
           <a:stretch/>
         </p:blipFill>
         <p:spPr>
           <a:xfrm>
-            <a:off x="973460" y="3696435"/>
+            <a:off x="6797944" y="1787038"/>
             <a:ext cx="1905000" cy="1905000"/>
           </a:xfrm>
           <a:prstGeom prst="rect">
@@ -15354,7 +15532,7 @@
       </p:pic>
       <p:pic>
         <p:nvPicPr>
-          <p:cNvPr id="88" name="Google Shape;88;p13" descr="image.png"/>
+          <p:cNvPr id="89" name="Google Shape;89;p13" descr="image.png"/>
           <p:cNvPicPr preferRelativeResize="0"/>
           <p:nvPr/>
         </p:nvPicPr>
@@ -15374,8 +15552,8 @@
         </p:blipFill>
         <p:spPr>
           <a:xfrm>
-            <a:off x="6797944" y="1787038"/>
-            <a:ext cx="1905000" cy="1905000"/>
+            <a:off x="10008394" y="2843150"/>
+            <a:ext cx="1714500" cy="1714500"/>
           </a:xfrm>
           <a:prstGeom prst="rect">
             <a:avLst/>
@@ -15388,7 +15566,7 @@
       </p:pic>
       <p:pic>
         <p:nvPicPr>
-          <p:cNvPr id="89" name="Google Shape;89;p13" descr="image.png"/>
+          <p:cNvPr id="90" name="Google Shape;90;p13" descr="image.png"/>
           <p:cNvPicPr preferRelativeResize="0"/>
           <p:nvPr/>
         </p:nvPicPr>
@@ -15408,8 +15586,8 @@
         </p:blipFill>
         <p:spPr>
           <a:xfrm>
-            <a:off x="10008394" y="2843150"/>
-            <a:ext cx="1714500" cy="1714500"/>
+            <a:off x="7815981" y="3924300"/>
+            <a:ext cx="1905000" cy="1905000"/>
           </a:xfrm>
           <a:prstGeom prst="rect">
             <a:avLst/>
@@ -15422,28 +15600,21 @@
       </p:pic>
       <p:pic>
         <p:nvPicPr>
-          <p:cNvPr id="90" name="Google Shape;90;p13" descr="image.png"/>
+          <p:cNvPr id="91" name="Google Shape;91;p13" descr="image.png"/>
           <p:cNvPicPr preferRelativeResize="0"/>
           <p:nvPr/>
         </p:nvPicPr>
         <p:blipFill rotWithShape="1">
           <a:blip r:embed="rId9">
             <a:alphaModFix/>
-            <a:duotone>
-              <a:prstClr val="black"/>
-              <a:srgbClr val="FFC000">
-                <a:tint val="45000"/>
-                <a:satMod val="400000"/>
-              </a:srgbClr>
-            </a:duotone>
           </a:blip>
           <a:srcRect/>
           <a:stretch/>
         </p:blipFill>
         <p:spPr>
           <a:xfrm>
-            <a:off x="7815981" y="3924300"/>
-            <a:ext cx="1905000" cy="1905000"/>
+            <a:off x="6086475" y="685800"/>
+            <a:ext cx="19050" cy="5143500"/>
           </a:xfrm>
           <a:prstGeom prst="rect">
             <a:avLst/>
@@ -15456,7 +15627,7 @@
       </p:pic>
       <p:pic>
         <p:nvPicPr>
-          <p:cNvPr id="91" name="Google Shape;91;p13" descr="image.png"/>
+          <p:cNvPr id="92" name="Google Shape;92;p13" descr="image.png"/>
           <p:cNvPicPr preferRelativeResize="0"/>
           <p:nvPr/>
         </p:nvPicPr>
@@ -15469,33 +15640,6 @@
         </p:blipFill>
         <p:spPr>
           <a:xfrm>
-            <a:off x="6086475" y="685800"/>
-            <a:ext cx="19050" cy="5143500"/>
-          </a:xfrm>
-          <a:prstGeom prst="rect">
-            <a:avLst/>
-          </a:prstGeom>
-          <a:noFill/>
-          <a:ln>
-            <a:noFill/>
-          </a:ln>
-        </p:spPr>
-      </p:pic>
-      <p:pic>
-        <p:nvPicPr>
-          <p:cNvPr id="92" name="Google Shape;92;p13" descr="image.png"/>
-          <p:cNvPicPr preferRelativeResize="0"/>
-          <p:nvPr/>
-        </p:nvPicPr>
-        <p:blipFill rotWithShape="1">
-          <a:blip r:embed="rId11">
-            <a:alphaModFix/>
-          </a:blip>
-          <a:srcRect/>
-          <a:stretch/>
-        </p:blipFill>
-        <p:spPr>
-          <a:xfrm>
             <a:off x="5715000" y="3048000"/>
             <a:ext cx="762000" cy="762000"/>
           </a:xfrm>
@@ -15515,7 +15659,7 @@
           <p:nvPr/>
         </p:nvPicPr>
         <p:blipFill rotWithShape="1">
-          <a:blip r:embed="rId12">
+          <a:blip r:embed="rId11">
             <a:alphaModFix/>
           </a:blip>
           <a:srcRect/>
@@ -15562,7 +15706,7 @@
             <p:nvPr/>
           </p:nvPicPr>
           <p:blipFill rotWithShape="1">
-            <a:blip r:embed="rId13">
+            <a:blip r:embed="rId12">
               <a:alphaModFix amt="70000"/>
             </a:blip>
             <a:srcRect/>
@@ -15621,17 +15765,17 @@
                   <a:solidFill>
                     <a:srgbClr val="F5F5F5"/>
                   </a:solidFill>
-                  <a:latin typeface="Urbanist" panose="020B0604020202020204" charset="0"/>
+                  <a:latin typeface="IDLC" pitchFamily="2" charset="0"/>
                   <a:ea typeface="Urbanist" panose="020B0604020202020204" charset="0"/>
-                  <a:cs typeface="Urbanist" panose="020B0604020202020204" charset="0"/>
+                  <a:cs typeface="IDLC" pitchFamily="2" charset="0"/>
                   <a:sym typeface="Urbanist"/>
                 </a:rPr>
                 <a:t>GIT</a:t>
               </a:r>
               <a:endParaRPr dirty="0">
-                <a:latin typeface="Urbanist" panose="020B0604020202020204" charset="0"/>
+                <a:latin typeface="IDLC" pitchFamily="2" charset="0"/>
                 <a:ea typeface="Urbanist" panose="020B0604020202020204" charset="0"/>
-                <a:cs typeface="Urbanist" panose="020B0604020202020204" charset="0"/>
+                <a:cs typeface="IDLC" pitchFamily="2" charset="0"/>
               </a:endParaRPr>
             </a:p>
           </p:txBody>
@@ -15674,19 +15818,31 @@
             <a:r>
               <a:rPr lang="en-US" sz="3900" b="1" i="0" u="none" strike="noStrike" cap="none" dirty="0">
                 <a:solidFill>
+                  <a:schemeClr val="bg1"/>
+                </a:solidFill>
+                <a:latin typeface="IDLC" pitchFamily="2" charset="0"/>
+                <a:ea typeface="Urbanist" panose="020B0604020202020204" charset="0"/>
+                <a:cs typeface="IDLC" pitchFamily="2" charset="0"/>
+                <a:sym typeface="Urbanist"/>
+              </a:rPr>
+              <a:t>Git vs GitHub </a:t>
+            </a:r>
+            <a:r>
+              <a:rPr lang="en-US" sz="3900" b="1" i="0" u="none" strike="noStrike" cap="none" dirty="0">
+                <a:solidFill>
                   <a:srgbClr val="DEFF9A"/>
                 </a:solidFill>
-                <a:latin typeface="Urbanist" panose="020B0604020202020204" charset="0"/>
+                <a:latin typeface="IDLC" pitchFamily="2" charset="0"/>
                 <a:ea typeface="Urbanist" panose="020B0604020202020204" charset="0"/>
-                <a:cs typeface="Urbanist" panose="020B0604020202020204" charset="0"/>
+                <a:cs typeface="IDLC" pitchFamily="2" charset="0"/>
                 <a:sym typeface="Urbanist"/>
               </a:rPr>
-              <a:t>Git vs GitHub : What's the difference ?</a:t>
+              <a:t>: What's the difference ?</a:t>
             </a:r>
             <a:endParaRPr dirty="0">
-              <a:latin typeface="Urbanist" panose="020B0604020202020204" charset="0"/>
+              <a:latin typeface="IDLC" pitchFamily="2" charset="0"/>
               <a:ea typeface="Urbanist" panose="020B0604020202020204" charset="0"/>
-              <a:cs typeface="Urbanist" panose="020B0604020202020204" charset="0"/>
+              <a:cs typeface="IDLC" pitchFamily="2" charset="0"/>
             </a:endParaRPr>
           </a:p>
         </p:txBody>
@@ -15750,17 +15906,17 @@
                   <a:solidFill>
                     <a:srgbClr val="F5F5F5"/>
                   </a:solidFill>
-                  <a:latin typeface="Urbanist" panose="020B0604020202020204" charset="0"/>
+                  <a:latin typeface="IDLC" pitchFamily="2" charset="0"/>
                   <a:ea typeface="Urbanist" panose="020B0604020202020204" charset="0"/>
-                  <a:cs typeface="Urbanist" panose="020B0604020202020204" charset="0"/>
+                  <a:cs typeface="IDLC" pitchFamily="2" charset="0"/>
                   <a:sym typeface="Urbanist"/>
                 </a:rPr>
                 <a:t>GITHUB</a:t>
               </a:r>
               <a:endParaRPr dirty="0">
-                <a:latin typeface="Urbanist" panose="020B0604020202020204" charset="0"/>
+                <a:latin typeface="IDLC" pitchFamily="2" charset="0"/>
                 <a:ea typeface="Urbanist" panose="020B0604020202020204" charset="0"/>
-                <a:cs typeface="Urbanist" panose="020B0604020202020204" charset="0"/>
+                <a:cs typeface="IDLC" pitchFamily="2" charset="0"/>
               </a:endParaRPr>
             </a:p>
           </p:txBody>
@@ -15780,7 +15936,7 @@
             <p:nvPr/>
           </p:nvPicPr>
           <p:blipFill>
-            <a:blip r:embed="rId14">
+            <a:blip r:embed="rId13">
               <a:alphaModFix amt="70000"/>
             </a:blip>
             <a:stretch>
@@ -15813,7 +15969,7 @@
           <p:nvPr/>
         </p:nvPicPr>
         <p:blipFill>
-          <a:blip r:embed="rId15">
+          <a:blip r:embed="rId14">
             <a:alphaModFix amt="85000"/>
             <a:extLst>
               <a:ext uri="{28A0092B-C50C-407E-A947-70E740481C1C}">
@@ -15851,6 +16007,13 @@
   <p:clrMapOvr>
     <a:masterClrMapping/>
   </p:clrMapOvr>
+  <p:timing>
+    <p:tnLst>
+      <p:par>
+        <p:cTn id="1" dur="indefinite" restart="never" nodeType="tmRoot"/>
+      </p:par>
+    </p:tnLst>
+  </p:timing>
 </p:sld>
 </file>
 
@@ -15992,9 +16155,9 @@
               <a:solidFill>
                 <a:schemeClr val="dk1"/>
               </a:solidFill>
-              <a:latin typeface="Calibri"/>
+              <a:latin typeface="IDLC" pitchFamily="2" charset="0"/>
               <a:ea typeface="Calibri"/>
-              <a:cs typeface="Calibri"/>
+              <a:cs typeface="IDLC" pitchFamily="2" charset="0"/>
               <a:sym typeface="Calibri"/>
             </a:endParaRPr>
           </a:p>
@@ -16035,18 +16198,21 @@
               <a:buNone/>
             </a:pPr>
             <a:r>
-              <a:rPr lang="en-US" sz="1050" b="1" i="0" u="none" strike="noStrike" cap="none">
+              <a:rPr lang="en-US" sz="1050" b="1" i="0" u="none" strike="noStrike" cap="none" dirty="0">
                 <a:solidFill>
                   <a:srgbClr val="000000"/>
                 </a:solidFill>
-                <a:latin typeface="Urbanist"/>
+                <a:latin typeface="IDLC" pitchFamily="2" charset="0"/>
                 <a:ea typeface="Urbanist"/>
-                <a:cs typeface="Urbanist"/>
+                <a:cs typeface="IDLC" pitchFamily="2" charset="0"/>
                 <a:sym typeface="Urbanist"/>
               </a:rPr>
               <a:t>FIRST PUSH</a:t>
             </a:r>
-            <a:endParaRPr/>
+            <a:endParaRPr dirty="0">
+              <a:latin typeface="IDLC" pitchFamily="2" charset="0"/>
+              <a:cs typeface="IDLC" pitchFamily="2" charset="0"/>
+            </a:endParaRPr>
           </a:p>
         </p:txBody>
       </p:sp>
@@ -16089,14 +16255,17 @@
                 <a:solidFill>
                   <a:srgbClr val="CCFF66"/>
                 </a:solidFill>
-                <a:latin typeface="Urbanist"/>
+                <a:latin typeface="IDLC" pitchFamily="2" charset="0"/>
                 <a:ea typeface="Urbanist"/>
-                <a:cs typeface="Urbanist"/>
+                <a:cs typeface="IDLC" pitchFamily="2" charset="0"/>
                 <a:sym typeface="Urbanist"/>
               </a:rPr>
               <a:t>CONNECT TO GITHUB</a:t>
             </a:r>
-            <a:endParaRPr/>
+            <a:endParaRPr>
+              <a:latin typeface="IDLC" pitchFamily="2" charset="0"/>
+              <a:cs typeface="IDLC" pitchFamily="2" charset="0"/>
+            </a:endParaRPr>
           </a:p>
         </p:txBody>
       </p:sp>
@@ -16109,7 +16278,7 @@
         <p:spPr>
           <a:xfrm>
             <a:off x="762000" y="3480494"/>
-            <a:ext cx="5143500" cy="514350"/>
+            <a:ext cx="5143500" cy="623248"/>
           </a:xfrm>
           <a:prstGeom prst="rect">
             <a:avLst/>
@@ -16142,14 +16311,17 @@
                 <a:solidFill>
                   <a:srgbClr val="CCCCCC"/>
                 </a:solidFill>
-                <a:latin typeface="Urbanist"/>
+                <a:latin typeface="IDLC" pitchFamily="2" charset="0"/>
                 <a:ea typeface="Urbanist"/>
-                <a:cs typeface="Urbanist"/>
+                <a:cs typeface="IDLC" pitchFamily="2" charset="0"/>
                 <a:sym typeface="Urbanist"/>
               </a:rPr>
               <a:t>Link your local repository to the cloud and push your "main" branch for the first time.</a:t>
             </a:r>
-            <a:endParaRPr/>
+            <a:endParaRPr>
+              <a:latin typeface="IDLC" pitchFamily="2" charset="0"/>
+              <a:cs typeface="IDLC" pitchFamily="2" charset="0"/>
+            </a:endParaRPr>
           </a:p>
         </p:txBody>
       </p:sp>
@@ -16193,9 +16365,9 @@
               <a:solidFill>
                 <a:schemeClr val="dk1"/>
               </a:solidFill>
-              <a:latin typeface="Calibri"/>
+              <a:latin typeface="IDLC" pitchFamily="2" charset="0"/>
               <a:ea typeface="Calibri"/>
-              <a:cs typeface="Calibri"/>
+              <a:cs typeface="IDLC" pitchFamily="2" charset="0"/>
               <a:sym typeface="Calibri"/>
             </a:endParaRPr>
           </a:p>
@@ -16240,14 +16412,17 @@
                 <a:solidFill>
                   <a:srgbClr val="000000"/>
                 </a:solidFill>
-                <a:latin typeface="Urbanist"/>
+                <a:latin typeface="IDLC" pitchFamily="2" charset="0"/>
                 <a:ea typeface="Urbanist"/>
-                <a:cs typeface="Urbanist"/>
+                <a:cs typeface="IDLC" pitchFamily="2" charset="0"/>
                 <a:sym typeface="Urbanist"/>
               </a:rPr>
               <a:t>FEATURE BRANCH</a:t>
             </a:r>
-            <a:endParaRPr/>
+            <a:endParaRPr>
+              <a:latin typeface="IDLC" pitchFamily="2" charset="0"/>
+              <a:cs typeface="IDLC" pitchFamily="2" charset="0"/>
+            </a:endParaRPr>
           </a:p>
         </p:txBody>
       </p:sp>
@@ -16290,14 +16465,17 @@
                 <a:solidFill>
                   <a:srgbClr val="CCFF66"/>
                 </a:solidFill>
-                <a:latin typeface="Urbanist"/>
+                <a:latin typeface="IDLC" pitchFamily="2" charset="0"/>
                 <a:ea typeface="Urbanist"/>
-                <a:cs typeface="Urbanist"/>
+                <a:cs typeface="IDLC" pitchFamily="2" charset="0"/>
                 <a:sym typeface="Urbanist"/>
               </a:rPr>
               <a:t>COLLABORATE SAFELY</a:t>
             </a:r>
-            <a:endParaRPr/>
+            <a:endParaRPr>
+              <a:latin typeface="IDLC" pitchFamily="2" charset="0"/>
+              <a:cs typeface="IDLC" pitchFamily="2" charset="0"/>
+            </a:endParaRPr>
           </a:p>
         </p:txBody>
       </p:sp>
@@ -16310,7 +16488,7 @@
         <p:spPr>
           <a:xfrm>
             <a:off x="6286500" y="3480494"/>
-            <a:ext cx="5143500" cy="514350"/>
+            <a:ext cx="5143500" cy="623248"/>
           </a:xfrm>
           <a:prstGeom prst="rect">
             <a:avLst/>
@@ -16343,14 +16521,17 @@
                 <a:solidFill>
                   <a:srgbClr val="CCCCCC"/>
                 </a:solidFill>
-                <a:latin typeface="Urbanist"/>
+                <a:latin typeface="IDLC" pitchFamily="2" charset="0"/>
                 <a:ea typeface="Urbanist"/>
-                <a:cs typeface="Urbanist"/>
+                <a:cs typeface="IDLC" pitchFamily="2" charset="0"/>
                 <a:sym typeface="Urbanist"/>
               </a:rPr>
               <a:t>Create a new work stream, save your modifications, and share them on GitHub.</a:t>
             </a:r>
-            <a:endParaRPr/>
+            <a:endParaRPr>
+              <a:latin typeface="IDLC" pitchFamily="2" charset="0"/>
+              <a:cs typeface="IDLC" pitchFamily="2" charset="0"/>
+            </a:endParaRPr>
           </a:p>
         </p:txBody>
       </p:sp>
@@ -16363,7 +16544,7 @@
         <p:spPr>
           <a:xfrm>
             <a:off x="962025" y="4623494"/>
-            <a:ext cx="4743450" cy="771525"/>
+            <a:ext cx="4743450" cy="625941"/>
           </a:xfrm>
           <a:prstGeom prst="rect">
             <a:avLst/>
@@ -16392,100 +16573,163 @@
               <a:buNone/>
             </a:pPr>
             <a:r>
-              <a:rPr lang="en-US" sz="1125" b="1" i="0" u="none" strike="noStrike" cap="none">
+              <a:rPr lang="en-US" sz="1200" b="1" i="0" u="none" strike="noStrike" cap="none" dirty="0">
                 <a:solidFill>
                   <a:srgbClr val="CCFF66"/>
                 </a:solidFill>
-                <a:latin typeface="JetBrains Mono"/>
+                <a:latin typeface="IDLC" pitchFamily="2" charset="0"/>
                 <a:ea typeface="JetBrains Mono"/>
-                <a:cs typeface="JetBrains Mono"/>
+                <a:cs typeface="IDLC" pitchFamily="2" charset="0"/>
                 <a:sym typeface="JetBrains Mono"/>
               </a:rPr>
               <a:t>$</a:t>
             </a:r>
             <a:r>
-              <a:rPr lang="en-US" sz="1125" b="0" i="0" u="none" strike="noStrike" cap="none">
+              <a:rPr lang="en-US" sz="1200" b="0" i="0" u="none" strike="noStrike" cap="none" dirty="0" err="1">
                 <a:solidFill>
                   <a:srgbClr val="FFFFFF"/>
                 </a:solidFill>
-                <a:latin typeface="JetBrains Mono"/>
+                <a:latin typeface="IDLC" pitchFamily="2" charset="0"/>
                 <a:ea typeface="JetBrains Mono"/>
-                <a:cs typeface="JetBrains Mono"/>
+                <a:cs typeface="IDLC" pitchFamily="2" charset="0"/>
                 <a:sym typeface="JetBrains Mono"/>
               </a:rPr>
-              <a:t>git remote add origin https://...</a:t>
+              <a:t>git</a:t>
+            </a:r>
+            <a:r>
+              <a:rPr lang="en-US" sz="1200" b="0" i="0" u="none" strike="noStrike" cap="none" dirty="0">
+                <a:solidFill>
+                  <a:srgbClr val="FFFFFF"/>
+                </a:solidFill>
+                <a:latin typeface="IDLC" pitchFamily="2" charset="0"/>
+                <a:ea typeface="JetBrains Mono"/>
+                <a:cs typeface="IDLC" pitchFamily="2" charset="0"/>
+                <a:sym typeface="JetBrains Mono"/>
+              </a:rPr>
+              <a:t> remote add origin https://...</a:t>
+            </a:r>
+            <a:r>
+              <a:rPr lang="en-US" sz="2000" b="0" i="0" u="none" strike="noStrike" cap="none" dirty="0">
+                <a:solidFill>
+                  <a:schemeClr val="dk1"/>
+                </a:solidFill>
+                <a:latin typeface="IDLC" pitchFamily="2" charset="0"/>
+                <a:ea typeface="Calibri"/>
+                <a:cs typeface="IDLC" pitchFamily="2" charset="0"/>
+                <a:sym typeface="Calibri"/>
+              </a:rPr>
+              <a:t/>
             </a:r>
             <a:br>
-              <a:rPr lang="en-US" sz="1800" b="0" i="0" u="none" strike="noStrike" cap="none">
+              <a:rPr lang="en-US" sz="2000" b="0" i="0" u="none" strike="noStrike" cap="none" dirty="0">
                 <a:solidFill>
                   <a:schemeClr val="dk1"/>
                 </a:solidFill>
-                <a:latin typeface="Calibri"/>
+                <a:latin typeface="IDLC" pitchFamily="2" charset="0"/>
                 <a:ea typeface="Calibri"/>
-                <a:cs typeface="Calibri"/>
+                <a:cs typeface="IDLC" pitchFamily="2" charset="0"/>
                 <a:sym typeface="Calibri"/>
               </a:rPr>
             </a:br>
             <a:r>
-              <a:rPr lang="en-US" sz="1125" b="1" i="0" u="none" strike="noStrike" cap="none">
+              <a:rPr lang="en-US" sz="1200" b="1" i="0" u="none" strike="noStrike" cap="none" dirty="0">
                 <a:solidFill>
                   <a:srgbClr val="CCFF66"/>
                 </a:solidFill>
-                <a:latin typeface="JetBrains Mono"/>
+                <a:latin typeface="IDLC" pitchFamily="2" charset="0"/>
                 <a:ea typeface="JetBrains Mono"/>
-                <a:cs typeface="JetBrains Mono"/>
+                <a:cs typeface="IDLC" pitchFamily="2" charset="0"/>
                 <a:sym typeface="JetBrains Mono"/>
               </a:rPr>
               <a:t>$</a:t>
             </a:r>
             <a:r>
-              <a:rPr lang="en-US" sz="1125" b="0" i="0" u="none" strike="noStrike" cap="none">
+              <a:rPr lang="en-US" sz="1200" b="0" i="0" u="none" strike="noStrike" cap="none" dirty="0" err="1">
                 <a:solidFill>
                   <a:srgbClr val="FFFFFF"/>
                 </a:solidFill>
-                <a:latin typeface="JetBrains Mono"/>
+                <a:latin typeface="IDLC" pitchFamily="2" charset="0"/>
                 <a:ea typeface="JetBrains Mono"/>
-                <a:cs typeface="JetBrains Mono"/>
+                <a:cs typeface="IDLC" pitchFamily="2" charset="0"/>
                 <a:sym typeface="JetBrains Mono"/>
               </a:rPr>
-              <a:t>git branch -M main</a:t>
+              <a:t>git</a:t>
+            </a:r>
+            <a:r>
+              <a:rPr lang="en-US" sz="1200" b="0" i="0" u="none" strike="noStrike" cap="none" dirty="0">
+                <a:solidFill>
+                  <a:srgbClr val="FFFFFF"/>
+                </a:solidFill>
+                <a:latin typeface="IDLC" pitchFamily="2" charset="0"/>
+                <a:ea typeface="JetBrains Mono"/>
+                <a:cs typeface="IDLC" pitchFamily="2" charset="0"/>
+                <a:sym typeface="JetBrains Mono"/>
+              </a:rPr>
+              <a:t> branch -M main</a:t>
+            </a:r>
+            <a:r>
+              <a:rPr lang="en-US" sz="2000" b="0" i="0" u="none" strike="noStrike" cap="none" dirty="0">
+                <a:solidFill>
+                  <a:schemeClr val="dk1"/>
+                </a:solidFill>
+                <a:latin typeface="IDLC" pitchFamily="2" charset="0"/>
+                <a:ea typeface="Calibri"/>
+                <a:cs typeface="IDLC" pitchFamily="2" charset="0"/>
+                <a:sym typeface="Calibri"/>
+              </a:rPr>
+              <a:t/>
             </a:r>
             <a:br>
-              <a:rPr lang="en-US" sz="1800" b="0" i="0" u="none" strike="noStrike" cap="none">
+              <a:rPr lang="en-US" sz="2000" b="0" i="0" u="none" strike="noStrike" cap="none" dirty="0">
                 <a:solidFill>
                   <a:schemeClr val="dk1"/>
                 </a:solidFill>
-                <a:latin typeface="Calibri"/>
+                <a:latin typeface="IDLC" pitchFamily="2" charset="0"/>
                 <a:ea typeface="Calibri"/>
-                <a:cs typeface="Calibri"/>
+                <a:cs typeface="IDLC" pitchFamily="2" charset="0"/>
                 <a:sym typeface="Calibri"/>
               </a:rPr>
             </a:br>
             <a:r>
-              <a:rPr lang="en-US" sz="1125" b="1" i="0" u="none" strike="noStrike" cap="none">
+              <a:rPr lang="en-US" sz="1200" b="1" i="0" u="none" strike="noStrike" cap="none" dirty="0">
                 <a:solidFill>
                   <a:srgbClr val="CCFF66"/>
                 </a:solidFill>
-                <a:latin typeface="JetBrains Mono"/>
+                <a:latin typeface="IDLC" pitchFamily="2" charset="0"/>
                 <a:ea typeface="JetBrains Mono"/>
-                <a:cs typeface="JetBrains Mono"/>
+                <a:cs typeface="IDLC" pitchFamily="2" charset="0"/>
                 <a:sym typeface="JetBrains Mono"/>
               </a:rPr>
               <a:t>$</a:t>
             </a:r>
             <a:r>
-              <a:rPr lang="en-US" sz="1125" b="0" i="0" u="none" strike="noStrike" cap="none">
+              <a:rPr lang="en-US" sz="1200" b="0" i="0" u="none" strike="noStrike" cap="none" dirty="0" err="1">
                 <a:solidFill>
                   <a:srgbClr val="FFFFFF"/>
                 </a:solidFill>
-                <a:latin typeface="JetBrains Mono"/>
+                <a:latin typeface="IDLC" pitchFamily="2" charset="0"/>
                 <a:ea typeface="JetBrains Mono"/>
-                <a:cs typeface="JetBrains Mono"/>
+                <a:cs typeface="IDLC" pitchFamily="2" charset="0"/>
                 <a:sym typeface="JetBrains Mono"/>
               </a:rPr>
-              <a:t>git push -u origin main</a:t>
-            </a:r>
-            <a:endParaRPr/>
+              <a:t>git</a:t>
+            </a:r>
+            <a:r>
+              <a:rPr lang="en-US" sz="1200" b="0" i="0" u="none" strike="noStrike" cap="none" dirty="0">
+                <a:solidFill>
+                  <a:srgbClr val="FFFFFF"/>
+                </a:solidFill>
+                <a:latin typeface="IDLC" pitchFamily="2" charset="0"/>
+                <a:ea typeface="JetBrains Mono"/>
+                <a:cs typeface="IDLC" pitchFamily="2" charset="0"/>
+                <a:sym typeface="JetBrains Mono"/>
+              </a:rPr>
+              <a:t> push -u origin main</a:t>
+            </a:r>
+            <a:endParaRPr sz="1600" dirty="0">
+              <a:latin typeface="IDLC" pitchFamily="2" charset="0"/>
+              <a:cs typeface="IDLC" pitchFamily="2" charset="0"/>
+            </a:endParaRPr>
           </a:p>
         </p:txBody>
       </p:sp>
@@ -16498,7 +16742,7 @@
         <p:spPr>
           <a:xfrm>
             <a:off x="6486525" y="4623494"/>
-            <a:ext cx="4743450" cy="1028700"/>
+            <a:ext cx="4743450" cy="834587"/>
           </a:xfrm>
           <a:prstGeom prst="rect">
             <a:avLst/>
@@ -16527,123 +16771,222 @@
               <a:buNone/>
             </a:pPr>
             <a:r>
-              <a:rPr lang="en-US" sz="1125" b="1" i="0" u="none" strike="noStrike" cap="none">
+              <a:rPr lang="en-US" sz="1200" b="1" i="0" u="none" strike="noStrike" cap="none" dirty="0">
                 <a:solidFill>
                   <a:srgbClr val="CCFF66"/>
                 </a:solidFill>
-                <a:latin typeface="JetBrains Mono"/>
+                <a:latin typeface="IDLC" pitchFamily="2" charset="0"/>
                 <a:ea typeface="JetBrains Mono"/>
-                <a:cs typeface="JetBrains Mono"/>
+                <a:cs typeface="IDLC" pitchFamily="2" charset="0"/>
                 <a:sym typeface="JetBrains Mono"/>
               </a:rPr>
               <a:t>$</a:t>
             </a:r>
             <a:r>
-              <a:rPr lang="en-US" sz="1125" b="0" i="0" u="none" strike="noStrike" cap="none">
+              <a:rPr lang="en-US" sz="1200" b="0" i="0" u="none" strike="noStrike" cap="none" dirty="0" err="1">
                 <a:solidFill>
                   <a:srgbClr val="FFFFFF"/>
                 </a:solidFill>
-                <a:latin typeface="JetBrains Mono"/>
+                <a:latin typeface="IDLC" pitchFamily="2" charset="0"/>
                 <a:ea typeface="JetBrains Mono"/>
-                <a:cs typeface="JetBrains Mono"/>
+                <a:cs typeface="IDLC" pitchFamily="2" charset="0"/>
                 <a:sym typeface="JetBrains Mono"/>
               </a:rPr>
-              <a:t>git checkout -b feature-a</a:t>
+              <a:t>git</a:t>
+            </a:r>
+            <a:r>
+              <a:rPr lang="en-US" sz="1200" b="0" i="0" u="none" strike="noStrike" cap="none" dirty="0">
+                <a:solidFill>
+                  <a:srgbClr val="FFFFFF"/>
+                </a:solidFill>
+                <a:latin typeface="IDLC" pitchFamily="2" charset="0"/>
+                <a:ea typeface="JetBrains Mono"/>
+                <a:cs typeface="IDLC" pitchFamily="2" charset="0"/>
+                <a:sym typeface="JetBrains Mono"/>
+              </a:rPr>
+              <a:t> checkout -b feature-a</a:t>
+            </a:r>
+            <a:r>
+              <a:rPr lang="en-US" sz="2000" b="0" i="0" u="none" strike="noStrike" cap="none" dirty="0">
+                <a:solidFill>
+                  <a:schemeClr val="dk1"/>
+                </a:solidFill>
+                <a:latin typeface="IDLC" pitchFamily="2" charset="0"/>
+                <a:ea typeface="Calibri"/>
+                <a:cs typeface="IDLC" pitchFamily="2" charset="0"/>
+                <a:sym typeface="Calibri"/>
+              </a:rPr>
+              <a:t/>
             </a:r>
             <a:br>
-              <a:rPr lang="en-US" sz="1800" b="0" i="0" u="none" strike="noStrike" cap="none">
+              <a:rPr lang="en-US" sz="2000" b="0" i="0" u="none" strike="noStrike" cap="none" dirty="0">
                 <a:solidFill>
                   <a:schemeClr val="dk1"/>
                 </a:solidFill>
-                <a:latin typeface="Calibri"/>
+                <a:latin typeface="IDLC" pitchFamily="2" charset="0"/>
                 <a:ea typeface="Calibri"/>
-                <a:cs typeface="Calibri"/>
+                <a:cs typeface="IDLC" pitchFamily="2" charset="0"/>
                 <a:sym typeface="Calibri"/>
               </a:rPr>
             </a:br>
             <a:r>
-              <a:rPr lang="en-US" sz="1125" b="0" i="1" u="none" strike="noStrike" cap="none">
+              <a:rPr lang="en-US" sz="1200" b="0" i="1" u="none" strike="noStrike" cap="none" dirty="0">
                 <a:solidFill>
                   <a:srgbClr val="555555"/>
                 </a:solidFill>
-                <a:latin typeface="JetBrains Mono"/>
+                <a:latin typeface="IDLC" pitchFamily="2" charset="0"/>
                 <a:ea typeface="JetBrains Mono"/>
-                <a:cs typeface="JetBrains Mono"/>
+                <a:cs typeface="IDLC" pitchFamily="2" charset="0"/>
                 <a:sym typeface="JetBrains Mono"/>
               </a:rPr>
-              <a:t># ... edits made in RStudio ...</a:t>
+              <a:t># ... edits made in </a:t>
+            </a:r>
+            <a:r>
+              <a:rPr lang="en-US" sz="1200" b="0" i="1" u="none" strike="noStrike" cap="none" dirty="0" err="1">
+                <a:solidFill>
+                  <a:srgbClr val="555555"/>
+                </a:solidFill>
+                <a:latin typeface="IDLC" pitchFamily="2" charset="0"/>
+                <a:ea typeface="JetBrains Mono"/>
+                <a:cs typeface="IDLC" pitchFamily="2" charset="0"/>
+                <a:sym typeface="JetBrains Mono"/>
+              </a:rPr>
+              <a:t>RStudio</a:t>
+            </a:r>
+            <a:r>
+              <a:rPr lang="en-US" sz="1200" b="0" i="1" u="none" strike="noStrike" cap="none" dirty="0">
+                <a:solidFill>
+                  <a:srgbClr val="555555"/>
+                </a:solidFill>
+                <a:latin typeface="IDLC" pitchFamily="2" charset="0"/>
+                <a:ea typeface="JetBrains Mono"/>
+                <a:cs typeface="IDLC" pitchFamily="2" charset="0"/>
+                <a:sym typeface="JetBrains Mono"/>
+              </a:rPr>
+              <a:t> ...</a:t>
+            </a:r>
+            <a:r>
+              <a:rPr lang="en-US" sz="2000" b="0" i="0" u="none" strike="noStrike" cap="none" dirty="0">
+                <a:solidFill>
+                  <a:schemeClr val="dk1"/>
+                </a:solidFill>
+                <a:latin typeface="IDLC" pitchFamily="2" charset="0"/>
+                <a:ea typeface="Calibri"/>
+                <a:cs typeface="IDLC" pitchFamily="2" charset="0"/>
+                <a:sym typeface="Calibri"/>
+              </a:rPr>
+              <a:t/>
             </a:r>
             <a:br>
-              <a:rPr lang="en-US" sz="1800" b="0" i="0" u="none" strike="noStrike" cap="none">
+              <a:rPr lang="en-US" sz="2000" b="0" i="0" u="none" strike="noStrike" cap="none" dirty="0">
                 <a:solidFill>
                   <a:schemeClr val="dk1"/>
                 </a:solidFill>
-                <a:latin typeface="Calibri"/>
+                <a:latin typeface="IDLC" pitchFamily="2" charset="0"/>
                 <a:ea typeface="Calibri"/>
-                <a:cs typeface="Calibri"/>
+                <a:cs typeface="IDLC" pitchFamily="2" charset="0"/>
                 <a:sym typeface="Calibri"/>
               </a:rPr>
             </a:br>
             <a:r>
-              <a:rPr lang="en-US" sz="1125" b="1" i="0" u="none" strike="noStrike" cap="none">
+              <a:rPr lang="en-US" sz="1200" b="1" i="0" u="none" strike="noStrike" cap="none" dirty="0">
                 <a:solidFill>
                   <a:srgbClr val="CCFF66"/>
                 </a:solidFill>
-                <a:latin typeface="JetBrains Mono"/>
+                <a:latin typeface="IDLC" pitchFamily="2" charset="0"/>
                 <a:ea typeface="JetBrains Mono"/>
-                <a:cs typeface="JetBrains Mono"/>
+                <a:cs typeface="IDLC" pitchFamily="2" charset="0"/>
                 <a:sym typeface="JetBrains Mono"/>
               </a:rPr>
               <a:t>$</a:t>
             </a:r>
             <a:r>
-              <a:rPr lang="en-US" sz="1125" b="0" i="0" u="none" strike="noStrike" cap="none">
+              <a:rPr lang="en-US" sz="1200" b="0" i="0" u="none" strike="noStrike" cap="none" dirty="0" err="1">
                 <a:solidFill>
                   <a:srgbClr val="FFFFFF"/>
                 </a:solidFill>
-                <a:latin typeface="JetBrains Mono"/>
+                <a:latin typeface="IDLC" pitchFamily="2" charset="0"/>
                 <a:ea typeface="JetBrains Mono"/>
-                <a:cs typeface="JetBrains Mono"/>
+                <a:cs typeface="IDLC" pitchFamily="2" charset="0"/>
                 <a:sym typeface="JetBrains Mono"/>
               </a:rPr>
-              <a:t>git commit -am "added feature"</a:t>
+              <a:t>git</a:t>
+            </a:r>
+            <a:r>
+              <a:rPr lang="en-US" sz="1200" b="0" i="0" u="none" strike="noStrike" cap="none" dirty="0">
+                <a:solidFill>
+                  <a:srgbClr val="FFFFFF"/>
+                </a:solidFill>
+                <a:latin typeface="IDLC" pitchFamily="2" charset="0"/>
+                <a:ea typeface="JetBrains Mono"/>
+                <a:cs typeface="IDLC" pitchFamily="2" charset="0"/>
+                <a:sym typeface="JetBrains Mono"/>
+              </a:rPr>
+              <a:t> commit -am "added feature"</a:t>
+            </a:r>
+            <a:r>
+              <a:rPr lang="en-US" sz="2000" b="0" i="0" u="none" strike="noStrike" cap="none" dirty="0">
+                <a:solidFill>
+                  <a:schemeClr val="dk1"/>
+                </a:solidFill>
+                <a:latin typeface="IDLC" pitchFamily="2" charset="0"/>
+                <a:ea typeface="Calibri"/>
+                <a:cs typeface="IDLC" pitchFamily="2" charset="0"/>
+                <a:sym typeface="Calibri"/>
+              </a:rPr>
+              <a:t/>
             </a:r>
             <a:br>
-              <a:rPr lang="en-US" sz="1800" b="0" i="0" u="none" strike="noStrike" cap="none">
+              <a:rPr lang="en-US" sz="2000" b="0" i="0" u="none" strike="noStrike" cap="none" dirty="0">
                 <a:solidFill>
                   <a:schemeClr val="dk1"/>
                 </a:solidFill>
-                <a:latin typeface="Calibri"/>
+                <a:latin typeface="IDLC" pitchFamily="2" charset="0"/>
                 <a:ea typeface="Calibri"/>
-                <a:cs typeface="Calibri"/>
+                <a:cs typeface="IDLC" pitchFamily="2" charset="0"/>
                 <a:sym typeface="Calibri"/>
               </a:rPr>
             </a:br>
             <a:r>
-              <a:rPr lang="en-US" sz="1125" b="1" i="0" u="none" strike="noStrike" cap="none">
+              <a:rPr lang="en-US" sz="1200" b="1" i="0" u="none" strike="noStrike" cap="none" dirty="0">
                 <a:solidFill>
                   <a:srgbClr val="CCFF66"/>
                 </a:solidFill>
-                <a:latin typeface="JetBrains Mono"/>
+                <a:latin typeface="IDLC" pitchFamily="2" charset="0"/>
                 <a:ea typeface="JetBrains Mono"/>
-                <a:cs typeface="JetBrains Mono"/>
+                <a:cs typeface="IDLC" pitchFamily="2" charset="0"/>
                 <a:sym typeface="JetBrains Mono"/>
               </a:rPr>
               <a:t>$</a:t>
             </a:r>
             <a:r>
-              <a:rPr lang="en-US" sz="1125" b="0" i="0" u="none" strike="noStrike" cap="none">
+              <a:rPr lang="en-US" sz="1200" b="0" i="0" u="none" strike="noStrike" cap="none" dirty="0" err="1">
                 <a:solidFill>
                   <a:srgbClr val="FFFFFF"/>
                 </a:solidFill>
-                <a:latin typeface="JetBrains Mono"/>
+                <a:latin typeface="IDLC" pitchFamily="2" charset="0"/>
                 <a:ea typeface="JetBrains Mono"/>
-                <a:cs typeface="JetBrains Mono"/>
+                <a:cs typeface="IDLC" pitchFamily="2" charset="0"/>
                 <a:sym typeface="JetBrains Mono"/>
               </a:rPr>
-              <a:t>git push origin feature-a</a:t>
-            </a:r>
-            <a:endParaRPr/>
+              <a:t>git</a:t>
+            </a:r>
+            <a:r>
+              <a:rPr lang="en-US" sz="1200" b="0" i="0" u="none" strike="noStrike" cap="none" dirty="0">
+                <a:solidFill>
+                  <a:srgbClr val="FFFFFF"/>
+                </a:solidFill>
+                <a:latin typeface="IDLC" pitchFamily="2" charset="0"/>
+                <a:ea typeface="JetBrains Mono"/>
+                <a:cs typeface="IDLC" pitchFamily="2" charset="0"/>
+                <a:sym typeface="JetBrains Mono"/>
+              </a:rPr>
+              <a:t> push origin feature-a</a:t>
+            </a:r>
+            <a:endParaRPr sz="1600" dirty="0">
+              <a:latin typeface="IDLC" pitchFamily="2" charset="0"/>
+              <a:cs typeface="IDLC" pitchFamily="2" charset="0"/>
+            </a:endParaRPr>
           </a:p>
         </p:txBody>
       </p:sp>
@@ -16689,9 +17032,9 @@
               <a:solidFill>
                 <a:schemeClr val="dk1"/>
               </a:solidFill>
-              <a:latin typeface="Calibri"/>
+              <a:latin typeface="IDLC" pitchFamily="2" charset="0"/>
               <a:ea typeface="Calibri"/>
-              <a:cs typeface="Calibri"/>
+              <a:cs typeface="IDLC" pitchFamily="2" charset="0"/>
               <a:sym typeface="Calibri"/>
             </a:endParaRPr>
           </a:p>
@@ -16739,9 +17082,9 @@
               <a:solidFill>
                 <a:schemeClr val="dk1"/>
               </a:solidFill>
-              <a:latin typeface="Calibri"/>
+              <a:latin typeface="IDLC" pitchFamily="2" charset="0"/>
               <a:ea typeface="Calibri"/>
-              <a:cs typeface="Calibri"/>
+              <a:cs typeface="IDLC" pitchFamily="2" charset="0"/>
               <a:sym typeface="Calibri"/>
             </a:endParaRPr>
           </a:p>
@@ -16789,9 +17132,9 @@
               <a:solidFill>
                 <a:schemeClr val="dk1"/>
               </a:solidFill>
-              <a:latin typeface="Calibri"/>
+              <a:latin typeface="IDLC" pitchFamily="2" charset="0"/>
               <a:ea typeface="Calibri"/>
-              <a:cs typeface="Calibri"/>
+              <a:cs typeface="IDLC" pitchFamily="2" charset="0"/>
               <a:sym typeface="Calibri"/>
             </a:endParaRPr>
           </a:p>
@@ -16839,9 +17182,9 @@
               <a:solidFill>
                 <a:schemeClr val="dk1"/>
               </a:solidFill>
-              <a:latin typeface="Calibri"/>
+              <a:latin typeface="IDLC" pitchFamily="2" charset="0"/>
               <a:ea typeface="Calibri"/>
-              <a:cs typeface="Calibri"/>
+              <a:cs typeface="IDLC" pitchFamily="2" charset="0"/>
               <a:sym typeface="Calibri"/>
             </a:endParaRPr>
           </a:p>
@@ -16889,9 +17232,9 @@
               <a:solidFill>
                 <a:schemeClr val="dk1"/>
               </a:solidFill>
-              <a:latin typeface="Calibri"/>
+              <a:latin typeface="IDLC" pitchFamily="2" charset="0"/>
               <a:ea typeface="Calibri"/>
-              <a:cs typeface="Calibri"/>
+              <a:cs typeface="IDLC" pitchFamily="2" charset="0"/>
               <a:sym typeface="Calibri"/>
             </a:endParaRPr>
           </a:p>
@@ -16939,9 +17282,9 @@
               <a:solidFill>
                 <a:schemeClr val="dk1"/>
               </a:solidFill>
-              <a:latin typeface="Calibri"/>
+              <a:latin typeface="IDLC" pitchFamily="2" charset="0"/>
               <a:ea typeface="Calibri"/>
-              <a:cs typeface="Calibri"/>
+              <a:cs typeface="IDLC" pitchFamily="2" charset="0"/>
               <a:sym typeface="Calibri"/>
             </a:endParaRPr>
           </a:p>
@@ -16989,9 +17332,9 @@
                 <a:solidFill>
                   <a:schemeClr val="bg1"/>
                 </a:solidFill>
-                <a:latin typeface="Urbanist"/>
+                <a:latin typeface="IDLC" pitchFamily="2" charset="0"/>
                 <a:ea typeface="Urbanist"/>
-                <a:cs typeface="Urbanist"/>
+                <a:cs typeface="IDLC" pitchFamily="2" charset="0"/>
                 <a:sym typeface="Urbanist"/>
               </a:rPr>
               <a:t>TERMINAL</a:t>
@@ -17001,14 +17344,17 @@
                 <a:solidFill>
                   <a:srgbClr val="CCFF66"/>
                 </a:solidFill>
-                <a:latin typeface="Urbanist"/>
+                <a:latin typeface="IDLC" pitchFamily="2" charset="0"/>
                 <a:ea typeface="Urbanist"/>
-                <a:cs typeface="Urbanist"/>
+                <a:cs typeface="IDLC" pitchFamily="2" charset="0"/>
                 <a:sym typeface="Urbanist"/>
               </a:rPr>
               <a:t> EXAMPLES</a:t>
             </a:r>
-            <a:endParaRPr dirty="0"/>
+            <a:endParaRPr dirty="0">
+              <a:latin typeface="IDLC" pitchFamily="2" charset="0"/>
+              <a:cs typeface="IDLC" pitchFamily="2" charset="0"/>
+            </a:endParaRPr>
           </a:p>
         </p:txBody>
       </p:sp>
@@ -17052,9 +17398,9 @@
               <a:solidFill>
                 <a:schemeClr val="dk1"/>
               </a:solidFill>
-              <a:latin typeface="Calibri"/>
+              <a:latin typeface="IDLC" pitchFamily="2" charset="0"/>
               <a:ea typeface="Calibri"/>
-              <a:cs typeface="Calibri"/>
+              <a:cs typeface="IDLC" pitchFamily="2" charset="0"/>
               <a:sym typeface="Calibri"/>
             </a:endParaRPr>
           </a:p>
@@ -17065,6 +17411,13 @@
   <p:clrMapOvr>
     <a:masterClrMapping/>
   </p:clrMapOvr>
+  <p:timing>
+    <p:tnLst>
+      <p:par>
+        <p:cTn id="1" dur="indefinite" restart="never" nodeType="tmRoot"/>
+      </p:par>
+    </p:tnLst>
+  </p:timing>
 </p:sld>
 </file>
 
@@ -17154,9 +17507,9 @@
                 <a:solidFill>
                   <a:schemeClr val="bg1"/>
                 </a:solidFill>
-                <a:latin typeface="Urbanist"/>
+                <a:latin typeface="IDLC" pitchFamily="2" charset="0"/>
                 <a:ea typeface="Urbanist"/>
-                <a:cs typeface="Urbanist"/>
+                <a:cs typeface="IDLC" pitchFamily="2" charset="0"/>
                 <a:sym typeface="Urbanist"/>
               </a:rPr>
               <a:t>PULL</a:t>
@@ -17166,14 +17519,17 @@
                 <a:solidFill>
                   <a:srgbClr val="CCFF66"/>
                 </a:solidFill>
-                <a:latin typeface="Urbanist"/>
+                <a:latin typeface="IDLC" pitchFamily="2" charset="0"/>
                 <a:ea typeface="Urbanist"/>
-                <a:cs typeface="Urbanist"/>
+                <a:cs typeface="IDLC" pitchFamily="2" charset="0"/>
                 <a:sym typeface="Urbanist"/>
               </a:rPr>
               <a:t> REQUESTS</a:t>
             </a:r>
-            <a:endParaRPr dirty="0"/>
+            <a:endParaRPr dirty="0">
+              <a:latin typeface="IDLC" pitchFamily="2" charset="0"/>
+              <a:cs typeface="IDLC" pitchFamily="2" charset="0"/>
+            </a:endParaRPr>
           </a:p>
         </p:txBody>
       </p:sp>
@@ -17217,9 +17573,9 @@
               <a:solidFill>
                 <a:schemeClr val="dk1"/>
               </a:solidFill>
-              <a:latin typeface="Calibri"/>
+              <a:latin typeface="IDLC" pitchFamily="2" charset="0"/>
               <a:ea typeface="Calibri"/>
-              <a:cs typeface="Calibri"/>
+              <a:cs typeface="IDLC" pitchFamily="2" charset="0"/>
               <a:sym typeface="Calibri"/>
             </a:endParaRPr>
           </a:p>
@@ -17292,9 +17648,9 @@
               <a:solidFill>
                 <a:schemeClr val="dk1"/>
               </a:solidFill>
-              <a:latin typeface="Calibri"/>
+              <a:latin typeface="IDLC" pitchFamily="2" charset="0"/>
               <a:ea typeface="Calibri"/>
-              <a:cs typeface="Calibri"/>
+              <a:cs typeface="IDLC" pitchFamily="2" charset="0"/>
               <a:sym typeface="Calibri"/>
             </a:endParaRPr>
           </a:p>
@@ -17339,14 +17695,17 @@
                 <a:solidFill>
                   <a:srgbClr val="000000"/>
                 </a:solidFill>
-                <a:latin typeface="Urbanist"/>
+                <a:latin typeface="IDLC" pitchFamily="2" charset="0"/>
                 <a:ea typeface="Urbanist"/>
-                <a:cs typeface="Urbanist"/>
+                <a:cs typeface="IDLC" pitchFamily="2" charset="0"/>
                 <a:sym typeface="Urbanist"/>
               </a:rPr>
               <a:t>GITHUB.COM</a:t>
             </a:r>
-            <a:endParaRPr/>
+            <a:endParaRPr>
+              <a:latin typeface="IDLC" pitchFamily="2" charset="0"/>
+              <a:cs typeface="IDLC" pitchFamily="2" charset="0"/>
+            </a:endParaRPr>
           </a:p>
         </p:txBody>
       </p:sp>
@@ -17389,14 +17748,17 @@
                 <a:solidFill>
                   <a:srgbClr val="CCFF66"/>
                 </a:solidFill>
-                <a:latin typeface="Urbanist"/>
+                <a:latin typeface="IDLC" pitchFamily="2" charset="0"/>
                 <a:ea typeface="Urbanist"/>
-                <a:cs typeface="Urbanist"/>
+                <a:cs typeface="IDLC" pitchFamily="2" charset="0"/>
                 <a:sym typeface="Urbanist"/>
               </a:rPr>
               <a:t>FINALIZE THE REVIEW</a:t>
             </a:r>
-            <a:endParaRPr/>
+            <a:endParaRPr>
+              <a:latin typeface="IDLC" pitchFamily="2" charset="0"/>
+              <a:cs typeface="IDLC" pitchFamily="2" charset="0"/>
+            </a:endParaRPr>
           </a:p>
         </p:txBody>
       </p:sp>
@@ -17409,7 +17771,7 @@
         <p:spPr>
           <a:xfrm>
             <a:off x="762000" y="3189089"/>
-            <a:ext cx="5095875" cy="514350"/>
+            <a:ext cx="5095875" cy="623248"/>
           </a:xfrm>
           <a:prstGeom prst="rect">
             <a:avLst/>
@@ -17442,14 +17804,17 @@
                 <a:solidFill>
                   <a:srgbClr val="CCCCCC"/>
                 </a:solidFill>
-                <a:latin typeface="Urbanist"/>
+                <a:latin typeface="IDLC" pitchFamily="2" charset="0"/>
                 <a:ea typeface="Urbanist"/>
-                <a:cs typeface="Urbanist"/>
+                <a:cs typeface="IDLC" pitchFamily="2" charset="0"/>
                 <a:sym typeface="Urbanist"/>
               </a:rPr>
               <a:t>Once your branch is pushed, head to GitHub to propose merging your code into the project.</a:t>
             </a:r>
-            <a:endParaRPr/>
+            <a:endParaRPr>
+              <a:latin typeface="IDLC" pitchFamily="2" charset="0"/>
+              <a:cs typeface="IDLC" pitchFamily="2" charset="0"/>
+            </a:endParaRPr>
           </a:p>
         </p:txBody>
       </p:sp>
@@ -17492,9 +17857,9 @@
                 <a:solidFill>
                   <a:srgbClr val="CCCCCC"/>
                 </a:solidFill>
-                <a:latin typeface="Urbanist"/>
+                <a:latin typeface="IDLC" pitchFamily="2" charset="0"/>
                 <a:ea typeface="Urbanist"/>
-                <a:cs typeface="Urbanist"/>
+                <a:cs typeface="IDLC" pitchFamily="2" charset="0"/>
                 <a:sym typeface="Urbanist"/>
               </a:rPr>
               <a:t>Compare &amp; PR:</a:t>
@@ -17504,14 +17869,17 @@
                 <a:solidFill>
                   <a:srgbClr val="CCCCCC"/>
                 </a:solidFill>
-                <a:latin typeface="Urbanist"/>
+                <a:latin typeface="IDLC" pitchFamily="2" charset="0"/>
                 <a:ea typeface="Urbanist"/>
-                <a:cs typeface="Urbanist"/>
+                <a:cs typeface="IDLC" pitchFamily="2" charset="0"/>
                 <a:sym typeface="Urbanist"/>
               </a:rPr>
               <a:t> GitHub will show a banner to start the merge request.</a:t>
             </a:r>
-            <a:endParaRPr/>
+            <a:endParaRPr>
+              <a:latin typeface="IDLC" pitchFamily="2" charset="0"/>
+              <a:cs typeface="IDLC" pitchFamily="2" charset="0"/>
+            </a:endParaRPr>
           </a:p>
         </p:txBody>
       </p:sp>
@@ -17554,9 +17922,9 @@
                 <a:solidFill>
                   <a:srgbClr val="CCCCCC"/>
                 </a:solidFill>
-                <a:latin typeface="Urbanist"/>
+                <a:latin typeface="IDLC" pitchFamily="2" charset="0"/>
                 <a:ea typeface="Urbanist"/>
-                <a:cs typeface="Urbanist"/>
+                <a:cs typeface="IDLC" pitchFamily="2" charset="0"/>
                 <a:sym typeface="Urbanist"/>
               </a:rPr>
               <a:t>Assign Reviewers:</a:t>
@@ -17566,14 +17934,17 @@
                 <a:solidFill>
                   <a:srgbClr val="CCCCCC"/>
                 </a:solidFill>
-                <a:latin typeface="Urbanist"/>
+                <a:latin typeface="IDLC" pitchFamily="2" charset="0"/>
                 <a:ea typeface="Urbanist"/>
-                <a:cs typeface="Urbanist"/>
+                <a:cs typeface="IDLC" pitchFamily="2" charset="0"/>
                 <a:sym typeface="Urbanist"/>
               </a:rPr>
               <a:t> Tag your teammates to check your code.</a:t>
             </a:r>
-            <a:endParaRPr/>
+            <a:endParaRPr>
+              <a:latin typeface="IDLC" pitchFamily="2" charset="0"/>
+              <a:cs typeface="IDLC" pitchFamily="2" charset="0"/>
+            </a:endParaRPr>
           </a:p>
         </p:txBody>
       </p:sp>
@@ -17616,9 +17987,9 @@
                 <a:solidFill>
                   <a:srgbClr val="CCCCCC"/>
                 </a:solidFill>
-                <a:latin typeface="Urbanist"/>
+                <a:latin typeface="IDLC" pitchFamily="2" charset="0"/>
                 <a:ea typeface="Urbanist"/>
-                <a:cs typeface="Urbanist"/>
+                <a:cs typeface="IDLC" pitchFamily="2" charset="0"/>
                 <a:sym typeface="Urbanist"/>
               </a:rPr>
               <a:t>Merge:</a:t>
@@ -17628,14 +17999,17 @@
                 <a:solidFill>
                   <a:srgbClr val="CCCCCC"/>
                 </a:solidFill>
-                <a:latin typeface="Urbanist"/>
+                <a:latin typeface="IDLC" pitchFamily="2" charset="0"/>
                 <a:ea typeface="Urbanist"/>
-                <a:cs typeface="Urbanist"/>
+                <a:cs typeface="IDLC" pitchFamily="2" charset="0"/>
                 <a:sym typeface="Urbanist"/>
               </a:rPr>
               <a:t> Once approved, hit Merge to update the main project.</a:t>
             </a:r>
-            <a:endParaRPr/>
+            <a:endParaRPr>
+              <a:latin typeface="IDLC" pitchFamily="2" charset="0"/>
+              <a:cs typeface="IDLC" pitchFamily="2" charset="0"/>
+            </a:endParaRPr>
           </a:p>
         </p:txBody>
       </p:sp>
@@ -17725,6 +18099,13 @@
   <p:clrMapOvr>
     <a:masterClrMapping/>
   </p:clrMapOvr>
+  <p:timing>
+    <p:tnLst>
+      <p:par>
+        <p:cTn id="1" dur="indefinite" restart="never" nodeType="tmRoot"/>
+      </p:par>
+    </p:tnLst>
+  </p:timing>
 </p:sld>
 </file>
 
@@ -17872,18 +18253,21 @@
               <a:buNone/>
             </a:pPr>
             <a:r>
-              <a:rPr lang="en-US" sz="1800" b="1" i="0" u="none" strike="noStrike" cap="none">
+              <a:rPr lang="en-US" sz="1800" b="1" i="0" u="none" strike="noStrike" cap="none" dirty="0">
                 <a:solidFill>
                   <a:srgbClr val="CCFF66"/>
                 </a:solidFill>
-                <a:latin typeface="Urbanist"/>
+                <a:latin typeface="IDLC" pitchFamily="2" charset="0"/>
                 <a:ea typeface="Urbanist"/>
-                <a:cs typeface="Urbanist"/>
+                <a:cs typeface="IDLC" pitchFamily="2" charset="0"/>
                 <a:sym typeface="Urbanist"/>
               </a:rPr>
               <a:t>WHEN CHANGES COLLIDE</a:t>
             </a:r>
-            <a:endParaRPr/>
+            <a:endParaRPr dirty="0">
+              <a:latin typeface="IDLC" pitchFamily="2" charset="0"/>
+              <a:cs typeface="IDLC" pitchFamily="2" charset="0"/>
+            </a:endParaRPr>
           </a:p>
         </p:txBody>
       </p:sp>
@@ -17896,7 +18280,7 @@
         <p:spPr>
           <a:xfrm>
             <a:off x="771525" y="2854672"/>
-            <a:ext cx="5542508" cy="548580"/>
+            <a:ext cx="5542508" cy="664797"/>
           </a:xfrm>
           <a:prstGeom prst="rect">
             <a:avLst/>
@@ -17929,14 +18313,17 @@
                 <a:solidFill>
                   <a:srgbClr val="CCCCCC"/>
                 </a:solidFill>
-                <a:latin typeface="Urbanist"/>
+                <a:latin typeface="IDLC" pitchFamily="2" charset="0"/>
                 <a:ea typeface="Urbanist"/>
-                <a:cs typeface="Urbanist"/>
+                <a:cs typeface="IDLC" pitchFamily="2" charset="0"/>
                 <a:sym typeface="Urbanist"/>
               </a:rPr>
               <a:t>Conflicts occur when two collaborators edit the exact same line of code. Git stops the merge and inserts markers inside your script.</a:t>
             </a:r>
-            <a:endParaRPr/>
+            <a:endParaRPr>
+              <a:latin typeface="IDLC" pitchFamily="2" charset="0"/>
+              <a:cs typeface="IDLC" pitchFamily="2" charset="0"/>
+            </a:endParaRPr>
           </a:p>
         </p:txBody>
       </p:sp>
@@ -17979,14 +18366,17 @@
                 <a:solidFill>
                   <a:srgbClr val="CCFF66"/>
                 </a:solidFill>
-                <a:latin typeface="Urbanist"/>
+                <a:latin typeface="IDLC" pitchFamily="2" charset="0"/>
                 <a:ea typeface="Urbanist"/>
-                <a:cs typeface="Urbanist"/>
+                <a:cs typeface="IDLC" pitchFamily="2" charset="0"/>
                 <a:sym typeface="Urbanist"/>
               </a:rPr>
               <a:t>THE 4-STEP RESOLUTION</a:t>
             </a:r>
-            <a:endParaRPr/>
+            <a:endParaRPr>
+              <a:latin typeface="IDLC" pitchFamily="2" charset="0"/>
+              <a:cs typeface="IDLC" pitchFamily="2" charset="0"/>
+            </a:endParaRPr>
           </a:p>
         </p:txBody>
       </p:sp>
@@ -17999,7 +18389,7 @@
         <p:spPr>
           <a:xfrm>
             <a:off x="7076033" y="2531864"/>
-            <a:ext cx="4344441" cy="228600"/>
+            <a:ext cx="4344441" cy="553998"/>
           </a:xfrm>
           <a:prstGeom prst="rect">
             <a:avLst/>
@@ -18032,14 +18422,17 @@
                 <a:solidFill>
                   <a:srgbClr val="CCCCCC"/>
                 </a:solidFill>
-                <a:latin typeface="Urbanist"/>
+                <a:latin typeface="IDLC" pitchFamily="2" charset="0"/>
                 <a:ea typeface="Urbanist"/>
-                <a:cs typeface="Urbanist"/>
+                <a:cs typeface="IDLC" pitchFamily="2" charset="0"/>
                 <a:sym typeface="Urbanist"/>
               </a:rPr>
               <a:t>Follow this terminal &amp; RStudio sequence to resolve conflicts perfectly:</a:t>
             </a:r>
-            <a:endParaRPr/>
+            <a:endParaRPr>
+              <a:latin typeface="IDLC" pitchFamily="2" charset="0"/>
+              <a:cs typeface="IDLC" pitchFamily="2" charset="0"/>
+            </a:endParaRPr>
           </a:p>
         </p:txBody>
       </p:sp>
@@ -18052,7 +18445,7 @@
         <p:spPr>
           <a:xfrm>
             <a:off x="1838325" y="3774727"/>
-            <a:ext cx="4275683" cy="180975"/>
+            <a:ext cx="4275683" cy="161583"/>
           </a:xfrm>
           <a:prstGeom prst="rect">
             <a:avLst/>
@@ -18082,9 +18475,9 @@
                 <a:solidFill>
                   <a:srgbClr val="CCFF66"/>
                 </a:solidFill>
-                <a:latin typeface="JetBrains Mono"/>
+                <a:latin typeface="IDLC" pitchFamily="2" charset="0"/>
                 <a:ea typeface="JetBrains Mono"/>
-                <a:cs typeface="JetBrains Mono"/>
+                <a:cs typeface="IDLC" pitchFamily="2" charset="0"/>
                 <a:sym typeface="JetBrains Mono"/>
               </a:rPr>
               <a:t> cleanup.R</a:t>
@@ -18094,14 +18487,17 @@
                 <a:solidFill>
                   <a:srgbClr val="666666"/>
                 </a:solidFill>
-                <a:latin typeface="JetBrains Mono"/>
+                <a:latin typeface="IDLC" pitchFamily="2" charset="0"/>
                 <a:ea typeface="JetBrains Mono"/>
-                <a:cs typeface="JetBrains Mono"/>
+                <a:cs typeface="IDLC" pitchFamily="2" charset="0"/>
                 <a:sym typeface="JetBrains Mono"/>
               </a:rPr>
               <a:t> RStudio Editor</a:t>
             </a:r>
-            <a:endParaRPr/>
+            <a:endParaRPr>
+              <a:latin typeface="IDLC" pitchFamily="2" charset="0"/>
+              <a:cs typeface="IDLC" pitchFamily="2" charset="0"/>
+            </a:endParaRPr>
           </a:p>
         </p:txBody>
       </p:sp>
@@ -18145,9 +18541,9 @@
               <a:solidFill>
                 <a:schemeClr val="dk1"/>
               </a:solidFill>
-              <a:latin typeface="Calibri"/>
+              <a:latin typeface="IDLC" pitchFamily="2" charset="0"/>
               <a:ea typeface="Calibri"/>
-              <a:cs typeface="Calibri"/>
+              <a:cs typeface="IDLC" pitchFamily="2" charset="0"/>
               <a:sym typeface="Calibri"/>
             </a:endParaRPr>
           </a:p>
@@ -18162,7 +18558,7 @@
         <p:spPr>
           <a:xfrm>
             <a:off x="7361783" y="2998589"/>
-            <a:ext cx="4058691" cy="497085"/>
+            <a:ext cx="4058691" cy="590931"/>
           </a:xfrm>
           <a:prstGeom prst="rect">
             <a:avLst/>
@@ -18195,9 +18591,9 @@
                 <a:solidFill>
                   <a:srgbClr val="CCCCCC"/>
                 </a:solidFill>
-                <a:latin typeface="Urbanist"/>
+                <a:latin typeface="IDLC" pitchFamily="2" charset="0"/>
                 <a:ea typeface="Urbanist"/>
-                <a:cs typeface="Urbanist"/>
+                <a:cs typeface="IDLC" pitchFamily="2" charset="0"/>
                 <a:sym typeface="Urbanist"/>
               </a:rPr>
               <a:t>Find:</a:t>
@@ -18207,14 +18603,17 @@
                 <a:solidFill>
                   <a:srgbClr val="CCCCCC"/>
                 </a:solidFill>
-                <a:latin typeface="Urbanist"/>
+                <a:latin typeface="IDLC" pitchFamily="2" charset="0"/>
                 <a:ea typeface="Urbanist"/>
-                <a:cs typeface="Urbanist"/>
+                <a:cs typeface="IDLC" pitchFamily="2" charset="0"/>
                 <a:sym typeface="Urbanist"/>
               </a:rPr>
               <a:t> Open the marked file in RStudio and look for conflict headers (&lt;&lt;&lt;&lt;&lt;&lt;&lt;).</a:t>
             </a:r>
-            <a:endParaRPr/>
+            <a:endParaRPr>
+              <a:latin typeface="IDLC" pitchFamily="2" charset="0"/>
+              <a:cs typeface="IDLC" pitchFamily="2" charset="0"/>
+            </a:endParaRPr>
           </a:p>
         </p:txBody>
       </p:sp>
@@ -18227,7 +18626,7 @@
         <p:spPr>
           <a:xfrm>
             <a:off x="7361783" y="3638550"/>
-            <a:ext cx="4058691" cy="487560"/>
+            <a:ext cx="4058691" cy="590931"/>
           </a:xfrm>
           <a:prstGeom prst="rect">
             <a:avLst/>
@@ -18260,9 +18659,9 @@
                 <a:solidFill>
                   <a:srgbClr val="CCCCCC"/>
                 </a:solidFill>
-                <a:latin typeface="Urbanist"/>
+                <a:latin typeface="IDLC" pitchFamily="2" charset="0"/>
                 <a:ea typeface="Urbanist"/>
-                <a:cs typeface="Urbanist"/>
+                <a:cs typeface="IDLC" pitchFamily="2" charset="0"/>
                 <a:sym typeface="Urbanist"/>
               </a:rPr>
               <a:t>Edit:</a:t>
@@ -18272,14 +18671,17 @@
                 <a:solidFill>
                   <a:srgbClr val="CCCCCC"/>
                 </a:solidFill>
-                <a:latin typeface="Urbanist"/>
+                <a:latin typeface="IDLC" pitchFamily="2" charset="0"/>
                 <a:ea typeface="Urbanist"/>
-                <a:cs typeface="Urbanist"/>
+                <a:cs typeface="IDLC" pitchFamily="2" charset="0"/>
                 <a:sym typeface="Urbanist"/>
               </a:rPr>
               <a:t> Decide which code to keep. Manually delete all conflict markers and keep the correct line of code.</a:t>
             </a:r>
-            <a:endParaRPr/>
+            <a:endParaRPr>
+              <a:latin typeface="IDLC" pitchFamily="2" charset="0"/>
+              <a:cs typeface="IDLC" pitchFamily="2" charset="0"/>
+            </a:endParaRPr>
           </a:p>
         </p:txBody>
       </p:sp>
@@ -18292,7 +18694,7 @@
         <p:spPr>
           <a:xfrm>
             <a:off x="7361783" y="4268985"/>
-            <a:ext cx="4058691" cy="542776"/>
+            <a:ext cx="4058691" cy="590931"/>
           </a:xfrm>
           <a:prstGeom prst="rect">
             <a:avLst/>
@@ -18325,9 +18727,9 @@
                 <a:solidFill>
                   <a:srgbClr val="CCCCCC"/>
                 </a:solidFill>
-                <a:latin typeface="Urbanist"/>
+                <a:latin typeface="IDLC" pitchFamily="2" charset="0"/>
                 <a:ea typeface="Urbanist"/>
-                <a:cs typeface="Urbanist"/>
+                <a:cs typeface="IDLC" pitchFamily="2" charset="0"/>
                 <a:sym typeface="Urbanist"/>
               </a:rPr>
               <a:t>Stage:</a:t>
@@ -18337,9 +18739,9 @@
                 <a:solidFill>
                   <a:srgbClr val="CCCCCC"/>
                 </a:solidFill>
-                <a:latin typeface="Urbanist"/>
+                <a:latin typeface="IDLC" pitchFamily="2" charset="0"/>
                 <a:ea typeface="Urbanist"/>
-                <a:cs typeface="Urbanist"/>
+                <a:cs typeface="IDLC" pitchFamily="2" charset="0"/>
                 <a:sym typeface="Urbanist"/>
               </a:rPr>
               <a:t> Save the cleaned file and add it to the index using your Bash console: </a:t>
@@ -18349,14 +18751,17 @@
                 <a:solidFill>
                   <a:srgbClr val="CCFF66"/>
                 </a:solidFill>
-                <a:latin typeface="Urbanist"/>
+                <a:latin typeface="IDLC" pitchFamily="2" charset="0"/>
                 <a:ea typeface="Urbanist"/>
-                <a:cs typeface="Urbanist"/>
+                <a:cs typeface="IDLC" pitchFamily="2" charset="0"/>
                 <a:sym typeface="Urbanist"/>
               </a:rPr>
               <a:t>git add cleanup.R</a:t>
             </a:r>
-            <a:endParaRPr/>
+            <a:endParaRPr>
+              <a:latin typeface="IDLC" pitchFamily="2" charset="0"/>
+              <a:cs typeface="IDLC" pitchFamily="2" charset="0"/>
+            </a:endParaRPr>
           </a:p>
         </p:txBody>
       </p:sp>
@@ -18369,7 +18774,7 @@
         <p:spPr>
           <a:xfrm>
             <a:off x="7361783" y="4954637"/>
-            <a:ext cx="4058691" cy="542776"/>
+            <a:ext cx="4058691" cy="590931"/>
           </a:xfrm>
           <a:prstGeom prst="rect">
             <a:avLst/>
@@ -18402,9 +18807,9 @@
                 <a:solidFill>
                   <a:srgbClr val="CCCCCC"/>
                 </a:solidFill>
-                <a:latin typeface="Urbanist"/>
+                <a:latin typeface="IDLC" pitchFamily="2" charset="0"/>
                 <a:ea typeface="Urbanist"/>
-                <a:cs typeface="Urbanist"/>
+                <a:cs typeface="IDLC" pitchFamily="2" charset="0"/>
                 <a:sym typeface="Urbanist"/>
               </a:rPr>
               <a:t>Commit &amp; Push:</a:t>
@@ -18414,9 +18819,9 @@
                 <a:solidFill>
                   <a:srgbClr val="CCCCCC"/>
                 </a:solidFill>
-                <a:latin typeface="Urbanist"/>
+                <a:latin typeface="IDLC" pitchFamily="2" charset="0"/>
                 <a:ea typeface="Urbanist"/>
-                <a:cs typeface="Urbanist"/>
+                <a:cs typeface="IDLC" pitchFamily="2" charset="0"/>
                 <a:sym typeface="Urbanist"/>
               </a:rPr>
               <a:t> Save the resolution snapshot and sync to the cloud: </a:t>
@@ -18426,14 +18831,17 @@
                 <a:solidFill>
                   <a:srgbClr val="CCFF66"/>
                 </a:solidFill>
-                <a:latin typeface="Urbanist"/>
+                <a:latin typeface="IDLC" pitchFamily="2" charset="0"/>
                 <a:ea typeface="Urbanist"/>
-                <a:cs typeface="Urbanist"/>
+                <a:cs typeface="IDLC" pitchFamily="2" charset="0"/>
                 <a:sym typeface="Urbanist"/>
               </a:rPr>
               <a:t>git commit -m "Resolve conflict"</a:t>
             </a:r>
-            <a:endParaRPr/>
+            <a:endParaRPr>
+              <a:latin typeface="IDLC" pitchFamily="2" charset="0"/>
+              <a:cs typeface="IDLC" pitchFamily="2" charset="0"/>
+            </a:endParaRPr>
           </a:p>
         </p:txBody>
       </p:sp>
@@ -18504,9 +18912,9 @@
               <a:solidFill>
                 <a:schemeClr val="dk1"/>
               </a:solidFill>
-              <a:latin typeface="Calibri"/>
+              <a:latin typeface="IDLC" pitchFamily="2" charset="0"/>
               <a:ea typeface="Calibri"/>
-              <a:cs typeface="Calibri"/>
+              <a:cs typeface="IDLC" pitchFamily="2" charset="0"/>
               <a:sym typeface="Calibri"/>
             </a:endParaRPr>
           </a:p>
@@ -18554,14 +18962,17 @@
                 <a:solidFill>
                   <a:srgbClr val="FFFFFF"/>
                 </a:solidFill>
-                <a:latin typeface="JetBrains Mono"/>
+                <a:latin typeface="IDLC" pitchFamily="2" charset="0"/>
                 <a:ea typeface="JetBrains Mono"/>
-                <a:cs typeface="JetBrains Mono"/>
+                <a:cs typeface="IDLC" pitchFamily="2" charset="0"/>
                 <a:sym typeface="JetBrains Mono"/>
               </a:rPr>
               <a:t>data &lt;- data %&gt;% filter(age &gt;= 18)</a:t>
             </a:r>
-            <a:endParaRPr dirty="0"/>
+            <a:endParaRPr dirty="0">
+              <a:latin typeface="IDLC" pitchFamily="2" charset="0"/>
+              <a:cs typeface="IDLC" pitchFamily="2" charset="0"/>
+            </a:endParaRPr>
           </a:p>
         </p:txBody>
       </p:sp>
@@ -18605,9 +19016,9 @@
               <a:solidFill>
                 <a:schemeClr val="dk1"/>
               </a:solidFill>
-              <a:latin typeface="Calibri"/>
+              <a:latin typeface="IDLC" pitchFamily="2" charset="0"/>
               <a:ea typeface="Calibri"/>
-              <a:cs typeface="Calibri"/>
+              <a:cs typeface="IDLC" pitchFamily="2" charset="0"/>
               <a:sym typeface="Calibri"/>
             </a:endParaRPr>
           </a:p>
@@ -18622,7 +19033,7 @@
         <p:spPr>
           <a:xfrm>
             <a:off x="971550" y="4742408"/>
-            <a:ext cx="666750" cy="171450"/>
+            <a:ext cx="666750" cy="274691"/>
           </a:xfrm>
           <a:prstGeom prst="rect">
             <a:avLst/>
@@ -18655,14 +19066,17 @@
                 <a:solidFill>
                   <a:srgbClr val="666666"/>
                 </a:solidFill>
-                <a:latin typeface="JetBrains Mono"/>
+                <a:latin typeface="IDLC" pitchFamily="2" charset="0"/>
                 <a:ea typeface="JetBrains Mono"/>
-                <a:cs typeface="JetBrains Mono"/>
+                <a:cs typeface="IDLC" pitchFamily="2" charset="0"/>
                 <a:sym typeface="JetBrains Mono"/>
               </a:rPr>
               <a:t>=======</a:t>
             </a:r>
-            <a:endParaRPr/>
+            <a:endParaRPr>
+              <a:latin typeface="IDLC" pitchFamily="2" charset="0"/>
+              <a:cs typeface="IDLC" pitchFamily="2" charset="0"/>
+            </a:endParaRPr>
           </a:p>
         </p:txBody>
       </p:sp>
@@ -18706,9 +19120,9 @@
               <a:solidFill>
                 <a:schemeClr val="dk1"/>
               </a:solidFill>
-              <a:latin typeface="Calibri"/>
+              <a:latin typeface="IDLC" pitchFamily="2" charset="0"/>
               <a:ea typeface="Calibri"/>
-              <a:cs typeface="Calibri"/>
+              <a:cs typeface="IDLC" pitchFamily="2" charset="0"/>
               <a:sym typeface="Calibri"/>
             </a:endParaRPr>
           </a:p>
@@ -18723,7 +19137,7 @@
         <p:spPr>
           <a:xfrm>
             <a:off x="1066800" y="4940498"/>
-            <a:ext cx="5047208" cy="226665"/>
+            <a:ext cx="5047208" cy="274691"/>
           </a:xfrm>
           <a:prstGeom prst="rect">
             <a:avLst/>
@@ -18756,14 +19170,17 @@
                 <a:solidFill>
                   <a:srgbClr val="FFFFFF"/>
                 </a:solidFill>
-                <a:latin typeface="JetBrains Mono"/>
+                <a:latin typeface="IDLC" pitchFamily="2" charset="0"/>
                 <a:ea typeface="JetBrains Mono"/>
-                <a:cs typeface="JetBrains Mono"/>
+                <a:cs typeface="IDLC" pitchFamily="2" charset="0"/>
                 <a:sym typeface="JetBrains Mono"/>
               </a:rPr>
               <a:t>data &lt;- data %&gt;% filter(age &gt; 17 &amp; active == TRUE)</a:t>
             </a:r>
-            <a:endParaRPr dirty="0"/>
+            <a:endParaRPr dirty="0">
+              <a:latin typeface="IDLC" pitchFamily="2" charset="0"/>
+              <a:cs typeface="IDLC" pitchFamily="2" charset="0"/>
+            </a:endParaRPr>
           </a:p>
         </p:txBody>
       </p:sp>
@@ -18807,9 +19224,9 @@
               <a:solidFill>
                 <a:schemeClr val="dk1"/>
               </a:solidFill>
-              <a:latin typeface="Calibri"/>
+              <a:latin typeface="IDLC" pitchFamily="2" charset="0"/>
               <a:ea typeface="Calibri"/>
-              <a:cs typeface="Calibri"/>
+              <a:cs typeface="IDLC" pitchFamily="2" charset="0"/>
               <a:sym typeface="Calibri"/>
             </a:endParaRPr>
           </a:p>
@@ -18851,7 +19268,7 @@
         <p:spPr>
           <a:xfrm>
             <a:off x="7076033" y="2998589"/>
-            <a:ext cx="152400" cy="247650"/>
+            <a:ext cx="152400" cy="295466"/>
           </a:xfrm>
           <a:prstGeom prst="rect">
             <a:avLst/>
@@ -18884,14 +19301,17 @@
                 <a:solidFill>
                   <a:srgbClr val="CCFF66"/>
                 </a:solidFill>
-                <a:latin typeface="Urbanist"/>
+                <a:latin typeface="IDLC" pitchFamily="2" charset="0"/>
                 <a:ea typeface="Urbanist"/>
-                <a:cs typeface="Urbanist"/>
+                <a:cs typeface="IDLC" pitchFamily="2" charset="0"/>
                 <a:sym typeface="Urbanist"/>
               </a:rPr>
               <a:t>→</a:t>
             </a:r>
-            <a:endParaRPr/>
+            <a:endParaRPr>
+              <a:latin typeface="IDLC" pitchFamily="2" charset="0"/>
+              <a:cs typeface="IDLC" pitchFamily="2" charset="0"/>
+            </a:endParaRPr>
           </a:p>
         </p:txBody>
       </p:sp>
@@ -18904,7 +19324,7 @@
         <p:spPr>
           <a:xfrm>
             <a:off x="7076033" y="3638550"/>
-            <a:ext cx="152400" cy="247650"/>
+            <a:ext cx="152400" cy="295466"/>
           </a:xfrm>
           <a:prstGeom prst="rect">
             <a:avLst/>
@@ -18937,14 +19357,17 @@
                 <a:solidFill>
                   <a:srgbClr val="CCFF66"/>
                 </a:solidFill>
-                <a:latin typeface="Urbanist"/>
+                <a:latin typeface="IDLC" pitchFamily="2" charset="0"/>
                 <a:ea typeface="Urbanist"/>
-                <a:cs typeface="Urbanist"/>
+                <a:cs typeface="IDLC" pitchFamily="2" charset="0"/>
                 <a:sym typeface="Urbanist"/>
               </a:rPr>
               <a:t>→</a:t>
             </a:r>
-            <a:endParaRPr/>
+            <a:endParaRPr>
+              <a:latin typeface="IDLC" pitchFamily="2" charset="0"/>
+              <a:cs typeface="IDLC" pitchFamily="2" charset="0"/>
+            </a:endParaRPr>
           </a:p>
         </p:txBody>
       </p:sp>
@@ -18957,7 +19380,7 @@
         <p:spPr>
           <a:xfrm>
             <a:off x="7076033" y="4268985"/>
-            <a:ext cx="152400" cy="247650"/>
+            <a:ext cx="152400" cy="295466"/>
           </a:xfrm>
           <a:prstGeom prst="rect">
             <a:avLst/>
@@ -18990,14 +19413,17 @@
                 <a:solidFill>
                   <a:srgbClr val="CCFF66"/>
                 </a:solidFill>
-                <a:latin typeface="Urbanist"/>
+                <a:latin typeface="IDLC" pitchFamily="2" charset="0"/>
                 <a:ea typeface="Urbanist"/>
-                <a:cs typeface="Urbanist"/>
+                <a:cs typeface="IDLC" pitchFamily="2" charset="0"/>
                 <a:sym typeface="Urbanist"/>
               </a:rPr>
               <a:t>→</a:t>
             </a:r>
-            <a:endParaRPr/>
+            <a:endParaRPr>
+              <a:latin typeface="IDLC" pitchFamily="2" charset="0"/>
+              <a:cs typeface="IDLC" pitchFamily="2" charset="0"/>
+            </a:endParaRPr>
           </a:p>
         </p:txBody>
       </p:sp>
@@ -19010,7 +19436,7 @@
         <p:spPr>
           <a:xfrm>
             <a:off x="7076033" y="4954637"/>
-            <a:ext cx="152400" cy="247650"/>
+            <a:ext cx="152400" cy="295466"/>
           </a:xfrm>
           <a:prstGeom prst="rect">
             <a:avLst/>
@@ -19043,14 +19469,17 @@
                 <a:solidFill>
                   <a:srgbClr val="CCFF66"/>
                 </a:solidFill>
-                <a:latin typeface="Urbanist"/>
+                <a:latin typeface="IDLC" pitchFamily="2" charset="0"/>
                 <a:ea typeface="Urbanist"/>
-                <a:cs typeface="Urbanist"/>
+                <a:cs typeface="IDLC" pitchFamily="2" charset="0"/>
                 <a:sym typeface="Urbanist"/>
               </a:rPr>
               <a:t>→</a:t>
             </a:r>
-            <a:endParaRPr/>
+            <a:endParaRPr>
+              <a:latin typeface="IDLC" pitchFamily="2" charset="0"/>
+              <a:cs typeface="IDLC" pitchFamily="2" charset="0"/>
+            </a:endParaRPr>
           </a:p>
         </p:txBody>
       </p:sp>
@@ -19090,7 +19519,7 @@
         <p:spPr>
           <a:xfrm>
             <a:off x="962025" y="581025"/>
-            <a:ext cx="10981372" cy="514350"/>
+            <a:ext cx="10981372" cy="623248"/>
           </a:xfrm>
           <a:prstGeom prst="rect">
             <a:avLst/>
@@ -19119,18 +19548,33 @@
               <a:buNone/>
             </a:pPr>
             <a:r>
-              <a:rPr lang="en-US" sz="4050" b="1" i="0" u="none" strike="noStrike" cap="none">
+              <a:rPr lang="en-US" sz="4050" b="1" i="0" u="none" strike="noStrike" cap="none" dirty="0">
+                <a:solidFill>
+                  <a:schemeClr val="bg1"/>
+                </a:solidFill>
+                <a:latin typeface="IDLC" pitchFamily="2" charset="0"/>
+                <a:ea typeface="Urbanist"/>
+                <a:cs typeface="IDLC" pitchFamily="2" charset="0"/>
+                <a:sym typeface="Urbanist"/>
+              </a:rPr>
+              <a:t>HANDLING</a:t>
+            </a:r>
+            <a:r>
+              <a:rPr lang="en-US" sz="4050" b="1" i="0" u="none" strike="noStrike" cap="none" dirty="0">
                 <a:solidFill>
                   <a:srgbClr val="CCFF66"/>
                 </a:solidFill>
-                <a:latin typeface="Urbanist"/>
+                <a:latin typeface="IDLC" pitchFamily="2" charset="0"/>
                 <a:ea typeface="Urbanist"/>
-                <a:cs typeface="Urbanist"/>
+                <a:cs typeface="IDLC" pitchFamily="2" charset="0"/>
                 <a:sym typeface="Urbanist"/>
               </a:rPr>
-              <a:t>HANDLING CONFLICTS</a:t>
-            </a:r>
-            <a:endParaRPr/>
+              <a:t> CONFLICTS</a:t>
+            </a:r>
+            <a:endParaRPr dirty="0">
+              <a:latin typeface="IDLC" pitchFamily="2" charset="0"/>
+              <a:cs typeface="IDLC" pitchFamily="2" charset="0"/>
+            </a:endParaRPr>
           </a:p>
         </p:txBody>
       </p:sp>
@@ -19174,9 +19618,9 @@
               <a:solidFill>
                 <a:schemeClr val="dk1"/>
               </a:solidFill>
-              <a:latin typeface="Calibri"/>
+              <a:latin typeface="IDLC" pitchFamily="2" charset="0"/>
               <a:ea typeface="Calibri"/>
-              <a:cs typeface="Calibri"/>
+              <a:cs typeface="IDLC" pitchFamily="2" charset="0"/>
               <a:sym typeface="Calibri"/>
             </a:endParaRPr>
           </a:p>
@@ -19187,6 +19631,13 @@
   <p:clrMapOvr>
     <a:masterClrMapping/>
   </p:clrMapOvr>
+  <p:timing>
+    <p:tnLst>
+      <p:par>
+        <p:cTn id="1" dur="indefinite" restart="never" nodeType="tmRoot"/>
+      </p:par>
+    </p:tnLst>
+  </p:timing>
 </p:sld>
 </file>
 
@@ -19249,7 +19700,7 @@
         </p:blipFill>
         <p:spPr>
           <a:xfrm>
-            <a:off x="6885533" y="2080766"/>
+            <a:off x="6885533" y="2137916"/>
             <a:ext cx="4534941" cy="3591669"/>
           </a:xfrm>
           <a:prstGeom prst="rect">
@@ -19276,7 +19727,7 @@
         </p:blipFill>
         <p:spPr>
           <a:xfrm>
-            <a:off x="771525" y="2297459"/>
+            <a:off x="747192" y="1910090"/>
             <a:ext cx="2105025" cy="238125"/>
           </a:xfrm>
           <a:prstGeom prst="rect">
@@ -19296,7 +19747,7 @@
         </p:nvSpPr>
         <p:spPr>
           <a:xfrm>
-            <a:off x="771525" y="2630834"/>
+            <a:off x="724450" y="2553837"/>
             <a:ext cx="5819633" cy="276225"/>
           </a:xfrm>
           <a:prstGeom prst="rect">
@@ -19323,18 +19774,21 @@
               <a:buNone/>
             </a:pPr>
             <a:r>
-              <a:rPr lang="en-US" sz="1800" b="1" i="0" u="none" strike="noStrike" cap="none">
+              <a:rPr lang="en-US" sz="1800" b="1" i="0" u="none" strike="noStrike" cap="none" dirty="0">
                 <a:solidFill>
                   <a:srgbClr val="CCFF66"/>
                 </a:solidFill>
-                <a:latin typeface="Urbanist"/>
+                <a:latin typeface="IDLC" pitchFamily="2" charset="0"/>
                 <a:ea typeface="Urbanist"/>
-                <a:cs typeface="Urbanist"/>
+                <a:cs typeface="IDLC" pitchFamily="2" charset="0"/>
                 <a:sym typeface="Urbanist"/>
               </a:rPr>
               <a:t>FILTERING UNWANTED FILES</a:t>
             </a:r>
-            <a:endParaRPr/>
+            <a:endParaRPr dirty="0">
+              <a:latin typeface="IDLC" pitchFamily="2" charset="0"/>
+              <a:cs typeface="IDLC" pitchFamily="2" charset="0"/>
+            </a:endParaRPr>
           </a:p>
         </p:txBody>
       </p:sp>
@@ -19346,8 +19800,8 @@
         </p:nvSpPr>
         <p:spPr>
           <a:xfrm>
-            <a:off x="771525" y="3078509"/>
-            <a:ext cx="5542508" cy="548580"/>
+            <a:off x="771525" y="3135659"/>
+            <a:ext cx="5542508" cy="664797"/>
           </a:xfrm>
           <a:prstGeom prst="rect">
             <a:avLst/>
@@ -19380,14 +19834,17 @@
                 <a:solidFill>
                   <a:srgbClr val="CCCCCC"/>
                 </a:solidFill>
-                <a:latin typeface="Urbanist"/>
+                <a:latin typeface="IDLC" pitchFamily="2" charset="0"/>
                 <a:ea typeface="Urbanist"/>
-                <a:cs typeface="Urbanist"/>
+                <a:cs typeface="IDLC" pitchFamily="2" charset="0"/>
                 <a:sym typeface="Urbanist"/>
               </a:rPr>
               <a:t>Not every file belongs on GitHub. A .gitignore file tells Git precisely which files, file types, or entire folders to ignore entirely.</a:t>
             </a:r>
-            <a:endParaRPr/>
+            <a:endParaRPr>
+              <a:latin typeface="IDLC" pitchFamily="2" charset="0"/>
+              <a:cs typeface="IDLC" pitchFamily="2" charset="0"/>
+            </a:endParaRPr>
           </a:p>
         </p:txBody>
       </p:sp>
@@ -19399,8 +19856,8 @@
         </p:nvSpPr>
         <p:spPr>
           <a:xfrm>
-            <a:off x="8057108" y="2280791"/>
-            <a:ext cx="3163341" cy="180975"/>
+            <a:off x="8057108" y="2337941"/>
+            <a:ext cx="3163341" cy="161583"/>
           </a:xfrm>
           <a:prstGeom prst="rect">
             <a:avLst/>
@@ -19430,9 +19887,9 @@
                 <a:solidFill>
                   <a:srgbClr val="CCFF66"/>
                 </a:solidFill>
-                <a:latin typeface="JetBrains Mono"/>
+                <a:latin typeface="IDLC" pitchFamily="2" charset="0"/>
                 <a:ea typeface="JetBrains Mono"/>
-                <a:cs typeface="JetBrains Mono"/>
+                <a:cs typeface="IDLC" pitchFamily="2" charset="0"/>
                 <a:sym typeface="JetBrains Mono"/>
               </a:rPr>
               <a:t> .gitignore</a:t>
@@ -19442,14 +19899,17 @@
                 <a:solidFill>
                   <a:srgbClr val="666666"/>
                 </a:solidFill>
-                <a:latin typeface="JetBrains Mono"/>
+                <a:latin typeface="IDLC" pitchFamily="2" charset="0"/>
                 <a:ea typeface="JetBrains Mono"/>
-                <a:cs typeface="JetBrains Mono"/>
+                <a:cs typeface="IDLC" pitchFamily="2" charset="0"/>
                 <a:sym typeface="JetBrains Mono"/>
               </a:rPr>
               <a:t> Workspace Rules</a:t>
             </a:r>
-            <a:endParaRPr/>
+            <a:endParaRPr>
+              <a:latin typeface="IDLC" pitchFamily="2" charset="0"/>
+              <a:cs typeface="IDLC" pitchFamily="2" charset="0"/>
+            </a:endParaRPr>
           </a:p>
         </p:txBody>
       </p:sp>
@@ -19461,7 +19921,7 @@
         </p:nvSpPr>
         <p:spPr>
           <a:xfrm>
-            <a:off x="7085558" y="2547491"/>
+            <a:off x="7085558" y="2604641"/>
             <a:ext cx="4134891" cy="9525"/>
           </a:xfrm>
           <a:prstGeom prst="rect">
@@ -19493,9 +19953,9 @@
               <a:solidFill>
                 <a:schemeClr val="dk1"/>
               </a:solidFill>
-              <a:latin typeface="Calibri"/>
+              <a:latin typeface="IDLC" pitchFamily="2" charset="0"/>
               <a:ea typeface="Calibri"/>
-              <a:cs typeface="Calibri"/>
+              <a:cs typeface="IDLC" pitchFamily="2" charset="0"/>
               <a:sym typeface="Calibri"/>
             </a:endParaRPr>
           </a:p>
@@ -19509,8 +19969,8 @@
         </p:nvSpPr>
         <p:spPr>
           <a:xfrm>
-            <a:off x="7085558" y="2699891"/>
-            <a:ext cx="4134891" cy="2772519"/>
+            <a:off x="7085558" y="2757041"/>
+            <a:ext cx="4134891" cy="2561535"/>
           </a:xfrm>
           <a:prstGeom prst="rect">
             <a:avLst/>
@@ -19539,270 +19999,489 @@
               <a:buNone/>
             </a:pPr>
             <a:r>
-              <a:rPr lang="en-US" sz="1050" b="0" i="1" u="none" strike="noStrike" cap="none">
+              <a:rPr lang="en-US" sz="1200" b="0" i="1" u="none" strike="noStrike" cap="none" dirty="0">
                 <a:solidFill>
                   <a:srgbClr val="555555"/>
                 </a:solidFill>
-                <a:latin typeface="JetBrains Mono"/>
+                <a:latin typeface="IDLC" pitchFamily="2" charset="0"/>
                 <a:ea typeface="JetBrains Mono"/>
-                <a:cs typeface="JetBrains Mono"/>
+                <a:cs typeface="IDLC" pitchFamily="2" charset="0"/>
                 <a:sym typeface="JetBrains Mono"/>
               </a:rPr>
               <a:t># History files &amp; temp databases</a:t>
             </a:r>
+            <a:r>
+              <a:rPr lang="en-US" sz="2400" b="0" i="0" u="none" strike="noStrike" cap="none" dirty="0">
+                <a:solidFill>
+                  <a:schemeClr val="dk1"/>
+                </a:solidFill>
+                <a:latin typeface="IDLC" pitchFamily="2" charset="0"/>
+                <a:ea typeface="Calibri"/>
+                <a:cs typeface="IDLC" pitchFamily="2" charset="0"/>
+                <a:sym typeface="Calibri"/>
+              </a:rPr>
+              <a:t/>
+            </a:r>
             <a:br>
-              <a:rPr lang="en-US" sz="1800" b="0" i="0" u="none" strike="noStrike" cap="none">
+              <a:rPr lang="en-US" sz="2400" b="0" i="0" u="none" strike="noStrike" cap="none" dirty="0">
                 <a:solidFill>
                   <a:schemeClr val="dk1"/>
                 </a:solidFill>
-                <a:latin typeface="Calibri"/>
+                <a:latin typeface="IDLC" pitchFamily="2" charset="0"/>
                 <a:ea typeface="Calibri"/>
-                <a:cs typeface="Calibri"/>
+                <a:cs typeface="IDLC" pitchFamily="2" charset="0"/>
                 <a:sym typeface="Calibri"/>
               </a:rPr>
             </a:br>
             <a:r>
-              <a:rPr lang="en-US" sz="1050" b="1" i="0" u="none" strike="noStrike" cap="none">
+              <a:rPr lang="en-US" sz="1200" b="1" i="0" u="none" strike="noStrike" cap="none" dirty="0">
                 <a:solidFill>
                   <a:srgbClr val="FFBD2E"/>
                 </a:solidFill>
-                <a:latin typeface="JetBrains Mono"/>
+                <a:latin typeface="IDLC" pitchFamily="2" charset="0"/>
                 <a:ea typeface="JetBrains Mono"/>
-                <a:cs typeface="JetBrains Mono"/>
+                <a:cs typeface="IDLC" pitchFamily="2" charset="0"/>
                 <a:sym typeface="JetBrains Mono"/>
               </a:rPr>
-              <a:t>.Rhistory</a:t>
+              <a:t>.</a:t>
+            </a:r>
+            <a:r>
+              <a:rPr lang="en-US" sz="1200" b="1" i="0" u="none" strike="noStrike" cap="none" dirty="0" err="1">
+                <a:solidFill>
+                  <a:srgbClr val="FFBD2E"/>
+                </a:solidFill>
+                <a:latin typeface="IDLC" pitchFamily="2" charset="0"/>
+                <a:ea typeface="JetBrains Mono"/>
+                <a:cs typeface="IDLC" pitchFamily="2" charset="0"/>
+                <a:sym typeface="JetBrains Mono"/>
+              </a:rPr>
+              <a:t>Rhistory</a:t>
+            </a:r>
+            <a:r>
+              <a:rPr lang="en-US" sz="2400" b="0" i="0" u="none" strike="noStrike" cap="none" dirty="0">
+                <a:solidFill>
+                  <a:schemeClr val="dk1"/>
+                </a:solidFill>
+                <a:latin typeface="IDLC" pitchFamily="2" charset="0"/>
+                <a:ea typeface="Calibri"/>
+                <a:cs typeface="IDLC" pitchFamily="2" charset="0"/>
+                <a:sym typeface="Calibri"/>
+              </a:rPr>
+              <a:t/>
             </a:r>
             <a:br>
-              <a:rPr lang="en-US" sz="1800" b="0" i="0" u="none" strike="noStrike" cap="none">
+              <a:rPr lang="en-US" sz="2400" b="0" i="0" u="none" strike="noStrike" cap="none" dirty="0">
                 <a:solidFill>
                   <a:schemeClr val="dk1"/>
                 </a:solidFill>
-                <a:latin typeface="Calibri"/>
+                <a:latin typeface="IDLC" pitchFamily="2" charset="0"/>
                 <a:ea typeface="Calibri"/>
-                <a:cs typeface="Calibri"/>
+                <a:cs typeface="IDLC" pitchFamily="2" charset="0"/>
                 <a:sym typeface="Calibri"/>
               </a:rPr>
             </a:br>
             <a:r>
-              <a:rPr lang="en-US" sz="1050" b="1" i="0" u="none" strike="noStrike" cap="none">
+              <a:rPr lang="en-US" sz="1200" b="1" i="0" u="none" strike="noStrike" cap="none" dirty="0">
                 <a:solidFill>
                   <a:srgbClr val="FFBD2E"/>
                 </a:solidFill>
-                <a:latin typeface="JetBrains Mono"/>
+                <a:latin typeface="IDLC" pitchFamily="2" charset="0"/>
                 <a:ea typeface="JetBrains Mono"/>
-                <a:cs typeface="JetBrains Mono"/>
+                <a:cs typeface="IDLC" pitchFamily="2" charset="0"/>
                 <a:sym typeface="JetBrains Mono"/>
               </a:rPr>
-              <a:t>.RData</a:t>
+              <a:t>.</a:t>
+            </a:r>
+            <a:r>
+              <a:rPr lang="en-US" sz="1200" b="1" i="0" u="none" strike="noStrike" cap="none" dirty="0" err="1">
+                <a:solidFill>
+                  <a:srgbClr val="FFBD2E"/>
+                </a:solidFill>
+                <a:latin typeface="IDLC" pitchFamily="2" charset="0"/>
+                <a:ea typeface="JetBrains Mono"/>
+                <a:cs typeface="IDLC" pitchFamily="2" charset="0"/>
+                <a:sym typeface="JetBrains Mono"/>
+              </a:rPr>
+              <a:t>RData</a:t>
+            </a:r>
+            <a:r>
+              <a:rPr lang="en-US" sz="2400" b="0" i="0" u="none" strike="noStrike" cap="none" dirty="0">
+                <a:solidFill>
+                  <a:schemeClr val="dk1"/>
+                </a:solidFill>
+                <a:latin typeface="IDLC" pitchFamily="2" charset="0"/>
+                <a:ea typeface="Calibri"/>
+                <a:cs typeface="IDLC" pitchFamily="2" charset="0"/>
+                <a:sym typeface="Calibri"/>
+              </a:rPr>
+              <a:t/>
             </a:r>
             <a:br>
-              <a:rPr lang="en-US" sz="1800" b="0" i="0" u="none" strike="noStrike" cap="none">
+              <a:rPr lang="en-US" sz="2400" b="0" i="0" u="none" strike="noStrike" cap="none" dirty="0">
                 <a:solidFill>
                   <a:schemeClr val="dk1"/>
                 </a:solidFill>
-                <a:latin typeface="Calibri"/>
+                <a:latin typeface="IDLC" pitchFamily="2" charset="0"/>
                 <a:ea typeface="Calibri"/>
-                <a:cs typeface="Calibri"/>
+                <a:cs typeface="IDLC" pitchFamily="2" charset="0"/>
                 <a:sym typeface="Calibri"/>
               </a:rPr>
             </a:br>
             <a:r>
-              <a:rPr lang="en-US" sz="1050" b="1" i="0" u="none" strike="noStrike" cap="none">
+              <a:rPr lang="en-US" sz="1200" b="1" i="0" u="none" strike="noStrike" cap="none" dirty="0">
                 <a:solidFill>
                   <a:srgbClr val="FFBD2E"/>
                 </a:solidFill>
-                <a:latin typeface="JetBrains Mono"/>
+                <a:latin typeface="IDLC" pitchFamily="2" charset="0"/>
                 <a:ea typeface="JetBrains Mono"/>
-                <a:cs typeface="JetBrains Mono"/>
+                <a:cs typeface="IDLC" pitchFamily="2" charset="0"/>
                 <a:sym typeface="JetBrains Mono"/>
               </a:rPr>
-              <a:t>.Rproj.user/</a:t>
+              <a:t>.</a:t>
+            </a:r>
+            <a:r>
+              <a:rPr lang="en-US" sz="1200" b="1" i="0" u="none" strike="noStrike" cap="none" dirty="0" err="1">
+                <a:solidFill>
+                  <a:srgbClr val="FFBD2E"/>
+                </a:solidFill>
+                <a:latin typeface="IDLC" pitchFamily="2" charset="0"/>
+                <a:ea typeface="JetBrains Mono"/>
+                <a:cs typeface="IDLC" pitchFamily="2" charset="0"/>
+                <a:sym typeface="JetBrains Mono"/>
+              </a:rPr>
+              <a:t>Rproj.user</a:t>
+            </a:r>
+            <a:r>
+              <a:rPr lang="en-US" sz="1200" b="1" i="0" u="none" strike="noStrike" cap="none" dirty="0">
+                <a:solidFill>
+                  <a:srgbClr val="FFBD2E"/>
+                </a:solidFill>
+                <a:latin typeface="IDLC" pitchFamily="2" charset="0"/>
+                <a:ea typeface="JetBrains Mono"/>
+                <a:cs typeface="IDLC" pitchFamily="2" charset="0"/>
+                <a:sym typeface="JetBrains Mono"/>
+              </a:rPr>
+              <a:t>/</a:t>
+            </a:r>
+            <a:r>
+              <a:rPr lang="en-US" sz="2400" b="0" i="0" u="none" strike="noStrike" cap="none" dirty="0">
+                <a:solidFill>
+                  <a:schemeClr val="dk1"/>
+                </a:solidFill>
+                <a:latin typeface="IDLC" pitchFamily="2" charset="0"/>
+                <a:ea typeface="Calibri"/>
+                <a:cs typeface="IDLC" pitchFamily="2" charset="0"/>
+                <a:sym typeface="Calibri"/>
+              </a:rPr>
+              <a:t/>
             </a:r>
             <a:br>
-              <a:rPr lang="en-US" sz="1800" b="0" i="0" u="none" strike="noStrike" cap="none">
+              <a:rPr lang="en-US" sz="2400" b="0" i="0" u="none" strike="noStrike" cap="none" dirty="0">
                 <a:solidFill>
                   <a:schemeClr val="dk1"/>
                 </a:solidFill>
-                <a:latin typeface="Calibri"/>
+                <a:latin typeface="IDLC" pitchFamily="2" charset="0"/>
                 <a:ea typeface="Calibri"/>
-                <a:cs typeface="Calibri"/>
+                <a:cs typeface="IDLC" pitchFamily="2" charset="0"/>
                 <a:sym typeface="Calibri"/>
               </a:rPr>
             </a:br>
+            <a:r>
+              <a:rPr lang="en-US" sz="2400" b="0" i="0" u="none" strike="noStrike" cap="none" dirty="0">
+                <a:solidFill>
+                  <a:schemeClr val="dk1"/>
+                </a:solidFill>
+                <a:latin typeface="IDLC" pitchFamily="2" charset="0"/>
+                <a:ea typeface="Calibri"/>
+                <a:cs typeface="IDLC" pitchFamily="2" charset="0"/>
+                <a:sym typeface="Calibri"/>
+              </a:rPr>
+              <a:t/>
+            </a:r>
             <a:br>
-              <a:rPr lang="en-US" sz="1800" b="0" i="0" u="none" strike="noStrike" cap="none">
+              <a:rPr lang="en-US" sz="2400" b="0" i="0" u="none" strike="noStrike" cap="none" dirty="0">
                 <a:solidFill>
                   <a:schemeClr val="dk1"/>
                 </a:solidFill>
-                <a:latin typeface="Calibri"/>
+                <a:latin typeface="IDLC" pitchFamily="2" charset="0"/>
                 <a:ea typeface="Calibri"/>
-                <a:cs typeface="Calibri"/>
+                <a:cs typeface="IDLC" pitchFamily="2" charset="0"/>
                 <a:sym typeface="Calibri"/>
               </a:rPr>
             </a:br>
             <a:r>
-              <a:rPr lang="en-US" sz="1050" b="0" i="1" u="none" strike="noStrike" cap="none">
+              <a:rPr lang="en-US" sz="1200" b="0" i="1" u="none" strike="noStrike" cap="none" dirty="0">
                 <a:solidFill>
                   <a:srgbClr val="555555"/>
                 </a:solidFill>
-                <a:latin typeface="JetBrains Mono"/>
+                <a:latin typeface="IDLC" pitchFamily="2" charset="0"/>
                 <a:ea typeface="JetBrains Mono"/>
-                <a:cs typeface="JetBrains Mono"/>
+                <a:cs typeface="IDLC" pitchFamily="2" charset="0"/>
                 <a:sym typeface="JetBrains Mono"/>
               </a:rPr>
               <a:t># Exclude heavy raw datasets</a:t>
             </a:r>
+            <a:r>
+              <a:rPr lang="en-US" sz="2400" b="0" i="0" u="none" strike="noStrike" cap="none" dirty="0">
+                <a:solidFill>
+                  <a:schemeClr val="dk1"/>
+                </a:solidFill>
+                <a:latin typeface="IDLC" pitchFamily="2" charset="0"/>
+                <a:ea typeface="Calibri"/>
+                <a:cs typeface="IDLC" pitchFamily="2" charset="0"/>
+                <a:sym typeface="Calibri"/>
+              </a:rPr>
+              <a:t/>
+            </a:r>
             <a:br>
-              <a:rPr lang="en-US" sz="1800" b="0" i="0" u="none" strike="noStrike" cap="none">
+              <a:rPr lang="en-US" sz="2400" b="0" i="0" u="none" strike="noStrike" cap="none" dirty="0">
                 <a:solidFill>
                   <a:schemeClr val="dk1"/>
                 </a:solidFill>
-                <a:latin typeface="Calibri"/>
+                <a:latin typeface="IDLC" pitchFamily="2" charset="0"/>
                 <a:ea typeface="Calibri"/>
-                <a:cs typeface="Calibri"/>
+                <a:cs typeface="IDLC" pitchFamily="2" charset="0"/>
                 <a:sym typeface="Calibri"/>
               </a:rPr>
             </a:br>
             <a:r>
-              <a:rPr lang="en-US" sz="1050" b="0" i="0" u="none" strike="noStrike" cap="none">
+              <a:rPr lang="en-US" sz="1200" b="0" i="0" u="none" strike="noStrike" cap="none" dirty="0">
                 <a:solidFill>
                   <a:srgbClr val="60A5FA"/>
                 </a:solidFill>
-                <a:latin typeface="JetBrains Mono"/>
+                <a:latin typeface="IDLC" pitchFamily="2" charset="0"/>
                 <a:ea typeface="JetBrains Mono"/>
-                <a:cs typeface="JetBrains Mono"/>
+                <a:cs typeface="IDLC" pitchFamily="2" charset="0"/>
                 <a:sym typeface="JetBrains Mono"/>
               </a:rPr>
               <a:t>data/raw/</a:t>
             </a:r>
+            <a:r>
+              <a:rPr lang="en-US" sz="2400" b="0" i="0" u="none" strike="noStrike" cap="none" dirty="0">
+                <a:solidFill>
+                  <a:schemeClr val="dk1"/>
+                </a:solidFill>
+                <a:latin typeface="IDLC" pitchFamily="2" charset="0"/>
+                <a:ea typeface="Calibri"/>
+                <a:cs typeface="IDLC" pitchFamily="2" charset="0"/>
+                <a:sym typeface="Calibri"/>
+              </a:rPr>
+              <a:t/>
+            </a:r>
             <a:br>
-              <a:rPr lang="en-US" sz="1800" b="0" i="0" u="none" strike="noStrike" cap="none">
+              <a:rPr lang="en-US" sz="2400" b="0" i="0" u="none" strike="noStrike" cap="none" dirty="0">
                 <a:solidFill>
                   <a:schemeClr val="dk1"/>
                 </a:solidFill>
-                <a:latin typeface="Calibri"/>
+                <a:latin typeface="IDLC" pitchFamily="2" charset="0"/>
                 <a:ea typeface="Calibri"/>
-                <a:cs typeface="Calibri"/>
+                <a:cs typeface="IDLC" pitchFamily="2" charset="0"/>
                 <a:sym typeface="Calibri"/>
               </a:rPr>
             </a:br>
             <a:r>
-              <a:rPr lang="en-US" sz="1050" b="1" i="0" u="none" strike="noStrike" cap="none">
+              <a:rPr lang="en-US" sz="1200" b="1" i="0" u="none" strike="noStrike" cap="none" dirty="0">
                 <a:solidFill>
                   <a:srgbClr val="FFBD2E"/>
                 </a:solidFill>
-                <a:latin typeface="JetBrains Mono"/>
+                <a:latin typeface="IDLC" pitchFamily="2" charset="0"/>
                 <a:ea typeface="JetBrains Mono"/>
-                <a:cs typeface="JetBrains Mono"/>
+                <a:cs typeface="IDLC" pitchFamily="2" charset="0"/>
                 <a:sym typeface="JetBrains Mono"/>
               </a:rPr>
               <a:t>*.csv</a:t>
             </a:r>
+            <a:r>
+              <a:rPr lang="en-US" sz="2400" b="0" i="0" u="none" strike="noStrike" cap="none" dirty="0">
+                <a:solidFill>
+                  <a:schemeClr val="dk1"/>
+                </a:solidFill>
+                <a:latin typeface="IDLC" pitchFamily="2" charset="0"/>
+                <a:ea typeface="Calibri"/>
+                <a:cs typeface="IDLC" pitchFamily="2" charset="0"/>
+                <a:sym typeface="Calibri"/>
+              </a:rPr>
+              <a:t/>
+            </a:r>
             <a:br>
-              <a:rPr lang="en-US" sz="1800" b="0" i="0" u="none" strike="noStrike" cap="none">
+              <a:rPr lang="en-US" sz="2400" b="0" i="0" u="none" strike="noStrike" cap="none" dirty="0">
                 <a:solidFill>
                   <a:schemeClr val="dk1"/>
                 </a:solidFill>
-                <a:latin typeface="Calibri"/>
+                <a:latin typeface="IDLC" pitchFamily="2" charset="0"/>
                 <a:ea typeface="Calibri"/>
-                <a:cs typeface="Calibri"/>
+                <a:cs typeface="IDLC" pitchFamily="2" charset="0"/>
                 <a:sym typeface="Calibri"/>
               </a:rPr>
             </a:br>
             <a:r>
-              <a:rPr lang="en-US" sz="1050" b="1" i="0" u="none" strike="noStrike" cap="none">
+              <a:rPr lang="en-US" sz="1200" b="1" i="0" u="none" strike="noStrike" cap="none" dirty="0">
                 <a:solidFill>
                   <a:srgbClr val="FFBD2E"/>
                 </a:solidFill>
-                <a:latin typeface="JetBrains Mono"/>
+                <a:latin typeface="IDLC" pitchFamily="2" charset="0"/>
                 <a:ea typeface="JetBrains Mono"/>
-                <a:cs typeface="JetBrains Mono"/>
+                <a:cs typeface="IDLC" pitchFamily="2" charset="0"/>
                 <a:sym typeface="JetBrains Mono"/>
               </a:rPr>
-              <a:t>*.rds</a:t>
+              <a:t>*.</a:t>
+            </a:r>
+            <a:r>
+              <a:rPr lang="en-US" sz="1200" b="1" i="0" u="none" strike="noStrike" cap="none" dirty="0" err="1">
+                <a:solidFill>
+                  <a:srgbClr val="FFBD2E"/>
+                </a:solidFill>
+                <a:latin typeface="IDLC" pitchFamily="2" charset="0"/>
+                <a:ea typeface="JetBrains Mono"/>
+                <a:cs typeface="IDLC" pitchFamily="2" charset="0"/>
+                <a:sym typeface="JetBrains Mono"/>
+              </a:rPr>
+              <a:t>rds</a:t>
+            </a:r>
+            <a:r>
+              <a:rPr lang="en-US" sz="2400" b="0" i="0" u="none" strike="noStrike" cap="none" dirty="0">
+                <a:solidFill>
+                  <a:schemeClr val="dk1"/>
+                </a:solidFill>
+                <a:latin typeface="IDLC" pitchFamily="2" charset="0"/>
+                <a:ea typeface="Calibri"/>
+                <a:cs typeface="IDLC" pitchFamily="2" charset="0"/>
+                <a:sym typeface="Calibri"/>
+              </a:rPr>
+              <a:t/>
             </a:r>
             <a:br>
-              <a:rPr lang="en-US" sz="1800" b="0" i="0" u="none" strike="noStrike" cap="none">
+              <a:rPr lang="en-US" sz="2400" b="0" i="0" u="none" strike="noStrike" cap="none" dirty="0">
                 <a:solidFill>
                   <a:schemeClr val="dk1"/>
                 </a:solidFill>
-                <a:latin typeface="Calibri"/>
+                <a:latin typeface="IDLC" pitchFamily="2" charset="0"/>
                 <a:ea typeface="Calibri"/>
-                <a:cs typeface="Calibri"/>
+                <a:cs typeface="IDLC" pitchFamily="2" charset="0"/>
                 <a:sym typeface="Calibri"/>
               </a:rPr>
             </a:br>
+            <a:r>
+              <a:rPr lang="en-US" sz="2400" b="0" i="0" u="none" strike="noStrike" cap="none" dirty="0">
+                <a:solidFill>
+                  <a:schemeClr val="dk1"/>
+                </a:solidFill>
+                <a:latin typeface="IDLC" pitchFamily="2" charset="0"/>
+                <a:ea typeface="Calibri"/>
+                <a:cs typeface="IDLC" pitchFamily="2" charset="0"/>
+                <a:sym typeface="Calibri"/>
+              </a:rPr>
+              <a:t/>
+            </a:r>
             <a:br>
-              <a:rPr lang="en-US" sz="1800" b="0" i="0" u="none" strike="noStrike" cap="none">
+              <a:rPr lang="en-US" sz="2400" b="0" i="0" u="none" strike="noStrike" cap="none" dirty="0">
                 <a:solidFill>
                   <a:schemeClr val="dk1"/>
                 </a:solidFill>
-                <a:latin typeface="Calibri"/>
+                <a:latin typeface="IDLC" pitchFamily="2" charset="0"/>
                 <a:ea typeface="Calibri"/>
-                <a:cs typeface="Calibri"/>
+                <a:cs typeface="IDLC" pitchFamily="2" charset="0"/>
                 <a:sym typeface="Calibri"/>
               </a:rPr>
             </a:br>
             <a:r>
-              <a:rPr lang="en-US" sz="1050" b="0" i="1" u="none" strike="noStrike" cap="none">
+              <a:rPr lang="en-US" sz="1200" b="0" i="1" u="none" strike="noStrike" cap="none" dirty="0">
                 <a:solidFill>
                   <a:srgbClr val="555555"/>
                 </a:solidFill>
-                <a:latin typeface="JetBrains Mono"/>
+                <a:latin typeface="IDLC" pitchFamily="2" charset="0"/>
                 <a:ea typeface="JetBrains Mono"/>
-                <a:cs typeface="JetBrains Mono"/>
+                <a:cs typeface="IDLC" pitchFamily="2" charset="0"/>
                 <a:sym typeface="JetBrains Mono"/>
               </a:rPr>
               <a:t># Security Credentials</a:t>
             </a:r>
+            <a:r>
+              <a:rPr lang="en-US" sz="2400" b="0" i="0" u="none" strike="noStrike" cap="none" dirty="0">
+                <a:solidFill>
+                  <a:schemeClr val="dk1"/>
+                </a:solidFill>
+                <a:latin typeface="IDLC" pitchFamily="2" charset="0"/>
+                <a:ea typeface="Calibri"/>
+                <a:cs typeface="IDLC" pitchFamily="2" charset="0"/>
+                <a:sym typeface="Calibri"/>
+              </a:rPr>
+              <a:t/>
+            </a:r>
             <a:br>
-              <a:rPr lang="en-US" sz="1800" b="0" i="0" u="none" strike="noStrike" cap="none">
+              <a:rPr lang="en-US" sz="2400" b="0" i="0" u="none" strike="noStrike" cap="none" dirty="0">
                 <a:solidFill>
                   <a:schemeClr val="dk1"/>
                 </a:solidFill>
-                <a:latin typeface="Calibri"/>
+                <a:latin typeface="IDLC" pitchFamily="2" charset="0"/>
                 <a:ea typeface="Calibri"/>
-                <a:cs typeface="Calibri"/>
+                <a:cs typeface="IDLC" pitchFamily="2" charset="0"/>
                 <a:sym typeface="Calibri"/>
               </a:rPr>
             </a:br>
             <a:r>
-              <a:rPr lang="en-US" sz="1050" b="1" i="0" u="none" strike="noStrike" cap="none">
+              <a:rPr lang="en-US" sz="1200" b="1" i="0" u="none" strike="noStrike" cap="none" dirty="0">
                 <a:solidFill>
                   <a:srgbClr val="FFBD2E"/>
                 </a:solidFill>
-                <a:latin typeface="JetBrains Mono"/>
+                <a:latin typeface="IDLC" pitchFamily="2" charset="0"/>
                 <a:ea typeface="JetBrains Mono"/>
-                <a:cs typeface="JetBrains Mono"/>
+                <a:cs typeface="IDLC" pitchFamily="2" charset="0"/>
                 <a:sym typeface="JetBrains Mono"/>
               </a:rPr>
-              <a:t>.env</a:t>
+              <a:t>.</a:t>
+            </a:r>
+            <a:r>
+              <a:rPr lang="en-US" sz="1200" b="1" i="0" u="none" strike="noStrike" cap="none" dirty="0" err="1">
+                <a:solidFill>
+                  <a:srgbClr val="FFBD2E"/>
+                </a:solidFill>
+                <a:latin typeface="IDLC" pitchFamily="2" charset="0"/>
+                <a:ea typeface="JetBrains Mono"/>
+                <a:cs typeface="IDLC" pitchFamily="2" charset="0"/>
+                <a:sym typeface="JetBrains Mono"/>
+              </a:rPr>
+              <a:t>env</a:t>
+            </a:r>
+            <a:r>
+              <a:rPr lang="en-US" sz="2400" b="0" i="0" u="none" strike="noStrike" cap="none" dirty="0">
+                <a:solidFill>
+                  <a:schemeClr val="dk1"/>
+                </a:solidFill>
+                <a:latin typeface="IDLC" pitchFamily="2" charset="0"/>
+                <a:ea typeface="Calibri"/>
+                <a:cs typeface="IDLC" pitchFamily="2" charset="0"/>
+                <a:sym typeface="Calibri"/>
+              </a:rPr>
+              <a:t/>
             </a:r>
             <a:br>
-              <a:rPr lang="en-US" sz="1800" b="0" i="0" u="none" strike="noStrike" cap="none">
+              <a:rPr lang="en-US" sz="2400" b="0" i="0" u="none" strike="noStrike" cap="none" dirty="0">
                 <a:solidFill>
                   <a:schemeClr val="dk1"/>
                 </a:solidFill>
-                <a:latin typeface="Calibri"/>
+                <a:latin typeface="IDLC" pitchFamily="2" charset="0"/>
                 <a:ea typeface="Calibri"/>
-                <a:cs typeface="Calibri"/>
+                <a:cs typeface="IDLC" pitchFamily="2" charset="0"/>
                 <a:sym typeface="Calibri"/>
               </a:rPr>
             </a:br>
             <a:r>
-              <a:rPr lang="en-US" sz="1050" b="1" i="0" u="none" strike="noStrike" cap="none">
+              <a:rPr lang="en-US" sz="1200" b="1" i="0" u="none" strike="noStrike" cap="none" dirty="0" err="1">
                 <a:solidFill>
                   <a:srgbClr val="FFBD2E"/>
                 </a:solidFill>
-                <a:latin typeface="JetBrains Mono"/>
+                <a:latin typeface="IDLC" pitchFamily="2" charset="0"/>
                 <a:ea typeface="JetBrains Mono"/>
-                <a:cs typeface="JetBrains Mono"/>
+                <a:cs typeface="IDLC" pitchFamily="2" charset="0"/>
                 <a:sym typeface="JetBrains Mono"/>
               </a:rPr>
               <a:t>config_secret.R</a:t>
             </a:r>
-            <a:endParaRPr/>
+            <a:endParaRPr sz="1800" dirty="0">
+              <a:latin typeface="IDLC" pitchFamily="2" charset="0"/>
+              <a:cs typeface="IDLC" pitchFamily="2" charset="0"/>
+            </a:endParaRPr>
           </a:p>
         </p:txBody>
       </p:sp>
@@ -19814,8 +20493,8 @@
         </p:nvSpPr>
         <p:spPr>
           <a:xfrm>
-            <a:off x="1057275" y="3798540"/>
-            <a:ext cx="5256758" cy="487560"/>
+            <a:off x="1057275" y="3855690"/>
+            <a:ext cx="5256758" cy="590931"/>
           </a:xfrm>
           <a:prstGeom prst="rect">
             <a:avLst/>
@@ -19848,9 +20527,9 @@
                 <a:solidFill>
                   <a:srgbClr val="CCCCCC"/>
                 </a:solidFill>
-                <a:latin typeface="Urbanist"/>
+                <a:latin typeface="IDLC" pitchFamily="2" charset="0"/>
                 <a:ea typeface="Urbanist"/>
-                <a:cs typeface="Urbanist"/>
+                <a:cs typeface="IDLC" pitchFamily="2" charset="0"/>
                 <a:sym typeface="Urbanist"/>
               </a:rPr>
               <a:t>Avoid Big Uploads:</a:t>
@@ -19860,14 +20539,17 @@
                 <a:solidFill>
                   <a:srgbClr val="CCCCCC"/>
                 </a:solidFill>
-                <a:latin typeface="Urbanist"/>
+                <a:latin typeface="IDLC" pitchFamily="2" charset="0"/>
                 <a:ea typeface="Urbanist"/>
-                <a:cs typeface="Urbanist"/>
+                <a:cs typeface="IDLC" pitchFamily="2" charset="0"/>
                 <a:sym typeface="Urbanist"/>
               </a:rPr>
               <a:t> Prevent massive datasets (CSV, RDS) from slowing down your pushes.</a:t>
             </a:r>
-            <a:endParaRPr/>
+            <a:endParaRPr>
+              <a:latin typeface="IDLC" pitchFamily="2" charset="0"/>
+              <a:cs typeface="IDLC" pitchFamily="2" charset="0"/>
+            </a:endParaRPr>
           </a:p>
         </p:txBody>
       </p:sp>
@@ -19879,8 +20561,8 @@
         </p:nvSpPr>
         <p:spPr>
           <a:xfrm>
-            <a:off x="1057275" y="4428976"/>
-            <a:ext cx="5256758" cy="253305"/>
+            <a:off x="1057275" y="4486126"/>
+            <a:ext cx="5256758" cy="295466"/>
           </a:xfrm>
           <a:prstGeom prst="rect">
             <a:avLst/>
@@ -19913,9 +20595,9 @@
                 <a:solidFill>
                   <a:srgbClr val="CCCCCC"/>
                 </a:solidFill>
-                <a:latin typeface="Urbanist"/>
+                <a:latin typeface="IDLC" pitchFamily="2" charset="0"/>
                 <a:ea typeface="Urbanist"/>
-                <a:cs typeface="Urbanist"/>
+                <a:cs typeface="IDLC" pitchFamily="2" charset="0"/>
                 <a:sym typeface="Urbanist"/>
               </a:rPr>
               <a:t>Secure Passwords:</a:t>
@@ -19925,14 +20607,17 @@
                 <a:solidFill>
                   <a:srgbClr val="CCCCCC"/>
                 </a:solidFill>
-                <a:latin typeface="Urbanist"/>
+                <a:latin typeface="IDLC" pitchFamily="2" charset="0"/>
                 <a:ea typeface="Urbanist"/>
-                <a:cs typeface="Urbanist"/>
+                <a:cs typeface="IDLC" pitchFamily="2" charset="0"/>
                 <a:sym typeface="Urbanist"/>
               </a:rPr>
               <a:t> Never push .env or secrets keys to the public cloud.</a:t>
             </a:r>
-            <a:endParaRPr/>
+            <a:endParaRPr>
+              <a:latin typeface="IDLC" pitchFamily="2" charset="0"/>
+              <a:cs typeface="IDLC" pitchFamily="2" charset="0"/>
+            </a:endParaRPr>
           </a:p>
         </p:txBody>
       </p:sp>
@@ -19944,8 +20629,8 @@
         </p:nvSpPr>
         <p:spPr>
           <a:xfrm>
-            <a:off x="1057275" y="4825156"/>
-            <a:ext cx="5256758" cy="487560"/>
+            <a:off x="1057275" y="4882306"/>
+            <a:ext cx="5256758" cy="590931"/>
           </a:xfrm>
           <a:prstGeom prst="rect">
             <a:avLst/>
@@ -19978,9 +20663,9 @@
                 <a:solidFill>
                   <a:srgbClr val="CCCCCC"/>
                 </a:solidFill>
-                <a:latin typeface="Urbanist"/>
+                <a:latin typeface="IDLC" pitchFamily="2" charset="0"/>
                 <a:ea typeface="Urbanist"/>
-                <a:cs typeface="Urbanist"/>
+                <a:cs typeface="IDLC" pitchFamily="2" charset="0"/>
                 <a:sym typeface="Urbanist"/>
               </a:rPr>
               <a:t>Ignore Local R junk:</a:t>
@@ -19990,14 +20675,17 @@
                 <a:solidFill>
                   <a:srgbClr val="CCCCCC"/>
                 </a:solidFill>
-                <a:latin typeface="Urbanist"/>
+                <a:latin typeface="IDLC" pitchFamily="2" charset="0"/>
                 <a:ea typeface="Urbanist"/>
-                <a:cs typeface="Urbanist"/>
+                <a:cs typeface="IDLC" pitchFamily="2" charset="0"/>
                 <a:sym typeface="Urbanist"/>
               </a:rPr>
               <a:t> Leave IDE configuration metadata behind so it doesn't clutter team file history.</a:t>
             </a:r>
-            <a:endParaRPr/>
+            <a:endParaRPr>
+              <a:latin typeface="IDLC" pitchFamily="2" charset="0"/>
+              <a:cs typeface="IDLC" pitchFamily="2" charset="0"/>
+            </a:endParaRPr>
           </a:p>
         </p:txBody>
       </p:sp>
@@ -20009,8 +20697,8 @@
         </p:nvSpPr>
         <p:spPr>
           <a:xfrm>
-            <a:off x="771525" y="3798540"/>
-            <a:ext cx="152400" cy="247650"/>
+            <a:off x="771525" y="3855690"/>
+            <a:ext cx="152400" cy="295466"/>
           </a:xfrm>
           <a:prstGeom prst="rect">
             <a:avLst/>
@@ -20043,14 +20731,17 @@
                 <a:solidFill>
                   <a:srgbClr val="CCFF66"/>
                 </a:solidFill>
-                <a:latin typeface="Urbanist"/>
+                <a:latin typeface="IDLC" pitchFamily="2" charset="0"/>
                 <a:ea typeface="Urbanist"/>
-                <a:cs typeface="Urbanist"/>
+                <a:cs typeface="IDLC" pitchFamily="2" charset="0"/>
                 <a:sym typeface="Urbanist"/>
               </a:rPr>
               <a:t>→</a:t>
             </a:r>
-            <a:endParaRPr/>
+            <a:endParaRPr>
+              <a:latin typeface="IDLC" pitchFamily="2" charset="0"/>
+              <a:cs typeface="IDLC" pitchFamily="2" charset="0"/>
+            </a:endParaRPr>
           </a:p>
         </p:txBody>
       </p:sp>
@@ -20062,8 +20753,8 @@
         </p:nvSpPr>
         <p:spPr>
           <a:xfrm>
-            <a:off x="771525" y="4428976"/>
-            <a:ext cx="152400" cy="247650"/>
+            <a:off x="771525" y="4486126"/>
+            <a:ext cx="152400" cy="295466"/>
           </a:xfrm>
           <a:prstGeom prst="rect">
             <a:avLst/>
@@ -20096,14 +20787,17 @@
                 <a:solidFill>
                   <a:srgbClr val="CCFF66"/>
                 </a:solidFill>
-                <a:latin typeface="Urbanist"/>
+                <a:latin typeface="IDLC" pitchFamily="2" charset="0"/>
                 <a:ea typeface="Urbanist"/>
-                <a:cs typeface="Urbanist"/>
+                <a:cs typeface="IDLC" pitchFamily="2" charset="0"/>
                 <a:sym typeface="Urbanist"/>
               </a:rPr>
               <a:t>→</a:t>
             </a:r>
-            <a:endParaRPr/>
+            <a:endParaRPr>
+              <a:latin typeface="IDLC" pitchFamily="2" charset="0"/>
+              <a:cs typeface="IDLC" pitchFamily="2" charset="0"/>
+            </a:endParaRPr>
           </a:p>
         </p:txBody>
       </p:sp>
@@ -20115,8 +20809,8 @@
         </p:nvSpPr>
         <p:spPr>
           <a:xfrm>
-            <a:off x="771525" y="4825156"/>
-            <a:ext cx="152400" cy="247650"/>
+            <a:off x="771525" y="4882306"/>
+            <a:ext cx="152400" cy="295466"/>
           </a:xfrm>
           <a:prstGeom prst="rect">
             <a:avLst/>
@@ -20149,14 +20843,17 @@
                 <a:solidFill>
                   <a:srgbClr val="CCFF66"/>
                 </a:solidFill>
-                <a:latin typeface="Urbanist"/>
+                <a:latin typeface="IDLC" pitchFamily="2" charset="0"/>
                 <a:ea typeface="Urbanist"/>
-                <a:cs typeface="Urbanist"/>
+                <a:cs typeface="IDLC" pitchFamily="2" charset="0"/>
                 <a:sym typeface="Urbanist"/>
               </a:rPr>
               <a:t>→</a:t>
             </a:r>
-            <a:endParaRPr/>
+            <a:endParaRPr>
+              <a:latin typeface="IDLC" pitchFamily="2" charset="0"/>
+              <a:cs typeface="IDLC" pitchFamily="2" charset="0"/>
+            </a:endParaRPr>
           </a:p>
         </p:txBody>
       </p:sp>
@@ -20175,7 +20872,7 @@
         </p:blipFill>
         <p:spPr>
           <a:xfrm>
-            <a:off x="7085558" y="2299841"/>
+            <a:off x="7085558" y="2356991"/>
             <a:ext cx="133350" cy="133350"/>
           </a:xfrm>
           <a:prstGeom prst="rect">
@@ -20195,8 +20892,8 @@
         </p:nvSpPr>
         <p:spPr>
           <a:xfrm>
-            <a:off x="962025" y="581025"/>
-            <a:ext cx="10981372" cy="514350"/>
+            <a:off x="962025" y="638175"/>
+            <a:ext cx="10981372" cy="623248"/>
           </a:xfrm>
           <a:prstGeom prst="rect">
             <a:avLst/>
@@ -20225,18 +20922,33 @@
               <a:buNone/>
             </a:pPr>
             <a:r>
-              <a:rPr lang="en-US" sz="4050" b="1" i="0" u="none" strike="noStrike" cap="none">
+              <a:rPr lang="en-US" sz="4050" b="1" i="0" u="none" strike="noStrike" cap="none" dirty="0">
+                <a:solidFill>
+                  <a:schemeClr val="bg1"/>
+                </a:solidFill>
+                <a:latin typeface="IDLC" pitchFamily="2" charset="0"/>
+                <a:ea typeface="Urbanist"/>
+                <a:cs typeface="IDLC" pitchFamily="2" charset="0"/>
+                <a:sym typeface="Urbanist"/>
+              </a:rPr>
+              <a:t>KEEPING REPOS </a:t>
+            </a:r>
+            <a:r>
+              <a:rPr lang="en-US" sz="4050" b="1" i="0" u="none" strike="noStrike" cap="none" dirty="0">
                 <a:solidFill>
                   <a:srgbClr val="CCFF66"/>
                 </a:solidFill>
-                <a:latin typeface="Urbanist"/>
+                <a:latin typeface="IDLC" pitchFamily="2" charset="0"/>
                 <a:ea typeface="Urbanist"/>
-                <a:cs typeface="Urbanist"/>
+                <a:cs typeface="IDLC" pitchFamily="2" charset="0"/>
                 <a:sym typeface="Urbanist"/>
               </a:rPr>
-              <a:t>KEEPING REPOS CLEAN</a:t>
-            </a:r>
-            <a:endParaRPr/>
+              <a:t>CLEAN</a:t>
+            </a:r>
+            <a:endParaRPr dirty="0">
+              <a:latin typeface="IDLC" pitchFamily="2" charset="0"/>
+              <a:cs typeface="IDLC" pitchFamily="2" charset="0"/>
+            </a:endParaRPr>
           </a:p>
         </p:txBody>
       </p:sp>
@@ -20248,7 +20960,7 @@
         </p:nvSpPr>
         <p:spPr>
           <a:xfrm>
-            <a:off x="771525" y="581025"/>
+            <a:off x="771525" y="638175"/>
             <a:ext cx="76200" cy="514350"/>
           </a:xfrm>
           <a:prstGeom prst="rect">
@@ -20280,9 +20992,9 @@
               <a:solidFill>
                 <a:schemeClr val="dk1"/>
               </a:solidFill>
-              <a:latin typeface="Calibri"/>
+              <a:latin typeface="IDLC" pitchFamily="2" charset="0"/>
               <a:ea typeface="Calibri"/>
-              <a:cs typeface="Calibri"/>
+              <a:cs typeface="IDLC" pitchFamily="2" charset="0"/>
               <a:sym typeface="Calibri"/>
             </a:endParaRPr>
           </a:p>
@@ -20293,6 +21005,2515 @@
   <p:clrMapOvr>
     <a:masterClrMapping/>
   </p:clrMapOvr>
+  <p:timing>
+    <p:tnLst>
+      <p:par>
+        <p:cTn id="1" dur="indefinite" restart="never" nodeType="tmRoot"/>
+      </p:par>
+    </p:tnLst>
+  </p:timing>
+</p:sld>
+</file>
+
+<file path=ppt/slides/slide14.xml><?xml version="1.0" encoding="utf-8"?>
+<p:sld xmlns:a="http://schemas.openxmlformats.org/drawingml/2006/main" xmlns:r="http://schemas.openxmlformats.org/officeDocument/2006/relationships" xmlns:p="http://schemas.openxmlformats.org/presentationml/2006/main">
+  <p:cSld>
+    <p:spTree>
+      <p:nvGrpSpPr>
+        <p:cNvPr id="1" name="Shape 200"/>
+        <p:cNvGrpSpPr/>
+        <p:nvPr/>
+      </p:nvGrpSpPr>
+      <p:grpSpPr>
+        <a:xfrm>
+          <a:off x="0" y="0"/>
+          <a:ext cx="0" cy="0"/>
+          <a:chOff x="0" y="0"/>
+          <a:chExt cx="0" cy="0"/>
+        </a:xfrm>
+      </p:grpSpPr>
+      <p:sp>
+        <p:nvSpPr>
+          <p:cNvPr id="201" name="BG"/>
+          <p:cNvSpPr/>
+          <p:nvPr/>
+        </p:nvSpPr>
+        <p:spPr>
+          <a:xfrm>
+            <a:off x="0" y="0"/>
+            <a:ext cx="12192000" cy="6858000"/>
+          </a:xfrm>
+          <a:prstGeom prst="rect">
+            <a:avLst/>
+          </a:prstGeom>
+          <a:solidFill>
+            <a:srgbClr val="0D0D0D"/>
+          </a:solidFill>
+          <a:ln>
+            <a:noFill/>
+          </a:ln>
+        </p:spPr>
+        <p:txBody>
+          <a:bodyPr wrap="square" lIns="0" tIns="0" rIns="0" bIns="0" anchor="t" anchorCtr="0">
+            <a:noAutofit/>
+          </a:bodyPr>
+          <a:lstStyle/>
+          <a:p>
+            <a:endParaRPr>
+              <a:latin typeface="IDLC" pitchFamily="2" charset="0"/>
+              <a:cs typeface="IDLC" pitchFamily="2" charset="0"/>
+            </a:endParaRPr>
+          </a:p>
+        </p:txBody>
+      </p:sp>
+      <p:sp>
+        <p:nvSpPr>
+          <p:cNvPr id="202" name="AccentBar"/>
+          <p:cNvSpPr/>
+          <p:nvPr/>
+        </p:nvSpPr>
+        <p:spPr>
+          <a:xfrm>
+            <a:off x="771525" y="533400"/>
+            <a:ext cx="76200" cy="533400"/>
+          </a:xfrm>
+          <a:prstGeom prst="rect">
+            <a:avLst/>
+          </a:prstGeom>
+          <a:solidFill>
+            <a:srgbClr val="CCFF66"/>
+          </a:solidFill>
+          <a:ln>
+            <a:noFill/>
+          </a:ln>
+        </p:spPr>
+        <p:txBody>
+          <a:bodyPr wrap="square" lIns="0" tIns="0" rIns="0" bIns="0" anchor="ctr" anchorCtr="0">
+            <a:noAutofit/>
+          </a:bodyPr>
+          <a:lstStyle/>
+          <a:p>
+            <a:endParaRPr>
+              <a:latin typeface="IDLC" pitchFamily="2" charset="0"/>
+              <a:cs typeface="IDLC" pitchFamily="2" charset="0"/>
+            </a:endParaRPr>
+          </a:p>
+        </p:txBody>
+      </p:sp>
+      <p:sp>
+        <p:nvSpPr>
+          <p:cNvPr id="203" name="SlideTitle"/>
+          <p:cNvSpPr txBox="1"/>
+          <p:nvPr/>
+        </p:nvSpPr>
+        <p:spPr>
+          <a:xfrm>
+            <a:off x="962025" y="523101"/>
+            <a:ext cx="10600000" cy="553998"/>
+          </a:xfrm>
+          <a:prstGeom prst="rect">
+            <a:avLst/>
+          </a:prstGeom>
+          <a:noFill/>
+          <a:ln>
+            <a:noFill/>
+          </a:ln>
+        </p:spPr>
+        <p:txBody>
+          <a:bodyPr spcFirstLastPara="1" wrap="square" lIns="0" tIns="0" rIns="0" bIns="0" anchor="ctr" anchorCtr="0">
+            <a:spAutoFit/>
+          </a:bodyPr>
+          <a:lstStyle/>
+          <a:p>
+            <a:pPr marL="0" marR="0" lvl="0" indent="0" algn="l" rtl="0">
+              <a:spcBef>
+                <a:spcPts val="0"/>
+              </a:spcBef>
+              <a:spcAft>
+                <a:spcPts val="0"/>
+              </a:spcAft>
+              <a:buNone/>
+            </a:pPr>
+            <a:r>
+              <a:rPr lang="en-US" sz="3600" b="1" i="0" u="none" strike="noStrike" cap="none" dirty="0">
+                <a:solidFill>
+                  <a:schemeClr val="bg1"/>
+                </a:solidFill>
+                <a:latin typeface="IDLC" pitchFamily="2" charset="0"/>
+                <a:ea typeface="Urbanist"/>
+                <a:cs typeface="IDLC" pitchFamily="2" charset="0"/>
+                <a:sym typeface="Urbanist"/>
+              </a:rPr>
+              <a:t>CODING</a:t>
+            </a:r>
+            <a:r>
+              <a:rPr lang="en-US" sz="3600" b="1" i="0" u="none" strike="noStrike" cap="none" dirty="0">
+                <a:solidFill>
+                  <a:srgbClr val="CCFF66"/>
+                </a:solidFill>
+                <a:latin typeface="IDLC" pitchFamily="2" charset="0"/>
+                <a:ea typeface="Urbanist"/>
+                <a:cs typeface="IDLC" pitchFamily="2" charset="0"/>
+                <a:sym typeface="Urbanist"/>
+              </a:rPr>
+              <a:t> CONVENTIONS</a:t>
+            </a:r>
+            <a:endParaRPr dirty="0">
+              <a:latin typeface="IDLC" pitchFamily="2" charset="0"/>
+              <a:cs typeface="IDLC" pitchFamily="2" charset="0"/>
+            </a:endParaRPr>
+          </a:p>
+        </p:txBody>
+      </p:sp>
+      <p:sp>
+        <p:nvSpPr>
+          <p:cNvPr id="204" name="Subtitle"/>
+          <p:cNvSpPr txBox="1"/>
+          <p:nvPr/>
+        </p:nvSpPr>
+        <p:spPr>
+          <a:xfrm>
+            <a:off x="962025" y="1133475"/>
+            <a:ext cx="10600000" cy="200055"/>
+          </a:xfrm>
+          <a:prstGeom prst="rect">
+            <a:avLst/>
+          </a:prstGeom>
+          <a:noFill/>
+          <a:ln>
+            <a:noFill/>
+          </a:ln>
+        </p:spPr>
+        <p:txBody>
+          <a:bodyPr spcFirstLastPara="1" wrap="square" lIns="0" tIns="0" rIns="0" bIns="0" anchor="t" anchorCtr="0">
+            <a:spAutoFit/>
+          </a:bodyPr>
+          <a:lstStyle/>
+          <a:p>
+            <a:pPr marL="0" marR="0" lvl="0" indent="0" algn="l" rtl="0">
+              <a:spcBef>
+                <a:spcPts val="0"/>
+              </a:spcBef>
+              <a:spcAft>
+                <a:spcPts val="0"/>
+              </a:spcAft>
+              <a:buNone/>
+            </a:pPr>
+            <a:r>
+              <a:rPr lang="en-US" sz="1300" b="0" i="0" u="none" strike="noStrike" cap="none" dirty="0">
+                <a:solidFill>
+                  <a:srgbClr val="888888"/>
+                </a:solidFill>
+                <a:latin typeface="IDLC" pitchFamily="2" charset="0"/>
+                <a:ea typeface="Urbanist"/>
+                <a:cs typeface="IDLC" pitchFamily="2" charset="0"/>
+                <a:sym typeface="Urbanist"/>
+              </a:rPr>
+              <a:t>Write code your teammates can read, not just code that runs.</a:t>
+            </a:r>
+            <a:endParaRPr dirty="0">
+              <a:latin typeface="IDLC" pitchFamily="2" charset="0"/>
+              <a:cs typeface="IDLC" pitchFamily="2" charset="0"/>
+            </a:endParaRPr>
+          </a:p>
+        </p:txBody>
+      </p:sp>
+      <p:sp>
+        <p:nvSpPr>
+          <p:cNvPr id="205" name="DividerLine"/>
+          <p:cNvSpPr/>
+          <p:nvPr/>
+        </p:nvSpPr>
+        <p:spPr>
+          <a:xfrm>
+            <a:off x="771525" y="1447800"/>
+            <a:ext cx="10648950" cy="9525"/>
+          </a:xfrm>
+          <a:prstGeom prst="rect">
+            <a:avLst/>
+          </a:prstGeom>
+          <a:solidFill>
+            <a:srgbClr val="1E1E1E"/>
+          </a:solidFill>
+          <a:ln>
+            <a:noFill/>
+          </a:ln>
+        </p:spPr>
+        <p:txBody>
+          <a:bodyPr wrap="square" lIns="0" tIns="0" rIns="0" bIns="0" anchor="t" anchorCtr="0">
+            <a:noAutofit/>
+          </a:bodyPr>
+          <a:lstStyle/>
+          <a:p>
+            <a:endParaRPr>
+              <a:latin typeface="IDLC" pitchFamily="2" charset="0"/>
+              <a:cs typeface="IDLC" pitchFamily="2" charset="0"/>
+            </a:endParaRPr>
+          </a:p>
+        </p:txBody>
+      </p:sp>
+      <p:sp>
+        <p:nvSpPr>
+          <p:cNvPr id="206" name="CodeBlockBG"/>
+          <p:cNvSpPr/>
+          <p:nvPr/>
+        </p:nvSpPr>
+        <p:spPr>
+          <a:xfrm>
+            <a:off x="771525" y="1524000"/>
+            <a:ext cx="4953825" cy="5030100"/>
+          </a:xfrm>
+          <a:prstGeom prst="rect">
+            <a:avLst/>
+          </a:prstGeom>
+          <a:solidFill>
+            <a:srgbClr val="141414"/>
+          </a:solidFill>
+          <a:ln w="9525">
+            <a:solidFill>
+              <a:srgbClr val="252525"/>
+            </a:solidFill>
+          </a:ln>
+        </p:spPr>
+        <p:txBody>
+          <a:bodyPr wrap="square" lIns="0" tIns="0" rIns="0" bIns="0" anchor="t" anchorCtr="0">
+            <a:noAutofit/>
+          </a:bodyPr>
+          <a:lstStyle/>
+          <a:p>
+            <a:endParaRPr>
+              <a:latin typeface="IDLC" pitchFamily="2" charset="0"/>
+              <a:cs typeface="IDLC" pitchFamily="2" charset="0"/>
+            </a:endParaRPr>
+          </a:p>
+        </p:txBody>
+      </p:sp>
+      <p:sp>
+        <p:nvSpPr>
+          <p:cNvPr id="207" name="TabBar"/>
+          <p:cNvSpPr/>
+          <p:nvPr/>
+        </p:nvSpPr>
+        <p:spPr>
+          <a:xfrm>
+            <a:off x="771525" y="1524000"/>
+            <a:ext cx="4953825" cy="247650"/>
+          </a:xfrm>
+          <a:prstGeom prst="rect">
+            <a:avLst/>
+          </a:prstGeom>
+          <a:solidFill>
+            <a:srgbClr val="1A1A1A"/>
+          </a:solidFill>
+          <a:ln>
+            <a:noFill/>
+          </a:ln>
+        </p:spPr>
+        <p:txBody>
+          <a:bodyPr wrap="square" lIns="0" tIns="0" rIns="0" bIns="0" anchor="t" anchorCtr="0">
+            <a:noAutofit/>
+          </a:bodyPr>
+          <a:lstStyle/>
+          <a:p>
+            <a:endParaRPr>
+              <a:latin typeface="IDLC" pitchFamily="2" charset="0"/>
+              <a:cs typeface="IDLC" pitchFamily="2" charset="0"/>
+            </a:endParaRPr>
+          </a:p>
+        </p:txBody>
+      </p:sp>
+      <p:sp>
+        <p:nvSpPr>
+          <p:cNvPr id="208" name="ActiveTab"/>
+          <p:cNvSpPr txBox="1"/>
+          <p:nvPr/>
+        </p:nvSpPr>
+        <p:spPr>
+          <a:xfrm>
+            <a:off x="771525" y="1532429"/>
+            <a:ext cx="1371600" cy="230792"/>
+          </a:xfrm>
+          <a:prstGeom prst="rect">
+            <a:avLst/>
+          </a:prstGeom>
+          <a:solidFill>
+            <a:srgbClr val="141414"/>
+          </a:solidFill>
+          <a:ln>
+            <a:noFill/>
+          </a:ln>
+        </p:spPr>
+        <p:txBody>
+          <a:bodyPr spcFirstLastPara="1" wrap="square" lIns="114300" tIns="45700" rIns="114300" bIns="45700" anchor="ctr" anchorCtr="0">
+            <a:spAutoFit/>
+          </a:bodyPr>
+          <a:lstStyle/>
+          <a:p>
+            <a:pPr marL="0" marR="0" lvl="0" indent="0" algn="l" rtl="0">
+              <a:spcBef>
+                <a:spcPts val="0"/>
+              </a:spcBef>
+              <a:spcAft>
+                <a:spcPts val="0"/>
+              </a:spcAft>
+              <a:buNone/>
+            </a:pPr>
+            <a:r>
+              <a:rPr lang="en-US" sz="900" b="0" i="0" u="none" strike="noStrike" cap="none">
+                <a:solidFill>
+                  <a:srgbClr val="CCFF66"/>
+                </a:solidFill>
+                <a:latin typeface="IDLC" pitchFamily="2" charset="0"/>
+                <a:ea typeface="JetBrains Mono"/>
+                <a:cs typeface="IDLC" pitchFamily="2" charset="0"/>
+                <a:sym typeface="JetBrains Mono"/>
+              </a:rPr>
+              <a:t>📂 project/</a:t>
+            </a:r>
+            <a:endParaRPr>
+              <a:latin typeface="IDLC" pitchFamily="2" charset="0"/>
+              <a:cs typeface="IDLC" pitchFamily="2" charset="0"/>
+            </a:endParaRPr>
+          </a:p>
+        </p:txBody>
+      </p:sp>
+      <p:sp>
+        <p:nvSpPr>
+          <p:cNvPr id="209" name="LeftLabel"/>
+          <p:cNvSpPr txBox="1"/>
+          <p:nvPr/>
+        </p:nvSpPr>
+        <p:spPr>
+          <a:xfrm>
+            <a:off x="848025" y="1540103"/>
+            <a:ext cx="2000000" cy="215444"/>
+          </a:xfrm>
+          <a:prstGeom prst="rect">
+            <a:avLst/>
+          </a:prstGeom>
+          <a:noFill/>
+          <a:ln>
+            <a:noFill/>
+          </a:ln>
+        </p:spPr>
+        <p:txBody>
+          <a:bodyPr spcFirstLastPara="1" wrap="square" lIns="0" tIns="0" rIns="0" bIns="0" anchor="ctr" anchorCtr="0">
+            <a:spAutoFit/>
+          </a:bodyPr>
+          <a:lstStyle/>
+          <a:p>
+            <a:pPr marL="0" marR="0" lvl="0" indent="0" algn="l" rtl="0">
+              <a:spcBef>
+                <a:spcPts val="0"/>
+              </a:spcBef>
+              <a:spcAft>
+                <a:spcPts val="0"/>
+              </a:spcAft>
+              <a:buNone/>
+            </a:pPr>
+            <a:endParaRPr>
+              <a:latin typeface="IDLC" pitchFamily="2" charset="0"/>
+              <a:cs typeface="IDLC" pitchFamily="2" charset="0"/>
+            </a:endParaRPr>
+          </a:p>
+        </p:txBody>
+      </p:sp>
+      <p:sp>
+        <p:nvSpPr>
+          <p:cNvPr id="210" name="FileTree"/>
+          <p:cNvSpPr txBox="1"/>
+          <p:nvPr/>
+        </p:nvSpPr>
+        <p:spPr>
+          <a:xfrm>
+            <a:off x="895350" y="1838325"/>
+            <a:ext cx="4752450" cy="3681777"/>
+          </a:xfrm>
+          <a:prstGeom prst="rect">
+            <a:avLst/>
+          </a:prstGeom>
+          <a:noFill/>
+          <a:ln>
+            <a:noFill/>
+          </a:ln>
+        </p:spPr>
+        <p:txBody>
+          <a:bodyPr spcFirstLastPara="1" wrap="square" lIns="0" tIns="0" rIns="0" bIns="0" anchor="t" anchorCtr="0">
+            <a:spAutoFit/>
+          </a:bodyPr>
+          <a:lstStyle/>
+          <a:p>
+            <a:pPr marL="0" marR="0" lvl="0" indent="0" algn="l" rtl="0">
+              <a:lnSpc>
+                <a:spcPct val="145000"/>
+              </a:lnSpc>
+              <a:spcBef>
+                <a:spcPts val="0"/>
+              </a:spcBef>
+              <a:spcAft>
+                <a:spcPts val="0"/>
+              </a:spcAft>
+              <a:buNone/>
+            </a:pPr>
+            <a:r>
+              <a:rPr lang="en-US" sz="1100" b="0" i="1" u="none" strike="noStrike" cap="none" dirty="0">
+                <a:solidFill>
+                  <a:srgbClr val="555555"/>
+                </a:solidFill>
+                <a:latin typeface="IDLC" pitchFamily="2" charset="0"/>
+                <a:ea typeface="JetBrains Mono"/>
+                <a:cs typeface="IDLC" pitchFamily="2" charset="0"/>
+                <a:sym typeface="JetBrains Mono"/>
+              </a:rPr>
+              <a:t># Recommended project layout</a:t>
+            </a:r>
+            <a:r>
+              <a:rPr lang="en-US" sz="1100" b="0" i="0" u="none" strike="noStrike" cap="none" dirty="0">
+                <a:solidFill>
+                  <a:srgbClr val="CCCCCC"/>
+                </a:solidFill>
+                <a:latin typeface="IDLC" pitchFamily="2" charset="0"/>
+                <a:cs typeface="IDLC" pitchFamily="2" charset="0"/>
+              </a:rPr>
+              <a:t/>
+            </a:r>
+            <a:br>
+              <a:rPr lang="en-US" sz="1100" b="0" i="0" u="none" strike="noStrike" cap="none" dirty="0">
+                <a:solidFill>
+                  <a:srgbClr val="CCCCCC"/>
+                </a:solidFill>
+                <a:latin typeface="IDLC" pitchFamily="2" charset="0"/>
+                <a:cs typeface="IDLC" pitchFamily="2" charset="0"/>
+              </a:rPr>
+            </a:br>
+            <a:r>
+              <a:rPr lang="en-US" sz="1100" b="1" i="0" u="none" strike="noStrike" cap="none" dirty="0">
+                <a:solidFill>
+                  <a:srgbClr val="60A5FA"/>
+                </a:solidFill>
+                <a:latin typeface="IDLC" pitchFamily="2" charset="0"/>
+                <a:ea typeface="JetBrains Mono"/>
+                <a:cs typeface="IDLC" pitchFamily="2" charset="0"/>
+                <a:sym typeface="JetBrains Mono"/>
+              </a:rPr>
+              <a:t>project/</a:t>
+            </a:r>
+            <a:r>
+              <a:rPr lang="en-US" sz="1100" b="0" i="0" u="none" strike="noStrike" cap="none" dirty="0">
+                <a:solidFill>
+                  <a:srgbClr val="CCCCCC"/>
+                </a:solidFill>
+                <a:latin typeface="IDLC" pitchFamily="2" charset="0"/>
+                <a:cs typeface="IDLC" pitchFamily="2" charset="0"/>
+              </a:rPr>
+              <a:t/>
+            </a:r>
+            <a:br>
+              <a:rPr lang="en-US" sz="1100" b="0" i="0" u="none" strike="noStrike" cap="none" dirty="0">
+                <a:solidFill>
+                  <a:srgbClr val="CCCCCC"/>
+                </a:solidFill>
+                <a:latin typeface="IDLC" pitchFamily="2" charset="0"/>
+                <a:cs typeface="IDLC" pitchFamily="2" charset="0"/>
+              </a:rPr>
+            </a:br>
+            <a:r>
+              <a:rPr lang="en-US" sz="1100" b="0" i="0" u="none" strike="noStrike" cap="none" dirty="0">
+                <a:solidFill>
+                  <a:srgbClr val="444444"/>
+                </a:solidFill>
+                <a:latin typeface="IDLC" pitchFamily="2" charset="0"/>
+                <a:ea typeface="JetBrains Mono"/>
+                <a:cs typeface="IDLC" pitchFamily="2" charset="0"/>
+                <a:sym typeface="JetBrains Mono"/>
+              </a:rPr>
+              <a:t>├── </a:t>
+            </a:r>
+            <a:r>
+              <a:rPr lang="en-US" sz="1100" b="1" i="0" u="none" strike="noStrike" cap="none" dirty="0">
+                <a:solidFill>
+                  <a:srgbClr val="FFBD2E"/>
+                </a:solidFill>
+                <a:latin typeface="IDLC" pitchFamily="2" charset="0"/>
+                <a:ea typeface="JetBrains Mono"/>
+                <a:cs typeface="IDLC" pitchFamily="2" charset="0"/>
+                <a:sym typeface="JetBrains Mono"/>
+              </a:rPr>
+              <a:t>00_libraries.R</a:t>
+            </a:r>
+            <a:r>
+              <a:rPr lang="en-US" sz="1100" b="0" i="1" u="none" strike="noStrike" cap="none" dirty="0">
+                <a:solidFill>
+                  <a:srgbClr val="555555"/>
+                </a:solidFill>
+                <a:latin typeface="IDLC" pitchFamily="2" charset="0"/>
+                <a:ea typeface="JetBrains Mono"/>
+                <a:cs typeface="IDLC" pitchFamily="2" charset="0"/>
+                <a:sym typeface="JetBrains Mono"/>
+              </a:rPr>
+              <a:t>  # all library()</a:t>
+            </a:r>
+            <a:r>
+              <a:rPr lang="en-US" sz="1100" b="0" i="0" u="none" strike="noStrike" cap="none" dirty="0">
+                <a:solidFill>
+                  <a:srgbClr val="CCCCCC"/>
+                </a:solidFill>
+                <a:latin typeface="IDLC" pitchFamily="2" charset="0"/>
+                <a:cs typeface="IDLC" pitchFamily="2" charset="0"/>
+              </a:rPr>
+              <a:t/>
+            </a:r>
+            <a:br>
+              <a:rPr lang="en-US" sz="1100" b="0" i="0" u="none" strike="noStrike" cap="none" dirty="0">
+                <a:solidFill>
+                  <a:srgbClr val="CCCCCC"/>
+                </a:solidFill>
+                <a:latin typeface="IDLC" pitchFamily="2" charset="0"/>
+                <a:cs typeface="IDLC" pitchFamily="2" charset="0"/>
+              </a:rPr>
+            </a:br>
+            <a:r>
+              <a:rPr lang="en-US" sz="1100" b="0" i="0" u="none" strike="noStrike" cap="none" dirty="0">
+                <a:solidFill>
+                  <a:srgbClr val="444444"/>
+                </a:solidFill>
+                <a:latin typeface="IDLC" pitchFamily="2" charset="0"/>
+                <a:ea typeface="JetBrains Mono"/>
+                <a:cs typeface="IDLC" pitchFamily="2" charset="0"/>
+                <a:sym typeface="JetBrains Mono"/>
+              </a:rPr>
+              <a:t>├── </a:t>
+            </a:r>
+            <a:r>
+              <a:rPr lang="en-US" sz="1100" b="1" i="0" u="none" strike="noStrike" cap="none" dirty="0">
+                <a:solidFill>
+                  <a:srgbClr val="FFBD2E"/>
+                </a:solidFill>
+                <a:latin typeface="IDLC" pitchFamily="2" charset="0"/>
+                <a:ea typeface="JetBrains Mono"/>
+                <a:cs typeface="IDLC" pitchFamily="2" charset="0"/>
+                <a:sym typeface="JetBrains Mono"/>
+              </a:rPr>
+              <a:t>01_globals.R</a:t>
+            </a:r>
+            <a:r>
+              <a:rPr lang="en-US" sz="1100" b="0" i="1" u="none" strike="noStrike" cap="none" dirty="0">
+                <a:solidFill>
+                  <a:srgbClr val="555555"/>
+                </a:solidFill>
+                <a:latin typeface="IDLC" pitchFamily="2" charset="0"/>
+                <a:ea typeface="JetBrains Mono"/>
+                <a:cs typeface="IDLC" pitchFamily="2" charset="0"/>
+                <a:sym typeface="JetBrains Mono"/>
+              </a:rPr>
+              <a:t>   # </a:t>
+            </a:r>
+            <a:r>
+              <a:rPr lang="en-US" sz="1100" b="0" i="1" u="none" strike="noStrike" cap="none" dirty="0" err="1">
+                <a:solidFill>
+                  <a:srgbClr val="555555"/>
+                </a:solidFill>
+                <a:latin typeface="IDLC" pitchFamily="2" charset="0"/>
+                <a:ea typeface="JetBrains Mono"/>
+                <a:cs typeface="IDLC" pitchFamily="2" charset="0"/>
+                <a:sym typeface="JetBrains Mono"/>
+              </a:rPr>
+              <a:t>vars</a:t>
+            </a:r>
+            <a:r>
+              <a:rPr lang="en-US" sz="1100" b="0" i="1" u="none" strike="noStrike" cap="none" dirty="0">
+                <a:solidFill>
+                  <a:srgbClr val="555555"/>
+                </a:solidFill>
+                <a:latin typeface="IDLC" pitchFamily="2" charset="0"/>
+                <a:ea typeface="JetBrains Mono"/>
+                <a:cs typeface="IDLC" pitchFamily="2" charset="0"/>
+                <a:sym typeface="JetBrains Mono"/>
+              </a:rPr>
+              <a:t> &amp; paths</a:t>
+            </a:r>
+            <a:r>
+              <a:rPr lang="en-US" sz="1100" b="0" i="0" u="none" strike="noStrike" cap="none" dirty="0">
+                <a:solidFill>
+                  <a:srgbClr val="CCCCCC"/>
+                </a:solidFill>
+                <a:latin typeface="IDLC" pitchFamily="2" charset="0"/>
+                <a:cs typeface="IDLC" pitchFamily="2" charset="0"/>
+              </a:rPr>
+              <a:t/>
+            </a:r>
+            <a:br>
+              <a:rPr lang="en-US" sz="1100" b="0" i="0" u="none" strike="noStrike" cap="none" dirty="0">
+                <a:solidFill>
+                  <a:srgbClr val="CCCCCC"/>
+                </a:solidFill>
+                <a:latin typeface="IDLC" pitchFamily="2" charset="0"/>
+                <a:cs typeface="IDLC" pitchFamily="2" charset="0"/>
+              </a:rPr>
+            </a:br>
+            <a:r>
+              <a:rPr lang="en-US" sz="1100" b="0" i="0" u="none" strike="noStrike" cap="none" dirty="0">
+                <a:solidFill>
+                  <a:srgbClr val="444444"/>
+                </a:solidFill>
+                <a:latin typeface="IDLC" pitchFamily="2" charset="0"/>
+                <a:ea typeface="JetBrains Mono"/>
+                <a:cs typeface="IDLC" pitchFamily="2" charset="0"/>
+                <a:sym typeface="JetBrains Mono"/>
+              </a:rPr>
+              <a:t>├── </a:t>
+            </a:r>
+            <a:r>
+              <a:rPr lang="en-US" sz="1100" b="1" i="0" u="none" strike="noStrike" cap="none" dirty="0">
+                <a:solidFill>
+                  <a:srgbClr val="FFBD2E"/>
+                </a:solidFill>
+                <a:latin typeface="IDLC" pitchFamily="2" charset="0"/>
+                <a:ea typeface="JetBrains Mono"/>
+                <a:cs typeface="IDLC" pitchFamily="2" charset="0"/>
+                <a:sym typeface="JetBrains Mono"/>
+              </a:rPr>
+              <a:t>02_helpers.R</a:t>
+            </a:r>
+            <a:r>
+              <a:rPr lang="en-US" sz="1100" b="0" i="1" u="none" strike="noStrike" cap="none" dirty="0">
+                <a:solidFill>
+                  <a:srgbClr val="555555"/>
+                </a:solidFill>
+                <a:latin typeface="IDLC" pitchFamily="2" charset="0"/>
+                <a:ea typeface="JetBrains Mono"/>
+                <a:cs typeface="IDLC" pitchFamily="2" charset="0"/>
+                <a:sym typeface="JetBrains Mono"/>
+              </a:rPr>
+              <a:t>   # helper </a:t>
+            </a:r>
+            <a:r>
+              <a:rPr lang="en-US" sz="1100" b="0" i="1" u="none" strike="noStrike" cap="none" dirty="0" err="1">
+                <a:solidFill>
+                  <a:srgbClr val="555555"/>
+                </a:solidFill>
+                <a:latin typeface="IDLC" pitchFamily="2" charset="0"/>
+                <a:ea typeface="JetBrains Mono"/>
+                <a:cs typeface="IDLC" pitchFamily="2" charset="0"/>
+                <a:sym typeface="JetBrains Mono"/>
+              </a:rPr>
+              <a:t>fns</a:t>
+            </a:r>
+            <a:r>
+              <a:rPr lang="en-US" sz="1100" b="0" i="0" u="none" strike="noStrike" cap="none" dirty="0">
+                <a:solidFill>
+                  <a:srgbClr val="CCCCCC"/>
+                </a:solidFill>
+                <a:latin typeface="IDLC" pitchFamily="2" charset="0"/>
+                <a:cs typeface="IDLC" pitchFamily="2" charset="0"/>
+              </a:rPr>
+              <a:t/>
+            </a:r>
+            <a:br>
+              <a:rPr lang="en-US" sz="1100" b="0" i="0" u="none" strike="noStrike" cap="none" dirty="0">
+                <a:solidFill>
+                  <a:srgbClr val="CCCCCC"/>
+                </a:solidFill>
+                <a:latin typeface="IDLC" pitchFamily="2" charset="0"/>
+                <a:cs typeface="IDLC" pitchFamily="2" charset="0"/>
+              </a:rPr>
+            </a:br>
+            <a:r>
+              <a:rPr lang="en-US" sz="1100" b="0" i="0" u="none" strike="noStrike" cap="none" dirty="0">
+                <a:solidFill>
+                  <a:srgbClr val="444444"/>
+                </a:solidFill>
+                <a:latin typeface="IDLC" pitchFamily="2" charset="0"/>
+                <a:ea typeface="JetBrains Mono"/>
+                <a:cs typeface="IDLC" pitchFamily="2" charset="0"/>
+                <a:sym typeface="JetBrains Mono"/>
+              </a:rPr>
+              <a:t>├── </a:t>
+            </a:r>
+            <a:r>
+              <a:rPr lang="en-US" sz="1100" b="1" i="0" u="none" strike="noStrike" cap="none" dirty="0">
+                <a:solidFill>
+                  <a:srgbClr val="CCFF66"/>
+                </a:solidFill>
+                <a:latin typeface="IDLC" pitchFamily="2" charset="0"/>
+                <a:ea typeface="JetBrains Mono"/>
+                <a:cs typeface="IDLC" pitchFamily="2" charset="0"/>
+                <a:sym typeface="JetBrains Mono"/>
+              </a:rPr>
+              <a:t>03_analysis.R</a:t>
+            </a:r>
+            <a:r>
+              <a:rPr lang="en-US" sz="1100" b="0" i="1" u="none" strike="noStrike" cap="none" dirty="0">
+                <a:solidFill>
+                  <a:srgbClr val="555555"/>
+                </a:solidFill>
+                <a:latin typeface="IDLC" pitchFamily="2" charset="0"/>
+                <a:ea typeface="JetBrains Mono"/>
+                <a:cs typeface="IDLC" pitchFamily="2" charset="0"/>
+                <a:sym typeface="JetBrains Mono"/>
+              </a:rPr>
+              <a:t>  # main logic</a:t>
+            </a:r>
+            <a:r>
+              <a:rPr lang="en-US" sz="1100" b="0" i="0" u="none" strike="noStrike" cap="none" dirty="0">
+                <a:solidFill>
+                  <a:srgbClr val="CCCCCC"/>
+                </a:solidFill>
+                <a:latin typeface="IDLC" pitchFamily="2" charset="0"/>
+                <a:cs typeface="IDLC" pitchFamily="2" charset="0"/>
+              </a:rPr>
+              <a:t/>
+            </a:r>
+            <a:br>
+              <a:rPr lang="en-US" sz="1100" b="0" i="0" u="none" strike="noStrike" cap="none" dirty="0">
+                <a:solidFill>
+                  <a:srgbClr val="CCCCCC"/>
+                </a:solidFill>
+                <a:latin typeface="IDLC" pitchFamily="2" charset="0"/>
+                <a:cs typeface="IDLC" pitchFamily="2" charset="0"/>
+              </a:rPr>
+            </a:br>
+            <a:r>
+              <a:rPr lang="en-US" sz="1100" b="0" i="0" u="none" strike="noStrike" cap="none" dirty="0">
+                <a:solidFill>
+                  <a:srgbClr val="444444"/>
+                </a:solidFill>
+                <a:latin typeface="IDLC" pitchFamily="2" charset="0"/>
+                <a:ea typeface="JetBrains Mono"/>
+                <a:cs typeface="IDLC" pitchFamily="2" charset="0"/>
+                <a:sym typeface="JetBrains Mono"/>
+              </a:rPr>
+              <a:t>└── </a:t>
+            </a:r>
+            <a:r>
+              <a:rPr lang="en-US" sz="1100" b="1" i="0" u="none" strike="noStrike" cap="none" dirty="0">
+                <a:solidFill>
+                  <a:srgbClr val="CCFF66"/>
+                </a:solidFill>
+                <a:latin typeface="IDLC" pitchFamily="2" charset="0"/>
+                <a:ea typeface="JetBrains Mono"/>
+                <a:cs typeface="IDLC" pitchFamily="2" charset="0"/>
+                <a:sym typeface="JetBrains Mono"/>
+              </a:rPr>
+              <a:t>04_report.R</a:t>
+            </a:r>
+            <a:r>
+              <a:rPr lang="en-US" sz="1100" b="0" i="1" u="none" strike="noStrike" cap="none" dirty="0">
+                <a:solidFill>
+                  <a:srgbClr val="555555"/>
+                </a:solidFill>
+                <a:latin typeface="IDLC" pitchFamily="2" charset="0"/>
+                <a:ea typeface="JetBrains Mono"/>
+                <a:cs typeface="IDLC" pitchFamily="2" charset="0"/>
+                <a:sym typeface="JetBrains Mono"/>
+              </a:rPr>
+              <a:t>    # output</a:t>
+            </a:r>
+            <a:r>
+              <a:rPr lang="en-US" sz="1100" b="0" i="0" u="none" strike="noStrike" cap="none" dirty="0">
+                <a:solidFill>
+                  <a:srgbClr val="CCCCCC"/>
+                </a:solidFill>
+                <a:latin typeface="IDLC" pitchFamily="2" charset="0"/>
+                <a:cs typeface="IDLC" pitchFamily="2" charset="0"/>
+              </a:rPr>
+              <a:t/>
+            </a:r>
+            <a:br>
+              <a:rPr lang="en-US" sz="1100" b="0" i="0" u="none" strike="noStrike" cap="none" dirty="0">
+                <a:solidFill>
+                  <a:srgbClr val="CCCCCC"/>
+                </a:solidFill>
+                <a:latin typeface="IDLC" pitchFamily="2" charset="0"/>
+                <a:cs typeface="IDLC" pitchFamily="2" charset="0"/>
+              </a:rPr>
+            </a:br>
+            <a:r>
+              <a:rPr lang="en-US" sz="1100" b="0" i="0" u="none" strike="noStrike" cap="none" dirty="0">
+                <a:solidFill>
+                  <a:srgbClr val="CCCCCC"/>
+                </a:solidFill>
+                <a:latin typeface="IDLC" pitchFamily="2" charset="0"/>
+                <a:cs typeface="IDLC" pitchFamily="2" charset="0"/>
+              </a:rPr>
+              <a:t/>
+            </a:r>
+            <a:br>
+              <a:rPr lang="en-US" sz="1100" b="0" i="0" u="none" strike="noStrike" cap="none" dirty="0">
+                <a:solidFill>
+                  <a:srgbClr val="CCCCCC"/>
+                </a:solidFill>
+                <a:latin typeface="IDLC" pitchFamily="2" charset="0"/>
+                <a:cs typeface="IDLC" pitchFamily="2" charset="0"/>
+              </a:rPr>
+            </a:br>
+            <a:r>
+              <a:rPr lang="en-US" sz="1100" b="0" i="1" u="none" strike="noStrike" cap="none" dirty="0">
+                <a:solidFill>
+                  <a:srgbClr val="555555"/>
+                </a:solidFill>
+                <a:latin typeface="IDLC" pitchFamily="2" charset="0"/>
+                <a:ea typeface="JetBrains Mono"/>
+                <a:cs typeface="IDLC" pitchFamily="2" charset="0"/>
+                <a:sym typeface="JetBrains Mono"/>
+              </a:rPr>
+              <a:t># 00_libraries.R</a:t>
+            </a:r>
+            <a:r>
+              <a:rPr lang="en-US" sz="1100" b="0" i="0" u="none" strike="noStrike" cap="none" dirty="0">
+                <a:solidFill>
+                  <a:srgbClr val="CCCCCC"/>
+                </a:solidFill>
+                <a:latin typeface="IDLC" pitchFamily="2" charset="0"/>
+                <a:cs typeface="IDLC" pitchFamily="2" charset="0"/>
+              </a:rPr>
+              <a:t/>
+            </a:r>
+            <a:br>
+              <a:rPr lang="en-US" sz="1100" b="0" i="0" u="none" strike="noStrike" cap="none" dirty="0">
+                <a:solidFill>
+                  <a:srgbClr val="CCCCCC"/>
+                </a:solidFill>
+                <a:latin typeface="IDLC" pitchFamily="2" charset="0"/>
+                <a:cs typeface="IDLC" pitchFamily="2" charset="0"/>
+              </a:rPr>
+            </a:br>
+            <a:r>
+              <a:rPr lang="en-US" sz="1100" b="0" i="0" u="none" strike="noStrike" cap="none" dirty="0">
+                <a:solidFill>
+                  <a:srgbClr val="C084FC"/>
+                </a:solidFill>
+                <a:latin typeface="IDLC" pitchFamily="2" charset="0"/>
+                <a:ea typeface="JetBrains Mono"/>
+                <a:cs typeface="IDLC" pitchFamily="2" charset="0"/>
+                <a:sym typeface="JetBrains Mono"/>
+              </a:rPr>
+              <a:t>library</a:t>
+            </a:r>
+            <a:r>
+              <a:rPr lang="en-US" sz="1100" b="0" i="0" u="none" strike="noStrike" cap="none" dirty="0">
+                <a:solidFill>
+                  <a:srgbClr val="CCCCCC"/>
+                </a:solidFill>
+                <a:latin typeface="IDLC" pitchFamily="2" charset="0"/>
+                <a:ea typeface="JetBrains Mono"/>
+                <a:cs typeface="IDLC" pitchFamily="2" charset="0"/>
+                <a:sym typeface="JetBrains Mono"/>
+              </a:rPr>
+              <a:t>(</a:t>
+            </a:r>
+            <a:r>
+              <a:rPr lang="en-US" sz="1100" b="0" i="0" u="none" strike="noStrike" cap="none" dirty="0" err="1">
+                <a:solidFill>
+                  <a:srgbClr val="CCCCCC"/>
+                </a:solidFill>
+                <a:latin typeface="IDLC" pitchFamily="2" charset="0"/>
+                <a:ea typeface="JetBrains Mono"/>
+                <a:cs typeface="IDLC" pitchFamily="2" charset="0"/>
+                <a:sym typeface="JetBrains Mono"/>
+              </a:rPr>
+              <a:t>tidyverse</a:t>
+            </a:r>
+            <a:r>
+              <a:rPr lang="en-US" sz="1100" b="0" i="0" u="none" strike="noStrike" cap="none" dirty="0">
+                <a:solidFill>
+                  <a:srgbClr val="CCCCCC"/>
+                </a:solidFill>
+                <a:latin typeface="IDLC" pitchFamily="2" charset="0"/>
+                <a:ea typeface="JetBrains Mono"/>
+                <a:cs typeface="IDLC" pitchFamily="2" charset="0"/>
+                <a:sym typeface="JetBrains Mono"/>
+              </a:rPr>
+              <a:t>)</a:t>
+            </a:r>
+            <a:r>
+              <a:rPr lang="en-US" sz="1100" b="0" i="0" u="none" strike="noStrike" cap="none" dirty="0">
+                <a:solidFill>
+                  <a:srgbClr val="CCCCCC"/>
+                </a:solidFill>
+                <a:latin typeface="IDLC" pitchFamily="2" charset="0"/>
+                <a:cs typeface="IDLC" pitchFamily="2" charset="0"/>
+              </a:rPr>
+              <a:t/>
+            </a:r>
+            <a:br>
+              <a:rPr lang="en-US" sz="1100" b="0" i="0" u="none" strike="noStrike" cap="none" dirty="0">
+                <a:solidFill>
+                  <a:srgbClr val="CCCCCC"/>
+                </a:solidFill>
+                <a:latin typeface="IDLC" pitchFamily="2" charset="0"/>
+                <a:cs typeface="IDLC" pitchFamily="2" charset="0"/>
+              </a:rPr>
+            </a:br>
+            <a:r>
+              <a:rPr lang="en-US" sz="1100" b="0" i="0" u="none" strike="noStrike" cap="none" dirty="0">
+                <a:solidFill>
+                  <a:srgbClr val="C084FC"/>
+                </a:solidFill>
+                <a:latin typeface="IDLC" pitchFamily="2" charset="0"/>
+                <a:ea typeface="JetBrains Mono"/>
+                <a:cs typeface="IDLC" pitchFamily="2" charset="0"/>
+                <a:sym typeface="JetBrains Mono"/>
+              </a:rPr>
+              <a:t>library</a:t>
+            </a:r>
+            <a:r>
+              <a:rPr lang="en-US" sz="1100" b="0" i="0" u="none" strike="noStrike" cap="none" dirty="0">
+                <a:solidFill>
+                  <a:srgbClr val="CCCCCC"/>
+                </a:solidFill>
+                <a:latin typeface="IDLC" pitchFamily="2" charset="0"/>
+                <a:ea typeface="JetBrains Mono"/>
+                <a:cs typeface="IDLC" pitchFamily="2" charset="0"/>
+                <a:sym typeface="JetBrains Mono"/>
+              </a:rPr>
+              <a:t>(</a:t>
+            </a:r>
+            <a:r>
+              <a:rPr lang="en-US" sz="1100" b="0" i="0" u="none" strike="noStrike" cap="none" dirty="0" err="1">
+                <a:solidFill>
+                  <a:srgbClr val="CCCCCC"/>
+                </a:solidFill>
+                <a:latin typeface="IDLC" pitchFamily="2" charset="0"/>
+                <a:ea typeface="JetBrains Mono"/>
+                <a:cs typeface="IDLC" pitchFamily="2" charset="0"/>
+                <a:sym typeface="JetBrains Mono"/>
+              </a:rPr>
+              <a:t>openxlsx</a:t>
+            </a:r>
+            <a:r>
+              <a:rPr lang="en-US" sz="1100" b="0" i="0" u="none" strike="noStrike" cap="none" dirty="0">
+                <a:solidFill>
+                  <a:srgbClr val="CCCCCC"/>
+                </a:solidFill>
+                <a:latin typeface="IDLC" pitchFamily="2" charset="0"/>
+                <a:ea typeface="JetBrains Mono"/>
+                <a:cs typeface="IDLC" pitchFamily="2" charset="0"/>
+                <a:sym typeface="JetBrains Mono"/>
+              </a:rPr>
+              <a:t>)</a:t>
+            </a:r>
+            <a:r>
+              <a:rPr lang="en-US" sz="1100" b="0" i="0" u="none" strike="noStrike" cap="none" dirty="0">
+                <a:solidFill>
+                  <a:srgbClr val="CCCCCC"/>
+                </a:solidFill>
+                <a:latin typeface="IDLC" pitchFamily="2" charset="0"/>
+                <a:cs typeface="IDLC" pitchFamily="2" charset="0"/>
+              </a:rPr>
+              <a:t/>
+            </a:r>
+            <a:br>
+              <a:rPr lang="en-US" sz="1100" b="0" i="0" u="none" strike="noStrike" cap="none" dirty="0">
+                <a:solidFill>
+                  <a:srgbClr val="CCCCCC"/>
+                </a:solidFill>
+                <a:latin typeface="IDLC" pitchFamily="2" charset="0"/>
+                <a:cs typeface="IDLC" pitchFamily="2" charset="0"/>
+              </a:rPr>
+            </a:br>
+            <a:r>
+              <a:rPr lang="en-US" sz="1100" b="0" i="0" u="none" strike="noStrike" cap="none" dirty="0">
+                <a:solidFill>
+                  <a:srgbClr val="CCCCCC"/>
+                </a:solidFill>
+                <a:latin typeface="IDLC" pitchFamily="2" charset="0"/>
+                <a:cs typeface="IDLC" pitchFamily="2" charset="0"/>
+              </a:rPr>
+              <a:t/>
+            </a:r>
+            <a:br>
+              <a:rPr lang="en-US" sz="1100" b="0" i="0" u="none" strike="noStrike" cap="none" dirty="0">
+                <a:solidFill>
+                  <a:srgbClr val="CCCCCC"/>
+                </a:solidFill>
+                <a:latin typeface="IDLC" pitchFamily="2" charset="0"/>
+                <a:cs typeface="IDLC" pitchFamily="2" charset="0"/>
+              </a:rPr>
+            </a:br>
+            <a:r>
+              <a:rPr lang="en-US" sz="1100" b="0" i="1" u="none" strike="noStrike" cap="none" dirty="0">
+                <a:solidFill>
+                  <a:srgbClr val="555555"/>
+                </a:solidFill>
+                <a:latin typeface="IDLC" pitchFamily="2" charset="0"/>
+                <a:ea typeface="JetBrains Mono"/>
+                <a:cs typeface="IDLC" pitchFamily="2" charset="0"/>
+                <a:sym typeface="JetBrains Mono"/>
+              </a:rPr>
+              <a:t># 01_globals.R</a:t>
+            </a:r>
+            <a:r>
+              <a:rPr lang="en-US" sz="1100" b="0" i="0" u="none" strike="noStrike" cap="none" dirty="0">
+                <a:solidFill>
+                  <a:srgbClr val="CCCCCC"/>
+                </a:solidFill>
+                <a:latin typeface="IDLC" pitchFamily="2" charset="0"/>
+                <a:cs typeface="IDLC" pitchFamily="2" charset="0"/>
+              </a:rPr>
+              <a:t/>
+            </a:r>
+            <a:br>
+              <a:rPr lang="en-US" sz="1100" b="0" i="0" u="none" strike="noStrike" cap="none" dirty="0">
+                <a:solidFill>
+                  <a:srgbClr val="CCCCCC"/>
+                </a:solidFill>
+                <a:latin typeface="IDLC" pitchFamily="2" charset="0"/>
+                <a:cs typeface="IDLC" pitchFamily="2" charset="0"/>
+              </a:rPr>
+            </a:br>
+            <a:r>
+              <a:rPr lang="en-US" sz="1100" b="0" i="0" u="none" strike="noStrike" cap="none" dirty="0" err="1">
+                <a:solidFill>
+                  <a:srgbClr val="60A5FA"/>
+                </a:solidFill>
+                <a:latin typeface="IDLC" pitchFamily="2" charset="0"/>
+                <a:ea typeface="JetBrains Mono"/>
+                <a:cs typeface="IDLC" pitchFamily="2" charset="0"/>
+                <a:sym typeface="JetBrains Mono"/>
+              </a:rPr>
+              <a:t>report_month</a:t>
+            </a:r>
+            <a:r>
+              <a:rPr lang="en-US" sz="1100" b="0" i="0" u="none" strike="noStrike" cap="none" dirty="0">
+                <a:solidFill>
+                  <a:srgbClr val="CCCCCC"/>
+                </a:solidFill>
+                <a:latin typeface="IDLC" pitchFamily="2" charset="0"/>
+                <a:ea typeface="JetBrains Mono"/>
+                <a:cs typeface="IDLC" pitchFamily="2" charset="0"/>
+                <a:sym typeface="JetBrains Mono"/>
+              </a:rPr>
+              <a:t> &lt;- </a:t>
+            </a:r>
+            <a:r>
+              <a:rPr lang="en-US" sz="1100" b="0" i="0" u="none" strike="noStrike" cap="none" dirty="0">
+                <a:solidFill>
+                  <a:srgbClr val="86EFAC"/>
+                </a:solidFill>
+                <a:latin typeface="IDLC" pitchFamily="2" charset="0"/>
+                <a:ea typeface="JetBrains Mono"/>
+                <a:cs typeface="IDLC" pitchFamily="2" charset="0"/>
+                <a:sym typeface="JetBrains Mono"/>
+              </a:rPr>
+              <a:t>"2025-05"</a:t>
+            </a:r>
+            <a:r>
+              <a:rPr lang="en-US" sz="1100" b="0" i="0" u="none" strike="noStrike" cap="none" dirty="0">
+                <a:solidFill>
+                  <a:srgbClr val="CCCCCC"/>
+                </a:solidFill>
+                <a:latin typeface="IDLC" pitchFamily="2" charset="0"/>
+                <a:cs typeface="IDLC" pitchFamily="2" charset="0"/>
+              </a:rPr>
+              <a:t/>
+            </a:r>
+            <a:br>
+              <a:rPr lang="en-US" sz="1100" b="0" i="0" u="none" strike="noStrike" cap="none" dirty="0">
+                <a:solidFill>
+                  <a:srgbClr val="CCCCCC"/>
+                </a:solidFill>
+                <a:latin typeface="IDLC" pitchFamily="2" charset="0"/>
+                <a:cs typeface="IDLC" pitchFamily="2" charset="0"/>
+              </a:rPr>
+            </a:br>
+            <a:r>
+              <a:rPr lang="en-US" sz="1100" b="0" i="0" u="none" strike="noStrike" cap="none" dirty="0" err="1">
+                <a:solidFill>
+                  <a:srgbClr val="60A5FA"/>
+                </a:solidFill>
+                <a:latin typeface="IDLC" pitchFamily="2" charset="0"/>
+                <a:ea typeface="JetBrains Mono"/>
+                <a:cs typeface="IDLC" pitchFamily="2" charset="0"/>
+                <a:sym typeface="JetBrains Mono"/>
+              </a:rPr>
+              <a:t>output_path</a:t>
+            </a:r>
+            <a:r>
+              <a:rPr lang="en-US" sz="1100" b="0" i="0" u="none" strike="noStrike" cap="none" dirty="0">
+                <a:solidFill>
+                  <a:srgbClr val="CCCCCC"/>
+                </a:solidFill>
+                <a:latin typeface="IDLC" pitchFamily="2" charset="0"/>
+                <a:ea typeface="JetBrains Mono"/>
+                <a:cs typeface="IDLC" pitchFamily="2" charset="0"/>
+                <a:sym typeface="JetBrains Mono"/>
+              </a:rPr>
+              <a:t>  &lt;- </a:t>
+            </a:r>
+            <a:r>
+              <a:rPr lang="en-US" sz="1100" b="0" i="0" u="none" strike="noStrike" cap="none" dirty="0">
+                <a:solidFill>
+                  <a:srgbClr val="86EFAC"/>
+                </a:solidFill>
+                <a:latin typeface="IDLC" pitchFamily="2" charset="0"/>
+                <a:ea typeface="JetBrains Mono"/>
+                <a:cs typeface="IDLC" pitchFamily="2" charset="0"/>
+                <a:sym typeface="JetBrains Mono"/>
+              </a:rPr>
+              <a:t>"output/"</a:t>
+            </a:r>
+            <a:endParaRPr sz="1800" dirty="0">
+              <a:latin typeface="IDLC" pitchFamily="2" charset="0"/>
+              <a:cs typeface="IDLC" pitchFamily="2" charset="0"/>
+            </a:endParaRPr>
+          </a:p>
+        </p:txBody>
+      </p:sp>
+      <p:sp>
+        <p:nvSpPr>
+          <p:cNvPr id="301" name="Card1BG"/>
+          <p:cNvSpPr/>
+          <p:nvPr/>
+        </p:nvSpPr>
+        <p:spPr>
+          <a:xfrm>
+            <a:off x="5943600" y="1524000"/>
+            <a:ext cx="5791275" cy="1171575"/>
+          </a:xfrm>
+          <a:prstGeom prst="rect">
+            <a:avLst/>
+          </a:prstGeom>
+          <a:solidFill>
+            <a:srgbClr val="141414"/>
+          </a:solidFill>
+          <a:ln w="9525">
+            <a:solidFill>
+              <a:srgbClr val="1E1E1E"/>
+            </a:solidFill>
+          </a:ln>
+        </p:spPr>
+        <p:txBody>
+          <a:bodyPr wrap="square" lIns="0" tIns="0" rIns="0" bIns="0" anchor="t" anchorCtr="0">
+            <a:noAutofit/>
+          </a:bodyPr>
+          <a:lstStyle/>
+          <a:p>
+            <a:endParaRPr>
+              <a:latin typeface="IDLC" pitchFamily="2" charset="0"/>
+              <a:cs typeface="IDLC" pitchFamily="2" charset="0"/>
+            </a:endParaRPr>
+          </a:p>
+        </p:txBody>
+      </p:sp>
+      <p:sp>
+        <p:nvSpPr>
+          <p:cNvPr id="302" name="Card1Bar"/>
+          <p:cNvSpPr/>
+          <p:nvPr/>
+        </p:nvSpPr>
+        <p:spPr>
+          <a:xfrm>
+            <a:off x="5943600" y="1524000"/>
+            <a:ext cx="57150" cy="1171575"/>
+          </a:xfrm>
+          <a:prstGeom prst="rect">
+            <a:avLst/>
+          </a:prstGeom>
+          <a:solidFill>
+            <a:srgbClr val="CCFF66"/>
+          </a:solidFill>
+          <a:ln>
+            <a:noFill/>
+          </a:ln>
+        </p:spPr>
+        <p:txBody>
+          <a:bodyPr wrap="square" lIns="0" tIns="0" rIns="0" bIns="0" anchor="t" anchorCtr="0">
+            <a:noAutofit/>
+          </a:bodyPr>
+          <a:lstStyle/>
+          <a:p>
+            <a:endParaRPr>
+              <a:latin typeface="IDLC" pitchFamily="2" charset="0"/>
+              <a:cs typeface="IDLC" pitchFamily="2" charset="0"/>
+            </a:endParaRPr>
+          </a:p>
+        </p:txBody>
+      </p:sp>
+      <p:sp>
+        <p:nvSpPr>
+          <p:cNvPr id="303" name="Card1Text"/>
+          <p:cNvSpPr txBox="1"/>
+          <p:nvPr/>
+        </p:nvSpPr>
+        <p:spPr>
+          <a:xfrm>
+            <a:off x="6058800" y="1562100"/>
+            <a:ext cx="5638350" cy="1003352"/>
+          </a:xfrm>
+          <a:prstGeom prst="rect">
+            <a:avLst/>
+          </a:prstGeom>
+          <a:noFill/>
+          <a:ln>
+            <a:noFill/>
+          </a:ln>
+        </p:spPr>
+        <p:txBody>
+          <a:bodyPr spcFirstLastPara="1" wrap="square" lIns="0" tIns="0" rIns="0" bIns="0" anchor="t" anchorCtr="0">
+            <a:spAutoFit/>
+          </a:bodyPr>
+          <a:lstStyle/>
+          <a:p>
+            <a:pPr marL="0" marR="0" lvl="0" indent="0" algn="l" rtl="0">
+              <a:spcBef>
+                <a:spcPts val="0"/>
+              </a:spcBef>
+              <a:spcAft>
+                <a:spcPts val="0"/>
+              </a:spcAft>
+              <a:buNone/>
+            </a:pPr>
+            <a:r>
+              <a:rPr lang="en-US" sz="1100" b="0" i="0" u="none" strike="noStrike" cap="none" dirty="0">
+                <a:solidFill>
+                  <a:srgbClr val="CCFF66"/>
+                </a:solidFill>
+                <a:latin typeface="IDLC" pitchFamily="2" charset="0"/>
+                <a:ea typeface="JetBrains Mono"/>
+                <a:cs typeface="IDLC" pitchFamily="2" charset="0"/>
+                <a:sym typeface="JetBrains Mono"/>
+              </a:rPr>
+              <a:t>source("02_helpers.R")</a:t>
+            </a:r>
+          </a:p>
+          <a:p>
+            <a:pPr marL="0" marR="0" lvl="0" indent="0" algn="l" rtl="0">
+              <a:lnSpc>
+                <a:spcPct val="120000"/>
+              </a:lnSpc>
+              <a:spcBef>
+                <a:spcPts val="600"/>
+              </a:spcBef>
+              <a:spcAft>
+                <a:spcPts val="0"/>
+              </a:spcAft>
+              <a:buNone/>
+            </a:pPr>
+            <a:r>
+              <a:rPr lang="en-US" sz="1400" b="1" i="0" u="none" strike="noStrike" cap="none" dirty="0">
+                <a:solidFill>
+                  <a:srgbClr val="FFFFFF"/>
+                </a:solidFill>
+                <a:latin typeface="IDLC" pitchFamily="2" charset="0"/>
+                <a:ea typeface="Urbanist"/>
+                <a:cs typeface="IDLC" pitchFamily="2" charset="0"/>
+                <a:sym typeface="Urbanist"/>
+              </a:rPr>
+              <a:t>Helper Functions in a Separate File</a:t>
+            </a:r>
+          </a:p>
+          <a:p>
+            <a:pPr marL="0" marR="0" lvl="0" indent="0" algn="l" rtl="0">
+              <a:lnSpc>
+                <a:spcPct val="130000"/>
+              </a:lnSpc>
+              <a:spcBef>
+                <a:spcPts val="300"/>
+              </a:spcBef>
+              <a:spcAft>
+                <a:spcPts val="0"/>
+              </a:spcAft>
+              <a:buNone/>
+            </a:pPr>
+            <a:r>
+              <a:rPr lang="en-US" sz="1150" b="0" i="0" u="none" strike="noStrike" cap="none" dirty="0">
+                <a:solidFill>
+                  <a:srgbClr val="888888"/>
+                </a:solidFill>
+                <a:latin typeface="IDLC" pitchFamily="2" charset="0"/>
+                <a:ea typeface="Urbanist"/>
+                <a:cs typeface="IDLC" pitchFamily="2" charset="0"/>
+                <a:sym typeface="Urbanist"/>
+              </a:rPr>
+              <a:t>Keep reusable functions in a dedicated file. Your main script stays lean and anyone can find logic instantly without hunting through hundreds of lines.</a:t>
+            </a:r>
+          </a:p>
+        </p:txBody>
+      </p:sp>
+      <p:sp>
+        <p:nvSpPr>
+          <p:cNvPr id="311" name="Card2BG"/>
+          <p:cNvSpPr/>
+          <p:nvPr/>
+        </p:nvSpPr>
+        <p:spPr>
+          <a:xfrm>
+            <a:off x="5943600" y="2733750"/>
+            <a:ext cx="5791275" cy="1171575"/>
+          </a:xfrm>
+          <a:prstGeom prst="rect">
+            <a:avLst/>
+          </a:prstGeom>
+          <a:solidFill>
+            <a:srgbClr val="141414"/>
+          </a:solidFill>
+          <a:ln w="9525">
+            <a:solidFill>
+              <a:srgbClr val="1E1E1E"/>
+            </a:solidFill>
+          </a:ln>
+        </p:spPr>
+        <p:txBody>
+          <a:bodyPr wrap="square" lIns="0" tIns="0" rIns="0" bIns="0" anchor="t" anchorCtr="0">
+            <a:noAutofit/>
+          </a:bodyPr>
+          <a:lstStyle/>
+          <a:p>
+            <a:endParaRPr>
+              <a:latin typeface="IDLC" pitchFamily="2" charset="0"/>
+              <a:cs typeface="IDLC" pitchFamily="2" charset="0"/>
+            </a:endParaRPr>
+          </a:p>
+        </p:txBody>
+      </p:sp>
+      <p:sp>
+        <p:nvSpPr>
+          <p:cNvPr id="312" name="Card2Bar"/>
+          <p:cNvSpPr/>
+          <p:nvPr/>
+        </p:nvSpPr>
+        <p:spPr>
+          <a:xfrm>
+            <a:off x="5943600" y="2733750"/>
+            <a:ext cx="57150" cy="1171575"/>
+          </a:xfrm>
+          <a:prstGeom prst="rect">
+            <a:avLst/>
+          </a:prstGeom>
+          <a:solidFill>
+            <a:srgbClr val="60A5FA"/>
+          </a:solidFill>
+          <a:ln>
+            <a:noFill/>
+          </a:ln>
+        </p:spPr>
+        <p:txBody>
+          <a:bodyPr wrap="square" lIns="0" tIns="0" rIns="0" bIns="0" anchor="t" anchorCtr="0">
+            <a:noAutofit/>
+          </a:bodyPr>
+          <a:lstStyle/>
+          <a:p>
+            <a:endParaRPr>
+              <a:latin typeface="IDLC" pitchFamily="2" charset="0"/>
+              <a:cs typeface="IDLC" pitchFamily="2" charset="0"/>
+            </a:endParaRPr>
+          </a:p>
+        </p:txBody>
+      </p:sp>
+      <p:sp>
+        <p:nvSpPr>
+          <p:cNvPr id="313" name="Card2Text"/>
+          <p:cNvSpPr txBox="1"/>
+          <p:nvPr/>
+        </p:nvSpPr>
+        <p:spPr>
+          <a:xfrm>
+            <a:off x="6058800" y="2771850"/>
+            <a:ext cx="5638350" cy="1003352"/>
+          </a:xfrm>
+          <a:prstGeom prst="rect">
+            <a:avLst/>
+          </a:prstGeom>
+          <a:noFill/>
+          <a:ln>
+            <a:noFill/>
+          </a:ln>
+        </p:spPr>
+        <p:txBody>
+          <a:bodyPr spcFirstLastPara="1" wrap="square" lIns="0" tIns="0" rIns="0" bIns="0" anchor="t" anchorCtr="0">
+            <a:spAutoFit/>
+          </a:bodyPr>
+          <a:lstStyle/>
+          <a:p>
+            <a:pPr marL="0" marR="0" lvl="0" indent="0" algn="l" rtl="0">
+              <a:spcBef>
+                <a:spcPts val="0"/>
+              </a:spcBef>
+              <a:spcAft>
+                <a:spcPts val="0"/>
+              </a:spcAft>
+              <a:buNone/>
+            </a:pPr>
+            <a:r>
+              <a:rPr lang="en-US" sz="1100" b="0" i="0" u="none" strike="noStrike" cap="none">
+                <a:solidFill>
+                  <a:srgbClr val="60A5FA"/>
+                </a:solidFill>
+                <a:latin typeface="IDLC" pitchFamily="2" charset="0"/>
+                <a:ea typeface="JetBrains Mono"/>
+                <a:cs typeface="IDLC" pitchFamily="2" charset="0"/>
+                <a:sym typeface="JetBrains Mono"/>
+              </a:rPr>
+              <a:t>library(tidyverse); library(DBI)</a:t>
+            </a:r>
+          </a:p>
+          <a:p>
+            <a:pPr marL="0" marR="0" lvl="0" indent="0" algn="l" rtl="0">
+              <a:lnSpc>
+                <a:spcPct val="120000"/>
+              </a:lnSpc>
+              <a:spcBef>
+                <a:spcPts val="600"/>
+              </a:spcBef>
+              <a:spcAft>
+                <a:spcPts val="0"/>
+              </a:spcAft>
+              <a:buNone/>
+            </a:pPr>
+            <a:r>
+              <a:rPr lang="en-US" sz="1400" b="1" i="0" u="none" strike="noStrike" cap="none">
+                <a:solidFill>
+                  <a:srgbClr val="FFFFFF"/>
+                </a:solidFill>
+                <a:latin typeface="IDLC" pitchFamily="2" charset="0"/>
+                <a:ea typeface="Urbanist"/>
+                <a:cs typeface="IDLC" pitchFamily="2" charset="0"/>
+                <a:sym typeface="Urbanist"/>
+              </a:rPr>
+              <a:t>All Libraries at the Top</a:t>
+            </a:r>
+          </a:p>
+          <a:p>
+            <a:pPr marL="0" marR="0" lvl="0" indent="0" algn="l" rtl="0">
+              <a:lnSpc>
+                <a:spcPct val="130000"/>
+              </a:lnSpc>
+              <a:spcBef>
+                <a:spcPts val="300"/>
+              </a:spcBef>
+              <a:spcAft>
+                <a:spcPts val="0"/>
+              </a:spcAft>
+              <a:buNone/>
+            </a:pPr>
+            <a:r>
+              <a:rPr lang="en-US" sz="1150" b="0" i="0" u="none" strike="noStrike" cap="none">
+                <a:solidFill>
+                  <a:srgbClr val="888888"/>
+                </a:solidFill>
+                <a:latin typeface="IDLC" pitchFamily="2" charset="0"/>
+                <a:ea typeface="Urbanist"/>
+                <a:cs typeface="IDLC" pitchFamily="2" charset="0"/>
+                <a:sym typeface="Urbanist"/>
+              </a:rPr>
+              <a:t>Every dependency declared upfront. A teammate cloning the repo immediately sees what packages are needed before a single line runs.</a:t>
+            </a:r>
+          </a:p>
+        </p:txBody>
+      </p:sp>
+      <p:sp>
+        <p:nvSpPr>
+          <p:cNvPr id="321" name="Card3BG"/>
+          <p:cNvSpPr/>
+          <p:nvPr/>
+        </p:nvSpPr>
+        <p:spPr>
+          <a:xfrm>
+            <a:off x="5943600" y="3943425"/>
+            <a:ext cx="5791275" cy="1171575"/>
+          </a:xfrm>
+          <a:prstGeom prst="rect">
+            <a:avLst/>
+          </a:prstGeom>
+          <a:solidFill>
+            <a:srgbClr val="141414"/>
+          </a:solidFill>
+          <a:ln w="9525">
+            <a:solidFill>
+              <a:srgbClr val="1E1E1E"/>
+            </a:solidFill>
+          </a:ln>
+        </p:spPr>
+        <p:txBody>
+          <a:bodyPr wrap="square" lIns="0" tIns="0" rIns="0" bIns="0" anchor="t" anchorCtr="0">
+            <a:noAutofit/>
+          </a:bodyPr>
+          <a:lstStyle/>
+          <a:p>
+            <a:endParaRPr>
+              <a:latin typeface="IDLC" pitchFamily="2" charset="0"/>
+              <a:cs typeface="IDLC" pitchFamily="2" charset="0"/>
+            </a:endParaRPr>
+          </a:p>
+        </p:txBody>
+      </p:sp>
+      <p:sp>
+        <p:nvSpPr>
+          <p:cNvPr id="322" name="Card3Bar"/>
+          <p:cNvSpPr/>
+          <p:nvPr/>
+        </p:nvSpPr>
+        <p:spPr>
+          <a:xfrm>
+            <a:off x="5943600" y="3943425"/>
+            <a:ext cx="57150" cy="1171575"/>
+          </a:xfrm>
+          <a:prstGeom prst="rect">
+            <a:avLst/>
+          </a:prstGeom>
+          <a:solidFill>
+            <a:srgbClr val="FFBD2E"/>
+          </a:solidFill>
+          <a:ln>
+            <a:noFill/>
+          </a:ln>
+        </p:spPr>
+        <p:txBody>
+          <a:bodyPr wrap="square" lIns="0" tIns="0" rIns="0" bIns="0" anchor="t" anchorCtr="0">
+            <a:noAutofit/>
+          </a:bodyPr>
+          <a:lstStyle/>
+          <a:p>
+            <a:endParaRPr>
+              <a:latin typeface="IDLC" pitchFamily="2" charset="0"/>
+              <a:cs typeface="IDLC" pitchFamily="2" charset="0"/>
+            </a:endParaRPr>
+          </a:p>
+        </p:txBody>
+      </p:sp>
+      <p:sp>
+        <p:nvSpPr>
+          <p:cNvPr id="323" name="Card3Text"/>
+          <p:cNvSpPr txBox="1"/>
+          <p:nvPr/>
+        </p:nvSpPr>
+        <p:spPr>
+          <a:xfrm>
+            <a:off x="6058800" y="3981525"/>
+            <a:ext cx="5638350" cy="1003352"/>
+          </a:xfrm>
+          <a:prstGeom prst="rect">
+            <a:avLst/>
+          </a:prstGeom>
+          <a:noFill/>
+          <a:ln>
+            <a:noFill/>
+          </a:ln>
+        </p:spPr>
+        <p:txBody>
+          <a:bodyPr spcFirstLastPara="1" wrap="square" lIns="0" tIns="0" rIns="0" bIns="0" anchor="t" anchorCtr="0">
+            <a:spAutoFit/>
+          </a:bodyPr>
+          <a:lstStyle/>
+          <a:p>
+            <a:pPr marL="0" marR="0" lvl="0" indent="0" algn="l" rtl="0">
+              <a:spcBef>
+                <a:spcPts val="0"/>
+              </a:spcBef>
+              <a:spcAft>
+                <a:spcPts val="0"/>
+              </a:spcAft>
+              <a:buNone/>
+            </a:pPr>
+            <a:r>
+              <a:rPr lang="en-US" sz="1100" b="0" i="0" u="none" strike="noStrike" cap="none">
+                <a:solidFill>
+                  <a:srgbClr val="FFBD2E"/>
+                </a:solidFill>
+                <a:latin typeface="IDLC" pitchFamily="2" charset="0"/>
+                <a:ea typeface="JetBrains Mono"/>
+                <a:cs typeface="IDLC" pitchFamily="2" charset="0"/>
+                <a:sym typeface="JetBrains Mono"/>
+              </a:rPr>
+              <a:t>report_month &lt;- "2025-05"</a:t>
+            </a:r>
+          </a:p>
+          <a:p>
+            <a:pPr marL="0" marR="0" lvl="0" indent="0" algn="l" rtl="0">
+              <a:lnSpc>
+                <a:spcPct val="120000"/>
+              </a:lnSpc>
+              <a:spcBef>
+                <a:spcPts val="600"/>
+              </a:spcBef>
+              <a:spcAft>
+                <a:spcPts val="0"/>
+              </a:spcAft>
+              <a:buNone/>
+            </a:pPr>
+            <a:r>
+              <a:rPr lang="en-US" sz="1400" b="1" i="0" u="none" strike="noStrike" cap="none">
+                <a:solidFill>
+                  <a:srgbClr val="FFFFFF"/>
+                </a:solidFill>
+                <a:latin typeface="IDLC" pitchFamily="2" charset="0"/>
+                <a:ea typeface="Urbanist"/>
+                <a:cs typeface="IDLC" pitchFamily="2" charset="0"/>
+                <a:sym typeface="Urbanist"/>
+              </a:rPr>
+              <a:t>Global Variables Defined Upfront</a:t>
+            </a:r>
+          </a:p>
+          <a:p>
+            <a:pPr marL="0" marR="0" lvl="0" indent="0" algn="l" rtl="0">
+              <a:lnSpc>
+                <a:spcPct val="130000"/>
+              </a:lnSpc>
+              <a:spcBef>
+                <a:spcPts val="300"/>
+              </a:spcBef>
+              <a:spcAft>
+                <a:spcPts val="0"/>
+              </a:spcAft>
+              <a:buNone/>
+            </a:pPr>
+            <a:r>
+              <a:rPr lang="en-US" sz="1150" b="0" i="0" u="none" strike="noStrike" cap="none">
+                <a:solidFill>
+                  <a:srgbClr val="888888"/>
+                </a:solidFill>
+                <a:latin typeface="IDLC" pitchFamily="2" charset="0"/>
+                <a:ea typeface="Urbanist"/>
+                <a:cs typeface="IDLC" pitchFamily="2" charset="0"/>
+                <a:sym typeface="Urbanist"/>
+              </a:rPr>
+              <a:t>Paths, dates, thresholds declared once at the top. Change a month or folder path in one place — not scattered across 12 scripts.</a:t>
+            </a:r>
+          </a:p>
+        </p:txBody>
+      </p:sp>
+      <p:sp>
+        <p:nvSpPr>
+          <p:cNvPr id="331" name="Card4BG"/>
+          <p:cNvSpPr/>
+          <p:nvPr/>
+        </p:nvSpPr>
+        <p:spPr>
+          <a:xfrm>
+            <a:off x="5943600" y="5153100"/>
+            <a:ext cx="5791275" cy="1171575"/>
+          </a:xfrm>
+          <a:prstGeom prst="rect">
+            <a:avLst/>
+          </a:prstGeom>
+          <a:solidFill>
+            <a:srgbClr val="141414"/>
+          </a:solidFill>
+          <a:ln w="9525">
+            <a:solidFill>
+              <a:srgbClr val="1E1E1E"/>
+            </a:solidFill>
+          </a:ln>
+        </p:spPr>
+        <p:txBody>
+          <a:bodyPr wrap="square" lIns="0" tIns="0" rIns="0" bIns="0" anchor="t" anchorCtr="0">
+            <a:noAutofit/>
+          </a:bodyPr>
+          <a:lstStyle/>
+          <a:p>
+            <a:endParaRPr>
+              <a:latin typeface="IDLC" pitchFamily="2" charset="0"/>
+              <a:cs typeface="IDLC" pitchFamily="2" charset="0"/>
+            </a:endParaRPr>
+          </a:p>
+        </p:txBody>
+      </p:sp>
+      <p:sp>
+        <p:nvSpPr>
+          <p:cNvPr id="332" name="Card4Bar"/>
+          <p:cNvSpPr/>
+          <p:nvPr/>
+        </p:nvSpPr>
+        <p:spPr>
+          <a:xfrm>
+            <a:off x="5943600" y="5153100"/>
+            <a:ext cx="57150" cy="1171575"/>
+          </a:xfrm>
+          <a:prstGeom prst="rect">
+            <a:avLst/>
+          </a:prstGeom>
+          <a:solidFill>
+            <a:srgbClr val="C084FC"/>
+          </a:solidFill>
+          <a:ln>
+            <a:noFill/>
+          </a:ln>
+        </p:spPr>
+        <p:txBody>
+          <a:bodyPr wrap="square" lIns="0" tIns="0" rIns="0" bIns="0" anchor="t" anchorCtr="0">
+            <a:noAutofit/>
+          </a:bodyPr>
+          <a:lstStyle/>
+          <a:p>
+            <a:endParaRPr>
+              <a:latin typeface="IDLC" pitchFamily="2" charset="0"/>
+              <a:cs typeface="IDLC" pitchFamily="2" charset="0"/>
+            </a:endParaRPr>
+          </a:p>
+        </p:txBody>
+      </p:sp>
+      <p:sp>
+        <p:nvSpPr>
+          <p:cNvPr id="333" name="Card4Text"/>
+          <p:cNvSpPr txBox="1"/>
+          <p:nvPr/>
+        </p:nvSpPr>
+        <p:spPr>
+          <a:xfrm>
+            <a:off x="6058800" y="5191200"/>
+            <a:ext cx="5638350" cy="1003352"/>
+          </a:xfrm>
+          <a:prstGeom prst="rect">
+            <a:avLst/>
+          </a:prstGeom>
+          <a:noFill/>
+          <a:ln>
+            <a:noFill/>
+          </a:ln>
+        </p:spPr>
+        <p:txBody>
+          <a:bodyPr spcFirstLastPara="1" wrap="square" lIns="0" tIns="0" rIns="0" bIns="0" anchor="t" anchorCtr="0">
+            <a:spAutoFit/>
+          </a:bodyPr>
+          <a:lstStyle/>
+          <a:p>
+            <a:pPr marL="0" marR="0" lvl="0" indent="0" algn="l" rtl="0">
+              <a:spcBef>
+                <a:spcPts val="0"/>
+              </a:spcBef>
+              <a:spcAft>
+                <a:spcPts val="0"/>
+              </a:spcAft>
+              <a:buNone/>
+            </a:pPr>
+            <a:r>
+              <a:rPr lang="en-US" sz="1100" b="0" i="0" u="none" strike="noStrike" cap="none">
+                <a:solidFill>
+                  <a:srgbClr val="C084FC"/>
+                </a:solidFill>
+                <a:latin typeface="IDLC" pitchFamily="2" charset="0"/>
+                <a:ea typeface="JetBrains Mono"/>
+                <a:cs typeface="IDLC" pitchFamily="2" charset="0"/>
+                <a:sym typeface="JetBrains Mono"/>
+              </a:rPr>
+              <a:t>calc_bucket_move() # not fn1()</a:t>
+            </a:r>
+          </a:p>
+          <a:p>
+            <a:pPr marL="0" marR="0" lvl="0" indent="0" algn="l" rtl="0">
+              <a:lnSpc>
+                <a:spcPct val="120000"/>
+              </a:lnSpc>
+              <a:spcBef>
+                <a:spcPts val="600"/>
+              </a:spcBef>
+              <a:spcAft>
+                <a:spcPts val="0"/>
+              </a:spcAft>
+              <a:buNone/>
+            </a:pPr>
+            <a:r>
+              <a:rPr lang="en-US" sz="1400" b="1" i="0" u="none" strike="noStrike" cap="none">
+                <a:solidFill>
+                  <a:srgbClr val="FFFFFF"/>
+                </a:solidFill>
+                <a:latin typeface="IDLC" pitchFamily="2" charset="0"/>
+                <a:ea typeface="Urbanist"/>
+                <a:cs typeface="IDLC" pitchFamily="2" charset="0"/>
+                <a:sym typeface="Urbanist"/>
+              </a:rPr>
+              <a:t>Descriptive Naming &amp; Comments</a:t>
+            </a:r>
+          </a:p>
+          <a:p>
+            <a:pPr marL="0" marR="0" lvl="0" indent="0" algn="l" rtl="0">
+              <a:lnSpc>
+                <a:spcPct val="130000"/>
+              </a:lnSpc>
+              <a:spcBef>
+                <a:spcPts val="300"/>
+              </a:spcBef>
+              <a:spcAft>
+                <a:spcPts val="0"/>
+              </a:spcAft>
+              <a:buNone/>
+            </a:pPr>
+            <a:r>
+              <a:rPr lang="en-US" sz="1150" b="0" i="0" u="none" strike="noStrike" cap="none">
+                <a:solidFill>
+                  <a:srgbClr val="888888"/>
+                </a:solidFill>
+                <a:latin typeface="IDLC" pitchFamily="2" charset="0"/>
+                <a:ea typeface="Urbanist"/>
+                <a:cs typeface="IDLC" pitchFamily="2" charset="0"/>
+                <a:sym typeface="Urbanist"/>
+              </a:rPr>
+              <a:t>Use snake_case, name variables and functions by what they mean. Add a section comment before each logical block so reviewers navigate fast.</a:t>
+            </a:r>
+          </a:p>
+        </p:txBody>
+      </p:sp>
+    </p:spTree>
+    <p:extLst>
+      <p:ext uri="{BB962C8B-B14F-4D97-AF65-F5344CB8AC3E}">
+        <p14:creationId xmlns:p14="http://schemas.microsoft.com/office/powerpoint/2010/main" val="2860263997"/>
+      </p:ext>
+    </p:extLst>
+  </p:cSld>
+  <p:clrMapOvr>
+    <a:masterClrMapping/>
+  </p:clrMapOvr>
+  <p:timing>
+    <p:tnLst>
+      <p:par>
+        <p:cTn id="1" dur="indefinite" restart="never" nodeType="tmRoot"/>
+      </p:par>
+    </p:tnLst>
+  </p:timing>
+</p:sld>
+</file>
+
+<file path=ppt/slides/slide15.xml><?xml version="1.0" encoding="utf-8"?>
+<p:sld xmlns:a="http://schemas.openxmlformats.org/drawingml/2006/main" xmlns:r="http://schemas.openxmlformats.org/officeDocument/2006/relationships" xmlns:p="http://schemas.openxmlformats.org/presentationml/2006/main">
+  <p:cSld>
+    <p:spTree>
+      <p:nvGrpSpPr>
+        <p:cNvPr id="1" name="Shape 83"/>
+        <p:cNvGrpSpPr/>
+        <p:nvPr/>
+      </p:nvGrpSpPr>
+      <p:grpSpPr>
+        <a:xfrm>
+          <a:off x="0" y="0"/>
+          <a:ext cx="0" cy="0"/>
+          <a:chOff x="0" y="0"/>
+          <a:chExt cx="0" cy="0"/>
+        </a:xfrm>
+      </p:grpSpPr>
+      <p:pic>
+        <p:nvPicPr>
+          <p:cNvPr id="84" name="Google Shape;84;p13" descr="image.png"/>
+          <p:cNvPicPr preferRelativeResize="0"/>
+          <p:nvPr/>
+        </p:nvPicPr>
+        <p:blipFill rotWithShape="1">
+          <a:blip r:embed="rId3">
+            <a:alphaModFix/>
+          </a:blip>
+          <a:srcRect/>
+          <a:stretch/>
+        </p:blipFill>
+        <p:spPr>
+          <a:xfrm>
+            <a:off x="0" y="0"/>
+            <a:ext cx="12192000" cy="6858000"/>
+          </a:xfrm>
+          <a:prstGeom prst="rect">
+            <a:avLst/>
+          </a:prstGeom>
+          <a:noFill/>
+          <a:ln>
+            <a:noFill/>
+          </a:ln>
+        </p:spPr>
+      </p:pic>
+      <p:pic>
+        <p:nvPicPr>
+          <p:cNvPr id="85" name="Google Shape;85;p13" descr="image.png"/>
+          <p:cNvPicPr preferRelativeResize="0"/>
+          <p:nvPr/>
+        </p:nvPicPr>
+        <p:blipFill rotWithShape="1">
+          <a:blip r:embed="rId4">
+            <a:alphaModFix/>
+          </a:blip>
+          <a:srcRect/>
+          <a:stretch/>
+        </p:blipFill>
+        <p:spPr>
+          <a:xfrm>
+            <a:off x="7389465" y="2019300"/>
+            <a:ext cx="4031009" cy="3810000"/>
+          </a:xfrm>
+          <a:prstGeom prst="rect">
+            <a:avLst/>
+          </a:prstGeom>
+          <a:noFill/>
+          <a:ln>
+            <a:noFill/>
+          </a:ln>
+        </p:spPr>
+      </p:pic>
+      <p:pic>
+        <p:nvPicPr>
+          <p:cNvPr id="86" name="Google Shape;86;p13" descr="image.png"/>
+          <p:cNvPicPr preferRelativeResize="0"/>
+          <p:nvPr/>
+        </p:nvPicPr>
+        <p:blipFill rotWithShape="1">
+          <a:blip r:embed="rId5">
+            <a:alphaModFix/>
+          </a:blip>
+          <a:srcRect/>
+          <a:stretch/>
+        </p:blipFill>
+        <p:spPr>
+          <a:xfrm>
+            <a:off x="1114425" y="1966019"/>
+            <a:ext cx="1314450" cy="295275"/>
+          </a:xfrm>
+          <a:prstGeom prst="rect">
+            <a:avLst/>
+          </a:prstGeom>
+          <a:noFill/>
+          <a:ln>
+            <a:noFill/>
+          </a:ln>
+        </p:spPr>
+      </p:pic>
+      <p:pic>
+        <p:nvPicPr>
+          <p:cNvPr id="87" name="Google Shape;87;p13" descr="image.png"/>
+          <p:cNvPicPr preferRelativeResize="0"/>
+          <p:nvPr/>
+        </p:nvPicPr>
+        <p:blipFill rotWithShape="1">
+          <a:blip r:embed="rId6">
+            <a:alphaModFix/>
+          </a:blip>
+          <a:srcRect/>
+          <a:stretch/>
+        </p:blipFill>
+        <p:spPr>
+          <a:xfrm>
+            <a:off x="1114425" y="4711005"/>
+            <a:ext cx="5360640" cy="1171575"/>
+          </a:xfrm>
+          <a:prstGeom prst="rect">
+            <a:avLst/>
+          </a:prstGeom>
+          <a:noFill/>
+          <a:ln>
+            <a:noFill/>
+          </a:ln>
+        </p:spPr>
+      </p:pic>
+      <p:pic>
+        <p:nvPicPr>
+          <p:cNvPr id="89" name="Google Shape;89;p13" descr="image.png"/>
+          <p:cNvPicPr preferRelativeResize="0"/>
+          <p:nvPr/>
+        </p:nvPicPr>
+        <p:blipFill rotWithShape="1">
+          <a:blip r:embed="rId7">
+            <a:alphaModFix/>
+          </a:blip>
+          <a:srcRect/>
+          <a:stretch/>
+        </p:blipFill>
+        <p:spPr>
+          <a:xfrm>
+            <a:off x="7398990" y="2028825"/>
+            <a:ext cx="4011959" cy="3790950"/>
+          </a:xfrm>
+          <a:prstGeom prst="rect">
+            <a:avLst/>
+          </a:prstGeom>
+          <a:noFill/>
+          <a:ln>
+            <a:noFill/>
+          </a:ln>
+        </p:spPr>
+      </p:pic>
+      <p:sp>
+        <p:nvSpPr>
+          <p:cNvPr id="90" name="Google Shape;90;p13"/>
+          <p:cNvSpPr/>
+          <p:nvPr/>
+        </p:nvSpPr>
+        <p:spPr>
+          <a:xfrm>
+            <a:off x="771525" y="6215955"/>
+            <a:ext cx="6046440" cy="9525"/>
+          </a:xfrm>
+          <a:prstGeom prst="rect">
+            <a:avLst/>
+          </a:prstGeom>
+          <a:solidFill>
+            <a:srgbClr val="222222"/>
+          </a:solidFill>
+          <a:ln>
+            <a:noFill/>
+          </a:ln>
+        </p:spPr>
+        <p:txBody>
+          <a:bodyPr spcFirstLastPara="1" wrap="square" lIns="91425" tIns="45700" rIns="91425" bIns="45700" anchor="ctr" anchorCtr="0">
+            <a:noAutofit/>
+          </a:bodyPr>
+          <a:lstStyle/>
+          <a:p>
+            <a:pPr marL="0" marR="0" lvl="0" indent="0" algn="ctr" rtl="0">
+              <a:spcBef>
+                <a:spcPts val="0"/>
+              </a:spcBef>
+              <a:spcAft>
+                <a:spcPts val="0"/>
+              </a:spcAft>
+              <a:buNone/>
+            </a:pPr>
+            <a:endParaRPr sz="1800" b="0" i="0" u="none" strike="noStrike" cap="none">
+              <a:solidFill>
+                <a:schemeClr val="dk1"/>
+              </a:solidFill>
+              <a:latin typeface="IDLC" pitchFamily="2" charset="0"/>
+              <a:ea typeface="Calibri"/>
+              <a:cs typeface="IDLC" pitchFamily="2" charset="0"/>
+              <a:sym typeface="Calibri"/>
+            </a:endParaRPr>
+          </a:p>
+        </p:txBody>
+      </p:sp>
+      <p:sp>
+        <p:nvSpPr>
+          <p:cNvPr id="91" name="Google Shape;91;p13"/>
+          <p:cNvSpPr txBox="1"/>
+          <p:nvPr/>
+        </p:nvSpPr>
+        <p:spPr>
+          <a:xfrm>
+            <a:off x="1114425" y="2451794"/>
+            <a:ext cx="5628672" cy="323850"/>
+          </a:xfrm>
+          <a:prstGeom prst="rect">
+            <a:avLst/>
+          </a:prstGeom>
+          <a:noFill/>
+          <a:ln>
+            <a:noFill/>
+          </a:ln>
+        </p:spPr>
+        <p:txBody>
+          <a:bodyPr spcFirstLastPara="1" wrap="square" lIns="0" tIns="0" rIns="0" bIns="0" anchor="ctr" anchorCtr="0">
+            <a:spAutoFit/>
+          </a:bodyPr>
+          <a:lstStyle/>
+          <a:p>
+            <a:pPr marL="0" marR="0" lvl="0" indent="0" algn="l" rtl="0">
+              <a:spcBef>
+                <a:spcPts val="0"/>
+              </a:spcBef>
+              <a:spcAft>
+                <a:spcPts val="0"/>
+              </a:spcAft>
+              <a:buNone/>
+            </a:pPr>
+            <a:r>
+              <a:rPr lang="en-US" sz="2100" b="1" i="0" u="none" strike="noStrike" cap="none">
+                <a:solidFill>
+                  <a:srgbClr val="FFFFFF"/>
+                </a:solidFill>
+                <a:latin typeface="IDLC" pitchFamily="2" charset="0"/>
+                <a:ea typeface="Urbanist"/>
+                <a:cs typeface="IDLC" pitchFamily="2" charset="0"/>
+                <a:sym typeface="Urbanist"/>
+              </a:rPr>
+              <a:t>Corporate Firewall Restrictions</a:t>
+            </a:r>
+            <a:endParaRPr>
+              <a:latin typeface="IDLC" pitchFamily="2" charset="0"/>
+              <a:cs typeface="IDLC" pitchFamily="2" charset="0"/>
+            </a:endParaRPr>
+          </a:p>
+        </p:txBody>
+      </p:sp>
+      <p:sp>
+        <p:nvSpPr>
+          <p:cNvPr id="92" name="Google Shape;92;p13"/>
+          <p:cNvSpPr txBox="1"/>
+          <p:nvPr/>
+        </p:nvSpPr>
+        <p:spPr>
+          <a:xfrm>
+            <a:off x="1114425" y="2918519"/>
+            <a:ext cx="5360640" cy="1107996"/>
+          </a:xfrm>
+          <a:prstGeom prst="rect">
+            <a:avLst/>
+          </a:prstGeom>
+          <a:noFill/>
+          <a:ln>
+            <a:noFill/>
+          </a:ln>
+        </p:spPr>
+        <p:txBody>
+          <a:bodyPr spcFirstLastPara="1" wrap="square" lIns="0" tIns="0" rIns="0" bIns="0" anchor="t" anchorCtr="0">
+            <a:spAutoFit/>
+          </a:bodyPr>
+          <a:lstStyle/>
+          <a:p>
+            <a:pPr marL="0" marR="0" lvl="0" indent="0" algn="l" rtl="0">
+              <a:lnSpc>
+                <a:spcPct val="160000"/>
+              </a:lnSpc>
+              <a:spcBef>
+                <a:spcPts val="0"/>
+              </a:spcBef>
+              <a:spcAft>
+                <a:spcPts val="0"/>
+              </a:spcAft>
+              <a:buNone/>
+            </a:pPr>
+            <a:r>
+              <a:rPr lang="en-US" sz="1500" b="0" i="0" u="none" strike="noStrike" cap="none" dirty="0">
+                <a:solidFill>
+                  <a:srgbClr val="CCCCCC"/>
+                </a:solidFill>
+                <a:latin typeface="IDLC" pitchFamily="2" charset="0"/>
+                <a:ea typeface="Urbanist"/>
+                <a:cs typeface="IDLC" pitchFamily="2" charset="0"/>
+                <a:sym typeface="Urbanist"/>
+              </a:rPr>
+              <a:t>Our internal network security policies currently intercept and block outbound </a:t>
+            </a:r>
+            <a:r>
+              <a:rPr lang="en-US" sz="1500" b="0" i="0" u="none" strike="noStrike" cap="none" dirty="0" err="1">
+                <a:solidFill>
+                  <a:srgbClr val="CCCCCC"/>
+                </a:solidFill>
+                <a:latin typeface="IDLC" pitchFamily="2" charset="0"/>
+                <a:ea typeface="Urbanist"/>
+                <a:cs typeface="IDLC" pitchFamily="2" charset="0"/>
+                <a:sym typeface="Urbanist"/>
+              </a:rPr>
+              <a:t>git</a:t>
+            </a:r>
+            <a:r>
+              <a:rPr lang="en-US" sz="1500" b="0" i="0" u="none" strike="noStrike" cap="none" dirty="0">
+                <a:solidFill>
+                  <a:srgbClr val="CCCCCC"/>
+                </a:solidFill>
+                <a:latin typeface="IDLC" pitchFamily="2" charset="0"/>
+                <a:ea typeface="Urbanist"/>
+                <a:cs typeface="IDLC" pitchFamily="2" charset="0"/>
+                <a:sym typeface="Urbanist"/>
+              </a:rPr>
+              <a:t> push connections to external GitHub accounts.</a:t>
+            </a:r>
+            <a:endParaRPr dirty="0">
+              <a:latin typeface="IDLC" pitchFamily="2" charset="0"/>
+              <a:cs typeface="IDLC" pitchFamily="2" charset="0"/>
+            </a:endParaRPr>
+          </a:p>
+        </p:txBody>
+      </p:sp>
+      <p:sp>
+        <p:nvSpPr>
+          <p:cNvPr id="93" name="Google Shape;93;p13"/>
+          <p:cNvSpPr txBox="1"/>
+          <p:nvPr/>
+        </p:nvSpPr>
+        <p:spPr>
+          <a:xfrm>
+            <a:off x="1114425" y="3985319"/>
+            <a:ext cx="5360640" cy="590931"/>
+          </a:xfrm>
+          <a:prstGeom prst="rect">
+            <a:avLst/>
+          </a:prstGeom>
+          <a:noFill/>
+          <a:ln>
+            <a:noFill/>
+          </a:ln>
+        </p:spPr>
+        <p:txBody>
+          <a:bodyPr spcFirstLastPara="1" wrap="square" lIns="0" tIns="0" rIns="0" bIns="0" anchor="t" anchorCtr="0">
+            <a:spAutoFit/>
+          </a:bodyPr>
+          <a:lstStyle/>
+          <a:p>
+            <a:pPr marL="0" marR="0" lvl="0" indent="0" algn="l" rtl="0">
+              <a:lnSpc>
+                <a:spcPct val="160000"/>
+              </a:lnSpc>
+              <a:spcBef>
+                <a:spcPts val="0"/>
+              </a:spcBef>
+              <a:spcAft>
+                <a:spcPts val="0"/>
+              </a:spcAft>
+              <a:buNone/>
+            </a:pPr>
+            <a:r>
+              <a:rPr lang="en-US" sz="1200" b="1" i="0" u="none" strike="noStrike" cap="none" dirty="0">
+                <a:solidFill>
+                  <a:srgbClr val="888888"/>
+                </a:solidFill>
+                <a:latin typeface="IDLC" pitchFamily="2" charset="0"/>
+                <a:ea typeface="Urbanist"/>
+                <a:cs typeface="IDLC" pitchFamily="2" charset="0"/>
+                <a:sym typeface="Urbanist"/>
+              </a:rPr>
+              <a:t>Impact:</a:t>
+            </a:r>
+            <a:r>
+              <a:rPr lang="en-US" sz="1200" b="0" i="0" u="none" strike="noStrike" cap="none" dirty="0">
+                <a:solidFill>
+                  <a:srgbClr val="888888"/>
+                </a:solidFill>
+                <a:latin typeface="IDLC" pitchFamily="2" charset="0"/>
+                <a:ea typeface="Urbanist"/>
+                <a:cs typeface="IDLC" pitchFamily="2" charset="0"/>
+                <a:sym typeface="Urbanist"/>
+              </a:rPr>
+              <a:t> Local commits in </a:t>
+            </a:r>
+            <a:r>
+              <a:rPr lang="en-US" sz="1200" b="0" i="0" u="none" strike="noStrike" cap="none" dirty="0" err="1">
+                <a:solidFill>
+                  <a:srgbClr val="888888"/>
+                </a:solidFill>
+                <a:latin typeface="IDLC" pitchFamily="2" charset="0"/>
+                <a:ea typeface="Urbanist"/>
+                <a:cs typeface="IDLC" pitchFamily="2" charset="0"/>
+                <a:sym typeface="Urbanist"/>
+              </a:rPr>
+              <a:t>RStudio</a:t>
+            </a:r>
+            <a:r>
+              <a:rPr lang="en-US" sz="1200" b="0" i="0" u="none" strike="noStrike" cap="none" dirty="0">
+                <a:solidFill>
+                  <a:srgbClr val="888888"/>
+                </a:solidFill>
+                <a:latin typeface="IDLC" pitchFamily="2" charset="0"/>
+                <a:ea typeface="Urbanist"/>
+                <a:cs typeface="IDLC" pitchFamily="2" charset="0"/>
+                <a:sym typeface="Urbanist"/>
+              </a:rPr>
+              <a:t> cannot be successfully synced to the cloud, halting the collaborative workflow.</a:t>
+            </a:r>
+            <a:endParaRPr dirty="0">
+              <a:latin typeface="IDLC" pitchFamily="2" charset="0"/>
+              <a:cs typeface="IDLC" pitchFamily="2" charset="0"/>
+            </a:endParaRPr>
+          </a:p>
+        </p:txBody>
+      </p:sp>
+      <p:pic>
+        <p:nvPicPr>
+          <p:cNvPr id="94" name="Google Shape;94;p13" descr="image.png"/>
+          <p:cNvPicPr preferRelativeResize="0"/>
+          <p:nvPr/>
+        </p:nvPicPr>
+        <p:blipFill rotWithShape="1">
+          <a:blip r:embed="rId8">
+            <a:alphaModFix/>
+          </a:blip>
+          <a:srcRect/>
+          <a:stretch/>
+        </p:blipFill>
+        <p:spPr>
+          <a:xfrm>
+            <a:off x="1276350" y="2042219"/>
+            <a:ext cx="142875" cy="133350"/>
+          </a:xfrm>
+          <a:prstGeom prst="rect">
+            <a:avLst/>
+          </a:prstGeom>
+          <a:noFill/>
+          <a:ln>
+            <a:noFill/>
+          </a:ln>
+        </p:spPr>
+      </p:pic>
+      <p:sp>
+        <p:nvSpPr>
+          <p:cNvPr id="95" name="Google Shape;95;p13"/>
+          <p:cNvSpPr txBox="1"/>
+          <p:nvPr/>
+        </p:nvSpPr>
+        <p:spPr>
+          <a:xfrm>
+            <a:off x="1343025" y="4853880"/>
+            <a:ext cx="4941540" cy="173124"/>
+          </a:xfrm>
+          <a:prstGeom prst="rect">
+            <a:avLst/>
+          </a:prstGeom>
+          <a:noFill/>
+          <a:ln>
+            <a:noFill/>
+          </a:ln>
+        </p:spPr>
+        <p:txBody>
+          <a:bodyPr spcFirstLastPara="1" wrap="square" lIns="0" tIns="0" rIns="0" bIns="0" anchor="t" anchorCtr="0">
+            <a:spAutoFit/>
+          </a:bodyPr>
+          <a:lstStyle/>
+          <a:p>
+            <a:pPr marL="0" marR="0" lvl="0" indent="0" algn="l" rtl="0">
+              <a:spcBef>
+                <a:spcPts val="0"/>
+              </a:spcBef>
+              <a:spcAft>
+                <a:spcPts val="0"/>
+              </a:spcAft>
+              <a:buNone/>
+            </a:pPr>
+            <a:r>
+              <a:rPr lang="en-US" sz="1125" b="0" i="0" u="none" strike="noStrike" cap="none">
+                <a:solidFill>
+                  <a:srgbClr val="CCFF66"/>
+                </a:solidFill>
+                <a:latin typeface="IDLC" pitchFamily="2" charset="0"/>
+                <a:ea typeface="JetBrains Mono"/>
+                <a:cs typeface="IDLC" pitchFamily="2" charset="0"/>
+                <a:sym typeface="JetBrains Mono"/>
+              </a:rPr>
+              <a:t>$</a:t>
+            </a:r>
+            <a:r>
+              <a:rPr lang="en-US" sz="1125" b="0" i="0" u="none" strike="noStrike" cap="none">
+                <a:solidFill>
+                  <a:srgbClr val="FFFFFF"/>
+                </a:solidFill>
+                <a:latin typeface="IDLC" pitchFamily="2" charset="0"/>
+                <a:ea typeface="JetBrains Mono"/>
+                <a:cs typeface="IDLC" pitchFamily="2" charset="0"/>
+                <a:sym typeface="JetBrains Mono"/>
+              </a:rPr>
+              <a:t>git push origin main</a:t>
+            </a:r>
+            <a:endParaRPr>
+              <a:latin typeface="IDLC" pitchFamily="2" charset="0"/>
+              <a:cs typeface="IDLC" pitchFamily="2" charset="0"/>
+            </a:endParaRPr>
+          </a:p>
+        </p:txBody>
+      </p:sp>
+      <p:sp>
+        <p:nvSpPr>
+          <p:cNvPr id="96" name="Google Shape;96;p13"/>
+          <p:cNvSpPr txBox="1"/>
+          <p:nvPr/>
+        </p:nvSpPr>
+        <p:spPr>
+          <a:xfrm>
+            <a:off x="1000125" y="581025"/>
+            <a:ext cx="10941367" cy="623248"/>
+          </a:xfrm>
+          <a:prstGeom prst="rect">
+            <a:avLst/>
+          </a:prstGeom>
+          <a:noFill/>
+          <a:ln>
+            <a:noFill/>
+          </a:ln>
+        </p:spPr>
+        <p:txBody>
+          <a:bodyPr spcFirstLastPara="1" wrap="square" lIns="0" tIns="0" rIns="0" bIns="0" anchor="t" anchorCtr="0">
+            <a:spAutoFit/>
+          </a:bodyPr>
+          <a:lstStyle/>
+          <a:p>
+            <a:pPr marL="0" marR="0" lvl="0" indent="0" algn="l" rtl="0">
+              <a:lnSpc>
+                <a:spcPct val="100000"/>
+              </a:lnSpc>
+              <a:spcBef>
+                <a:spcPts val="0"/>
+              </a:spcBef>
+              <a:spcAft>
+                <a:spcPts val="0"/>
+              </a:spcAft>
+              <a:buNone/>
+            </a:pPr>
+            <a:r>
+              <a:rPr lang="en-US" sz="4050" b="1" i="0" u="none" strike="noStrike" cap="none" dirty="0">
+                <a:solidFill>
+                  <a:schemeClr val="bg1"/>
+                </a:solidFill>
+                <a:latin typeface="IDLC" pitchFamily="2" charset="0"/>
+                <a:ea typeface="Urbanist"/>
+                <a:cs typeface="IDLC" pitchFamily="2" charset="0"/>
+                <a:sym typeface="Urbanist"/>
+              </a:rPr>
+              <a:t>IMPLEMENTATION</a:t>
+            </a:r>
+            <a:r>
+              <a:rPr lang="en-US" sz="4050" b="1" i="0" u="none" strike="noStrike" cap="none" dirty="0">
+                <a:solidFill>
+                  <a:srgbClr val="CCFF66"/>
+                </a:solidFill>
+                <a:latin typeface="IDLC" pitchFamily="2" charset="0"/>
+                <a:ea typeface="Urbanist"/>
+                <a:cs typeface="IDLC" pitchFamily="2" charset="0"/>
+                <a:sym typeface="Urbanist"/>
+              </a:rPr>
+              <a:t> CHALLENGES</a:t>
+            </a:r>
+            <a:endParaRPr dirty="0">
+              <a:latin typeface="IDLC" pitchFamily="2" charset="0"/>
+              <a:cs typeface="IDLC" pitchFamily="2" charset="0"/>
+            </a:endParaRPr>
+          </a:p>
+        </p:txBody>
+      </p:sp>
+      <p:sp>
+        <p:nvSpPr>
+          <p:cNvPr id="97" name="Google Shape;97;p13"/>
+          <p:cNvSpPr/>
+          <p:nvPr/>
+        </p:nvSpPr>
+        <p:spPr>
+          <a:xfrm>
+            <a:off x="771525" y="581025"/>
+            <a:ext cx="95250" cy="514350"/>
+          </a:xfrm>
+          <a:prstGeom prst="rect">
+            <a:avLst/>
+          </a:prstGeom>
+          <a:solidFill>
+            <a:srgbClr val="CCFF66"/>
+          </a:solidFill>
+          <a:ln>
+            <a:noFill/>
+          </a:ln>
+        </p:spPr>
+        <p:txBody>
+          <a:bodyPr spcFirstLastPara="1" wrap="square" lIns="91425" tIns="45700" rIns="91425" bIns="45700" anchor="ctr" anchorCtr="0">
+            <a:noAutofit/>
+          </a:bodyPr>
+          <a:lstStyle/>
+          <a:p>
+            <a:pPr marL="0" marR="0" lvl="0" indent="0" algn="ctr" rtl="0">
+              <a:spcBef>
+                <a:spcPts val="0"/>
+              </a:spcBef>
+              <a:spcAft>
+                <a:spcPts val="0"/>
+              </a:spcAft>
+              <a:buNone/>
+            </a:pPr>
+            <a:endParaRPr sz="1800" b="0" i="0" u="none" strike="noStrike" cap="none">
+              <a:solidFill>
+                <a:schemeClr val="dk1"/>
+              </a:solidFill>
+              <a:latin typeface="IDLC" pitchFamily="2" charset="0"/>
+              <a:ea typeface="Calibri"/>
+              <a:cs typeface="IDLC" pitchFamily="2" charset="0"/>
+              <a:sym typeface="Calibri"/>
+            </a:endParaRPr>
+          </a:p>
+        </p:txBody>
+      </p:sp>
+    </p:spTree>
+    <p:extLst>
+      <p:ext uri="{BB962C8B-B14F-4D97-AF65-F5344CB8AC3E}">
+        <p14:creationId xmlns:p14="http://schemas.microsoft.com/office/powerpoint/2010/main" val="542255031"/>
+      </p:ext>
+    </p:extLst>
+  </p:cSld>
+  <p:clrMapOvr>
+    <a:masterClrMapping/>
+  </p:clrMapOvr>
+  <p:timing>
+    <p:tnLst>
+      <p:par>
+        <p:cTn id="1" dur="indefinite" restart="never" nodeType="tmRoot"/>
+      </p:par>
+    </p:tnLst>
+  </p:timing>
 </p:sld>
 </file>
 
@@ -20406,17 +23627,17 @@
                 <a:solidFill>
                   <a:srgbClr val="DEFF9A"/>
                 </a:solidFill>
-                <a:latin typeface="Urbanist" panose="020B0604020202020204" charset="0"/>
+                <a:latin typeface="IDLC" pitchFamily="2" charset="0"/>
                 <a:ea typeface="Urbanist" panose="020B0604020202020204" charset="0"/>
-                <a:cs typeface="Urbanist" panose="020B0604020202020204" charset="0"/>
+                <a:cs typeface="IDLC" pitchFamily="2" charset="0"/>
                 <a:sym typeface="Urbanist SemiBold"/>
               </a:rPr>
               <a:t>The "Final" Illusion</a:t>
             </a:r>
             <a:endParaRPr dirty="0">
-              <a:latin typeface="Urbanist" panose="020B0604020202020204" charset="0"/>
+              <a:latin typeface="IDLC" pitchFamily="2" charset="0"/>
               <a:ea typeface="Urbanist" panose="020B0604020202020204" charset="0"/>
-              <a:cs typeface="Urbanist" panose="020B0604020202020204" charset="0"/>
+              <a:cs typeface="IDLC" pitchFamily="2" charset="0"/>
             </a:endParaRPr>
           </a:p>
         </p:txBody>
@@ -20463,17 +23684,17 @@
                 <a:solidFill>
                   <a:srgbClr val="DAFFDE"/>
                 </a:solidFill>
-                <a:latin typeface="Urbanist" panose="020B0604020202020204" charset="0"/>
+                <a:latin typeface="IDLC" pitchFamily="2" charset="0"/>
                 <a:ea typeface="Urbanist" panose="020B0604020202020204" charset="0"/>
-                <a:cs typeface="Urbanist" panose="020B0604020202020204" charset="0"/>
+                <a:cs typeface="IDLC" pitchFamily="2" charset="0"/>
                 <a:sym typeface="Urbanist"/>
               </a:rPr>
               <a:t>Without version control, tracking history turns into file accumulation chaos. Working manually leads to systemic traps:</a:t>
             </a:r>
             <a:endParaRPr dirty="0">
-              <a:latin typeface="Urbanist" panose="020B0604020202020204" charset="0"/>
+              <a:latin typeface="IDLC" pitchFamily="2" charset="0"/>
               <a:ea typeface="Urbanist" panose="020B0604020202020204" charset="0"/>
-              <a:cs typeface="Urbanist" panose="020B0604020202020204" charset="0"/>
+              <a:cs typeface="IDLC" pitchFamily="2" charset="0"/>
             </a:endParaRPr>
           </a:p>
         </p:txBody>
@@ -20520,9 +23741,9 @@
                 <a:solidFill>
                   <a:srgbClr val="DAFFDE"/>
                 </a:solidFill>
-                <a:latin typeface="Urbanist" panose="020B0604020202020204" charset="0"/>
+                <a:latin typeface="IDLC" pitchFamily="2" charset="0"/>
                 <a:ea typeface="Urbanist" panose="020B0604020202020204" charset="0"/>
-                <a:cs typeface="Urbanist" panose="020B0604020202020204" charset="0"/>
+                <a:cs typeface="IDLC" pitchFamily="2" charset="0"/>
                 <a:sym typeface="Urbanist"/>
               </a:rPr>
               <a:t>Cluttered Directories:</a:t>
@@ -20532,17 +23753,17 @@
                 <a:solidFill>
                   <a:srgbClr val="DAFFDE"/>
                 </a:solidFill>
-                <a:latin typeface="Urbanist" panose="020B0604020202020204" charset="0"/>
+                <a:latin typeface="IDLC" pitchFamily="2" charset="0"/>
                 <a:ea typeface="Urbanist" panose="020B0604020202020204" charset="0"/>
-                <a:cs typeface="Urbanist" panose="020B0604020202020204" charset="0"/>
+                <a:cs typeface="IDLC" pitchFamily="2" charset="0"/>
                 <a:sym typeface="Urbanist"/>
               </a:rPr>
               <a:t> Endless duplication of files just to save a historic snapshot.</a:t>
             </a:r>
             <a:endParaRPr dirty="0">
-              <a:latin typeface="Urbanist" panose="020B0604020202020204" charset="0"/>
+              <a:latin typeface="IDLC" pitchFamily="2" charset="0"/>
               <a:ea typeface="Urbanist" panose="020B0604020202020204" charset="0"/>
-              <a:cs typeface="Urbanist" panose="020B0604020202020204" charset="0"/>
+              <a:cs typeface="IDLC" pitchFamily="2" charset="0"/>
             </a:endParaRPr>
           </a:p>
         </p:txBody>
@@ -20589,9 +23810,9 @@
                 <a:solidFill>
                   <a:srgbClr val="DAFFDE"/>
                 </a:solidFill>
-                <a:latin typeface="Urbanist" panose="020B0604020202020204" charset="0"/>
+                <a:latin typeface="IDLC" pitchFamily="2" charset="0"/>
                 <a:ea typeface="Urbanist" panose="020B0604020202020204" charset="0"/>
-                <a:cs typeface="Urbanist" panose="020B0604020202020204" charset="0"/>
+                <a:cs typeface="IDLC" pitchFamily="2" charset="0"/>
                 <a:sym typeface="Urbanist"/>
               </a:rPr>
               <a:t>Loss of Context:</a:t>
@@ -20601,17 +23822,17 @@
                 <a:solidFill>
                   <a:srgbClr val="DAFFDE"/>
                 </a:solidFill>
-                <a:latin typeface="Urbanist" panose="020B0604020202020204" charset="0"/>
+                <a:latin typeface="IDLC" pitchFamily="2" charset="0"/>
                 <a:ea typeface="Urbanist" panose="020B0604020202020204" charset="0"/>
-                <a:cs typeface="Urbanist" panose="020B0604020202020204" charset="0"/>
+                <a:cs typeface="IDLC" pitchFamily="2" charset="0"/>
                 <a:sym typeface="Urbanist"/>
               </a:rPr>
               <a:t> Forgetting exactly what lines of code changed between version 3 and version 4 over time.</a:t>
             </a:r>
             <a:endParaRPr dirty="0">
-              <a:latin typeface="Urbanist" panose="020B0604020202020204" charset="0"/>
+              <a:latin typeface="IDLC" pitchFamily="2" charset="0"/>
               <a:ea typeface="Urbanist" panose="020B0604020202020204" charset="0"/>
-              <a:cs typeface="Urbanist" panose="020B0604020202020204" charset="0"/>
+              <a:cs typeface="IDLC" pitchFamily="2" charset="0"/>
             </a:endParaRPr>
           </a:p>
         </p:txBody>
@@ -20658,9 +23879,9 @@
                 <a:solidFill>
                   <a:srgbClr val="DAFFDE"/>
                 </a:solidFill>
-                <a:latin typeface="Urbanist" panose="020B0604020202020204" charset="0"/>
+                <a:latin typeface="IDLC" pitchFamily="2" charset="0"/>
                 <a:ea typeface="Urbanist" panose="020B0604020202020204" charset="0"/>
-                <a:cs typeface="Urbanist" panose="020B0604020202020204" charset="0"/>
+                <a:cs typeface="IDLC" pitchFamily="2" charset="0"/>
                 <a:sym typeface="Urbanist"/>
               </a:rPr>
               <a:t>Collaboration Blocking:</a:t>
@@ -20670,17 +23891,17 @@
                 <a:solidFill>
                   <a:srgbClr val="DAFFDE"/>
                 </a:solidFill>
-                <a:latin typeface="Urbanist" panose="020B0604020202020204" charset="0"/>
+                <a:latin typeface="IDLC" pitchFamily="2" charset="0"/>
                 <a:ea typeface="Urbanist" panose="020B0604020202020204" charset="0"/>
-                <a:cs typeface="Urbanist" panose="020B0604020202020204" charset="0"/>
+                <a:cs typeface="IDLC" pitchFamily="2" charset="0"/>
                 <a:sym typeface="Urbanist"/>
               </a:rPr>
               <a:t> You cannot easily share a folder of 15 confusing files with a teammate and expect them to know which one works.</a:t>
             </a:r>
             <a:endParaRPr dirty="0">
-              <a:latin typeface="Urbanist" panose="020B0604020202020204" charset="0"/>
+              <a:latin typeface="IDLC" pitchFamily="2" charset="0"/>
               <a:ea typeface="Urbanist" panose="020B0604020202020204" charset="0"/>
-              <a:cs typeface="Urbanist" panose="020B0604020202020204" charset="0"/>
+              <a:cs typeface="IDLC" pitchFamily="2" charset="0"/>
             </a:endParaRPr>
           </a:p>
         </p:txBody>
@@ -20727,17 +23948,17 @@
                 <a:solidFill>
                   <a:srgbClr val="DEFF9A"/>
                 </a:solidFill>
-                <a:latin typeface="Urbanist" panose="020B0604020202020204" charset="0"/>
+                <a:latin typeface="IDLC" pitchFamily="2" charset="0"/>
                 <a:ea typeface="Urbanist" panose="020B0604020202020204" charset="0"/>
-                <a:cs typeface="Urbanist" panose="020B0604020202020204" charset="0"/>
+                <a:cs typeface="IDLC" pitchFamily="2" charset="0"/>
                 <a:sym typeface="Urbanist"/>
               </a:rPr>
               <a:t>→</a:t>
             </a:r>
             <a:endParaRPr>
-              <a:latin typeface="Urbanist" panose="020B0604020202020204" charset="0"/>
+              <a:latin typeface="IDLC" pitchFamily="2" charset="0"/>
               <a:ea typeface="Urbanist" panose="020B0604020202020204" charset="0"/>
-              <a:cs typeface="Urbanist" panose="020B0604020202020204" charset="0"/>
+              <a:cs typeface="IDLC" pitchFamily="2" charset="0"/>
             </a:endParaRPr>
           </a:p>
         </p:txBody>
@@ -20784,17 +24005,17 @@
                 <a:solidFill>
                   <a:srgbClr val="DEFF9A"/>
                 </a:solidFill>
-                <a:latin typeface="Urbanist" panose="020B0604020202020204" charset="0"/>
+                <a:latin typeface="IDLC" pitchFamily="2" charset="0"/>
                 <a:ea typeface="Urbanist" panose="020B0604020202020204" charset="0"/>
-                <a:cs typeface="Urbanist" panose="020B0604020202020204" charset="0"/>
+                <a:cs typeface="IDLC" pitchFamily="2" charset="0"/>
                 <a:sym typeface="Urbanist"/>
               </a:rPr>
               <a:t>→</a:t>
             </a:r>
             <a:endParaRPr>
-              <a:latin typeface="Urbanist" panose="020B0604020202020204" charset="0"/>
+              <a:latin typeface="IDLC" pitchFamily="2" charset="0"/>
               <a:ea typeface="Urbanist" panose="020B0604020202020204" charset="0"/>
-              <a:cs typeface="Urbanist" panose="020B0604020202020204" charset="0"/>
+              <a:cs typeface="IDLC" pitchFamily="2" charset="0"/>
             </a:endParaRPr>
           </a:p>
         </p:txBody>
@@ -20841,17 +24062,17 @@
                 <a:solidFill>
                   <a:srgbClr val="DEFF9A"/>
                 </a:solidFill>
-                <a:latin typeface="Urbanist" panose="020B0604020202020204" charset="0"/>
+                <a:latin typeface="IDLC" pitchFamily="2" charset="0"/>
                 <a:ea typeface="Urbanist" panose="020B0604020202020204" charset="0"/>
-                <a:cs typeface="Urbanist" panose="020B0604020202020204" charset="0"/>
+                <a:cs typeface="IDLC" pitchFamily="2" charset="0"/>
                 <a:sym typeface="Urbanist"/>
               </a:rPr>
               <a:t>→</a:t>
             </a:r>
             <a:endParaRPr>
-              <a:latin typeface="Urbanist" panose="020B0604020202020204" charset="0"/>
+              <a:latin typeface="IDLC" pitchFamily="2" charset="0"/>
               <a:ea typeface="Urbanist" panose="020B0604020202020204" charset="0"/>
-              <a:cs typeface="Urbanist" panose="020B0604020202020204" charset="0"/>
+              <a:cs typeface="IDLC" pitchFamily="2" charset="0"/>
             </a:endParaRPr>
           </a:p>
         </p:txBody>
@@ -20895,9 +24116,9 @@
                 <a:solidFill>
                   <a:srgbClr val="F5F5F5"/>
                 </a:solidFill>
-                <a:latin typeface="Urbanist" panose="020B0604020202020204" charset="0"/>
+                <a:latin typeface="IDLC" pitchFamily="2" charset="0"/>
                 <a:ea typeface="Urbanist" panose="020B0604020202020204" charset="0"/>
-                <a:cs typeface="Urbanist" panose="020B0604020202020204" charset="0"/>
+                <a:cs typeface="IDLC" pitchFamily="2" charset="0"/>
                 <a:sym typeface="Urbanist"/>
               </a:rPr>
               <a:t>THE PROBLEM: </a:t>
@@ -20907,17 +24128,17 @@
                 <a:solidFill>
                   <a:srgbClr val="DEFF9A"/>
                 </a:solidFill>
-                <a:latin typeface="Urbanist" panose="020B0604020202020204" charset="0"/>
+                <a:latin typeface="IDLC" pitchFamily="2" charset="0"/>
                 <a:ea typeface="Urbanist" panose="020B0604020202020204" charset="0"/>
-                <a:cs typeface="Urbanist" panose="020B0604020202020204" charset="0"/>
+                <a:cs typeface="IDLC" pitchFamily="2" charset="0"/>
                 <a:sym typeface="Urbanist"/>
               </a:rPr>
               <a:t>NAMING NIGHTMARE</a:t>
             </a:r>
             <a:endParaRPr dirty="0">
-              <a:latin typeface="Urbanist" panose="020B0604020202020204" charset="0"/>
+              <a:latin typeface="IDLC" pitchFamily="2" charset="0"/>
               <a:ea typeface="Urbanist" panose="020B0604020202020204" charset="0"/>
-              <a:cs typeface="Urbanist" panose="020B0604020202020204" charset="0"/>
+              <a:cs typeface="IDLC" pitchFamily="2" charset="0"/>
             </a:endParaRPr>
           </a:p>
         </p:txBody>
@@ -20962,9 +24183,9 @@
               <a:solidFill>
                 <a:schemeClr val="dk1"/>
               </a:solidFill>
-              <a:latin typeface="Urbanist" panose="020B0604020202020204" charset="0"/>
+              <a:latin typeface="IDLC" pitchFamily="2" charset="0"/>
               <a:ea typeface="Urbanist" panose="020B0604020202020204" charset="0"/>
-              <a:cs typeface="Urbanist" panose="020B0604020202020204" charset="0"/>
+              <a:cs typeface="IDLC" pitchFamily="2" charset="0"/>
               <a:sym typeface="Calibri"/>
             </a:endParaRPr>
           </a:p>
@@ -20975,6 +24196,13 @@
   <p:clrMapOvr>
     <a:masterClrMapping/>
   </p:clrMapOvr>
+  <p:timing>
+    <p:tnLst>
+      <p:par>
+        <p:cTn id="1" dur="indefinite" restart="never" nodeType="tmRoot"/>
+      </p:par>
+    </p:tnLst>
+  </p:timing>
 </p:sld>
 </file>
 
@@ -21142,17 +24370,17 @@
                 <a:solidFill>
                   <a:srgbClr val="DEFF9A"/>
                 </a:solidFill>
-                <a:latin typeface="Urbanist" panose="020B0604020202020204" charset="0"/>
+                <a:latin typeface="IDLC" pitchFamily="2" charset="0"/>
                 <a:ea typeface="Urbanist" panose="020B0604020202020204" charset="0"/>
-                <a:cs typeface="Urbanist" panose="020B0604020202020204" charset="0"/>
+                <a:cs typeface="IDLC" pitchFamily="2" charset="0"/>
                 <a:sym typeface="Urbanist SemiBold"/>
               </a:rPr>
               <a:t>Granular Snapshots</a:t>
             </a:r>
             <a:endParaRPr dirty="0">
-              <a:latin typeface="Urbanist" panose="020B0604020202020204" charset="0"/>
+              <a:latin typeface="IDLC" pitchFamily="2" charset="0"/>
               <a:ea typeface="Urbanist" panose="020B0604020202020204" charset="0"/>
-              <a:cs typeface="Urbanist" panose="020B0604020202020204" charset="0"/>
+              <a:cs typeface="IDLC" pitchFamily="2" charset="0"/>
             </a:endParaRPr>
           </a:p>
         </p:txBody>
@@ -21199,17 +24427,17 @@
                 <a:solidFill>
                   <a:srgbClr val="DAFFDE"/>
                 </a:solidFill>
-                <a:latin typeface="Urbanist" panose="020B0604020202020204" charset="0"/>
+                <a:latin typeface="IDLC" pitchFamily="2" charset="0"/>
                 <a:ea typeface="Urbanist" panose="020B0604020202020204" charset="0"/>
-                <a:cs typeface="Urbanist" panose="020B0604020202020204" charset="0"/>
+                <a:cs typeface="IDLC" pitchFamily="2" charset="0"/>
                 <a:sym typeface="Urbanist"/>
               </a:rPr>
               <a:t>Instead of copying whole files, Git tracks incremental line changes precisely. Your project folder stays completely clean with just a single file visible.</a:t>
             </a:r>
             <a:endParaRPr dirty="0">
-              <a:latin typeface="Urbanist" panose="020B0604020202020204" charset="0"/>
+              <a:latin typeface="IDLC" pitchFamily="2" charset="0"/>
               <a:ea typeface="Urbanist" panose="020B0604020202020204" charset="0"/>
-              <a:cs typeface="Urbanist" panose="020B0604020202020204" charset="0"/>
+              <a:cs typeface="IDLC" pitchFamily="2" charset="0"/>
             </a:endParaRPr>
           </a:p>
         </p:txBody>
@@ -21253,17 +24481,17 @@
                 <a:solidFill>
                   <a:srgbClr val="DEFF9A"/>
                 </a:solidFill>
-                <a:latin typeface="Urbanist" panose="020B0604020202020204" charset="0"/>
+                <a:latin typeface="IDLC" pitchFamily="2" charset="0"/>
                 <a:ea typeface="Urbanist" panose="020B0604020202020204" charset="0"/>
-                <a:cs typeface="Urbanist" panose="020B0604020202020204" charset="0"/>
+                <a:cs typeface="IDLC" pitchFamily="2" charset="0"/>
                 <a:sym typeface="Urbanist SemiBold"/>
               </a:rPr>
               <a:t>Flawless Time Travel</a:t>
             </a:r>
             <a:endParaRPr dirty="0">
-              <a:latin typeface="Urbanist" panose="020B0604020202020204" charset="0"/>
+              <a:latin typeface="IDLC" pitchFamily="2" charset="0"/>
               <a:ea typeface="Urbanist" panose="020B0604020202020204" charset="0"/>
-              <a:cs typeface="Urbanist" panose="020B0604020202020204" charset="0"/>
+              <a:cs typeface="IDLC" pitchFamily="2" charset="0"/>
             </a:endParaRPr>
           </a:p>
         </p:txBody>
@@ -21310,17 +24538,17 @@
                 <a:solidFill>
                   <a:srgbClr val="DAFFDE"/>
                 </a:solidFill>
-                <a:latin typeface="Urbanist" panose="020B0604020202020204" charset="0"/>
+                <a:latin typeface="IDLC" pitchFamily="2" charset="0"/>
                 <a:ea typeface="Urbanist" panose="020B0604020202020204" charset="0"/>
-                <a:cs typeface="Urbanist" panose="020B0604020202020204" charset="0"/>
+                <a:cs typeface="IDLC" pitchFamily="2" charset="0"/>
                 <a:sym typeface="Urbanist"/>
               </a:rPr>
               <a:t>Faced with broken script executions? Seamlessly roll back your entire workspace to any precise historic commit instantly.</a:t>
             </a:r>
             <a:endParaRPr dirty="0">
-              <a:latin typeface="Urbanist" panose="020B0604020202020204" charset="0"/>
+              <a:latin typeface="IDLC" pitchFamily="2" charset="0"/>
               <a:ea typeface="Urbanist" panose="020B0604020202020204" charset="0"/>
-              <a:cs typeface="Urbanist" panose="020B0604020202020204" charset="0"/>
+              <a:cs typeface="IDLC" pitchFamily="2" charset="0"/>
             </a:endParaRPr>
           </a:p>
         </p:txBody>
@@ -21364,17 +24592,17 @@
                 <a:solidFill>
                   <a:srgbClr val="DEFF9A"/>
                 </a:solidFill>
-                <a:latin typeface="Urbanist" panose="020B0604020202020204" charset="0"/>
+                <a:latin typeface="IDLC" pitchFamily="2" charset="0"/>
                 <a:ea typeface="Urbanist" panose="020B0604020202020204" charset="0"/>
-                <a:cs typeface="Urbanist" panose="020B0604020202020204" charset="0"/>
+                <a:cs typeface="IDLC" pitchFamily="2" charset="0"/>
                 <a:sym typeface="Urbanist SemiBold"/>
               </a:rPr>
               <a:t>Absolute Audit Trails</a:t>
             </a:r>
             <a:endParaRPr dirty="0">
-              <a:latin typeface="Urbanist" panose="020B0604020202020204" charset="0"/>
+              <a:latin typeface="IDLC" pitchFamily="2" charset="0"/>
               <a:ea typeface="Urbanist" panose="020B0604020202020204" charset="0"/>
-              <a:cs typeface="Urbanist" panose="020B0604020202020204" charset="0"/>
+              <a:cs typeface="IDLC" pitchFamily="2" charset="0"/>
             </a:endParaRPr>
           </a:p>
         </p:txBody>
@@ -21421,17 +24649,17 @@
                 <a:solidFill>
                   <a:srgbClr val="DAFFDE"/>
                 </a:solidFill>
-                <a:latin typeface="Urbanist" panose="020B0604020202020204" charset="0"/>
+                <a:latin typeface="IDLC" pitchFamily="2" charset="0"/>
                 <a:ea typeface="Urbanist" panose="020B0604020202020204" charset="0"/>
-                <a:cs typeface="Urbanist" panose="020B0604020202020204" charset="0"/>
+                <a:cs typeface="IDLC" pitchFamily="2" charset="0"/>
                 <a:sym typeface="Urbanist"/>
               </a:rPr>
               <a:t>Every dynamic modification maps directly back to an individual author signature, accurate timestamp, and contextual intent description.</a:t>
             </a:r>
             <a:endParaRPr dirty="0">
-              <a:latin typeface="Urbanist" panose="020B0604020202020204" charset="0"/>
+              <a:latin typeface="IDLC" pitchFamily="2" charset="0"/>
               <a:ea typeface="Urbanist" panose="020B0604020202020204" charset="0"/>
-              <a:cs typeface="Urbanist" panose="020B0604020202020204" charset="0"/>
+              <a:cs typeface="IDLC" pitchFamily="2" charset="0"/>
             </a:endParaRPr>
           </a:p>
         </p:txBody>
@@ -21556,9 +24784,9 @@
                 <a:solidFill>
                   <a:srgbClr val="F5F5F5"/>
                 </a:solidFill>
-                <a:latin typeface="Urbanist" panose="020B0604020202020204" charset="0"/>
+                <a:latin typeface="IDLC" pitchFamily="2" charset="0"/>
                 <a:ea typeface="Urbanist" panose="020B0604020202020204" charset="0"/>
-                <a:cs typeface="Urbanist" panose="020B0604020202020204" charset="0"/>
+                <a:cs typeface="IDLC" pitchFamily="2" charset="0"/>
                 <a:sym typeface="Urbanist"/>
               </a:rPr>
               <a:t>THE CORE SOLUTION: </a:t>
@@ -21568,17 +24796,17 @@
                 <a:solidFill>
                   <a:srgbClr val="DEFF9A"/>
                 </a:solidFill>
-                <a:latin typeface="Urbanist" panose="020B0604020202020204" charset="0"/>
+                <a:latin typeface="IDLC" pitchFamily="2" charset="0"/>
                 <a:ea typeface="Urbanist" panose="020B0604020202020204" charset="0"/>
-                <a:cs typeface="Urbanist" panose="020B0604020202020204" charset="0"/>
+                <a:cs typeface="IDLC" pitchFamily="2" charset="0"/>
                 <a:sym typeface="Urbanist"/>
               </a:rPr>
               <a:t>TOTAL CONTROL</a:t>
             </a:r>
             <a:endParaRPr dirty="0">
-              <a:latin typeface="Urbanist" panose="020B0604020202020204" charset="0"/>
+              <a:latin typeface="IDLC" pitchFamily="2" charset="0"/>
               <a:ea typeface="Urbanist" panose="020B0604020202020204" charset="0"/>
-              <a:cs typeface="Urbanist" panose="020B0604020202020204" charset="0"/>
+              <a:cs typeface="IDLC" pitchFamily="2" charset="0"/>
             </a:endParaRPr>
           </a:p>
         </p:txBody>
@@ -21623,9 +24851,9 @@
               <a:solidFill>
                 <a:schemeClr val="dk1"/>
               </a:solidFill>
-              <a:latin typeface="Urbanist" panose="020B0604020202020204" charset="0"/>
+              <a:latin typeface="IDLC" pitchFamily="2" charset="0"/>
               <a:ea typeface="Urbanist" panose="020B0604020202020204" charset="0"/>
-              <a:cs typeface="Urbanist" panose="020B0604020202020204" charset="0"/>
+              <a:cs typeface="IDLC" pitchFamily="2" charset="0"/>
               <a:sym typeface="Calibri"/>
             </a:endParaRPr>
           </a:p>
@@ -21636,6 +24864,13 @@
   <p:clrMapOvr>
     <a:masterClrMapping/>
   </p:clrMapOvr>
+  <p:timing>
+    <p:tnLst>
+      <p:par>
+        <p:cTn id="1" dur="indefinite" restart="never" nodeType="tmRoot"/>
+      </p:par>
+    </p:tnLst>
+  </p:timing>
 </p:sld>
 </file>
 
@@ -21776,17 +25011,17 @@
                 <a:solidFill>
                   <a:srgbClr val="DEFF9A"/>
                 </a:solidFill>
-                <a:latin typeface="Urbanist" panose="020B0604020202020204" charset="0"/>
+                <a:latin typeface="IDLC" pitchFamily="2" charset="0"/>
                 <a:ea typeface="Urbanist" panose="020B0604020202020204" charset="0"/>
-                <a:cs typeface="Urbanist" panose="020B0604020202020204" charset="0"/>
+                <a:cs typeface="IDLC" pitchFamily="2" charset="0"/>
                 <a:sym typeface="Urbanist SemiBold"/>
               </a:rPr>
               <a:t>Parallel Streams of Innovation</a:t>
             </a:r>
             <a:endParaRPr dirty="0">
-              <a:latin typeface="Urbanist" panose="020B0604020202020204" charset="0"/>
+              <a:latin typeface="IDLC" pitchFamily="2" charset="0"/>
               <a:ea typeface="Urbanist" panose="020B0604020202020204" charset="0"/>
-              <a:cs typeface="Urbanist" panose="020B0604020202020204" charset="0"/>
+              <a:cs typeface="IDLC" pitchFamily="2" charset="0"/>
             </a:endParaRPr>
           </a:p>
         </p:txBody>
@@ -21833,17 +25068,17 @@
                 <a:solidFill>
                   <a:srgbClr val="DAFFDE"/>
                 </a:solidFill>
-                <a:latin typeface="Urbanist" panose="020B0604020202020204" charset="0"/>
+                <a:latin typeface="IDLC" pitchFamily="2" charset="0"/>
                 <a:ea typeface="Urbanist" panose="020B0604020202020204" charset="0"/>
-                <a:cs typeface="Urbanist" panose="020B0604020202020204" charset="0"/>
+                <a:cs typeface="IDLC" pitchFamily="2" charset="0"/>
                 <a:sym typeface="Urbanist"/>
               </a:rPr>
               <a:t>Branching structures safely isolate work streams so you can code without breaking the baseline project:</a:t>
             </a:r>
             <a:endParaRPr dirty="0">
-              <a:latin typeface="Urbanist" panose="020B0604020202020204" charset="0"/>
+              <a:latin typeface="IDLC" pitchFamily="2" charset="0"/>
               <a:ea typeface="Urbanist" panose="020B0604020202020204" charset="0"/>
-              <a:cs typeface="Urbanist" panose="020B0604020202020204" charset="0"/>
+              <a:cs typeface="IDLC" pitchFamily="2" charset="0"/>
             </a:endParaRPr>
           </a:p>
         </p:txBody>
@@ -21890,9 +25125,9 @@
                 <a:solidFill>
                   <a:srgbClr val="DAFFDE"/>
                 </a:solidFill>
-                <a:latin typeface="Urbanist" panose="020B0604020202020204" charset="0"/>
+                <a:latin typeface="IDLC" pitchFamily="2" charset="0"/>
                 <a:ea typeface="Urbanist" panose="020B0604020202020204" charset="0"/>
-                <a:cs typeface="Urbanist" panose="020B0604020202020204" charset="0"/>
+                <a:cs typeface="IDLC" pitchFamily="2" charset="0"/>
                 <a:sym typeface="Urbanist"/>
               </a:rPr>
               <a:t>The Baseline (main):</a:t>
@@ -21902,17 +25137,17 @@
                 <a:solidFill>
                   <a:srgbClr val="DAFFDE"/>
                 </a:solidFill>
-                <a:latin typeface="Urbanist" panose="020B0604020202020204" charset="0"/>
+                <a:latin typeface="IDLC" pitchFamily="2" charset="0"/>
                 <a:ea typeface="Urbanist" panose="020B0604020202020204" charset="0"/>
-                <a:cs typeface="Urbanist" panose="020B0604020202020204" charset="0"/>
+                <a:cs typeface="IDLC" pitchFamily="2" charset="0"/>
                 <a:sym typeface="Urbanist"/>
               </a:rPr>
               <a:t> The pristine, production-ready code. This is the single source of truth.</a:t>
             </a:r>
             <a:endParaRPr dirty="0">
-              <a:latin typeface="Urbanist" panose="020B0604020202020204" charset="0"/>
+              <a:latin typeface="IDLC" pitchFamily="2" charset="0"/>
               <a:ea typeface="Urbanist" panose="020B0604020202020204" charset="0"/>
-              <a:cs typeface="Urbanist" panose="020B0604020202020204" charset="0"/>
+              <a:cs typeface="IDLC" pitchFamily="2" charset="0"/>
             </a:endParaRPr>
           </a:p>
         </p:txBody>
@@ -21959,9 +25194,9 @@
                 <a:solidFill>
                   <a:srgbClr val="DAFFDE"/>
                 </a:solidFill>
-                <a:latin typeface="Urbanist" panose="020B0604020202020204" charset="0"/>
+                <a:latin typeface="IDLC" pitchFamily="2" charset="0"/>
                 <a:ea typeface="Urbanist" panose="020B0604020202020204" charset="0"/>
-                <a:cs typeface="Urbanist" panose="020B0604020202020204" charset="0"/>
+                <a:cs typeface="IDLC" pitchFamily="2" charset="0"/>
                 <a:sym typeface="Urbanist"/>
               </a:rPr>
               <a:t>Feature Development (feature/</a:t>
@@ -21971,9 +25206,9 @@
                 <a:solidFill>
                   <a:srgbClr val="DAFFDE"/>
                 </a:solidFill>
-                <a:latin typeface="Urbanist" panose="020B0604020202020204" charset="0"/>
+                <a:latin typeface="IDLC" pitchFamily="2" charset="0"/>
                 <a:ea typeface="Urbanist" panose="020B0604020202020204" charset="0"/>
-                <a:cs typeface="Urbanist" panose="020B0604020202020204" charset="0"/>
+                <a:cs typeface="IDLC" pitchFamily="2" charset="0"/>
                 <a:sym typeface="Urbanist"/>
               </a:rPr>
               <a:t>esau_calculator</a:t>
@@ -21983,9 +25218,9 @@
                 <a:solidFill>
                   <a:srgbClr val="DAFFDE"/>
                 </a:solidFill>
-                <a:latin typeface="Urbanist" panose="020B0604020202020204" charset="0"/>
+                <a:latin typeface="IDLC" pitchFamily="2" charset="0"/>
                 <a:ea typeface="Urbanist" panose="020B0604020202020204" charset="0"/>
-                <a:cs typeface="Urbanist" panose="020B0604020202020204" charset="0"/>
+                <a:cs typeface="IDLC" pitchFamily="2" charset="0"/>
                 <a:sym typeface="Urbanist"/>
               </a:rPr>
               <a:t>):</a:t>
@@ -21995,17 +25230,17 @@
                 <a:solidFill>
                   <a:srgbClr val="DAFFDE"/>
                 </a:solidFill>
-                <a:latin typeface="Urbanist" panose="020B0604020202020204" charset="0"/>
+                <a:latin typeface="IDLC" pitchFamily="2" charset="0"/>
                 <a:ea typeface="Urbanist" panose="020B0604020202020204" charset="0"/>
-                <a:cs typeface="Urbanist" panose="020B0604020202020204" charset="0"/>
+                <a:cs typeface="IDLC" pitchFamily="2" charset="0"/>
                 <a:sym typeface="Urbanist"/>
               </a:rPr>
               <a:t> A safe sandbox where you build and test new models or logic without touching main.</a:t>
             </a:r>
             <a:endParaRPr dirty="0">
-              <a:latin typeface="Urbanist" panose="020B0604020202020204" charset="0"/>
+              <a:latin typeface="IDLC" pitchFamily="2" charset="0"/>
               <a:ea typeface="Urbanist" panose="020B0604020202020204" charset="0"/>
-              <a:cs typeface="Urbanist" panose="020B0604020202020204" charset="0"/>
+              <a:cs typeface="IDLC" pitchFamily="2" charset="0"/>
             </a:endParaRPr>
           </a:p>
         </p:txBody>
@@ -22052,9 +25287,9 @@
                 <a:solidFill>
                   <a:srgbClr val="DAFFDE"/>
                 </a:solidFill>
-                <a:latin typeface="Urbanist" panose="020B0604020202020204" charset="0"/>
+                <a:latin typeface="IDLC" pitchFamily="2" charset="0"/>
                 <a:ea typeface="Urbanist" panose="020B0604020202020204" charset="0"/>
-                <a:cs typeface="Urbanist" panose="020B0604020202020204" charset="0"/>
+                <a:cs typeface="IDLC" pitchFamily="2" charset="0"/>
                 <a:sym typeface="Urbanist"/>
               </a:rPr>
               <a:t>Bug Fixing (bugfix/</a:t>
@@ -22064,9 +25299,9 @@
                 <a:solidFill>
                   <a:srgbClr val="DAFFDE"/>
                 </a:solidFill>
-                <a:latin typeface="Urbanist" panose="020B0604020202020204" charset="0"/>
+                <a:latin typeface="IDLC" pitchFamily="2" charset="0"/>
                 <a:ea typeface="Urbanist" panose="020B0604020202020204" charset="0"/>
-                <a:cs typeface="Urbanist" panose="020B0604020202020204" charset="0"/>
+                <a:cs typeface="IDLC" pitchFamily="2" charset="0"/>
                 <a:sym typeface="Urbanist"/>
               </a:rPr>
               <a:t>data_cleaning</a:t>
@@ -22076,9 +25311,9 @@
                 <a:solidFill>
                   <a:srgbClr val="DAFFDE"/>
                 </a:solidFill>
-                <a:latin typeface="Urbanist" panose="020B0604020202020204" charset="0"/>
+                <a:latin typeface="IDLC" pitchFamily="2" charset="0"/>
                 <a:ea typeface="Urbanist" panose="020B0604020202020204" charset="0"/>
-                <a:cs typeface="Urbanist" panose="020B0604020202020204" charset="0"/>
+                <a:cs typeface="IDLC" pitchFamily="2" charset="0"/>
                 <a:sym typeface="Urbanist"/>
               </a:rPr>
               <a:t>):</a:t>
@@ -22088,17 +25323,17 @@
                 <a:solidFill>
                   <a:srgbClr val="DAFFDE"/>
                 </a:solidFill>
-                <a:latin typeface="Urbanist" panose="020B0604020202020204" charset="0"/>
+                <a:latin typeface="IDLC" pitchFamily="2" charset="0"/>
                 <a:ea typeface="Urbanist" panose="020B0604020202020204" charset="0"/>
-                <a:cs typeface="Urbanist" panose="020B0604020202020204" charset="0"/>
+                <a:cs typeface="IDLC" pitchFamily="2" charset="0"/>
                 <a:sym typeface="Urbanist"/>
               </a:rPr>
               <a:t> A quick, parallel branch spun up to fix a specific issue without interrupting the ongoing feature work.</a:t>
             </a:r>
             <a:endParaRPr dirty="0">
-              <a:latin typeface="Urbanist" panose="020B0604020202020204" charset="0"/>
+              <a:latin typeface="IDLC" pitchFamily="2" charset="0"/>
               <a:ea typeface="Urbanist" panose="020B0604020202020204" charset="0"/>
-              <a:cs typeface="Urbanist" panose="020B0604020202020204" charset="0"/>
+              <a:cs typeface="IDLC" pitchFamily="2" charset="0"/>
             </a:endParaRPr>
           </a:p>
         </p:txBody>
@@ -22145,17 +25380,17 @@
                 <a:solidFill>
                   <a:srgbClr val="DEFF9A"/>
                 </a:solidFill>
-                <a:latin typeface="Urbanist" panose="020B0604020202020204" charset="0"/>
+                <a:latin typeface="IDLC" pitchFamily="2" charset="0"/>
                 <a:ea typeface="Urbanist" panose="020B0604020202020204" charset="0"/>
-                <a:cs typeface="Urbanist" panose="020B0604020202020204" charset="0"/>
+                <a:cs typeface="IDLC" pitchFamily="2" charset="0"/>
                 <a:sym typeface="Urbanist"/>
               </a:rPr>
               <a:t>→</a:t>
             </a:r>
             <a:endParaRPr>
-              <a:latin typeface="Urbanist" panose="020B0604020202020204" charset="0"/>
+              <a:latin typeface="IDLC" pitchFamily="2" charset="0"/>
               <a:ea typeface="Urbanist" panose="020B0604020202020204" charset="0"/>
-              <a:cs typeface="Urbanist" panose="020B0604020202020204" charset="0"/>
+              <a:cs typeface="IDLC" pitchFamily="2" charset="0"/>
             </a:endParaRPr>
           </a:p>
         </p:txBody>
@@ -22202,17 +25437,17 @@
                 <a:solidFill>
                   <a:srgbClr val="DEFF9A"/>
                 </a:solidFill>
-                <a:latin typeface="Urbanist" panose="020B0604020202020204" charset="0"/>
+                <a:latin typeface="IDLC" pitchFamily="2" charset="0"/>
                 <a:ea typeface="Urbanist" panose="020B0604020202020204" charset="0"/>
-                <a:cs typeface="Urbanist" panose="020B0604020202020204" charset="0"/>
+                <a:cs typeface="IDLC" pitchFamily="2" charset="0"/>
                 <a:sym typeface="Urbanist"/>
               </a:rPr>
               <a:t>→</a:t>
             </a:r>
             <a:endParaRPr>
-              <a:latin typeface="Urbanist" panose="020B0604020202020204" charset="0"/>
+              <a:latin typeface="IDLC" pitchFamily="2" charset="0"/>
               <a:ea typeface="Urbanist" panose="020B0604020202020204" charset="0"/>
-              <a:cs typeface="Urbanist" panose="020B0604020202020204" charset="0"/>
+              <a:cs typeface="IDLC" pitchFamily="2" charset="0"/>
             </a:endParaRPr>
           </a:p>
         </p:txBody>
@@ -22259,17 +25494,17 @@
                 <a:solidFill>
                   <a:srgbClr val="DEFF9A"/>
                 </a:solidFill>
-                <a:latin typeface="Urbanist" panose="020B0604020202020204" charset="0"/>
+                <a:latin typeface="IDLC" pitchFamily="2" charset="0"/>
                 <a:ea typeface="Urbanist" panose="020B0604020202020204" charset="0"/>
-                <a:cs typeface="Urbanist" panose="020B0604020202020204" charset="0"/>
+                <a:cs typeface="IDLC" pitchFamily="2" charset="0"/>
                 <a:sym typeface="Urbanist"/>
               </a:rPr>
               <a:t>→</a:t>
             </a:r>
             <a:endParaRPr>
-              <a:latin typeface="Urbanist" panose="020B0604020202020204" charset="0"/>
+              <a:latin typeface="IDLC" pitchFamily="2" charset="0"/>
               <a:ea typeface="Urbanist" panose="020B0604020202020204" charset="0"/>
-              <a:cs typeface="Urbanist" panose="020B0604020202020204" charset="0"/>
+              <a:cs typeface="IDLC" pitchFamily="2" charset="0"/>
             </a:endParaRPr>
           </a:p>
         </p:txBody>
@@ -22313,9 +25548,9 @@
                 <a:solidFill>
                   <a:srgbClr val="F5F5F5"/>
                 </a:solidFill>
-                <a:latin typeface="Urbanist" panose="020B0604020202020204" charset="0"/>
+                <a:latin typeface="IDLC" pitchFamily="2" charset="0"/>
                 <a:ea typeface="Urbanist" panose="020B0604020202020204" charset="0"/>
-                <a:cs typeface="Urbanist" panose="020B0604020202020204" charset="0"/>
+                <a:cs typeface="IDLC" pitchFamily="2" charset="0"/>
                 <a:sym typeface="Urbanist"/>
               </a:rPr>
               <a:t>ADVANCED WORKFLOWS: </a:t>
@@ -22325,17 +25560,17 @@
                 <a:solidFill>
                   <a:srgbClr val="DEFF9A"/>
                 </a:solidFill>
-                <a:latin typeface="Urbanist" panose="020B0604020202020204" charset="0"/>
+                <a:latin typeface="IDLC" pitchFamily="2" charset="0"/>
                 <a:ea typeface="Urbanist" panose="020B0604020202020204" charset="0"/>
-                <a:cs typeface="Urbanist" panose="020B0604020202020204" charset="0"/>
+                <a:cs typeface="IDLC" pitchFamily="2" charset="0"/>
                 <a:sym typeface="Urbanist"/>
               </a:rPr>
               <a:t>BRANCHING</a:t>
             </a:r>
             <a:endParaRPr dirty="0">
-              <a:latin typeface="Urbanist" panose="020B0604020202020204" charset="0"/>
+              <a:latin typeface="IDLC" pitchFamily="2" charset="0"/>
               <a:ea typeface="Urbanist" panose="020B0604020202020204" charset="0"/>
-              <a:cs typeface="Urbanist" panose="020B0604020202020204" charset="0"/>
+              <a:cs typeface="IDLC" pitchFamily="2" charset="0"/>
             </a:endParaRPr>
           </a:p>
         </p:txBody>
@@ -22380,9 +25615,9 @@
               <a:solidFill>
                 <a:schemeClr val="dk1"/>
               </a:solidFill>
-              <a:latin typeface="Urbanist" panose="020B0604020202020204" charset="0"/>
+              <a:latin typeface="IDLC" pitchFamily="2" charset="0"/>
               <a:ea typeface="Urbanist" panose="020B0604020202020204" charset="0"/>
-              <a:cs typeface="Urbanist" panose="020B0604020202020204" charset="0"/>
+              <a:cs typeface="IDLC" pitchFamily="2" charset="0"/>
               <a:sym typeface="Calibri"/>
             </a:endParaRPr>
           </a:p>
@@ -22393,6 +25628,13 @@
   <p:clrMapOvr>
     <a:masterClrMapping/>
   </p:clrMapOvr>
+  <p:timing>
+    <p:tnLst>
+      <p:par>
+        <p:cTn id="1" dur="indefinite" restart="never" nodeType="tmRoot"/>
+      </p:par>
+    </p:tnLst>
+  </p:timing>
 </p:sld>
 </file>
 
@@ -22435,9 +25677,9 @@
           <a:lstStyle/>
           <a:p>
             <a:endParaRPr lang="en-US">
-              <a:latin typeface="Urbanist" panose="020B0604020202020204" charset="0"/>
+              <a:latin typeface="IDLC" pitchFamily="2" charset="0"/>
               <a:ea typeface="Urbanist" panose="020B0604020202020204" charset="0"/>
-              <a:cs typeface="Urbanist" panose="020B0604020202020204" charset="0"/>
+              <a:cs typeface="IDLC" pitchFamily="2" charset="0"/>
             </a:endParaRPr>
           </a:p>
         </p:txBody>
@@ -22464,9 +25706,9 @@
           <a:lstStyle/>
           <a:p>
             <a:endParaRPr lang="en-US">
-              <a:latin typeface="Urbanist" panose="020B0604020202020204" charset="0"/>
+              <a:latin typeface="IDLC" pitchFamily="2" charset="0"/>
               <a:ea typeface="Urbanist" panose="020B0604020202020204" charset="0"/>
-              <a:cs typeface="Urbanist" panose="020B0604020202020204" charset="0"/>
+              <a:cs typeface="IDLC" pitchFamily="2" charset="0"/>
             </a:endParaRPr>
           </a:p>
         </p:txBody>
@@ -22511,6 +25753,13 @@
   <p:clrMapOvr>
     <a:masterClrMapping/>
   </p:clrMapOvr>
+  <p:timing>
+    <p:tnLst>
+      <p:par>
+        <p:cTn id="1" dur="indefinite" restart="never" nodeType="tmRoot"/>
+      </p:par>
+    </p:tnLst>
+  </p:timing>
 </p:sld>
 </file>
 
@@ -22597,9 +25846,9 @@
                 <a:solidFill>
                   <a:srgbClr val="F5F5F5"/>
                 </a:solidFill>
-                <a:latin typeface="Urbanist" panose="020B0604020202020204" charset="0"/>
+                <a:latin typeface="IDLC" pitchFamily="2" charset="0"/>
                 <a:ea typeface="Urbanist" panose="020B0604020202020204" charset="0"/>
-                <a:cs typeface="Urbanist" panose="020B0604020202020204" charset="0"/>
+                <a:cs typeface="IDLC" pitchFamily="2" charset="0"/>
                 <a:sym typeface="Urbanist"/>
               </a:rPr>
               <a:t>RSTUDIO </a:t>
@@ -22609,17 +25858,17 @@
                 <a:solidFill>
                   <a:srgbClr val="DEFF9A"/>
                 </a:solidFill>
-                <a:latin typeface="Urbanist" panose="020B0604020202020204" charset="0"/>
+                <a:latin typeface="IDLC" pitchFamily="2" charset="0"/>
                 <a:ea typeface="Urbanist" panose="020B0604020202020204" charset="0"/>
-                <a:cs typeface="Urbanist" panose="020B0604020202020204" charset="0"/>
+                <a:cs typeface="IDLC" pitchFamily="2" charset="0"/>
                 <a:sym typeface="Urbanist"/>
               </a:rPr>
               <a:t>CONFIGURATION</a:t>
             </a:r>
             <a:endParaRPr dirty="0">
-              <a:latin typeface="Urbanist" panose="020B0604020202020204" charset="0"/>
+              <a:latin typeface="IDLC" pitchFamily="2" charset="0"/>
               <a:ea typeface="Urbanist" panose="020B0604020202020204" charset="0"/>
-              <a:cs typeface="Urbanist" panose="020B0604020202020204" charset="0"/>
+              <a:cs typeface="IDLC" pitchFamily="2" charset="0"/>
             </a:endParaRPr>
           </a:p>
         </p:txBody>
@@ -22664,9 +25913,9 @@
               <a:solidFill>
                 <a:schemeClr val="dk1"/>
               </a:solidFill>
-              <a:latin typeface="Urbanist" panose="020B0604020202020204" charset="0"/>
+              <a:latin typeface="IDLC" pitchFamily="2" charset="0"/>
               <a:ea typeface="Urbanist" panose="020B0604020202020204" charset="0"/>
-              <a:cs typeface="Urbanist" panose="020B0604020202020204" charset="0"/>
+              <a:cs typeface="IDLC" pitchFamily="2" charset="0"/>
               <a:sym typeface="Calibri"/>
             </a:endParaRPr>
           </a:p>
@@ -22714,17 +25963,17 @@
                 <a:solidFill>
                   <a:srgbClr val="DAFFDE"/>
                 </a:solidFill>
-                <a:latin typeface="Urbanist" panose="020B0604020202020204" charset="0"/>
+                <a:latin typeface="IDLC" pitchFamily="2" charset="0"/>
                 <a:ea typeface="Urbanist" panose="020B0604020202020204" charset="0"/>
-                <a:cs typeface="Urbanist" panose="020B0604020202020204" charset="0"/>
+                <a:cs typeface="IDLC" pitchFamily="2" charset="0"/>
                 <a:sym typeface="Urbanist"/>
               </a:rPr>
               <a:t>Verify path to git.exe</a:t>
             </a:r>
             <a:endParaRPr dirty="0">
-              <a:latin typeface="Urbanist" panose="020B0604020202020204" charset="0"/>
+              <a:latin typeface="IDLC" pitchFamily="2" charset="0"/>
               <a:ea typeface="Urbanist" panose="020B0604020202020204" charset="0"/>
-              <a:cs typeface="Urbanist" panose="020B0604020202020204" charset="0"/>
+              <a:cs typeface="IDLC" pitchFamily="2" charset="0"/>
             </a:endParaRPr>
           </a:p>
         </p:txBody>
@@ -22811,9 +26060,9 @@
                     <a:solidFill>
                       <a:srgbClr val="DAFFDE"/>
                     </a:solidFill>
-                    <a:latin typeface="Urbanist" panose="020B0604020202020204" charset="0"/>
+                    <a:latin typeface="IDLC" pitchFamily="2" charset="0"/>
                     <a:ea typeface="Urbanist" panose="020B0604020202020204" charset="0"/>
-                    <a:cs typeface="Urbanist" panose="020B0604020202020204" charset="0"/>
+                    <a:cs typeface="IDLC" pitchFamily="2" charset="0"/>
                     <a:sym typeface="Urbanist"/>
                   </a:rPr>
                   <a:t>Navigate to </a:t>
@@ -22823,17 +26072,17 @@
                     <a:solidFill>
                       <a:srgbClr val="DAFFDE"/>
                     </a:solidFill>
-                    <a:latin typeface="Urbanist" panose="020B0604020202020204" charset="0"/>
+                    <a:latin typeface="IDLC" pitchFamily="2" charset="0"/>
                     <a:ea typeface="Urbanist" panose="020B0604020202020204" charset="0"/>
-                    <a:cs typeface="Urbanist" panose="020B0604020202020204" charset="0"/>
+                    <a:cs typeface="IDLC" pitchFamily="2" charset="0"/>
                     <a:sym typeface="Urbanist"/>
                   </a:rPr>
                   <a:t>Tools &gt; Global Options</a:t>
                 </a:r>
                 <a:endParaRPr dirty="0">
-                  <a:latin typeface="Urbanist" panose="020B0604020202020204" charset="0"/>
+                  <a:latin typeface="IDLC" pitchFamily="2" charset="0"/>
                   <a:ea typeface="Urbanist" panose="020B0604020202020204" charset="0"/>
-                  <a:cs typeface="Urbanist" panose="020B0604020202020204" charset="0"/>
+                  <a:cs typeface="IDLC" pitchFamily="2" charset="0"/>
                 </a:endParaRPr>
               </a:p>
             </p:txBody>
@@ -22928,9 +26177,9 @@
                     <a:solidFill>
                       <a:srgbClr val="DAFFDE"/>
                     </a:solidFill>
-                    <a:latin typeface="Urbanist" panose="020B0604020202020204" charset="0"/>
+                    <a:latin typeface="IDLC" pitchFamily="2" charset="0"/>
                     <a:ea typeface="Urbanist" panose="020B0604020202020204" charset="0"/>
-                    <a:cs typeface="Urbanist" panose="020B0604020202020204" charset="0"/>
+                    <a:cs typeface="IDLC" pitchFamily="2" charset="0"/>
                     <a:sym typeface="Urbanist"/>
                   </a:rPr>
                   <a:t>Select the </a:t>
@@ -22940,9 +26189,9 @@
                     <a:solidFill>
                       <a:srgbClr val="DAFFDE"/>
                     </a:solidFill>
-                    <a:latin typeface="Urbanist" panose="020B0604020202020204" charset="0"/>
+                    <a:latin typeface="IDLC" pitchFamily="2" charset="0"/>
                     <a:ea typeface="Urbanist" panose="020B0604020202020204" charset="0"/>
-                    <a:cs typeface="Urbanist" panose="020B0604020202020204" charset="0"/>
+                    <a:cs typeface="IDLC" pitchFamily="2" charset="0"/>
                     <a:sym typeface="Urbanist"/>
                   </a:rPr>
                   <a:t>Git/SVN</a:t>
@@ -22952,17 +26201,17 @@
                     <a:solidFill>
                       <a:srgbClr val="DAFFDE"/>
                     </a:solidFill>
-                    <a:latin typeface="Urbanist" panose="020B0604020202020204" charset="0"/>
+                    <a:latin typeface="IDLC" pitchFamily="2" charset="0"/>
                     <a:ea typeface="Urbanist" panose="020B0604020202020204" charset="0"/>
-                    <a:cs typeface="Urbanist" panose="020B0604020202020204" charset="0"/>
+                    <a:cs typeface="IDLC" pitchFamily="2" charset="0"/>
                     <a:sym typeface="Urbanist"/>
                   </a:rPr>
                   <a:t> tab</a:t>
                 </a:r>
                 <a:endParaRPr dirty="0">
-                  <a:latin typeface="Urbanist" panose="020B0604020202020204" charset="0"/>
+                  <a:latin typeface="IDLC" pitchFamily="2" charset="0"/>
                   <a:ea typeface="Urbanist" panose="020B0604020202020204" charset="0"/>
-                  <a:cs typeface="Urbanist" panose="020B0604020202020204" charset="0"/>
+                  <a:cs typeface="IDLC" pitchFamily="2" charset="0"/>
                 </a:endParaRPr>
               </a:p>
             </p:txBody>
@@ -23057,9 +26306,9 @@
                     <a:solidFill>
                       <a:srgbClr val="DAFFDE"/>
                     </a:solidFill>
-                    <a:latin typeface="Urbanist" panose="020B0604020202020204" charset="0"/>
+                    <a:latin typeface="IDLC" pitchFamily="2" charset="0"/>
                     <a:ea typeface="Urbanist" panose="020B0604020202020204" charset="0"/>
-                    <a:cs typeface="Urbanist" panose="020B0604020202020204" charset="0"/>
+                    <a:cs typeface="IDLC" pitchFamily="2" charset="0"/>
                     <a:sym typeface="Urbanist"/>
                   </a:rPr>
                   <a:t>Enable </a:t>
@@ -23069,17 +26318,17 @@
                     <a:solidFill>
                       <a:srgbClr val="DAFFDE"/>
                     </a:solidFill>
-                    <a:latin typeface="Urbanist" panose="020B0604020202020204" charset="0"/>
+                    <a:latin typeface="IDLC" pitchFamily="2" charset="0"/>
                     <a:ea typeface="Urbanist" panose="020B0604020202020204" charset="0"/>
-                    <a:cs typeface="Urbanist" panose="020B0604020202020204" charset="0"/>
+                    <a:cs typeface="IDLC" pitchFamily="2" charset="0"/>
                     <a:sym typeface="Urbanist"/>
                   </a:rPr>
                   <a:t>Version Control Interface</a:t>
                 </a:r>
                 <a:endParaRPr dirty="0">
-                  <a:latin typeface="Urbanist" panose="020B0604020202020204" charset="0"/>
+                  <a:latin typeface="IDLC" pitchFamily="2" charset="0"/>
                   <a:ea typeface="Urbanist" panose="020B0604020202020204" charset="0"/>
-                  <a:cs typeface="Urbanist" panose="020B0604020202020204" charset="0"/>
+                  <a:cs typeface="IDLC" pitchFamily="2" charset="0"/>
                 </a:endParaRPr>
               </a:p>
             </p:txBody>
@@ -23189,9 +26438,9 @@
               <a:solidFill>
                 <a:schemeClr val="tx1"/>
               </a:solidFill>
-              <a:latin typeface="Urbanist" panose="020B0604020202020204" charset="0"/>
+              <a:latin typeface="IDLC" pitchFamily="2" charset="0"/>
               <a:ea typeface="Urbanist" panose="020B0604020202020204" charset="0"/>
-              <a:cs typeface="Urbanist" panose="020B0604020202020204" charset="0"/>
+              <a:cs typeface="IDLC" pitchFamily="2" charset="0"/>
             </a:endParaRPr>
           </a:p>
         </p:txBody>
@@ -23201,6 +26450,13 @@
   <p:clrMapOvr>
     <a:masterClrMapping/>
   </p:clrMapOvr>
+  <p:timing>
+    <p:tnLst>
+      <p:par>
+        <p:cTn id="1" dur="indefinite" restart="never" nodeType="tmRoot"/>
+      </p:par>
+    </p:tnLst>
+  </p:timing>
 </p:sld>
 </file>
 
@@ -23314,9 +26570,9 @@
                 <a:solidFill>
                   <a:srgbClr val="F5F5F5"/>
                 </a:solidFill>
-                <a:latin typeface="Urbanist" panose="020B0604020202020204" charset="0"/>
+                <a:latin typeface="IDLC" pitchFamily="2" charset="0"/>
                 <a:ea typeface="Urbanist" panose="020B0604020202020204" charset="0"/>
-                <a:cs typeface="Urbanist" panose="020B0604020202020204" charset="0"/>
+                <a:cs typeface="IDLC" pitchFamily="2" charset="0"/>
                 <a:sym typeface="Urbanist"/>
               </a:rPr>
               <a:t>ONE TIME</a:t>
@@ -23326,9 +26582,9 @@
                 <a:solidFill>
                   <a:srgbClr val="F5F5F5"/>
                 </a:solidFill>
-                <a:latin typeface="Urbanist" panose="020B0604020202020204" charset="0"/>
+                <a:latin typeface="IDLC" pitchFamily="2" charset="0"/>
                 <a:ea typeface="Urbanist" panose="020B0604020202020204" charset="0"/>
-                <a:cs typeface="Urbanist" panose="020B0604020202020204" charset="0"/>
+                <a:cs typeface="IDLC" pitchFamily="2" charset="0"/>
                 <a:sym typeface="Urbanist"/>
               </a:rPr>
               <a:t> </a:t>
@@ -23338,17 +26594,17 @@
                 <a:solidFill>
                   <a:srgbClr val="DEFF9A"/>
                 </a:solidFill>
-                <a:latin typeface="Urbanist" panose="020B0604020202020204" charset="0"/>
+                <a:latin typeface="IDLC" pitchFamily="2" charset="0"/>
                 <a:ea typeface="Urbanist" panose="020B0604020202020204" charset="0"/>
-                <a:cs typeface="Urbanist" panose="020B0604020202020204" charset="0"/>
+                <a:cs typeface="IDLC" pitchFamily="2" charset="0"/>
                 <a:sym typeface="Urbanist"/>
               </a:rPr>
               <a:t>SETUP</a:t>
             </a:r>
             <a:endParaRPr dirty="0">
-              <a:latin typeface="Urbanist" panose="020B0604020202020204" charset="0"/>
+              <a:latin typeface="IDLC" pitchFamily="2" charset="0"/>
               <a:ea typeface="Urbanist" panose="020B0604020202020204" charset="0"/>
-              <a:cs typeface="Urbanist" panose="020B0604020202020204" charset="0"/>
+              <a:cs typeface="IDLC" pitchFamily="2" charset="0"/>
             </a:endParaRPr>
           </a:p>
         </p:txBody>
@@ -23393,9 +26649,9 @@
               <a:solidFill>
                 <a:schemeClr val="dk1"/>
               </a:solidFill>
-              <a:latin typeface="Urbanist" panose="020B0604020202020204" charset="0"/>
+              <a:latin typeface="IDLC" pitchFamily="2" charset="0"/>
               <a:ea typeface="Urbanist" panose="020B0604020202020204" charset="0"/>
-              <a:cs typeface="Urbanist" panose="020B0604020202020204" charset="0"/>
+              <a:cs typeface="IDLC" pitchFamily="2" charset="0"/>
               <a:sym typeface="Calibri"/>
             </a:endParaRPr>
           </a:p>
@@ -23443,9 +26699,9 @@
                 <a:solidFill>
                   <a:srgbClr val="DAFFDE"/>
                 </a:solidFill>
-                <a:latin typeface="Urbanist" panose="020B0604020202020204" charset="0"/>
+                <a:latin typeface="IDLC" pitchFamily="2" charset="0"/>
                 <a:ea typeface="Urbanist" panose="020B0604020202020204" charset="0"/>
-                <a:cs typeface="Urbanist" panose="020B0604020202020204" charset="0"/>
+                <a:cs typeface="IDLC" pitchFamily="2" charset="0"/>
                 <a:sym typeface="Urbanist"/>
               </a:rPr>
               <a:t>Run this in R Console </a:t>
@@ -23469,17 +26725,17 @@
                 <a:solidFill>
                   <a:srgbClr val="DAFFDE"/>
                 </a:solidFill>
-                <a:latin typeface="Urbanist" panose="020B0604020202020204" charset="0"/>
+                <a:latin typeface="IDLC" pitchFamily="2" charset="0"/>
                 <a:ea typeface="Urbanist" panose="020B0604020202020204" charset="0"/>
-                <a:cs typeface="Urbanist" panose="020B0604020202020204" charset="0"/>
+                <a:cs typeface="IDLC" pitchFamily="2" charset="0"/>
                 <a:sym typeface="Urbanist"/>
               </a:rPr>
               <a:t>to link your local commits to profile:</a:t>
             </a:r>
             <a:endParaRPr sz="1200" dirty="0">
-              <a:latin typeface="Urbanist" panose="020B0604020202020204" charset="0"/>
+              <a:latin typeface="IDLC" pitchFamily="2" charset="0"/>
               <a:ea typeface="Urbanist" panose="020B0604020202020204" charset="0"/>
-              <a:cs typeface="Urbanist" panose="020B0604020202020204" charset="0"/>
+              <a:cs typeface="IDLC" pitchFamily="2" charset="0"/>
             </a:endParaRPr>
           </a:p>
         </p:txBody>
@@ -23526,9 +26782,9 @@
                 <a:solidFill>
                   <a:srgbClr val="DEFF9A"/>
                 </a:solidFill>
-                <a:latin typeface="Urbanist" panose="020B0604020202020204" charset="0"/>
+                <a:latin typeface="IDLC" pitchFamily="2" charset="0"/>
                 <a:ea typeface="Urbanist" panose="020B0604020202020204" charset="0"/>
-                <a:cs typeface="Urbanist" panose="020B0604020202020204" charset="0"/>
+                <a:cs typeface="IDLC" pitchFamily="2" charset="0"/>
                 <a:sym typeface="JetBrains Mono"/>
               </a:rPr>
               <a:t>   </a:t>
@@ -23538,9 +26794,9 @@
                 <a:solidFill>
                   <a:srgbClr val="DEFF9A"/>
                 </a:solidFill>
-                <a:latin typeface="Urbanist" panose="020B0604020202020204" charset="0"/>
+                <a:latin typeface="IDLC" pitchFamily="2" charset="0"/>
                 <a:ea typeface="Urbanist" panose="020B0604020202020204" charset="0"/>
-                <a:cs typeface="Urbanist" panose="020B0604020202020204" charset="0"/>
+                <a:cs typeface="IDLC" pitchFamily="2" charset="0"/>
                 <a:sym typeface="JetBrains Mono"/>
               </a:rPr>
               <a:t>usethis</a:t>
@@ -23550,9 +26806,9 @@
                 <a:solidFill>
                   <a:srgbClr val="DEFF9A"/>
                 </a:solidFill>
-                <a:latin typeface="Urbanist" panose="020B0604020202020204" charset="0"/>
+                <a:latin typeface="IDLC" pitchFamily="2" charset="0"/>
                 <a:ea typeface="Urbanist" panose="020B0604020202020204" charset="0"/>
-                <a:cs typeface="Urbanist" panose="020B0604020202020204" charset="0"/>
+                <a:cs typeface="IDLC" pitchFamily="2" charset="0"/>
                 <a:sym typeface="JetBrains Mono"/>
               </a:rPr>
               <a:t>::</a:t>
@@ -23562,9 +26818,9 @@
                 <a:solidFill>
                   <a:srgbClr val="DEFF9A"/>
                 </a:solidFill>
-                <a:latin typeface="Urbanist" panose="020B0604020202020204" charset="0"/>
+                <a:latin typeface="IDLC" pitchFamily="2" charset="0"/>
                 <a:ea typeface="Urbanist" panose="020B0604020202020204" charset="0"/>
-                <a:cs typeface="Urbanist" panose="020B0604020202020204" charset="0"/>
+                <a:cs typeface="IDLC" pitchFamily="2" charset="0"/>
                 <a:sym typeface="JetBrains Mono"/>
               </a:rPr>
               <a:t>use_git_config</a:t>
@@ -23574,21 +26830,33 @@
                 <a:solidFill>
                   <a:srgbClr val="DEFF9A"/>
                 </a:solidFill>
-                <a:latin typeface="Urbanist" panose="020B0604020202020204" charset="0"/>
+                <a:latin typeface="IDLC" pitchFamily="2" charset="0"/>
                 <a:ea typeface="Urbanist" panose="020B0604020202020204" charset="0"/>
-                <a:cs typeface="Urbanist" panose="020B0604020202020204" charset="0"/>
+                <a:cs typeface="IDLC" pitchFamily="2" charset="0"/>
                 <a:sym typeface="JetBrains Mono"/>
               </a:rPr>
               <a:t>(</a:t>
+            </a:r>
+            <a:r>
+              <a:rPr lang="en-US" sz="1800" b="0" i="0" u="none" strike="noStrike" cap="none" dirty="0">
+                <a:solidFill>
+                  <a:schemeClr val="dk1"/>
+                </a:solidFill>
+                <a:latin typeface="IDLC" pitchFamily="2" charset="0"/>
+                <a:ea typeface="Urbanist" panose="020B0604020202020204" charset="0"/>
+                <a:cs typeface="IDLC" pitchFamily="2" charset="0"/>
+                <a:sym typeface="Calibri"/>
+              </a:rPr>
+              <a:t/>
             </a:r>
             <a:br>
               <a:rPr lang="en-US" sz="1800" b="0" i="0" u="none" strike="noStrike" cap="none" dirty="0">
                 <a:solidFill>
                   <a:schemeClr val="dk1"/>
                 </a:solidFill>
-                <a:latin typeface="Urbanist" panose="020B0604020202020204" charset="0"/>
+                <a:latin typeface="IDLC" pitchFamily="2" charset="0"/>
                 <a:ea typeface="Urbanist" panose="020B0604020202020204" charset="0"/>
-                <a:cs typeface="Urbanist" panose="020B0604020202020204" charset="0"/>
+                <a:cs typeface="IDLC" pitchFamily="2" charset="0"/>
                 <a:sym typeface="Calibri"/>
               </a:rPr>
             </a:br>
@@ -23597,21 +26865,33 @@
                 <a:solidFill>
                   <a:srgbClr val="DEFF9A"/>
                 </a:solidFill>
-                <a:latin typeface="Urbanist" panose="020B0604020202020204" charset="0"/>
+                <a:latin typeface="IDLC" pitchFamily="2" charset="0"/>
                 <a:ea typeface="Urbanist" panose="020B0604020202020204" charset="0"/>
-                <a:cs typeface="Urbanist" panose="020B0604020202020204" charset="0"/>
+                <a:cs typeface="IDLC" pitchFamily="2" charset="0"/>
                 <a:sym typeface="JetBrains Mono"/>
               </a:rPr>
               <a:t>   user.name = "Your Name",</a:t>
+            </a:r>
+            <a:r>
+              <a:rPr lang="en-US" sz="1800" b="0" i="0" u="none" strike="noStrike" cap="none" dirty="0">
+                <a:solidFill>
+                  <a:schemeClr val="dk1"/>
+                </a:solidFill>
+                <a:latin typeface="IDLC" pitchFamily="2" charset="0"/>
+                <a:ea typeface="Urbanist" panose="020B0604020202020204" charset="0"/>
+                <a:cs typeface="IDLC" pitchFamily="2" charset="0"/>
+                <a:sym typeface="Calibri"/>
+              </a:rPr>
+              <a:t/>
             </a:r>
             <a:br>
               <a:rPr lang="en-US" sz="1800" b="0" i="0" u="none" strike="noStrike" cap="none" dirty="0">
                 <a:solidFill>
                   <a:schemeClr val="dk1"/>
                 </a:solidFill>
-                <a:latin typeface="Urbanist" panose="020B0604020202020204" charset="0"/>
+                <a:latin typeface="IDLC" pitchFamily="2" charset="0"/>
                 <a:ea typeface="Urbanist" panose="020B0604020202020204" charset="0"/>
-                <a:cs typeface="Urbanist" panose="020B0604020202020204" charset="0"/>
+                <a:cs typeface="IDLC" pitchFamily="2" charset="0"/>
                 <a:sym typeface="Calibri"/>
               </a:rPr>
             </a:br>
@@ -23620,9 +26900,9 @@
                 <a:solidFill>
                   <a:srgbClr val="DEFF9A"/>
                 </a:solidFill>
-                <a:latin typeface="Urbanist" panose="020B0604020202020204" charset="0"/>
+                <a:latin typeface="IDLC" pitchFamily="2" charset="0"/>
                 <a:ea typeface="Urbanist" panose="020B0604020202020204" charset="0"/>
-                <a:cs typeface="Urbanist" panose="020B0604020202020204" charset="0"/>
+                <a:cs typeface="IDLC" pitchFamily="2" charset="0"/>
                 <a:sym typeface="JetBrains Mono"/>
               </a:rPr>
               <a:t>   </a:t>
@@ -23632,9 +26912,9 @@
                 <a:solidFill>
                   <a:srgbClr val="DEFF9A"/>
                 </a:solidFill>
-                <a:latin typeface="Urbanist" panose="020B0604020202020204" charset="0"/>
+                <a:latin typeface="IDLC" pitchFamily="2" charset="0"/>
                 <a:ea typeface="Urbanist" panose="020B0604020202020204" charset="0"/>
-                <a:cs typeface="Urbanist" panose="020B0604020202020204" charset="0"/>
+                <a:cs typeface="IDLC" pitchFamily="2" charset="0"/>
                 <a:sym typeface="JetBrains Mono"/>
               </a:rPr>
               <a:t>user.email</a:t>
@@ -23644,21 +26924,33 @@
                 <a:solidFill>
                   <a:srgbClr val="DEFF9A"/>
                 </a:solidFill>
-                <a:latin typeface="Urbanist" panose="020B0604020202020204" charset="0"/>
+                <a:latin typeface="IDLC" pitchFamily="2" charset="0"/>
                 <a:ea typeface="Urbanist" panose="020B0604020202020204" charset="0"/>
-                <a:cs typeface="Urbanist" panose="020B0604020202020204" charset="0"/>
+                <a:cs typeface="IDLC" pitchFamily="2" charset="0"/>
                 <a:sym typeface="JetBrains Mono"/>
               </a:rPr>
               <a:t> = "your@email.com"</a:t>
+            </a:r>
+            <a:r>
+              <a:rPr lang="en-US" sz="1800" b="0" i="0" u="none" strike="noStrike" cap="none" dirty="0">
+                <a:solidFill>
+                  <a:schemeClr val="dk1"/>
+                </a:solidFill>
+                <a:latin typeface="IDLC" pitchFamily="2" charset="0"/>
+                <a:ea typeface="Urbanist" panose="020B0604020202020204" charset="0"/>
+                <a:cs typeface="IDLC" pitchFamily="2" charset="0"/>
+                <a:sym typeface="Calibri"/>
+              </a:rPr>
+              <a:t/>
             </a:r>
             <a:br>
               <a:rPr lang="en-US" sz="1800" b="0" i="0" u="none" strike="noStrike" cap="none" dirty="0">
                 <a:solidFill>
                   <a:schemeClr val="dk1"/>
                 </a:solidFill>
-                <a:latin typeface="Urbanist" panose="020B0604020202020204" charset="0"/>
+                <a:latin typeface="IDLC" pitchFamily="2" charset="0"/>
                 <a:ea typeface="Urbanist" panose="020B0604020202020204" charset="0"/>
-                <a:cs typeface="Urbanist" panose="020B0604020202020204" charset="0"/>
+                <a:cs typeface="IDLC" pitchFamily="2" charset="0"/>
                 <a:sym typeface="Calibri"/>
               </a:rPr>
             </a:br>
@@ -23667,17 +26959,17 @@
                 <a:solidFill>
                   <a:srgbClr val="DEFF9A"/>
                 </a:solidFill>
-                <a:latin typeface="Urbanist" panose="020B0604020202020204" charset="0"/>
+                <a:latin typeface="IDLC" pitchFamily="2" charset="0"/>
                 <a:ea typeface="Urbanist" panose="020B0604020202020204" charset="0"/>
-                <a:cs typeface="Urbanist" panose="020B0604020202020204" charset="0"/>
+                <a:cs typeface="IDLC" pitchFamily="2" charset="0"/>
                 <a:sym typeface="JetBrains Mono"/>
               </a:rPr>
               <a:t> )</a:t>
             </a:r>
             <a:endParaRPr dirty="0">
-              <a:latin typeface="Urbanist" panose="020B0604020202020204" charset="0"/>
+              <a:latin typeface="IDLC" pitchFamily="2" charset="0"/>
               <a:ea typeface="Urbanist" panose="020B0604020202020204" charset="0"/>
-              <a:cs typeface="Urbanist" panose="020B0604020202020204" charset="0"/>
+              <a:cs typeface="IDLC" pitchFamily="2" charset="0"/>
             </a:endParaRPr>
           </a:p>
         </p:txBody>
@@ -23724,17 +27016,17 @@
                 <a:solidFill>
                   <a:srgbClr val="DAFFDE"/>
                 </a:solidFill>
-                <a:latin typeface="Urbanist" panose="020B0604020202020204" charset="0"/>
+                <a:latin typeface="IDLC" pitchFamily="2" charset="0"/>
                 <a:ea typeface="Urbanist" panose="020B0604020202020204" charset="0"/>
-                <a:cs typeface="Urbanist" panose="020B0604020202020204" charset="0"/>
+                <a:cs typeface="IDLC" pitchFamily="2" charset="0"/>
                 <a:sym typeface="Urbanist"/>
               </a:rPr>
               <a:t>* Note: Use the same email address as your GitHub account.</a:t>
             </a:r>
             <a:endParaRPr dirty="0">
-              <a:latin typeface="Urbanist" panose="020B0604020202020204" charset="0"/>
+              <a:latin typeface="IDLC" pitchFamily="2" charset="0"/>
               <a:ea typeface="Urbanist" panose="020B0604020202020204" charset="0"/>
-              <a:cs typeface="Urbanist" panose="020B0604020202020204" charset="0"/>
+              <a:cs typeface="IDLC" pitchFamily="2" charset="0"/>
             </a:endParaRPr>
           </a:p>
         </p:txBody>
@@ -23820,9 +27112,9 @@
                 <a:solidFill>
                   <a:srgbClr val="DAFFDE"/>
                 </a:solidFill>
-                <a:latin typeface="Urbanist" panose="020B0604020202020204" charset="0"/>
+                <a:latin typeface="IDLC" pitchFamily="2" charset="0"/>
                 <a:ea typeface="Urbanist" panose="020B0604020202020204" charset="0"/>
-                <a:cs typeface="Urbanist" panose="020B0604020202020204" charset="0"/>
+                <a:cs typeface="IDLC" pitchFamily="2" charset="0"/>
                 <a:sym typeface="Urbanist"/>
               </a:rPr>
               <a:t>GitHub no longer accepts passwords for Git operations. </a:t>
@@ -23839,9 +27131,9 @@
                 <a:solidFill>
                   <a:srgbClr val="DAFFDE"/>
                 </a:solidFill>
-                <a:latin typeface="Urbanist" panose="020B0604020202020204" charset="0"/>
+                <a:latin typeface="IDLC" pitchFamily="2" charset="0"/>
                 <a:ea typeface="Urbanist" panose="020B0604020202020204" charset="0"/>
-                <a:cs typeface="Urbanist" panose="020B0604020202020204" charset="0"/>
+                <a:cs typeface="IDLC" pitchFamily="2" charset="0"/>
                 <a:sym typeface="Urbanist"/>
               </a:rPr>
               <a:t>We</a:t>
@@ -23851,9 +27143,9 @@
                 <a:solidFill>
                   <a:srgbClr val="DAFFDE"/>
                 </a:solidFill>
-                <a:latin typeface="Urbanist" panose="020B0604020202020204" charset="0"/>
+                <a:latin typeface="IDLC" pitchFamily="2" charset="0"/>
                 <a:ea typeface="Urbanist" panose="020B0604020202020204" charset="0"/>
-                <a:cs typeface="Urbanist" panose="020B0604020202020204" charset="0"/>
+                <a:cs typeface="IDLC" pitchFamily="2" charset="0"/>
                 <a:sym typeface="Urbanist"/>
               </a:rPr>
               <a:t> must use a PAT (</a:t>
@@ -23863,9 +27155,9 @@
                 <a:solidFill>
                   <a:srgbClr val="DAFFDE"/>
                 </a:solidFill>
-                <a:latin typeface="Urbanist" panose="020B0604020202020204" charset="0"/>
+                <a:latin typeface="IDLC" pitchFamily="2" charset="0"/>
                 <a:ea typeface="Urbanist" panose="020B0604020202020204" charset="0"/>
-                <a:cs typeface="Urbanist" panose="020B0604020202020204" charset="0"/>
+                <a:cs typeface="IDLC" pitchFamily="2" charset="0"/>
                 <a:sym typeface="Urbanist"/>
               </a:rPr>
               <a:t>Personal Access Tokens </a:t>
@@ -23875,9 +27167,9 @@
                 <a:solidFill>
                   <a:srgbClr val="DAFFDE"/>
                 </a:solidFill>
-                <a:latin typeface="Urbanist" panose="020B0604020202020204" charset="0"/>
+                <a:latin typeface="IDLC" pitchFamily="2" charset="0"/>
                 <a:ea typeface="Urbanist" panose="020B0604020202020204" charset="0"/>
-                <a:cs typeface="Urbanist" panose="020B0604020202020204" charset="0"/>
+                <a:cs typeface="IDLC" pitchFamily="2" charset="0"/>
                 <a:sym typeface="Urbanist"/>
               </a:rPr>
               <a:t>)</a:t>
@@ -23887,17 +27179,17 @@
                 <a:solidFill>
                   <a:srgbClr val="DAFFDE"/>
                 </a:solidFill>
-                <a:latin typeface="Urbanist" panose="020B0604020202020204" charset="0"/>
+                <a:latin typeface="IDLC" pitchFamily="2" charset="0"/>
                 <a:ea typeface="Urbanist" panose="020B0604020202020204" charset="0"/>
-                <a:cs typeface="Urbanist" panose="020B0604020202020204" charset="0"/>
+                <a:cs typeface="IDLC" pitchFamily="2" charset="0"/>
                 <a:sym typeface="Urbanist"/>
               </a:rPr>
               <a:t> :</a:t>
             </a:r>
             <a:endParaRPr sz="1800" dirty="0">
-              <a:latin typeface="Urbanist" panose="020B0604020202020204" charset="0"/>
+              <a:latin typeface="IDLC" pitchFamily="2" charset="0"/>
               <a:ea typeface="Urbanist" panose="020B0604020202020204" charset="0"/>
-              <a:cs typeface="Urbanist" panose="020B0604020202020204" charset="0"/>
+              <a:cs typeface="IDLC" pitchFamily="2" charset="0"/>
             </a:endParaRPr>
           </a:p>
         </p:txBody>
@@ -23915,7 +27207,7 @@
           <p:nvPr>
             <p:extLst>
               <p:ext uri="{D42A27DB-BD31-4B8C-83A1-F6EECF244321}">
-                <p14:modId xmlns:p14="http://schemas.microsoft.com/office/powerpoint/2010/main" val="3069187010"/>
+                <p14:modId xmlns:p14="http://schemas.microsoft.com/office/powerpoint/2010/main" val="1980208749"/>
               </p:ext>
             </p:extLst>
           </p:nvPr>
@@ -23935,6 +27227,13 @@
   <p:clrMapOvr>
     <a:masterClrMapping/>
   </p:clrMapOvr>
+  <p:timing>
+    <p:tnLst>
+      <p:par>
+        <p:cTn id="1" dur="indefinite" restart="never" nodeType="tmRoot"/>
+      </p:par>
+    </p:tnLst>
+  </p:timing>
 </p:sld>
 </file>
 
@@ -23970,8 +27269,8 @@
         </p:blipFill>
         <p:spPr>
           <a:xfrm>
-            <a:off x="0" y="0"/>
-            <a:ext cx="12192000" cy="6858000"/>
+            <a:off x="-28576" y="0"/>
+            <a:ext cx="12220575" cy="6858000"/>
           </a:xfrm>
           <a:prstGeom prst="rect">
             <a:avLst/>
@@ -24045,7 +27344,7 @@
         <p:spPr>
           <a:xfrm>
             <a:off x="346709" y="4886920"/>
-            <a:ext cx="1440180" cy="209550"/>
+            <a:ext cx="1440180" cy="215444"/>
           </a:xfrm>
           <a:prstGeom prst="rect">
             <a:avLst/>
@@ -24071,18 +27370,21 @@
               <a:buNone/>
             </a:pPr>
             <a:r>
-              <a:rPr lang="en-US" sz="1350" b="1" i="0" u="none" strike="noStrike" cap="none">
+              <a:rPr lang="en-US" b="1" i="0" u="none" strike="noStrike" cap="none" dirty="0">
                 <a:solidFill>
                   <a:srgbClr val="CCFF66"/>
                 </a:solidFill>
-                <a:latin typeface="Urbanist"/>
+                <a:latin typeface="IDLC" pitchFamily="2" charset="0"/>
                 <a:ea typeface="Urbanist"/>
-                <a:cs typeface="Urbanist"/>
+                <a:cs typeface="IDLC" pitchFamily="2" charset="0"/>
                 <a:sym typeface="Urbanist"/>
               </a:rPr>
               <a:t>GITHUB</a:t>
             </a:r>
-            <a:endParaRPr/>
+            <a:endParaRPr sz="1600" dirty="0">
+              <a:latin typeface="IDLC" pitchFamily="2" charset="0"/>
+              <a:cs typeface="IDLC" pitchFamily="2" charset="0"/>
+            </a:endParaRPr>
           </a:p>
         </p:txBody>
       </p:sp>
@@ -24095,7 +27397,7 @@
         <p:spPr>
           <a:xfrm>
             <a:off x="381000" y="5172670"/>
-            <a:ext cx="1371600" cy="519707"/>
+            <a:ext cx="1371600" cy="350865"/>
           </a:xfrm>
           <a:prstGeom prst="rect">
             <a:avLst/>
@@ -24124,64 +27426,91 @@
               <a:buNone/>
             </a:pPr>
             <a:r>
-              <a:rPr lang="en-US" sz="975" b="0" i="0" u="none" strike="noStrike" cap="none">
+              <a:rPr lang="en-US" sz="1000" b="0" i="0" u="none" strike="noStrike" cap="none" dirty="0">
                 <a:solidFill>
                   <a:srgbClr val="FFFFFF"/>
                 </a:solidFill>
-                <a:latin typeface="Urbanist"/>
+                <a:latin typeface="IDLC" pitchFamily="2" charset="0"/>
                 <a:ea typeface="Urbanist"/>
-                <a:cs typeface="Urbanist"/>
+                <a:cs typeface="IDLC" pitchFamily="2" charset="0"/>
                 <a:sym typeface="Urbanist"/>
               </a:rPr>
               <a:t>Create a new</a:t>
             </a:r>
+            <a:r>
+              <a:rPr lang="en-US" sz="2000" b="0" i="0" u="none" strike="noStrike" cap="none" dirty="0">
+                <a:solidFill>
+                  <a:schemeClr val="dk1"/>
+                </a:solidFill>
+                <a:latin typeface="IDLC" pitchFamily="2" charset="0"/>
+                <a:ea typeface="Calibri"/>
+                <a:cs typeface="IDLC" pitchFamily="2" charset="0"/>
+                <a:sym typeface="Calibri"/>
+              </a:rPr>
+              <a:t/>
+            </a:r>
             <a:br>
-              <a:rPr lang="en-US" sz="1800" b="0" i="0" u="none" strike="noStrike" cap="none">
+              <a:rPr lang="en-US" sz="2000" b="0" i="0" u="none" strike="noStrike" cap="none" dirty="0">
                 <a:solidFill>
                   <a:schemeClr val="dk1"/>
                 </a:solidFill>
-                <a:latin typeface="Calibri"/>
+                <a:latin typeface="IDLC" pitchFamily="2" charset="0"/>
                 <a:ea typeface="Calibri"/>
-                <a:cs typeface="Calibri"/>
+                <a:cs typeface="IDLC" pitchFamily="2" charset="0"/>
                 <a:sym typeface="Calibri"/>
               </a:rPr>
             </a:br>
             <a:r>
-              <a:rPr lang="en-US" sz="975" b="0" i="0" u="none" strike="noStrike" cap="none">
+              <a:rPr lang="en-US" sz="1000" b="0" i="0" u="none" strike="noStrike" cap="none" dirty="0">
                 <a:solidFill>
                   <a:srgbClr val="FFFFFF"/>
                 </a:solidFill>
-                <a:latin typeface="Urbanist"/>
+                <a:latin typeface="IDLC" pitchFamily="2" charset="0"/>
                 <a:ea typeface="Urbanist"/>
-                <a:cs typeface="Urbanist"/>
+                <a:cs typeface="IDLC" pitchFamily="2" charset="0"/>
                 <a:sym typeface="Urbanist"/>
               </a:rPr>
               <a:t> repository on</a:t>
             </a:r>
+            <a:r>
+              <a:rPr lang="en-US" sz="2000" b="0" i="0" u="none" strike="noStrike" cap="none" dirty="0">
+                <a:solidFill>
+                  <a:schemeClr val="dk1"/>
+                </a:solidFill>
+                <a:latin typeface="IDLC" pitchFamily="2" charset="0"/>
+                <a:ea typeface="Calibri"/>
+                <a:cs typeface="IDLC" pitchFamily="2" charset="0"/>
+                <a:sym typeface="Calibri"/>
+              </a:rPr>
+              <a:t/>
+            </a:r>
             <a:br>
-              <a:rPr lang="en-US" sz="1800" b="0" i="0" u="none" strike="noStrike" cap="none">
+              <a:rPr lang="en-US" sz="2000" b="0" i="0" u="none" strike="noStrike" cap="none" dirty="0">
                 <a:solidFill>
                   <a:schemeClr val="dk1"/>
                 </a:solidFill>
-                <a:latin typeface="Calibri"/>
+                <a:latin typeface="IDLC" pitchFamily="2" charset="0"/>
                 <a:ea typeface="Calibri"/>
-                <a:cs typeface="Calibri"/>
+                <a:cs typeface="IDLC" pitchFamily="2" charset="0"/>
                 <a:sym typeface="Calibri"/>
               </a:rPr>
             </a:br>
             <a:r>
-              <a:rPr lang="en-US" sz="975" b="0" i="0" u="none" strike="noStrike" cap="none">
+              <a:rPr lang="en-US" sz="1000" b="0" i="0" u="none" strike="noStrike" cap="none" dirty="0">
                 <a:solidFill>
                   <a:srgbClr val="FFFFFF"/>
                 </a:solidFill>
-                <a:latin typeface="Urbanist"/>
+                <a:latin typeface="IDLC" pitchFamily="2" charset="0"/>
                 <a:ea typeface="Urbanist"/>
-                <a:cs typeface="Urbanist"/>
+                <a:cs typeface="IDLC" pitchFamily="2" charset="0"/>
                 <a:sym typeface="Urbanist"/>
               </a:rPr>
               <a:t> GitHub.com</a:t>
             </a:r>
-            <a:endParaRPr/>
+            <a:endParaRPr sz="1600" dirty="0">
+              <a:latin typeface="IDLC" pitchFamily="2" charset="0"/>
+              <a:cs typeface="IDLC" pitchFamily="2" charset="0"/>
+            </a:endParaRPr>
           </a:p>
         </p:txBody>
       </p:sp>
@@ -24194,7 +27523,7 @@
         <p:spPr>
           <a:xfrm>
             <a:off x="1783496" y="3077467"/>
-            <a:ext cx="1440180" cy="209550"/>
+            <a:ext cx="1440180" cy="215444"/>
           </a:xfrm>
           <a:prstGeom prst="rect">
             <a:avLst/>
@@ -24220,18 +27549,21 @@
               <a:buNone/>
             </a:pPr>
             <a:r>
-              <a:rPr lang="en-US" sz="1350" b="1" i="0" u="none" strike="noStrike" cap="none">
+              <a:rPr lang="en-US" b="1" i="0" u="none" strike="noStrike" cap="none" dirty="0">
                 <a:solidFill>
                   <a:srgbClr val="CCFF66"/>
                 </a:solidFill>
-                <a:latin typeface="Urbanist"/>
+                <a:latin typeface="IDLC" pitchFamily="2" charset="0"/>
                 <a:ea typeface="Urbanist"/>
-                <a:cs typeface="Urbanist"/>
+                <a:cs typeface="IDLC" pitchFamily="2" charset="0"/>
                 <a:sym typeface="Urbanist"/>
               </a:rPr>
               <a:t>PROJECT</a:t>
             </a:r>
-            <a:endParaRPr/>
+            <a:endParaRPr sz="1600" dirty="0">
+              <a:latin typeface="IDLC" pitchFamily="2" charset="0"/>
+              <a:cs typeface="IDLC" pitchFamily="2" charset="0"/>
+            </a:endParaRPr>
           </a:p>
         </p:txBody>
       </p:sp>
@@ -24244,7 +27576,7 @@
         <p:spPr>
           <a:xfrm>
             <a:off x="1817786" y="3363217"/>
-            <a:ext cx="1371600" cy="552524"/>
+            <a:ext cx="1371600" cy="581826"/>
           </a:xfrm>
           <a:prstGeom prst="rect">
             <a:avLst/>
@@ -24273,36 +27605,48 @@
               <a:buNone/>
             </a:pPr>
             <a:r>
-              <a:rPr lang="en-US" sz="975" b="0" i="0" u="none" strike="noStrike" cap="none" dirty="0">
+              <a:rPr lang="en-US" sz="1000" b="0" i="0" u="none" strike="noStrike" cap="none" dirty="0">
                 <a:solidFill>
                   <a:srgbClr val="FFFFFF"/>
                 </a:solidFill>
-                <a:latin typeface="Urbanist"/>
+                <a:latin typeface="IDLC" pitchFamily="2" charset="0"/>
                 <a:ea typeface="Urbanist"/>
-                <a:cs typeface="Urbanist"/>
+                <a:cs typeface="IDLC" pitchFamily="2" charset="0"/>
                 <a:sym typeface="Urbanist"/>
               </a:rPr>
               <a:t>Create a new</a:t>
             </a:r>
+            <a:r>
+              <a:rPr lang="en-US" sz="2000" b="0" i="0" u="none" strike="noStrike" cap="none" dirty="0">
+                <a:solidFill>
+                  <a:schemeClr val="dk1"/>
+                </a:solidFill>
+                <a:latin typeface="IDLC" pitchFamily="2" charset="0"/>
+                <a:ea typeface="Calibri"/>
+                <a:cs typeface="IDLC" pitchFamily="2" charset="0"/>
+                <a:sym typeface="Calibri"/>
+              </a:rPr>
+              <a:t/>
+            </a:r>
             <a:br>
-              <a:rPr lang="en-US" sz="1800" b="0" i="0" u="none" strike="noStrike" cap="none" dirty="0">
+              <a:rPr lang="en-US" sz="2000" b="0" i="0" u="none" strike="noStrike" cap="none" dirty="0">
                 <a:solidFill>
                   <a:schemeClr val="dk1"/>
                 </a:solidFill>
-                <a:latin typeface="Calibri"/>
+                <a:latin typeface="IDLC" pitchFamily="2" charset="0"/>
                 <a:ea typeface="Calibri"/>
-                <a:cs typeface="Calibri"/>
+                <a:cs typeface="IDLC" pitchFamily="2" charset="0"/>
                 <a:sym typeface="Calibri"/>
               </a:rPr>
             </a:br>
             <a:r>
-              <a:rPr lang="en-US" sz="975" b="0" i="0" u="none" strike="noStrike" cap="none" dirty="0">
+              <a:rPr lang="en-US" sz="1000" b="0" i="0" u="none" strike="noStrike" cap="none" dirty="0">
                 <a:solidFill>
                   <a:srgbClr val="FFFFFF"/>
                 </a:solidFill>
-                <a:latin typeface="Urbanist"/>
+                <a:latin typeface="IDLC" pitchFamily="2" charset="0"/>
                 <a:ea typeface="Urbanist"/>
-                <a:cs typeface="Urbanist"/>
+                <a:cs typeface="IDLC" pitchFamily="2" charset="0"/>
                 <a:sym typeface="Urbanist"/>
               </a:rPr>
               <a:t> R Project</a:t>
@@ -24321,54 +27665,69 @@
               </a:spcAft>
               <a:buNone/>
             </a:pPr>
+            <a:r>
+              <a:rPr lang="en-US" sz="2000" b="0" i="0" u="none" strike="noStrike" cap="none" dirty="0">
+                <a:solidFill>
+                  <a:schemeClr val="dk1"/>
+                </a:solidFill>
+                <a:latin typeface="IDLC" pitchFamily="2" charset="0"/>
+                <a:ea typeface="Calibri"/>
+                <a:cs typeface="IDLC" pitchFamily="2" charset="0"/>
+                <a:sym typeface="Calibri"/>
+              </a:rPr>
+              <a:t/>
+            </a:r>
             <a:br>
-              <a:rPr lang="en-US" sz="1800" b="0" i="0" u="none" strike="noStrike" cap="none" dirty="0">
+              <a:rPr lang="en-US" sz="2000" b="0" i="0" u="none" strike="noStrike" cap="none" dirty="0">
                 <a:solidFill>
                   <a:schemeClr val="dk1"/>
                 </a:solidFill>
-                <a:latin typeface="Calibri"/>
+                <a:latin typeface="IDLC" pitchFamily="2" charset="0"/>
                 <a:ea typeface="Calibri"/>
-                <a:cs typeface="Calibri"/>
+                <a:cs typeface="IDLC" pitchFamily="2" charset="0"/>
                 <a:sym typeface="Calibri"/>
               </a:rPr>
             </a:br>
             <a:r>
-              <a:rPr lang="en-US" sz="975" b="0" i="0" u="none" strike="noStrike" cap="none" dirty="0">
+              <a:rPr lang="en-US" sz="1000" b="0" i="0" u="none" strike="noStrike" cap="none" dirty="0">
                 <a:solidFill>
                   <a:srgbClr val="FFFFFF"/>
                 </a:solidFill>
-                <a:latin typeface="Urbanist"/>
+                <a:latin typeface="IDLC" pitchFamily="2" charset="0"/>
                 <a:ea typeface="Urbanist"/>
-                <a:cs typeface="Urbanist"/>
+                <a:cs typeface="IDLC" pitchFamily="2" charset="0"/>
                 <a:sym typeface="Urbanist"/>
               </a:rPr>
               <a:t>"</a:t>
             </a:r>
             <a:r>
-              <a:rPr lang="en-US" sz="975" b="1" i="1" u="none" strike="noStrike" cap="none" dirty="0" err="1">
+              <a:rPr lang="en-US" sz="1000" b="1" i="1" u="none" strike="noStrike" cap="none" dirty="0" err="1">
                 <a:solidFill>
                   <a:srgbClr val="BEE395"/>
                 </a:solidFill>
-                <a:latin typeface="Urbanist"/>
+                <a:latin typeface="IDLC" pitchFamily="2" charset="0"/>
                 <a:ea typeface="Urbanist"/>
-                <a:cs typeface="Urbanist"/>
+                <a:cs typeface="IDLC" pitchFamily="2" charset="0"/>
                 <a:sym typeface="Urbanist"/>
               </a:rPr>
               <a:t>project.Rproj</a:t>
             </a:r>
             <a:r>
-              <a:rPr lang="en-US" sz="975" b="0" i="0" u="none" strike="noStrike" cap="none" dirty="0">
+              <a:rPr lang="en-US" sz="1000" b="0" i="0" u="none" strike="noStrike" cap="none" dirty="0">
                 <a:solidFill>
                   <a:srgbClr val="FFFFFF"/>
                 </a:solidFill>
-                <a:latin typeface="Urbanist"/>
+                <a:latin typeface="IDLC" pitchFamily="2" charset="0"/>
                 <a:ea typeface="Urbanist"/>
-                <a:cs typeface="Urbanist"/>
+                <a:cs typeface="IDLC" pitchFamily="2" charset="0"/>
                 <a:sym typeface="Urbanist"/>
               </a:rPr>
               <a:t>"</a:t>
             </a:r>
-            <a:endParaRPr dirty="0"/>
+            <a:endParaRPr sz="1600" dirty="0">
+              <a:latin typeface="IDLC" pitchFamily="2" charset="0"/>
+              <a:cs typeface="IDLC" pitchFamily="2" charset="0"/>
+            </a:endParaRPr>
           </a:p>
         </p:txBody>
       </p:sp>
@@ -24381,7 +27740,7 @@
         <p:spPr>
           <a:xfrm>
             <a:off x="3220283" y="4886920"/>
-            <a:ext cx="1440180" cy="209550"/>
+            <a:ext cx="1440180" cy="215444"/>
           </a:xfrm>
           <a:prstGeom prst="rect">
             <a:avLst/>
@@ -24407,18 +27766,21 @@
               <a:buNone/>
             </a:pPr>
             <a:r>
-              <a:rPr lang="en-US" sz="1350" b="1" i="0" u="none" strike="noStrike" cap="none">
+              <a:rPr lang="en-US" b="1" i="0" u="none" strike="noStrike" cap="none" dirty="0">
                 <a:solidFill>
                   <a:srgbClr val="CCFF66"/>
                 </a:solidFill>
-                <a:latin typeface="Urbanist"/>
+                <a:latin typeface="IDLC" pitchFamily="2" charset="0"/>
                 <a:ea typeface="Urbanist"/>
-                <a:cs typeface="Urbanist"/>
+                <a:cs typeface="IDLC" pitchFamily="2" charset="0"/>
                 <a:sym typeface="Urbanist"/>
               </a:rPr>
               <a:t>TERMINAL</a:t>
             </a:r>
-            <a:endParaRPr/>
+            <a:endParaRPr sz="1600" dirty="0">
+              <a:latin typeface="IDLC" pitchFamily="2" charset="0"/>
+              <a:cs typeface="IDLC" pitchFamily="2" charset="0"/>
+            </a:endParaRPr>
           </a:p>
         </p:txBody>
       </p:sp>
@@ -24431,7 +27793,7 @@
         <p:spPr>
           <a:xfrm>
             <a:off x="3254573" y="5172670"/>
-            <a:ext cx="1371600" cy="346471"/>
+            <a:ext cx="1371600" cy="233910"/>
           </a:xfrm>
           <a:prstGeom prst="rect">
             <a:avLst/>
@@ -24460,53 +27822,68 @@
               <a:buNone/>
             </a:pPr>
             <a:r>
-              <a:rPr lang="en-US" sz="975" b="0" i="0" u="none" strike="noStrike" cap="none" dirty="0">
+              <a:rPr lang="en-US" sz="1000" b="0" i="0" u="none" strike="noStrike" cap="none" dirty="0">
                 <a:solidFill>
                   <a:srgbClr val="FFFFFF"/>
                 </a:solidFill>
-                <a:latin typeface="Urbanist"/>
+                <a:latin typeface="IDLC" pitchFamily="2" charset="0"/>
                 <a:ea typeface="Urbanist"/>
-                <a:cs typeface="Urbanist"/>
+                <a:cs typeface="IDLC" pitchFamily="2" charset="0"/>
                 <a:sym typeface="Urbanist"/>
               </a:rPr>
               <a:t>Open the</a:t>
             </a:r>
+            <a:r>
+              <a:rPr lang="en-US" sz="2000" b="0" i="0" u="none" strike="noStrike" cap="none" dirty="0">
+                <a:solidFill>
+                  <a:schemeClr val="dk1"/>
+                </a:solidFill>
+                <a:latin typeface="IDLC" pitchFamily="2" charset="0"/>
+                <a:ea typeface="Calibri"/>
+                <a:cs typeface="IDLC" pitchFamily="2" charset="0"/>
+                <a:sym typeface="Calibri"/>
+              </a:rPr>
+              <a:t/>
+            </a:r>
             <a:br>
-              <a:rPr lang="en-US" sz="1800" b="0" i="0" u="none" strike="noStrike" cap="none" dirty="0">
+              <a:rPr lang="en-US" sz="2000" b="0" i="0" u="none" strike="noStrike" cap="none" dirty="0">
                 <a:solidFill>
                   <a:schemeClr val="dk1"/>
                 </a:solidFill>
-                <a:latin typeface="Calibri"/>
+                <a:latin typeface="IDLC" pitchFamily="2" charset="0"/>
                 <a:ea typeface="Calibri"/>
-                <a:cs typeface="Calibri"/>
+                <a:cs typeface="IDLC" pitchFamily="2" charset="0"/>
                 <a:sym typeface="Calibri"/>
               </a:rPr>
             </a:br>
             <a:r>
-              <a:rPr lang="en-US" sz="975" b="1" i="0" u="none" strike="noStrike" cap="none" dirty="0">
+              <a:rPr lang="en-US" sz="1000" b="1" i="0" u="none" strike="noStrike" cap="none" dirty="0">
                 <a:solidFill>
                   <a:srgbClr val="FFFFFF"/>
                 </a:solidFill>
-                <a:latin typeface="Urbanist"/>
+                <a:latin typeface="IDLC" pitchFamily="2" charset="0"/>
                 <a:ea typeface="Urbanist"/>
-                <a:cs typeface="Urbanist"/>
+                <a:cs typeface="IDLC" pitchFamily="2" charset="0"/>
                 <a:sym typeface="Urbanist"/>
               </a:rPr>
               <a:t>Git Bash</a:t>
             </a:r>
             <a:r>
-              <a:rPr lang="en-US" sz="975" b="0" i="0" u="none" strike="noStrike" cap="none" dirty="0">
+              <a:rPr lang="en-US" sz="1000" b="0" i="0" u="none" strike="noStrike" cap="none" dirty="0">
                 <a:solidFill>
                   <a:srgbClr val="FFFFFF"/>
                 </a:solidFill>
-                <a:latin typeface="Urbanist"/>
+                <a:latin typeface="IDLC" pitchFamily="2" charset="0"/>
                 <a:ea typeface="Urbanist"/>
-                <a:cs typeface="Urbanist"/>
+                <a:cs typeface="IDLC" pitchFamily="2" charset="0"/>
                 <a:sym typeface="Urbanist"/>
               </a:rPr>
               <a:t> tab</a:t>
             </a:r>
-            <a:endParaRPr dirty="0"/>
+            <a:endParaRPr sz="1600" dirty="0">
+              <a:latin typeface="IDLC" pitchFamily="2" charset="0"/>
+              <a:cs typeface="IDLC" pitchFamily="2" charset="0"/>
+            </a:endParaRPr>
           </a:p>
         </p:txBody>
       </p:sp>
@@ -24519,7 +27896,7 @@
         <p:spPr>
           <a:xfrm>
             <a:off x="4657070" y="3250703"/>
-            <a:ext cx="1440180" cy="209550"/>
+            <a:ext cx="1440180" cy="215444"/>
           </a:xfrm>
           <a:prstGeom prst="rect">
             <a:avLst/>
@@ -24545,18 +27922,21 @@
               <a:buNone/>
             </a:pPr>
             <a:r>
-              <a:rPr lang="en-US" sz="1350" b="1" i="0" u="none" strike="noStrike" cap="none">
+              <a:rPr lang="en-US" b="1" i="0" u="none" strike="noStrike" cap="none" dirty="0">
                 <a:solidFill>
                   <a:srgbClr val="CCFF66"/>
                 </a:solidFill>
-                <a:latin typeface="Urbanist"/>
+                <a:latin typeface="IDLC" pitchFamily="2" charset="0"/>
                 <a:ea typeface="Urbanist"/>
-                <a:cs typeface="Urbanist"/>
+                <a:cs typeface="IDLC" pitchFamily="2" charset="0"/>
                 <a:sym typeface="Urbanist"/>
               </a:rPr>
               <a:t>INITIALIZE</a:t>
             </a:r>
-            <a:endParaRPr/>
+            <a:endParaRPr sz="1600" dirty="0">
+              <a:latin typeface="IDLC" pitchFamily="2" charset="0"/>
+              <a:cs typeface="IDLC" pitchFamily="2" charset="0"/>
+            </a:endParaRPr>
           </a:p>
         </p:txBody>
       </p:sp>
@@ -24569,7 +27949,7 @@
         <p:spPr>
           <a:xfrm>
             <a:off x="4691360" y="3536453"/>
-            <a:ext cx="1371600" cy="464871"/>
+            <a:ext cx="1371600" cy="514628"/>
           </a:xfrm>
           <a:prstGeom prst="rect">
             <a:avLst/>
@@ -24598,13 +27978,13 @@
               <a:buNone/>
             </a:pPr>
             <a:r>
-              <a:rPr lang="en-US" sz="975" b="0" i="0" u="none" strike="noStrike" cap="none" dirty="0">
+              <a:rPr lang="en-US" sz="1000" b="0" i="0" u="none" strike="noStrike" cap="none" dirty="0">
                 <a:solidFill>
                   <a:srgbClr val="FFFFFF"/>
                 </a:solidFill>
-                <a:latin typeface="Urbanist"/>
+                <a:latin typeface="IDLC" pitchFamily="2" charset="0"/>
                 <a:ea typeface="Urbanist"/>
-                <a:cs typeface="Urbanist"/>
+                <a:cs typeface="IDLC" pitchFamily="2" charset="0"/>
                 <a:sym typeface="Urbanist"/>
               </a:rPr>
               <a:t>Setup local repo</a:t>
@@ -24623,48 +28003,60 @@
               </a:spcAft>
               <a:buNone/>
             </a:pPr>
+            <a:r>
+              <a:rPr lang="en-US" sz="2000" b="0" i="0" u="none" strike="noStrike" cap="none" dirty="0">
+                <a:solidFill>
+                  <a:schemeClr val="dk1"/>
+                </a:solidFill>
+                <a:latin typeface="IDLC" pitchFamily="2" charset="0"/>
+                <a:ea typeface="Calibri"/>
+                <a:cs typeface="IDLC" pitchFamily="2" charset="0"/>
+                <a:sym typeface="Calibri"/>
+              </a:rPr>
+              <a:t/>
+            </a:r>
             <a:br>
-              <a:rPr lang="en-US" sz="1800" b="0" i="0" u="none" strike="noStrike" cap="none" dirty="0">
+              <a:rPr lang="en-US" sz="2000" b="0" i="0" u="none" strike="noStrike" cap="none" dirty="0">
                 <a:solidFill>
                   <a:schemeClr val="dk1"/>
                 </a:solidFill>
-                <a:latin typeface="Calibri"/>
+                <a:latin typeface="IDLC" pitchFamily="2" charset="0"/>
                 <a:ea typeface="Calibri"/>
-                <a:cs typeface="Calibri"/>
+                <a:cs typeface="IDLC" pitchFamily="2" charset="0"/>
                 <a:sym typeface="Calibri"/>
               </a:rPr>
             </a:br>
             <a:r>
-              <a:rPr lang="en-US" sz="1200" b="1" dirty="0">
+              <a:rPr lang="en-US" b="1" dirty="0">
                 <a:solidFill>
                   <a:schemeClr val="accent6"/>
                 </a:solidFill>
-                <a:latin typeface="Urbanist"/>
+                <a:latin typeface="IDLC" pitchFamily="2" charset="0"/>
                 <a:ea typeface="Urbanist"/>
-                <a:cs typeface="Urbanist"/>
+                <a:cs typeface="IDLC" pitchFamily="2" charset="0"/>
                 <a:sym typeface="Urbanist"/>
               </a:rPr>
               <a:t>git </a:t>
             </a:r>
             <a:r>
-              <a:rPr lang="en-US" sz="1200" b="1" dirty="0" err="1">
+              <a:rPr lang="en-US" b="1" dirty="0" err="1">
                 <a:solidFill>
                   <a:schemeClr val="accent6"/>
                 </a:solidFill>
-                <a:latin typeface="Urbanist"/>
+                <a:latin typeface="IDLC" pitchFamily="2" charset="0"/>
                 <a:ea typeface="Urbanist"/>
-                <a:cs typeface="Urbanist"/>
+                <a:cs typeface="IDLC" pitchFamily="2" charset="0"/>
                 <a:sym typeface="Urbanist"/>
               </a:rPr>
               <a:t>init</a:t>
             </a:r>
-            <a:endParaRPr sz="1200" b="1" dirty="0">
+            <a:endParaRPr b="1" dirty="0">
               <a:solidFill>
                 <a:schemeClr val="accent6"/>
               </a:solidFill>
-              <a:latin typeface="Urbanist"/>
+              <a:latin typeface="IDLC" pitchFamily="2" charset="0"/>
               <a:ea typeface="Urbanist"/>
-              <a:cs typeface="Urbanist"/>
+              <a:cs typeface="IDLC" pitchFamily="2" charset="0"/>
             </a:endParaRPr>
           </a:p>
         </p:txBody>
@@ -24678,7 +28070,7 @@
         <p:spPr>
           <a:xfrm>
             <a:off x="6093856" y="4886920"/>
-            <a:ext cx="1440180" cy="209550"/>
+            <a:ext cx="1440180" cy="215444"/>
           </a:xfrm>
           <a:prstGeom prst="rect">
             <a:avLst/>
@@ -24704,18 +28096,21 @@
               <a:buNone/>
             </a:pPr>
             <a:r>
-              <a:rPr lang="en-US" sz="1350" b="1" i="0" u="none" strike="noStrike" cap="none">
+              <a:rPr lang="en-US" b="1" i="0" u="none" strike="noStrike" cap="none" dirty="0">
                 <a:solidFill>
                   <a:srgbClr val="CCFF66"/>
                 </a:solidFill>
-                <a:latin typeface="Urbanist"/>
+                <a:latin typeface="IDLC" pitchFamily="2" charset="0"/>
                 <a:ea typeface="Urbanist"/>
-                <a:cs typeface="Urbanist"/>
+                <a:cs typeface="IDLC" pitchFamily="2" charset="0"/>
                 <a:sym typeface="Urbanist"/>
               </a:rPr>
               <a:t>STAGE</a:t>
             </a:r>
-            <a:endParaRPr/>
+            <a:endParaRPr sz="1600" dirty="0">
+              <a:latin typeface="IDLC" pitchFamily="2" charset="0"/>
+              <a:cs typeface="IDLC" pitchFamily="2" charset="0"/>
+            </a:endParaRPr>
           </a:p>
         </p:txBody>
       </p:sp>
@@ -24728,7 +28123,7 @@
         <p:spPr>
           <a:xfrm>
             <a:off x="6128146" y="5172670"/>
-            <a:ext cx="1371600" cy="464871"/>
+            <a:ext cx="1371600" cy="514628"/>
           </a:xfrm>
           <a:prstGeom prst="rect">
             <a:avLst/>
@@ -24757,13 +28152,13 @@
               <a:buNone/>
             </a:pPr>
             <a:r>
-              <a:rPr lang="en-US" sz="975" b="0" i="0" u="none" strike="noStrike" cap="none" dirty="0">
+              <a:rPr lang="en-US" sz="1000" b="0" i="0" u="none" strike="noStrike" cap="none" dirty="0">
                 <a:solidFill>
                   <a:srgbClr val="FFFFFF"/>
                 </a:solidFill>
-                <a:latin typeface="Urbanist"/>
+                <a:latin typeface="IDLC" pitchFamily="2" charset="0"/>
                 <a:ea typeface="Urbanist"/>
-                <a:cs typeface="Urbanist"/>
+                <a:cs typeface="IDLC" pitchFamily="2" charset="0"/>
                 <a:sym typeface="Urbanist"/>
               </a:rPr>
               <a:t>Prepare files</a:t>
@@ -24782,36 +28177,48 @@
               </a:spcAft>
               <a:buNone/>
             </a:pPr>
+            <a:r>
+              <a:rPr lang="en-US" sz="2000" b="0" i="0" u="none" strike="noStrike" cap="none" dirty="0">
+                <a:solidFill>
+                  <a:schemeClr val="dk1"/>
+                </a:solidFill>
+                <a:latin typeface="IDLC" pitchFamily="2" charset="0"/>
+                <a:ea typeface="Calibri"/>
+                <a:cs typeface="IDLC" pitchFamily="2" charset="0"/>
+                <a:sym typeface="Calibri"/>
+              </a:rPr>
+              <a:t/>
+            </a:r>
             <a:br>
-              <a:rPr lang="en-US" sz="1800" b="0" i="0" u="none" strike="noStrike" cap="none" dirty="0">
+              <a:rPr lang="en-US" sz="2000" b="0" i="0" u="none" strike="noStrike" cap="none" dirty="0">
                 <a:solidFill>
                   <a:schemeClr val="dk1"/>
                 </a:solidFill>
-                <a:latin typeface="Calibri"/>
+                <a:latin typeface="IDLC" pitchFamily="2" charset="0"/>
                 <a:ea typeface="Calibri"/>
-                <a:cs typeface="Calibri"/>
+                <a:cs typeface="IDLC" pitchFamily="2" charset="0"/>
                 <a:sym typeface="Calibri"/>
               </a:rPr>
             </a:br>
             <a:r>
-              <a:rPr lang="en-US" sz="1200" b="1" dirty="0">
+              <a:rPr lang="en-US" b="1" dirty="0">
                 <a:solidFill>
                   <a:schemeClr val="accent6"/>
                 </a:solidFill>
-                <a:latin typeface="Urbanist"/>
+                <a:latin typeface="IDLC" pitchFamily="2" charset="0"/>
                 <a:ea typeface="Urbanist"/>
-                <a:cs typeface="Urbanist"/>
+                <a:cs typeface="IDLC" pitchFamily="2" charset="0"/>
                 <a:sym typeface="Urbanist"/>
               </a:rPr>
               <a:t>git add .</a:t>
             </a:r>
-            <a:endParaRPr sz="1200" b="1" dirty="0">
+            <a:endParaRPr b="1" dirty="0">
               <a:solidFill>
                 <a:schemeClr val="accent6"/>
               </a:solidFill>
-              <a:latin typeface="Urbanist"/>
+              <a:latin typeface="IDLC" pitchFamily="2" charset="0"/>
               <a:ea typeface="Urbanist"/>
-              <a:cs typeface="Urbanist"/>
+              <a:cs typeface="IDLC" pitchFamily="2" charset="0"/>
             </a:endParaRPr>
           </a:p>
         </p:txBody>
@@ -24825,7 +28232,7 @@
         <p:spPr>
           <a:xfrm>
             <a:off x="7530643" y="3064073"/>
-            <a:ext cx="1440180" cy="209550"/>
+            <a:ext cx="1440180" cy="215444"/>
           </a:xfrm>
           <a:prstGeom prst="rect">
             <a:avLst/>
@@ -24851,18 +28258,21 @@
               <a:buNone/>
             </a:pPr>
             <a:r>
-              <a:rPr lang="en-US" sz="1350" b="1" i="0" u="none" strike="noStrike" cap="none" dirty="0">
+              <a:rPr lang="en-US" b="1" i="0" u="none" strike="noStrike" cap="none" dirty="0">
                 <a:solidFill>
                   <a:srgbClr val="CCFF66"/>
                 </a:solidFill>
-                <a:latin typeface="Urbanist"/>
+                <a:latin typeface="IDLC" pitchFamily="2" charset="0"/>
                 <a:ea typeface="Urbanist"/>
-                <a:cs typeface="Urbanist"/>
+                <a:cs typeface="IDLC" pitchFamily="2" charset="0"/>
                 <a:sym typeface="Urbanist"/>
               </a:rPr>
               <a:t>COMMIT</a:t>
             </a:r>
-            <a:endParaRPr dirty="0"/>
+            <a:endParaRPr sz="1600" dirty="0">
+              <a:latin typeface="IDLC" pitchFamily="2" charset="0"/>
+              <a:cs typeface="IDLC" pitchFamily="2" charset="0"/>
+            </a:endParaRPr>
           </a:p>
         </p:txBody>
       </p:sp>
@@ -24875,7 +28285,7 @@
         <p:spPr>
           <a:xfrm>
             <a:off x="7564932" y="3349823"/>
-            <a:ext cx="1436787" cy="464871"/>
+            <a:ext cx="1436787" cy="678391"/>
           </a:xfrm>
           <a:prstGeom prst="rect">
             <a:avLst/>
@@ -24904,13 +28314,13 @@
               <a:buNone/>
             </a:pPr>
             <a:r>
-              <a:rPr lang="en-US" sz="975" b="0" i="0" u="none" strike="noStrike" cap="none" dirty="0">
+              <a:rPr lang="en-US" sz="1000" b="0" i="0" u="none" strike="noStrike" cap="none" dirty="0">
                 <a:solidFill>
                   <a:srgbClr val="FFFFFF"/>
                 </a:solidFill>
-                <a:latin typeface="Urbanist"/>
+                <a:latin typeface="IDLC" pitchFamily="2" charset="0"/>
                 <a:ea typeface="Urbanist"/>
-                <a:cs typeface="Urbanist"/>
+                <a:cs typeface="IDLC" pitchFamily="2" charset="0"/>
                 <a:sym typeface="Urbanist"/>
               </a:rPr>
               <a:t>Save snapshot</a:t>
@@ -24929,42 +28339,57 @@
               </a:spcAft>
               <a:buNone/>
             </a:pPr>
+            <a:r>
+              <a:rPr lang="en-US" sz="2000" b="0" i="0" u="none" strike="noStrike" cap="none" dirty="0">
+                <a:solidFill>
+                  <a:schemeClr val="dk1"/>
+                </a:solidFill>
+                <a:latin typeface="IDLC" pitchFamily="2" charset="0"/>
+                <a:ea typeface="Calibri"/>
+                <a:cs typeface="IDLC" pitchFamily="2" charset="0"/>
+                <a:sym typeface="Calibri"/>
+              </a:rPr>
+              <a:t/>
+            </a:r>
             <a:br>
-              <a:rPr lang="en-US" sz="1800" b="0" i="0" u="none" strike="noStrike" cap="none" dirty="0">
+              <a:rPr lang="en-US" sz="2000" b="0" i="0" u="none" strike="noStrike" cap="none" dirty="0">
                 <a:solidFill>
                   <a:schemeClr val="dk1"/>
                 </a:solidFill>
-                <a:latin typeface="Calibri"/>
+                <a:latin typeface="IDLC" pitchFamily="2" charset="0"/>
                 <a:ea typeface="Calibri"/>
-                <a:cs typeface="Calibri"/>
+                <a:cs typeface="IDLC" pitchFamily="2" charset="0"/>
                 <a:sym typeface="Calibri"/>
               </a:rPr>
             </a:br>
             <a:r>
-              <a:rPr lang="en-US" sz="1200" b="1" dirty="0">
+              <a:rPr lang="en-US" b="1" dirty="0">
                 <a:solidFill>
                   <a:schemeClr val="accent6"/>
                 </a:solidFill>
-                <a:latin typeface="Urbanist"/>
+                <a:latin typeface="IDLC" pitchFamily="2" charset="0"/>
                 <a:ea typeface="Urbanist"/>
-                <a:cs typeface="Urbanist"/>
+                <a:cs typeface="IDLC" pitchFamily="2" charset="0"/>
                 <a:sym typeface="Urbanist"/>
               </a:rPr>
               <a:t>git commit -m "msg</a:t>
             </a:r>
             <a:r>
-              <a:rPr lang="en-US" sz="975" b="0" i="0" u="none" strike="noStrike" cap="none" dirty="0">
+              <a:rPr lang="en-US" sz="1000" b="0" i="0" u="none" strike="noStrike" cap="none" dirty="0">
                 <a:solidFill>
                   <a:srgbClr val="FFFFFF"/>
                 </a:solidFill>
-                <a:latin typeface="Urbanist"/>
+                <a:latin typeface="IDLC" pitchFamily="2" charset="0"/>
                 <a:ea typeface="Urbanist"/>
-                <a:cs typeface="Urbanist"/>
+                <a:cs typeface="IDLC" pitchFamily="2" charset="0"/>
                 <a:sym typeface="Urbanist"/>
               </a:rPr>
               <a:t>"</a:t>
             </a:r>
-            <a:endParaRPr dirty="0"/>
+            <a:endParaRPr sz="1600" dirty="0">
+              <a:latin typeface="IDLC" pitchFamily="2" charset="0"/>
+              <a:cs typeface="IDLC" pitchFamily="2" charset="0"/>
+            </a:endParaRPr>
           </a:p>
         </p:txBody>
       </p:sp>
@@ -24977,7 +28402,7 @@
         <p:spPr>
           <a:xfrm>
             <a:off x="8967430" y="4886920"/>
-            <a:ext cx="1440180" cy="209550"/>
+            <a:ext cx="1440180" cy="215444"/>
           </a:xfrm>
           <a:prstGeom prst="rect">
             <a:avLst/>
@@ -25003,18 +28428,21 @@
               <a:buNone/>
             </a:pPr>
             <a:r>
-              <a:rPr lang="en-US" sz="1350" b="1" i="0" u="none" strike="noStrike" cap="none">
+              <a:rPr lang="en-US" b="1" i="0" u="none" strike="noStrike" cap="none" dirty="0">
                 <a:solidFill>
                   <a:srgbClr val="CCFF66"/>
                 </a:solidFill>
-                <a:latin typeface="Urbanist"/>
+                <a:latin typeface="IDLC" pitchFamily="2" charset="0"/>
                 <a:ea typeface="Urbanist"/>
-                <a:cs typeface="Urbanist"/>
+                <a:cs typeface="IDLC" pitchFamily="2" charset="0"/>
                 <a:sym typeface="Urbanist"/>
               </a:rPr>
               <a:t>LINK</a:t>
             </a:r>
-            <a:endParaRPr/>
+            <a:endParaRPr sz="1600" dirty="0">
+              <a:latin typeface="IDLC" pitchFamily="2" charset="0"/>
+              <a:cs typeface="IDLC" pitchFamily="2" charset="0"/>
+            </a:endParaRPr>
           </a:p>
         </p:txBody>
       </p:sp>
@@ -25027,7 +28455,7 @@
         <p:spPr>
           <a:xfrm>
             <a:off x="9001720" y="5172670"/>
-            <a:ext cx="1371600" cy="464871"/>
+            <a:ext cx="1371600" cy="514628"/>
           </a:xfrm>
           <a:prstGeom prst="rect">
             <a:avLst/>
@@ -25056,13 +28484,13 @@
               <a:buNone/>
             </a:pPr>
             <a:r>
-              <a:rPr lang="en-US" sz="975" b="0" i="0" u="none" strike="noStrike" cap="none" dirty="0">
+              <a:rPr lang="en-US" sz="1000" b="0" i="0" u="none" strike="noStrike" cap="none" dirty="0">
                 <a:solidFill>
                   <a:srgbClr val="FFFFFF"/>
                 </a:solidFill>
-                <a:latin typeface="Urbanist"/>
+                <a:latin typeface="IDLC" pitchFamily="2" charset="0"/>
                 <a:ea typeface="Urbanist"/>
-                <a:cs typeface="Urbanist"/>
+                <a:cs typeface="IDLC" pitchFamily="2" charset="0"/>
                 <a:sym typeface="Urbanist"/>
               </a:rPr>
               <a:t>Connect GitHub</a:t>
@@ -25081,36 +28509,48 @@
               </a:spcAft>
               <a:buNone/>
             </a:pPr>
+            <a:r>
+              <a:rPr lang="en-US" sz="2000" b="0" i="0" u="none" strike="noStrike" cap="none" dirty="0">
+                <a:solidFill>
+                  <a:schemeClr val="dk1"/>
+                </a:solidFill>
+                <a:latin typeface="IDLC" pitchFamily="2" charset="0"/>
+                <a:ea typeface="Calibri"/>
+                <a:cs typeface="IDLC" pitchFamily="2" charset="0"/>
+                <a:sym typeface="Calibri"/>
+              </a:rPr>
+              <a:t/>
+            </a:r>
             <a:br>
-              <a:rPr lang="en-US" sz="1800" b="0" i="0" u="none" strike="noStrike" cap="none" dirty="0">
+              <a:rPr lang="en-US" sz="2000" b="0" i="0" u="none" strike="noStrike" cap="none" dirty="0">
                 <a:solidFill>
                   <a:schemeClr val="dk1"/>
                 </a:solidFill>
-                <a:latin typeface="Calibri"/>
+                <a:latin typeface="IDLC" pitchFamily="2" charset="0"/>
                 <a:ea typeface="Calibri"/>
-                <a:cs typeface="Calibri"/>
+                <a:cs typeface="IDLC" pitchFamily="2" charset="0"/>
                 <a:sym typeface="Calibri"/>
               </a:rPr>
             </a:br>
             <a:r>
-              <a:rPr lang="en-US" sz="1200" b="1" dirty="0">
+              <a:rPr lang="en-US" b="1" dirty="0">
                 <a:solidFill>
                   <a:schemeClr val="accent6"/>
                 </a:solidFill>
-                <a:latin typeface="Urbanist"/>
+                <a:latin typeface="IDLC" pitchFamily="2" charset="0"/>
                 <a:ea typeface="Urbanist"/>
-                <a:cs typeface="Urbanist"/>
+                <a:cs typeface="IDLC" pitchFamily="2" charset="0"/>
                 <a:sym typeface="Urbanist"/>
               </a:rPr>
               <a:t>git remote add</a:t>
             </a:r>
-            <a:endParaRPr sz="1200" b="1" dirty="0">
+            <a:endParaRPr b="1" dirty="0">
               <a:solidFill>
                 <a:schemeClr val="accent6"/>
               </a:solidFill>
-              <a:latin typeface="Urbanist"/>
+              <a:latin typeface="IDLC" pitchFamily="2" charset="0"/>
               <a:ea typeface="Urbanist"/>
-              <a:cs typeface="Urbanist"/>
+              <a:cs typeface="IDLC" pitchFamily="2" charset="0"/>
             </a:endParaRPr>
           </a:p>
         </p:txBody>
@@ -25124,7 +28564,7 @@
         <p:spPr>
           <a:xfrm>
             <a:off x="10404217" y="3250703"/>
-            <a:ext cx="1440180" cy="209550"/>
+            <a:ext cx="1440180" cy="215444"/>
           </a:xfrm>
           <a:prstGeom prst="rect">
             <a:avLst/>
@@ -25150,18 +28590,21 @@
               <a:buNone/>
             </a:pPr>
             <a:r>
-              <a:rPr lang="en-US" sz="1350" b="1" i="0" u="none" strike="noStrike" cap="none">
+              <a:rPr lang="en-US" b="1" i="0" u="none" strike="noStrike" cap="none" dirty="0">
                 <a:solidFill>
                   <a:srgbClr val="CCFF66"/>
                 </a:solidFill>
-                <a:latin typeface="Urbanist"/>
+                <a:latin typeface="IDLC" pitchFamily="2" charset="0"/>
                 <a:ea typeface="Urbanist"/>
-                <a:cs typeface="Urbanist"/>
+                <a:cs typeface="IDLC" pitchFamily="2" charset="0"/>
                 <a:sym typeface="Urbanist"/>
               </a:rPr>
               <a:t>PUSH</a:t>
             </a:r>
-            <a:endParaRPr/>
+            <a:endParaRPr sz="1600" dirty="0">
+              <a:latin typeface="IDLC" pitchFamily="2" charset="0"/>
+              <a:cs typeface="IDLC" pitchFamily="2" charset="0"/>
+            </a:endParaRPr>
           </a:p>
         </p:txBody>
       </p:sp>
@@ -25174,7 +28617,7 @@
         <p:spPr>
           <a:xfrm>
             <a:off x="10438507" y="3536453"/>
-            <a:ext cx="1371600" cy="464871"/>
+            <a:ext cx="1371600" cy="514628"/>
           </a:xfrm>
           <a:prstGeom prst="rect">
             <a:avLst/>
@@ -25203,13 +28646,13 @@
               <a:buNone/>
             </a:pPr>
             <a:r>
-              <a:rPr lang="en-US" sz="975" b="0" i="0" u="none" strike="noStrike" cap="none" dirty="0">
+              <a:rPr lang="en-US" sz="1000" b="0" i="0" u="none" strike="noStrike" cap="none" dirty="0">
                 <a:solidFill>
                   <a:srgbClr val="FFFFFF"/>
                 </a:solidFill>
-                <a:latin typeface="Urbanist"/>
+                <a:latin typeface="IDLC" pitchFamily="2" charset="0"/>
                 <a:ea typeface="Urbanist"/>
-                <a:cs typeface="Urbanist"/>
+                <a:cs typeface="IDLC" pitchFamily="2" charset="0"/>
                 <a:sym typeface="Urbanist"/>
               </a:rPr>
               <a:t>Publish code</a:t>
@@ -25228,36 +28671,48 @@
               </a:spcAft>
               <a:buNone/>
             </a:pPr>
+            <a:r>
+              <a:rPr lang="en-US" sz="2000" b="0" i="0" u="none" strike="noStrike" cap="none" dirty="0">
+                <a:solidFill>
+                  <a:schemeClr val="dk1"/>
+                </a:solidFill>
+                <a:latin typeface="IDLC" pitchFamily="2" charset="0"/>
+                <a:ea typeface="Calibri"/>
+                <a:cs typeface="IDLC" pitchFamily="2" charset="0"/>
+                <a:sym typeface="Calibri"/>
+              </a:rPr>
+              <a:t/>
+            </a:r>
             <a:br>
-              <a:rPr lang="en-US" sz="1800" b="0" i="0" u="none" strike="noStrike" cap="none" dirty="0">
+              <a:rPr lang="en-US" sz="2000" b="0" i="0" u="none" strike="noStrike" cap="none" dirty="0">
                 <a:solidFill>
                   <a:schemeClr val="dk1"/>
                 </a:solidFill>
-                <a:latin typeface="Calibri"/>
+                <a:latin typeface="IDLC" pitchFamily="2" charset="0"/>
                 <a:ea typeface="Calibri"/>
-                <a:cs typeface="Calibri"/>
+                <a:cs typeface="IDLC" pitchFamily="2" charset="0"/>
                 <a:sym typeface="Calibri"/>
               </a:rPr>
             </a:br>
             <a:r>
-              <a:rPr lang="en-US" sz="1200" b="1" dirty="0">
+              <a:rPr lang="en-US" b="1" dirty="0">
                 <a:solidFill>
                   <a:schemeClr val="accent6"/>
                 </a:solidFill>
-                <a:latin typeface="Urbanist"/>
+                <a:latin typeface="IDLC" pitchFamily="2" charset="0"/>
                 <a:ea typeface="Urbanist"/>
-                <a:cs typeface="Urbanist"/>
+                <a:cs typeface="IDLC" pitchFamily="2" charset="0"/>
                 <a:sym typeface="Urbanist"/>
               </a:rPr>
               <a:t>git push origin</a:t>
             </a:r>
-            <a:endParaRPr sz="1200" b="1" dirty="0">
+            <a:endParaRPr b="1" dirty="0">
               <a:solidFill>
                 <a:schemeClr val="accent6"/>
               </a:solidFill>
-              <a:latin typeface="Urbanist"/>
+              <a:latin typeface="IDLC" pitchFamily="2" charset="0"/>
               <a:ea typeface="Urbanist"/>
-              <a:cs typeface="Urbanist"/>
+              <a:cs typeface="IDLC" pitchFamily="2" charset="0"/>
             </a:endParaRPr>
           </a:p>
         </p:txBody>
@@ -25310,9 +28765,9 @@
               <a:solidFill>
                 <a:schemeClr val="dk1"/>
               </a:solidFill>
-              <a:latin typeface="Calibri"/>
+              <a:latin typeface="IDLC" pitchFamily="2" charset="0"/>
               <a:ea typeface="Calibri"/>
-              <a:cs typeface="Calibri"/>
+              <a:cs typeface="IDLC" pitchFamily="2" charset="0"/>
               <a:sym typeface="Calibri"/>
             </a:endParaRPr>
           </a:p>
@@ -25366,9 +28821,9 @@
               <a:solidFill>
                 <a:schemeClr val="dk1"/>
               </a:solidFill>
-              <a:latin typeface="Calibri"/>
+              <a:latin typeface="IDLC" pitchFamily="2" charset="0"/>
               <a:ea typeface="Calibri"/>
-              <a:cs typeface="Calibri"/>
+              <a:cs typeface="IDLC" pitchFamily="2" charset="0"/>
               <a:sym typeface="Calibri"/>
             </a:endParaRPr>
           </a:p>
@@ -25422,9 +28877,9 @@
               <a:solidFill>
                 <a:schemeClr val="dk1"/>
               </a:solidFill>
-              <a:latin typeface="Calibri"/>
+              <a:latin typeface="IDLC" pitchFamily="2" charset="0"/>
               <a:ea typeface="Calibri"/>
-              <a:cs typeface="Calibri"/>
+              <a:cs typeface="IDLC" pitchFamily="2" charset="0"/>
               <a:sym typeface="Calibri"/>
             </a:endParaRPr>
           </a:p>
@@ -25478,9 +28933,9 @@
               <a:solidFill>
                 <a:schemeClr val="dk1"/>
               </a:solidFill>
-              <a:latin typeface="Calibri"/>
+              <a:latin typeface="IDLC" pitchFamily="2" charset="0"/>
               <a:ea typeface="Calibri"/>
-              <a:cs typeface="Calibri"/>
+              <a:cs typeface="IDLC" pitchFamily="2" charset="0"/>
               <a:sym typeface="Calibri"/>
             </a:endParaRPr>
           </a:p>
@@ -25534,9 +28989,9 @@
               <a:solidFill>
                 <a:schemeClr val="dk1"/>
               </a:solidFill>
-              <a:latin typeface="Calibri"/>
+              <a:latin typeface="IDLC" pitchFamily="2" charset="0"/>
               <a:ea typeface="Calibri"/>
-              <a:cs typeface="Calibri"/>
+              <a:cs typeface="IDLC" pitchFamily="2" charset="0"/>
               <a:sym typeface="Calibri"/>
             </a:endParaRPr>
           </a:p>
@@ -25590,9 +29045,9 @@
               <a:solidFill>
                 <a:schemeClr val="dk1"/>
               </a:solidFill>
-              <a:latin typeface="Calibri"/>
+              <a:latin typeface="IDLC" pitchFamily="2" charset="0"/>
               <a:ea typeface="Calibri"/>
-              <a:cs typeface="Calibri"/>
+              <a:cs typeface="IDLC" pitchFamily="2" charset="0"/>
               <a:sym typeface="Calibri"/>
             </a:endParaRPr>
           </a:p>
@@ -25646,9 +29101,9 @@
               <a:solidFill>
                 <a:schemeClr val="dk1"/>
               </a:solidFill>
-              <a:latin typeface="Calibri"/>
+              <a:latin typeface="IDLC" pitchFamily="2" charset="0"/>
               <a:ea typeface="Calibri"/>
-              <a:cs typeface="Calibri"/>
+              <a:cs typeface="IDLC" pitchFamily="2" charset="0"/>
               <a:sym typeface="Calibri"/>
             </a:endParaRPr>
           </a:p>
@@ -25702,9 +29157,9 @@
               <a:solidFill>
                 <a:schemeClr val="dk1"/>
               </a:solidFill>
-              <a:latin typeface="Calibri"/>
+              <a:latin typeface="IDLC" pitchFamily="2" charset="0"/>
               <a:ea typeface="Calibri"/>
-              <a:cs typeface="Calibri"/>
+              <a:cs typeface="IDLC" pitchFamily="2" charset="0"/>
               <a:sym typeface="Calibri"/>
             </a:endParaRPr>
           </a:p>
@@ -25747,9 +29202,9 @@
                 <a:solidFill>
                   <a:srgbClr val="FFFFFF"/>
                 </a:solidFill>
-                <a:latin typeface="Urbanist"/>
+                <a:latin typeface="IDLC" pitchFamily="2" charset="0"/>
                 <a:ea typeface="Urbanist"/>
-                <a:cs typeface="Urbanist"/>
+                <a:cs typeface="IDLC" pitchFamily="2" charset="0"/>
                 <a:sym typeface="Urbanist"/>
               </a:rPr>
               <a:t>GET </a:t>
@@ -25759,14 +29214,17 @@
                 <a:solidFill>
                   <a:srgbClr val="DEFF9A"/>
                 </a:solidFill>
-                <a:latin typeface="Urbanist" panose="020B0604020202020204" charset="0"/>
+                <a:latin typeface="IDLC" pitchFamily="2" charset="0"/>
                 <a:ea typeface="Urbanist" panose="020B0604020202020204" charset="0"/>
-                <a:cs typeface="Urbanist" panose="020B0604020202020204" charset="0"/>
+                <a:cs typeface="IDLC" pitchFamily="2" charset="0"/>
                 <a:sym typeface="Urbanist"/>
               </a:rPr>
               <a:t>STARTED</a:t>
             </a:r>
-            <a:endParaRPr dirty="0"/>
+            <a:endParaRPr dirty="0">
+              <a:latin typeface="IDLC" pitchFamily="2" charset="0"/>
+              <a:cs typeface="IDLC" pitchFamily="2" charset="0"/>
+            </a:endParaRPr>
           </a:p>
         </p:txBody>
       </p:sp>
@@ -25816,9 +29274,9 @@
               <a:solidFill>
                 <a:schemeClr val="dk1"/>
               </a:solidFill>
-              <a:latin typeface="Calibri"/>
+              <a:latin typeface="IDLC" pitchFamily="2" charset="0"/>
               <a:ea typeface="Calibri"/>
-              <a:cs typeface="Calibri"/>
+              <a:cs typeface="IDLC" pitchFamily="2" charset="0"/>
               <a:sym typeface="Calibri"/>
             </a:endParaRPr>
           </a:p>
@@ -25829,6 +29287,13 @@
   <p:clrMapOvr>
     <a:masterClrMapping/>
   </p:clrMapOvr>
+  <p:timing>
+    <p:tnLst>
+      <p:par>
+        <p:cTn id="1" dur="indefinite" restart="never" nodeType="tmRoot"/>
+      </p:par>
+    </p:tnLst>
+  </p:timing>
 </p:sld>
 </file>
 
@@ -25942,14 +29407,17 @@
                 <a:solidFill>
                   <a:srgbClr val="CCFF66"/>
                 </a:solidFill>
-                <a:latin typeface="Urbanist"/>
+                <a:latin typeface="IDLC" pitchFamily="2" charset="0"/>
                 <a:ea typeface="Urbanist"/>
-                <a:cs typeface="Urbanist"/>
+                <a:cs typeface="IDLC" pitchFamily="2" charset="0"/>
                 <a:sym typeface="Urbanist"/>
               </a:rPr>
               <a:t>BRANCH</a:t>
             </a:r>
-            <a:endParaRPr/>
+            <a:endParaRPr>
+              <a:latin typeface="IDLC" pitchFamily="2" charset="0"/>
+              <a:cs typeface="IDLC" pitchFamily="2" charset="0"/>
+            </a:endParaRPr>
           </a:p>
         </p:txBody>
       </p:sp>
@@ -25962,7 +29430,7 @@
         <p:spPr>
           <a:xfrm>
             <a:off x="762000" y="5010150"/>
-            <a:ext cx="2133600" cy="400050"/>
+            <a:ext cx="2133600" cy="304699"/>
           </a:xfrm>
           <a:prstGeom prst="rect">
             <a:avLst/>
@@ -25995,21 +29463,33 @@
                 <a:solidFill>
                   <a:srgbClr val="FFFFFF"/>
                 </a:solidFill>
-                <a:latin typeface="Urbanist"/>
+                <a:latin typeface="IDLC" pitchFamily="2" charset="0"/>
                 <a:ea typeface="Urbanist"/>
-                <a:cs typeface="Urbanist"/>
+                <a:cs typeface="IDLC" pitchFamily="2" charset="0"/>
                 <a:sym typeface="Urbanist"/>
               </a:rPr>
               <a:t>Create a sandbox to</a:t>
+            </a:r>
+            <a:r>
+              <a:rPr lang="en-US" sz="1800" b="0" i="0" u="none" strike="noStrike" cap="none">
+                <a:solidFill>
+                  <a:schemeClr val="dk1"/>
+                </a:solidFill>
+                <a:latin typeface="IDLC" pitchFamily="2" charset="0"/>
+                <a:ea typeface="Calibri"/>
+                <a:cs typeface="IDLC" pitchFamily="2" charset="0"/>
+                <a:sym typeface="Calibri"/>
+              </a:rPr>
+              <a:t/>
             </a:r>
             <a:br>
               <a:rPr lang="en-US" sz="1800" b="0" i="0" u="none" strike="noStrike" cap="none">
                 <a:solidFill>
                   <a:schemeClr val="dk1"/>
                 </a:solidFill>
-                <a:latin typeface="Calibri"/>
+                <a:latin typeface="IDLC" pitchFamily="2" charset="0"/>
                 <a:ea typeface="Calibri"/>
-                <a:cs typeface="Calibri"/>
+                <a:cs typeface="IDLC" pitchFamily="2" charset="0"/>
                 <a:sym typeface="Calibri"/>
               </a:rPr>
             </a:br>
@@ -26018,14 +29498,17 @@
                 <a:solidFill>
                   <a:srgbClr val="FFFFFF"/>
                 </a:solidFill>
-                <a:latin typeface="Urbanist"/>
+                <a:latin typeface="IDLC" pitchFamily="2" charset="0"/>
                 <a:ea typeface="Urbanist"/>
-                <a:cs typeface="Urbanist"/>
+                <a:cs typeface="IDLC" pitchFamily="2" charset="0"/>
                 <a:sym typeface="Urbanist"/>
               </a:rPr>
               <a:t> isolate your feature code.</a:t>
             </a:r>
-            <a:endParaRPr/>
+            <a:endParaRPr>
+              <a:latin typeface="IDLC" pitchFamily="2" charset="0"/>
+              <a:cs typeface="IDLC" pitchFamily="2" charset="0"/>
+            </a:endParaRPr>
           </a:p>
         </p:txBody>
       </p:sp>
@@ -26068,14 +29551,17 @@
                 <a:solidFill>
                   <a:srgbClr val="CCFF66"/>
                 </a:solidFill>
-                <a:latin typeface="Urbanist"/>
+                <a:latin typeface="IDLC" pitchFamily="2" charset="0"/>
                 <a:ea typeface="Urbanist"/>
-                <a:cs typeface="Urbanist"/>
+                <a:cs typeface="IDLC" pitchFamily="2" charset="0"/>
                 <a:sym typeface="Urbanist"/>
               </a:rPr>
               <a:t>DEVELOP</a:t>
             </a:r>
-            <a:endParaRPr dirty="0"/>
+            <a:endParaRPr dirty="0">
+              <a:latin typeface="IDLC" pitchFamily="2" charset="0"/>
+              <a:cs typeface="IDLC" pitchFamily="2" charset="0"/>
+            </a:endParaRPr>
           </a:p>
         </p:txBody>
       </p:sp>
@@ -26088,7 +29574,7 @@
         <p:spPr>
           <a:xfrm>
             <a:off x="3606700" y="3057525"/>
-            <a:ext cx="2133600" cy="400050"/>
+            <a:ext cx="2133600" cy="304699"/>
           </a:xfrm>
           <a:prstGeom prst="rect">
             <a:avLst/>
@@ -26121,21 +29607,33 @@
                 <a:solidFill>
                   <a:srgbClr val="FFFFFF"/>
                 </a:solidFill>
-                <a:latin typeface="Urbanist"/>
+                <a:latin typeface="IDLC" pitchFamily="2" charset="0"/>
                 <a:ea typeface="Urbanist"/>
-                <a:cs typeface="Urbanist"/>
+                <a:cs typeface="IDLC" pitchFamily="2" charset="0"/>
                 <a:sym typeface="Urbanist"/>
               </a:rPr>
               <a:t>Modify scripts in RStudio.</a:t>
+            </a:r>
+            <a:r>
+              <a:rPr lang="en-US" sz="1800" b="0" i="0" u="none" strike="noStrike" cap="none" dirty="0">
+                <a:solidFill>
+                  <a:schemeClr val="dk1"/>
+                </a:solidFill>
+                <a:latin typeface="IDLC" pitchFamily="2" charset="0"/>
+                <a:ea typeface="Calibri"/>
+                <a:cs typeface="IDLC" pitchFamily="2" charset="0"/>
+                <a:sym typeface="Calibri"/>
+              </a:rPr>
+              <a:t/>
             </a:r>
             <a:br>
               <a:rPr lang="en-US" sz="1800" b="0" i="0" u="none" strike="noStrike" cap="none" dirty="0">
                 <a:solidFill>
                   <a:schemeClr val="dk1"/>
                 </a:solidFill>
-                <a:latin typeface="Calibri"/>
+                <a:latin typeface="IDLC" pitchFamily="2" charset="0"/>
                 <a:ea typeface="Calibri"/>
-                <a:cs typeface="Calibri"/>
+                <a:cs typeface="IDLC" pitchFamily="2" charset="0"/>
                 <a:sym typeface="Calibri"/>
               </a:rPr>
             </a:br>
@@ -26144,14 +29642,17 @@
                 <a:solidFill>
                   <a:srgbClr val="FFFFFF"/>
                 </a:solidFill>
-                <a:latin typeface="Urbanist"/>
+                <a:latin typeface="IDLC" pitchFamily="2" charset="0"/>
                 <a:ea typeface="Urbanist"/>
-                <a:cs typeface="Urbanist"/>
+                <a:cs typeface="IDLC" pitchFamily="2" charset="0"/>
                 <a:sym typeface="Urbanist"/>
               </a:rPr>
               <a:t> Stage and save snapshots.</a:t>
             </a:r>
-            <a:endParaRPr dirty="0"/>
+            <a:endParaRPr dirty="0">
+              <a:latin typeface="IDLC" pitchFamily="2" charset="0"/>
+              <a:cs typeface="IDLC" pitchFamily="2" charset="0"/>
+            </a:endParaRPr>
           </a:p>
         </p:txBody>
       </p:sp>
@@ -26194,14 +29695,17 @@
                 <a:solidFill>
                   <a:srgbClr val="CCFF66"/>
                 </a:solidFill>
-                <a:latin typeface="Urbanist"/>
+                <a:latin typeface="IDLC" pitchFamily="2" charset="0"/>
                 <a:ea typeface="Urbanist"/>
-                <a:cs typeface="Urbanist"/>
+                <a:cs typeface="IDLC" pitchFamily="2" charset="0"/>
                 <a:sym typeface="Urbanist"/>
               </a:rPr>
               <a:t>PUSH</a:t>
             </a:r>
-            <a:endParaRPr/>
+            <a:endParaRPr>
+              <a:latin typeface="IDLC" pitchFamily="2" charset="0"/>
+              <a:cs typeface="IDLC" pitchFamily="2" charset="0"/>
+            </a:endParaRPr>
           </a:p>
         </p:txBody>
       </p:sp>
@@ -26214,7 +29718,7 @@
         <p:spPr>
           <a:xfrm>
             <a:off x="6451401" y="5010150"/>
-            <a:ext cx="2133600" cy="400050"/>
+            <a:ext cx="2133600" cy="304699"/>
           </a:xfrm>
           <a:prstGeom prst="rect">
             <a:avLst/>
@@ -26247,21 +29751,33 @@
                 <a:solidFill>
                   <a:srgbClr val="FFFFFF"/>
                 </a:solidFill>
-                <a:latin typeface="Urbanist"/>
+                <a:latin typeface="IDLC" pitchFamily="2" charset="0"/>
                 <a:ea typeface="Urbanist"/>
-                <a:cs typeface="Urbanist"/>
+                <a:cs typeface="IDLC" pitchFamily="2" charset="0"/>
                 <a:sym typeface="Urbanist"/>
               </a:rPr>
               <a:t>Upload your branch and</a:t>
+            </a:r>
+            <a:r>
+              <a:rPr lang="en-US" sz="1800" b="0" i="0" u="none" strike="noStrike" cap="none">
+                <a:solidFill>
+                  <a:schemeClr val="dk1"/>
+                </a:solidFill>
+                <a:latin typeface="IDLC" pitchFamily="2" charset="0"/>
+                <a:ea typeface="Calibri"/>
+                <a:cs typeface="IDLC" pitchFamily="2" charset="0"/>
+                <a:sym typeface="Calibri"/>
+              </a:rPr>
+              <a:t/>
             </a:r>
             <a:br>
               <a:rPr lang="en-US" sz="1800" b="0" i="0" u="none" strike="noStrike" cap="none">
                 <a:solidFill>
                   <a:schemeClr val="dk1"/>
                 </a:solidFill>
-                <a:latin typeface="Calibri"/>
+                <a:latin typeface="IDLC" pitchFamily="2" charset="0"/>
                 <a:ea typeface="Calibri"/>
-                <a:cs typeface="Calibri"/>
+                <a:cs typeface="IDLC" pitchFamily="2" charset="0"/>
                 <a:sym typeface="Calibri"/>
               </a:rPr>
             </a:br>
@@ -26270,14 +29786,17 @@
                 <a:solidFill>
                   <a:srgbClr val="FFFFFF"/>
                 </a:solidFill>
-                <a:latin typeface="Urbanist"/>
+                <a:latin typeface="IDLC" pitchFamily="2" charset="0"/>
                 <a:ea typeface="Urbanist"/>
-                <a:cs typeface="Urbanist"/>
+                <a:cs typeface="IDLC" pitchFamily="2" charset="0"/>
                 <a:sym typeface="Urbanist"/>
               </a:rPr>
               <a:t> commits to GitHub cloud.</a:t>
             </a:r>
-            <a:endParaRPr/>
+            <a:endParaRPr>
+              <a:latin typeface="IDLC" pitchFamily="2" charset="0"/>
+              <a:cs typeface="IDLC" pitchFamily="2" charset="0"/>
+            </a:endParaRPr>
           </a:p>
         </p:txBody>
       </p:sp>
@@ -26320,14 +29839,17 @@
                 <a:solidFill>
                   <a:srgbClr val="CCFF66"/>
                 </a:solidFill>
-                <a:latin typeface="Urbanist"/>
+                <a:latin typeface="IDLC" pitchFamily="2" charset="0"/>
                 <a:ea typeface="Urbanist"/>
-                <a:cs typeface="Urbanist"/>
+                <a:cs typeface="IDLC" pitchFamily="2" charset="0"/>
                 <a:sym typeface="Urbanist"/>
               </a:rPr>
               <a:t>PULL REQUEST</a:t>
             </a:r>
-            <a:endParaRPr/>
+            <a:endParaRPr>
+              <a:latin typeface="IDLC" pitchFamily="2" charset="0"/>
+              <a:cs typeface="IDLC" pitchFamily="2" charset="0"/>
+            </a:endParaRPr>
           </a:p>
         </p:txBody>
       </p:sp>
@@ -26340,7 +29862,7 @@
         <p:spPr>
           <a:xfrm>
             <a:off x="9296102" y="3057525"/>
-            <a:ext cx="2133600" cy="400050"/>
+            <a:ext cx="2133600" cy="304699"/>
           </a:xfrm>
           <a:prstGeom prst="rect">
             <a:avLst/>
@@ -26373,21 +29895,33 @@
                 <a:solidFill>
                   <a:srgbClr val="FFFFFF"/>
                 </a:solidFill>
-                <a:latin typeface="Urbanist"/>
+                <a:latin typeface="IDLC" pitchFamily="2" charset="0"/>
                 <a:ea typeface="Urbanist"/>
-                <a:cs typeface="Urbanist"/>
+                <a:cs typeface="IDLC" pitchFamily="2" charset="0"/>
                 <a:sym typeface="Urbanist"/>
               </a:rPr>
               <a:t>On GitHub.com, propose</a:t>
+            </a:r>
+            <a:r>
+              <a:rPr lang="en-US" sz="1800" b="0" i="0" u="none" strike="noStrike" cap="none">
+                <a:solidFill>
+                  <a:schemeClr val="dk1"/>
+                </a:solidFill>
+                <a:latin typeface="IDLC" pitchFamily="2" charset="0"/>
+                <a:ea typeface="Calibri"/>
+                <a:cs typeface="IDLC" pitchFamily="2" charset="0"/>
+                <a:sym typeface="Calibri"/>
+              </a:rPr>
+              <a:t/>
             </a:r>
             <a:br>
               <a:rPr lang="en-US" sz="1800" b="0" i="0" u="none" strike="noStrike" cap="none">
                 <a:solidFill>
                   <a:schemeClr val="dk1"/>
                 </a:solidFill>
-                <a:latin typeface="Calibri"/>
+                <a:latin typeface="IDLC" pitchFamily="2" charset="0"/>
                 <a:ea typeface="Calibri"/>
-                <a:cs typeface="Calibri"/>
+                <a:cs typeface="IDLC" pitchFamily="2" charset="0"/>
                 <a:sym typeface="Calibri"/>
               </a:rPr>
             </a:br>
@@ -26396,14 +29930,17 @@
                 <a:solidFill>
                   <a:srgbClr val="FFFFFF"/>
                 </a:solidFill>
-                <a:latin typeface="Urbanist"/>
+                <a:latin typeface="IDLC" pitchFamily="2" charset="0"/>
                 <a:ea typeface="Urbanist"/>
-                <a:cs typeface="Urbanist"/>
+                <a:cs typeface="IDLC" pitchFamily="2" charset="0"/>
                 <a:sym typeface="Urbanist"/>
               </a:rPr>
               <a:t> merging code into main.</a:t>
             </a:r>
-            <a:endParaRPr/>
+            <a:endParaRPr>
+              <a:latin typeface="IDLC" pitchFamily="2" charset="0"/>
+              <a:cs typeface="IDLC" pitchFamily="2" charset="0"/>
+            </a:endParaRPr>
           </a:p>
         </p:txBody>
       </p:sp>
@@ -26415,8 +29952,8 @@
         </p:nvSpPr>
         <p:spPr>
           <a:xfrm>
-            <a:off x="990600" y="571500"/>
-            <a:ext cx="10961370" cy="609600"/>
+            <a:off x="990600" y="506968"/>
+            <a:ext cx="10961370" cy="738664"/>
           </a:xfrm>
           <a:prstGeom prst="rect">
             <a:avLst/>
@@ -26449,14 +29986,17 @@
                 <a:solidFill>
                   <a:srgbClr val="CCFF66"/>
                 </a:solidFill>
-                <a:latin typeface="Urbanist"/>
+                <a:latin typeface="IDLC" pitchFamily="2" charset="0"/>
                 <a:ea typeface="Urbanist"/>
-                <a:cs typeface="Urbanist"/>
+                <a:cs typeface="IDLC" pitchFamily="2" charset="0"/>
                 <a:sym typeface="Urbanist"/>
               </a:rPr>
               <a:t>COLLABORATION</a:t>
             </a:r>
-            <a:endParaRPr dirty="0"/>
+            <a:endParaRPr dirty="0">
+              <a:latin typeface="IDLC" pitchFamily="2" charset="0"/>
+              <a:cs typeface="IDLC" pitchFamily="2" charset="0"/>
+            </a:endParaRPr>
           </a:p>
         </p:txBody>
       </p:sp>
@@ -26500,9 +30040,9 @@
               <a:solidFill>
                 <a:schemeClr val="dk1"/>
               </a:solidFill>
-              <a:latin typeface="Calibri"/>
+              <a:latin typeface="IDLC" pitchFamily="2" charset="0"/>
               <a:ea typeface="Calibri"/>
-              <a:cs typeface="Calibri"/>
+              <a:cs typeface="IDLC" pitchFamily="2" charset="0"/>
               <a:sym typeface="Calibri"/>
             </a:endParaRPr>
           </a:p>
@@ -26556,9 +30096,9 @@
               <a:solidFill>
                 <a:schemeClr val="dk1"/>
               </a:solidFill>
-              <a:latin typeface="Calibri"/>
+              <a:latin typeface="IDLC" pitchFamily="2" charset="0"/>
               <a:ea typeface="Calibri"/>
-              <a:cs typeface="Calibri"/>
+              <a:cs typeface="IDLC" pitchFamily="2" charset="0"/>
               <a:sym typeface="Calibri"/>
             </a:endParaRPr>
           </a:p>
@@ -26612,9 +30152,9 @@
               <a:solidFill>
                 <a:schemeClr val="dk1"/>
               </a:solidFill>
-              <a:latin typeface="Calibri"/>
+              <a:latin typeface="IDLC" pitchFamily="2" charset="0"/>
               <a:ea typeface="Calibri"/>
-              <a:cs typeface="Calibri"/>
+              <a:cs typeface="IDLC" pitchFamily="2" charset="0"/>
               <a:sym typeface="Calibri"/>
             </a:endParaRPr>
           </a:p>
@@ -26668,9 +30208,9 @@
               <a:solidFill>
                 <a:schemeClr val="dk1"/>
               </a:solidFill>
-              <a:latin typeface="Calibri"/>
+              <a:latin typeface="IDLC" pitchFamily="2" charset="0"/>
               <a:ea typeface="Calibri"/>
-              <a:cs typeface="Calibri"/>
+              <a:cs typeface="IDLC" pitchFamily="2" charset="0"/>
               <a:sym typeface="Calibri"/>
             </a:endParaRPr>
           </a:p>
@@ -26724,9 +30264,9 @@
               <a:solidFill>
                 <a:schemeClr val="dk1"/>
               </a:solidFill>
-              <a:latin typeface="Calibri"/>
+              <a:latin typeface="IDLC" pitchFamily="2" charset="0"/>
               <a:ea typeface="Calibri"/>
-              <a:cs typeface="Calibri"/>
+              <a:cs typeface="IDLC" pitchFamily="2" charset="0"/>
               <a:sym typeface="Calibri"/>
             </a:endParaRPr>
           </a:p>
@@ -26737,6 +30277,13 @@
   <p:clrMapOvr>
     <a:masterClrMapping/>
   </p:clrMapOvr>
+  <p:timing>
+    <p:tnLst>
+      <p:par>
+        <p:cTn id="1" dur="indefinite" restart="never" nodeType="tmRoot"/>
+      </p:par>
+    </p:tnLst>
+  </p:timing>
 </p:sld>
 </file>
 
